--- a/20261013_セキュリティー京葉御中_LINE採用追客のご提案.pptx
+++ b/20261013_セキュリティー京葉御中_LINE採用追客のご提案.pptx
@@ -3825,7 +3825,7 @@
                 <a:ea typeface="メイリオ"/>
                 <a:cs typeface="メイリオ"/>
               </a:rPr>
-              <a:t>方針｜外れた方をLINEでリスト化し、追い続ける</a:t>
+              <a:t>方針｜外れた方に通知メッセージで届け、追い続ける</a:t>
             </a:r>
             <a:endParaRPr sz="1600" b="1" dirty="0">
               <a:solidFill>
@@ -3874,7 +3874,7 @@
                 <a:ea typeface="メイリオ"/>
                 <a:cs typeface="メイリオ"/>
               </a:rPr>
-              <a:t>面接に来なかった方・辞退した方に、LINEで自動で声をかけ続ける</a:t>
+              <a:t>面接に来なかった方・辞退した方に、通知メッセージでLINEを届け、ステップ配信で追う</a:t>
             </a:r>
             <a:endParaRPr sz="1050" dirty="0">
               <a:solidFill>
@@ -4069,7 +4069,28 @@
                 <a:ea typeface="メイリオ"/>
                 <a:cs typeface="メイリオ"/>
               </a:rPr>
-              <a:t>応募</a:t>
+              <a:t>面接に来ない・</a:t>
+            </a:r>
+          </a:p>
+          <a:p>
+            <a:pPr algn="ctr">
+              <a:lnSpc>
+                <a:spcPct val="110000"/>
+              </a:lnSpc>
+              <a:spcAft>
+                <a:spcPts val="0"/>
+              </a:spcAft>
+            </a:pPr>
+            <a:r>
+              <a:rPr sz="1150" b="0">
+                <a:solidFill>
+                  <a:srgbClr val="333333"/>
+                </a:solidFill>
+                <a:latin typeface="メイリオ"/>
+                <a:ea typeface="メイリオ"/>
+                <a:cs typeface="メイリオ"/>
+              </a:rPr>
+              <a:t>辞退</a:t>
             </a:r>
           </a:p>
         </p:txBody>
@@ -4169,7 +4190,7 @@
                 <a:ea typeface="メイリオ"/>
                 <a:cs typeface="メイリオ"/>
               </a:rPr>
-              <a:t>面接に来ない・</a:t>
+              <a:t>通知メッセージで</a:t>
             </a:r>
           </a:p>
           <a:p>
@@ -4190,7 +4211,7 @@
                 <a:ea typeface="メイリオ"/>
                 <a:cs typeface="メイリオ"/>
               </a:rPr>
-              <a:t>辞退</a:t>
+              <a:t>LINEに届く</a:t>
             </a:r>
           </a:p>
         </p:txBody>
@@ -4290,7 +4311,7 @@
                 <a:ea typeface="メイリオ"/>
                 <a:cs typeface="メイリオ"/>
               </a:rPr>
-              <a:t>LINEで</a:t>
+              <a:t>友だち追加・</a:t>
             </a:r>
           </a:p>
           <a:p>
@@ -4752,7 +4773,7 @@
                 <a:ea typeface="メイリオ"/>
                 <a:cs typeface="メイリオ"/>
               </a:rPr>
-              <a:t>手間</a:t>
+              <a:t>届け方</a:t>
             </a:r>
           </a:p>
         </p:txBody>
@@ -4796,7 +4817,7 @@
                 <a:ea typeface="メイリオ"/>
                 <a:cs typeface="メイリオ"/>
               </a:rPr>
-              <a:t>配信は自動。担当者が1人ずつ連絡しなくてよい</a:t>
+              <a:t>通知メッセージ：友だちでなくても、応募時の電話番号宛てにLINEで届く</a:t>
             </a:r>
           </a:p>
         </p:txBody>
@@ -4840,7 +4861,7 @@
                 <a:ea typeface="メイリオ"/>
                 <a:cs typeface="メイリオ"/>
               </a:rPr>
-              <a:t>狙い</a:t>
+              <a:t>手間</a:t>
             </a:r>
           </a:p>
         </p:txBody>
@@ -4854,6 +4875,94 @@
         <p:spPr>
           <a:xfrm>
             <a:off x="2426400" y="3488399"/>
+            <a:ext cx="6847199" cy="259200"/>
+          </a:xfrm>
+          <a:prstGeom prst="rect">
+            <a:avLst/>
+          </a:prstGeom>
+          <a:noFill/>
+        </p:spPr>
+        <p:txBody>
+          <a:bodyPr wrap="square" anchor="t" lIns="36000" rIns="36000" tIns="10800" bIns="10800">
+            <a:spAutoFit/>
+          </a:bodyPr>
+          <a:lstStyle/>
+          <a:p>
+            <a:pPr algn="l">
+              <a:lnSpc>
+                <a:spcPct val="105000"/>
+              </a:lnSpc>
+              <a:spcAft>
+                <a:spcPts val="200"/>
+              </a:spcAft>
+            </a:pPr>
+            <a:r>
+              <a:rPr sz="1300" b="0">
+                <a:solidFill>
+                  <a:srgbClr val="333333"/>
+                </a:solidFill>
+                <a:latin typeface="メイリオ"/>
+                <a:ea typeface="メイリオ"/>
+                <a:cs typeface="メイリオ"/>
+              </a:rPr>
+              <a:t>配信は自動。担当者が1人ずつ連絡しなくてよい</a:t>
+            </a:r>
+          </a:p>
+        </p:txBody>
+      </p:sp>
+      <p:sp>
+        <p:nvSpPr>
+          <p:cNvPr id="25" name="TextBox 24"/>
+          <p:cNvSpPr txBox="1"/>
+          <p:nvPr/>
+        </p:nvSpPr>
+        <p:spPr>
+          <a:xfrm>
+            <a:off x="770400" y="3747599"/>
+            <a:ext cx="1655999" cy="259200"/>
+          </a:xfrm>
+          <a:prstGeom prst="rect">
+            <a:avLst/>
+          </a:prstGeom>
+          <a:noFill/>
+        </p:spPr>
+        <p:txBody>
+          <a:bodyPr wrap="square" anchor="t" lIns="36000" rIns="36000" tIns="10800" bIns="10800">
+            <a:spAutoFit/>
+          </a:bodyPr>
+          <a:lstStyle/>
+          <a:p>
+            <a:pPr algn="l">
+              <a:lnSpc>
+                <a:spcPct val="105000"/>
+              </a:lnSpc>
+              <a:spcAft>
+                <a:spcPts val="200"/>
+              </a:spcAft>
+            </a:pPr>
+            <a:r>
+              <a:rPr sz="1300" b="1">
+                <a:solidFill>
+                  <a:srgbClr val="333333"/>
+                </a:solidFill>
+                <a:latin typeface="メイリオ"/>
+                <a:ea typeface="メイリオ"/>
+                <a:cs typeface="メイリオ"/>
+              </a:rPr>
+              <a:t>狙い</a:t>
+            </a:r>
+          </a:p>
+        </p:txBody>
+      </p:sp>
+      <p:sp>
+        <p:nvSpPr>
+          <p:cNvPr id="26" name="TextBox 25"/>
+          <p:cNvSpPr txBox="1"/>
+          <p:nvPr/>
+        </p:nvSpPr>
+        <p:spPr>
+          <a:xfrm>
+            <a:off x="2426400" y="3747599"/>
             <a:ext cx="6847199" cy="259200"/>
           </a:xfrm>
           <a:prstGeom prst="rect">
@@ -7409,7 +7518,7 @@
                 <a:ea typeface="メイリオ"/>
                 <a:cs typeface="メイリオ"/>
               </a:rPr>
-              <a:t>LINE登録の案内</a:t>
+              <a:t>通知メッセージ</a:t>
             </a:r>
           </a:p>
         </p:txBody>
@@ -7827,7 +7936,7 @@
                 <a:ea typeface="メイリオ"/>
                 <a:cs typeface="メイリオ"/>
               </a:rPr>
-              <a:t>面接に来なかった方・辞退した方へ、SMS・メールでLINEの友だち追加をご案内</a:t>
+              <a:t>通知メッセージ（応募時の電話番号宛て）で届け、友だち追加につなげる</a:t>
             </a:r>
           </a:p>
         </p:txBody>
@@ -7916,6 +8025,94 @@
                 <a:cs typeface="メイリオ"/>
               </a:rPr>
               <a:t>応募の受付・面接の連絡でLINEをご案内し、外れても追える状態にする</a:t>
+            </a:r>
+          </a:p>
+        </p:txBody>
+      </p:sp>
+      <p:sp>
+        <p:nvSpPr>
+          <p:cNvPr id="23" name="TextBox 22"/>
+          <p:cNvSpPr txBox="1"/>
+          <p:nvPr/>
+        </p:nvSpPr>
+        <p:spPr>
+          <a:xfrm>
+            <a:off x="770400" y="3488399"/>
+            <a:ext cx="1655999" cy="259200"/>
+          </a:xfrm>
+          <a:prstGeom prst="rect">
+            <a:avLst/>
+          </a:prstGeom>
+          <a:noFill/>
+        </p:spPr>
+        <p:txBody>
+          <a:bodyPr wrap="square" anchor="t" lIns="36000" rIns="36000" tIns="10800" bIns="10800">
+            <a:spAutoFit/>
+          </a:bodyPr>
+          <a:lstStyle/>
+          <a:p>
+            <a:pPr algn="l">
+              <a:lnSpc>
+                <a:spcPct val="105000"/>
+              </a:lnSpc>
+              <a:spcAft>
+                <a:spcPts val="200"/>
+              </a:spcAft>
+            </a:pPr>
+            <a:r>
+              <a:rPr sz="1300" b="1">
+                <a:solidFill>
+                  <a:srgbClr val="333333"/>
+                </a:solidFill>
+                <a:latin typeface="メイリオ"/>
+                <a:ea typeface="メイリオ"/>
+                <a:cs typeface="メイリオ"/>
+              </a:rPr>
+              <a:t>送る内容</a:t>
+            </a:r>
+          </a:p>
+        </p:txBody>
+      </p:sp>
+      <p:sp>
+        <p:nvSpPr>
+          <p:cNvPr id="24" name="TextBox 23"/>
+          <p:cNvSpPr txBox="1"/>
+          <p:nvPr/>
+        </p:nvSpPr>
+        <p:spPr>
+          <a:xfrm>
+            <a:off x="2426400" y="3488399"/>
+            <a:ext cx="6847199" cy="259200"/>
+          </a:xfrm>
+          <a:prstGeom prst="rect">
+            <a:avLst/>
+          </a:prstGeom>
+          <a:noFill/>
+        </p:spPr>
+        <p:txBody>
+          <a:bodyPr wrap="square" anchor="t" lIns="36000" rIns="36000" tIns="10800" bIns="10800">
+            <a:spAutoFit/>
+          </a:bodyPr>
+          <a:lstStyle/>
+          <a:p>
+            <a:pPr algn="l">
+              <a:lnSpc>
+                <a:spcPct val="105000"/>
+              </a:lnSpc>
+              <a:spcAft>
+                <a:spcPts val="200"/>
+              </a:spcAft>
+            </a:pPr>
+            <a:r>
+              <a:rPr sz="1300" b="0">
+                <a:solidFill>
+                  <a:srgbClr val="333333"/>
+                </a:solidFill>
+                <a:latin typeface="メイリオ"/>
+                <a:ea typeface="メイリオ"/>
+                <a:cs typeface="メイリオ"/>
+              </a:rPr>
+              <a:t>通知メッセージは面接日程の再調整などのお知らせ。募集の案内はステップ配信で</a:t>
             </a:r>
           </a:p>
         </p:txBody>
@@ -8237,7 +8434,7 @@
                 <a:ea typeface="メイリオ"/>
                 <a:cs typeface="メイリオ"/>
               </a:rPr>
-              <a:t>LINE公式アカウント開設・Lステップの設定・ステップ配信の作成</a:t>
+              <a:t>10万円</a:t>
             </a:r>
           </a:p>
         </p:txBody>
@@ -8332,13 +8529,101 @@
       </p:sp>
       <p:sp>
         <p:nvSpPr>
-          <p:cNvPr id="12" name="Rectangle 11"/>
+          <p:cNvPr id="12" name="TextBox 11"/>
+          <p:cNvSpPr txBox="1"/>
+          <p:nvPr/>
+        </p:nvSpPr>
+        <p:spPr>
+          <a:xfrm>
+            <a:off x="770400" y="2444399"/>
+            <a:ext cx="1655999" cy="259200"/>
+          </a:xfrm>
+          <a:prstGeom prst="rect">
+            <a:avLst/>
+          </a:prstGeom>
+          <a:noFill/>
+        </p:spPr>
+        <p:txBody>
+          <a:bodyPr wrap="square" anchor="t" lIns="36000" rIns="36000" tIns="10800" bIns="10800">
+            <a:spAutoFit/>
+          </a:bodyPr>
+          <a:lstStyle/>
+          <a:p>
+            <a:pPr algn="l">
+              <a:lnSpc>
+                <a:spcPct val="105000"/>
+              </a:lnSpc>
+              <a:spcAft>
+                <a:spcPts val="200"/>
+              </a:spcAft>
+            </a:pPr>
+            <a:r>
+              <a:rPr sz="1300" b="1">
+                <a:solidFill>
+                  <a:srgbClr val="333333"/>
+                </a:solidFill>
+                <a:latin typeface="メイリオ"/>
+                <a:ea typeface="メイリオ"/>
+                <a:cs typeface="メイリオ"/>
+              </a:rPr>
+              <a:t>初期構築の内容</a:t>
+            </a:r>
+          </a:p>
+        </p:txBody>
+      </p:sp>
+      <p:sp>
+        <p:nvSpPr>
+          <p:cNvPr id="13" name="TextBox 12"/>
+          <p:cNvSpPr txBox="1"/>
+          <p:nvPr/>
+        </p:nvSpPr>
+        <p:spPr>
+          <a:xfrm>
+            <a:off x="2426400" y="2444399"/>
+            <a:ext cx="6847199" cy="259200"/>
+          </a:xfrm>
+          <a:prstGeom prst="rect">
+            <a:avLst/>
+          </a:prstGeom>
+          <a:noFill/>
+        </p:spPr>
+        <p:txBody>
+          <a:bodyPr wrap="square" anchor="t" lIns="36000" rIns="36000" tIns="10800" bIns="10800">
+            <a:spAutoFit/>
+          </a:bodyPr>
+          <a:lstStyle/>
+          <a:p>
+            <a:pPr algn="l">
+              <a:lnSpc>
+                <a:spcPct val="105000"/>
+              </a:lnSpc>
+              <a:spcAft>
+                <a:spcPts val="200"/>
+              </a:spcAft>
+            </a:pPr>
+            <a:r>
+              <a:rPr sz="1300" b="0">
+                <a:solidFill>
+                  <a:srgbClr val="333333"/>
+                </a:solidFill>
+                <a:latin typeface="メイリオ"/>
+                <a:ea typeface="メイリオ"/>
+                <a:cs typeface="メイリオ"/>
+              </a:rPr>
+              <a:t>LINE公式アカウント開設・Lステップと通知メッセージの設定・配信の作成</a:t>
+            </a:r>
+          </a:p>
+        </p:txBody>
+      </p:sp>
+      <p:sp>
+        <p:nvSpPr>
+          <p:cNvPr id="14" name="Rectangle 13"/>
           <p:cNvSpPr/>
           <p:nvPr/>
         </p:nvSpPr>
         <p:spPr>
           <a:xfrm>
-            <a:off x="644400" y="2674799"/>
+            <a:off x="644400" y="2934000"/>
             <a:ext cx="54000" cy="180000"/>
           </a:xfrm>
           <a:prstGeom prst="rect">
@@ -8376,13 +8661,13 @@
       </p:sp>
       <p:sp>
         <p:nvSpPr>
-          <p:cNvPr id="13" name="TextBox 12"/>
+          <p:cNvPr id="15" name="TextBox 14"/>
           <p:cNvSpPr txBox="1"/>
           <p:nvPr/>
         </p:nvSpPr>
         <p:spPr>
           <a:xfrm>
-            <a:off x="770400" y="2624399"/>
+            <a:off x="770400" y="2883600"/>
             <a:ext cx="8503200" cy="288000"/>
           </a:xfrm>
           <a:prstGeom prst="rect">
@@ -8420,13 +8705,13 @@
       </p:sp>
       <p:sp>
         <p:nvSpPr>
-          <p:cNvPr id="14" name="TextBox 13"/>
+          <p:cNvPr id="16" name="TextBox 15"/>
           <p:cNvSpPr txBox="1"/>
           <p:nvPr/>
         </p:nvSpPr>
         <p:spPr>
           <a:xfrm>
-            <a:off x="770400" y="2930399"/>
+            <a:off x="770400" y="3189600"/>
             <a:ext cx="1655999" cy="259200"/>
           </a:xfrm>
           <a:prstGeom prst="rect">
@@ -8464,13 +8749,13 @@
       </p:sp>
       <p:sp>
         <p:nvSpPr>
-          <p:cNvPr id="15" name="TextBox 14"/>
+          <p:cNvPr id="17" name="TextBox 16"/>
           <p:cNvSpPr txBox="1"/>
           <p:nvPr/>
         </p:nvSpPr>
         <p:spPr>
           <a:xfrm>
-            <a:off x="2426400" y="2930399"/>
+            <a:off x="2426400" y="3189600"/>
             <a:ext cx="6847199" cy="259200"/>
           </a:xfrm>
           <a:prstGeom prst="rect">
@@ -8501,20 +8786,20 @@
                 <a:ea typeface="メイリオ"/>
                 <a:cs typeface="メイリオ"/>
               </a:rPr>
-              <a:t>ステップ配信・募集のお知らせの作成と運用</a:t>
-            </a:r>
-          </a:p>
-        </p:txBody>
-      </p:sp>
-      <p:sp>
-        <p:nvSpPr>
-          <p:cNvPr id="16" name="TextBox 15"/>
+              <a:t>通知メッセージ・ステップ配信・募集のお知らせの作成と運用</a:t>
+            </a:r>
+          </a:p>
+        </p:txBody>
+      </p:sp>
+      <p:sp>
+        <p:nvSpPr>
+          <p:cNvPr id="18" name="TextBox 17"/>
           <p:cNvSpPr txBox="1"/>
           <p:nvPr/>
         </p:nvSpPr>
         <p:spPr>
           <a:xfrm>
-            <a:off x="770400" y="3189600"/>
+            <a:off x="770400" y="3448800"/>
             <a:ext cx="1655999" cy="259200"/>
           </a:xfrm>
           <a:prstGeom prst="rect">
@@ -8552,13 +8837,13 @@
       </p:sp>
       <p:sp>
         <p:nvSpPr>
-          <p:cNvPr id="17" name="TextBox 16"/>
+          <p:cNvPr id="19" name="TextBox 18"/>
           <p:cNvSpPr txBox="1"/>
           <p:nvPr/>
         </p:nvSpPr>
         <p:spPr>
           <a:xfrm>
-            <a:off x="2426400" y="3189600"/>
+            <a:off x="2426400" y="3448800"/>
             <a:ext cx="6847199" cy="259200"/>
           </a:xfrm>
           <a:prstGeom prst="rect">
@@ -8596,13 +8881,13 @@
       </p:sp>
       <p:sp>
         <p:nvSpPr>
-          <p:cNvPr id="18" name="TextBox 17"/>
+          <p:cNvPr id="20" name="TextBox 19"/>
           <p:cNvSpPr txBox="1"/>
           <p:nvPr/>
         </p:nvSpPr>
         <p:spPr>
           <a:xfrm>
-            <a:off x="770400" y="3448799"/>
+            <a:off x="770400" y="3707999"/>
             <a:ext cx="1655999" cy="259200"/>
           </a:xfrm>
           <a:prstGeom prst="rect">
@@ -8640,13 +8925,13 @@
       </p:sp>
       <p:sp>
         <p:nvSpPr>
-          <p:cNvPr id="19" name="TextBox 18"/>
+          <p:cNvPr id="21" name="TextBox 20"/>
           <p:cNvSpPr txBox="1"/>
           <p:nvPr/>
         </p:nvSpPr>
         <p:spPr>
           <a:xfrm>
-            <a:off x="2426400" y="3448799"/>
+            <a:off x="2426400" y="3707999"/>
             <a:ext cx="6847199" cy="259200"/>
           </a:xfrm>
           <a:prstGeom prst="rect">
@@ -8684,13 +8969,13 @@
       </p:sp>
       <p:sp>
         <p:nvSpPr>
-          <p:cNvPr id="20" name="TextBox 19"/>
+          <p:cNvPr id="22" name="TextBox 21"/>
           <p:cNvSpPr txBox="1"/>
           <p:nvPr/>
         </p:nvSpPr>
         <p:spPr>
           <a:xfrm>
-            <a:off x="770400" y="3816000"/>
+            <a:off x="770400" y="4075200"/>
             <a:ext cx="8629200" cy="216000"/>
           </a:xfrm>
           <a:prstGeom prst="rect">
@@ -8721,7 +9006,7 @@
                 <a:ea typeface="メイリオ"/>
                 <a:cs typeface="メイリオ"/>
               </a:rPr>
-              <a:t>※Lステップ・LINE公式アカウントの利用料は別途（実費）</a:t>
+              <a:t>※Lステップ・LINE公式アカウント・通知メッセージの利用料は別途（実費）</a:t>
             </a:r>
           </a:p>
         </p:txBody>

--- a/20261013_セキュリティー京葉御中_LINE採用追客のご提案.pptx
+++ b/20261013_セキュリティー京葉御中_LINE採用追客のご提案.pptx
@@ -4993,7 +4993,7 @@
                 <a:ea typeface="メイリオ"/>
                 <a:cs typeface="メイリオ"/>
               </a:rPr>
-              <a:t>中途・派遣で働ける方を、タイミングが合ったときに採用につなげる</a:t>
+              <a:t>中途・アルバイトで働ける方を、タイミングが合ったときに採用につなげる</a:t>
             </a:r>
           </a:p>
         </p:txBody>
@@ -6605,7 +6605,7 @@
                 <a:ea typeface="メイリオ"/>
                 <a:cs typeface="メイリオ"/>
               </a:rPr>
-              <a:t>「面接に来なかった」「辞退した」をタグで分けて管理</a:t>
+              <a:t>「面接に来なかった」「辞退した（理由別）」をタグで分けて管理</a:t>
             </a:r>
           </a:p>
         </p:txBody>
@@ -6781,7 +6781,7 @@
                 <a:ea typeface="メイリオ"/>
                 <a:cs typeface="メイリオ"/>
               </a:rPr>
-              <a:t>希望の勤務地・日数・働き方（中途・派遣・スポット）をLINEのフォームで聞く</a:t>
+              <a:t>希望の勤務地・日数・働き方（中途・アルバイト・スポット）をLINEのフォームで聞く</a:t>
             </a:r>
           </a:p>
         </p:txBody>
@@ -6958,6 +6958,446 @@
                 <a:cs typeface="メイリオ"/>
               </a:rPr>
               <a:t>誰がどのリンクを押したかを確認し、次の連絡につなげる</a:t>
+            </a:r>
+          </a:p>
+        </p:txBody>
+      </p:sp>
+      <p:sp>
+        <p:nvSpPr>
+          <p:cNvPr id="18" name="Rectangle 17"/>
+          <p:cNvSpPr/>
+          <p:nvPr/>
+        </p:nvSpPr>
+        <p:spPr>
+          <a:xfrm>
+            <a:off x="644400" y="3452400"/>
+            <a:ext cx="54000" cy="180000"/>
+          </a:xfrm>
+          <a:prstGeom prst="rect">
+            <a:avLst/>
+          </a:prstGeom>
+          <a:solidFill>
+            <a:srgbClr val="1F285A"/>
+          </a:solidFill>
+          <a:ln>
+            <a:noFill/>
+          </a:ln>
+          <a:effectLst/>
+        </p:spPr>
+        <p:style>
+          <a:lnRef idx="1">
+            <a:schemeClr val="accent1"/>
+          </a:lnRef>
+          <a:fillRef idx="3">
+            <a:schemeClr val="accent1"/>
+          </a:fillRef>
+          <a:effectRef idx="0">
+            <a:schemeClr val="accent1"/>
+          </a:effectRef>
+          <a:fontRef idx="minor">
+            <a:schemeClr val="lt1"/>
+          </a:fontRef>
+        </p:style>
+        <p:txBody>
+          <a:bodyPr rtlCol="0" anchor="ctr" wrap="square" lIns="72000" tIns="18000" rIns="72000" bIns="18000"/>
+          <a:lstStyle/>
+          <a:p>
+            <a:pPr algn="ctr"/>
+          </a:p>
+        </p:txBody>
+      </p:sp>
+      <p:sp>
+        <p:nvSpPr>
+          <p:cNvPr id="19" name="TextBox 18"/>
+          <p:cNvSpPr txBox="1"/>
+          <p:nvPr/>
+        </p:nvSpPr>
+        <p:spPr>
+          <a:xfrm>
+            <a:off x="770400" y="3401999"/>
+            <a:ext cx="8503200" cy="288000"/>
+          </a:xfrm>
+          <a:prstGeom prst="rect">
+            <a:avLst/>
+          </a:prstGeom>
+          <a:noFill/>
+        </p:spPr>
+        <p:txBody>
+          <a:bodyPr wrap="square" anchor="t" lIns="36000" rIns="36000" tIns="10800" bIns="10800">
+            <a:spAutoFit/>
+          </a:bodyPr>
+          <a:lstStyle/>
+          <a:p>
+            <a:pPr algn="l">
+              <a:lnSpc>
+                <a:spcPct val="105000"/>
+              </a:lnSpc>
+              <a:spcAft>
+                <a:spcPts val="200"/>
+              </a:spcAft>
+            </a:pPr>
+            <a:r>
+              <a:rPr sz="1350" b="1">
+                <a:solidFill>
+                  <a:srgbClr val="1F285A"/>
+                </a:solidFill>
+                <a:latin typeface="メイリオ"/>
+                <a:ea typeface="メイリオ"/>
+                <a:cs typeface="メイリオ"/>
+              </a:rPr>
+              <a:t>辞退の理由ごとの送り方</a:t>
+            </a:r>
+          </a:p>
+        </p:txBody>
+      </p:sp>
+      <p:sp>
+        <p:nvSpPr>
+          <p:cNvPr id="20" name="TextBox 19"/>
+          <p:cNvSpPr txBox="1"/>
+          <p:nvPr/>
+        </p:nvSpPr>
+        <p:spPr>
+          <a:xfrm>
+            <a:off x="770400" y="3707999"/>
+            <a:ext cx="1655999" cy="259200"/>
+          </a:xfrm>
+          <a:prstGeom prst="rect">
+            <a:avLst/>
+          </a:prstGeom>
+          <a:noFill/>
+        </p:spPr>
+        <p:txBody>
+          <a:bodyPr wrap="square" anchor="t" lIns="36000" rIns="36000" tIns="10800" bIns="10800">
+            <a:spAutoFit/>
+          </a:bodyPr>
+          <a:lstStyle/>
+          <a:p>
+            <a:pPr algn="l">
+              <a:lnSpc>
+                <a:spcPct val="105000"/>
+              </a:lnSpc>
+              <a:spcAft>
+                <a:spcPts val="200"/>
+              </a:spcAft>
+            </a:pPr>
+            <a:r>
+              <a:rPr sz="1300" b="1">
+                <a:solidFill>
+                  <a:srgbClr val="333333"/>
+                </a:solidFill>
+                <a:latin typeface="メイリオ"/>
+                <a:ea typeface="メイリオ"/>
+                <a:cs typeface="メイリオ"/>
+              </a:rPr>
+              <a:t>日程が合わない</a:t>
+            </a:r>
+          </a:p>
+        </p:txBody>
+      </p:sp>
+      <p:sp>
+        <p:nvSpPr>
+          <p:cNvPr id="21" name="TextBox 20"/>
+          <p:cNvSpPr txBox="1"/>
+          <p:nvPr/>
+        </p:nvSpPr>
+        <p:spPr>
+          <a:xfrm>
+            <a:off x="2426400" y="3707999"/>
+            <a:ext cx="6847199" cy="259200"/>
+          </a:xfrm>
+          <a:prstGeom prst="rect">
+            <a:avLst/>
+          </a:prstGeom>
+          <a:noFill/>
+        </p:spPr>
+        <p:txBody>
+          <a:bodyPr wrap="square" anchor="t" lIns="36000" rIns="36000" tIns="10800" bIns="10800">
+            <a:spAutoFit/>
+          </a:bodyPr>
+          <a:lstStyle/>
+          <a:p>
+            <a:pPr algn="l">
+              <a:lnSpc>
+                <a:spcPct val="105000"/>
+              </a:lnSpc>
+              <a:spcAft>
+                <a:spcPts val="200"/>
+              </a:spcAft>
+            </a:pPr>
+            <a:r>
+              <a:rPr sz="1300" b="0">
+                <a:solidFill>
+                  <a:srgbClr val="333333"/>
+                </a:solidFill>
+                <a:latin typeface="メイリオ"/>
+                <a:ea typeface="メイリオ"/>
+                <a:cs typeface="メイリオ"/>
+              </a:rPr>
+              <a:t>次の面接日・スポット勤務のご案内</a:t>
+            </a:r>
+          </a:p>
+        </p:txBody>
+      </p:sp>
+      <p:sp>
+        <p:nvSpPr>
+          <p:cNvPr id="22" name="TextBox 21"/>
+          <p:cNvSpPr txBox="1"/>
+          <p:nvPr/>
+        </p:nvSpPr>
+        <p:spPr>
+          <a:xfrm>
+            <a:off x="770400" y="3967200"/>
+            <a:ext cx="1655999" cy="259200"/>
+          </a:xfrm>
+          <a:prstGeom prst="rect">
+            <a:avLst/>
+          </a:prstGeom>
+          <a:noFill/>
+        </p:spPr>
+        <p:txBody>
+          <a:bodyPr wrap="square" anchor="t" lIns="36000" rIns="36000" tIns="10800" bIns="10800">
+            <a:spAutoFit/>
+          </a:bodyPr>
+          <a:lstStyle/>
+          <a:p>
+            <a:pPr algn="l">
+              <a:lnSpc>
+                <a:spcPct val="105000"/>
+              </a:lnSpc>
+              <a:spcAft>
+                <a:spcPts val="200"/>
+              </a:spcAft>
+            </a:pPr>
+            <a:r>
+              <a:rPr sz="1300" b="1">
+                <a:solidFill>
+                  <a:srgbClr val="333333"/>
+                </a:solidFill>
+                <a:latin typeface="メイリオ"/>
+                <a:ea typeface="メイリオ"/>
+                <a:cs typeface="メイリオ"/>
+              </a:rPr>
+              <a:t>今回は見送り</a:t>
+            </a:r>
+          </a:p>
+        </p:txBody>
+      </p:sp>
+      <p:sp>
+        <p:nvSpPr>
+          <p:cNvPr id="23" name="TextBox 22"/>
+          <p:cNvSpPr txBox="1"/>
+          <p:nvPr/>
+        </p:nvSpPr>
+        <p:spPr>
+          <a:xfrm>
+            <a:off x="2426400" y="3967200"/>
+            <a:ext cx="6847199" cy="259200"/>
+          </a:xfrm>
+          <a:prstGeom prst="rect">
+            <a:avLst/>
+          </a:prstGeom>
+          <a:noFill/>
+        </p:spPr>
+        <p:txBody>
+          <a:bodyPr wrap="square" anchor="t" lIns="36000" rIns="36000" tIns="10800" bIns="10800">
+            <a:spAutoFit/>
+          </a:bodyPr>
+          <a:lstStyle/>
+          <a:p>
+            <a:pPr algn="l">
+              <a:lnSpc>
+                <a:spcPct val="105000"/>
+              </a:lnSpc>
+              <a:spcAft>
+                <a:spcPts val="200"/>
+              </a:spcAft>
+            </a:pPr>
+            <a:r>
+              <a:rPr sz="1300" b="0">
+                <a:solidFill>
+                  <a:srgbClr val="333333"/>
+                </a:solidFill>
+                <a:latin typeface="メイリオ"/>
+                <a:ea typeface="メイリオ"/>
+                <a:cs typeface="メイリオ"/>
+              </a:rPr>
+              <a:t>時期をあけて、募集のお知らせ</a:t>
+            </a:r>
+          </a:p>
+        </p:txBody>
+      </p:sp>
+      <p:sp>
+        <p:nvSpPr>
+          <p:cNvPr id="24" name="TextBox 23"/>
+          <p:cNvSpPr txBox="1"/>
+          <p:nvPr/>
+        </p:nvSpPr>
+        <p:spPr>
+          <a:xfrm>
+            <a:off x="770400" y="4226399"/>
+            <a:ext cx="1655999" cy="259200"/>
+          </a:xfrm>
+          <a:prstGeom prst="rect">
+            <a:avLst/>
+          </a:prstGeom>
+          <a:noFill/>
+        </p:spPr>
+        <p:txBody>
+          <a:bodyPr wrap="square" anchor="t" lIns="36000" rIns="36000" tIns="10800" bIns="10800">
+            <a:spAutoFit/>
+          </a:bodyPr>
+          <a:lstStyle/>
+          <a:p>
+            <a:pPr algn="l">
+              <a:lnSpc>
+                <a:spcPct val="105000"/>
+              </a:lnSpc>
+              <a:spcAft>
+                <a:spcPts val="200"/>
+              </a:spcAft>
+            </a:pPr>
+            <a:r>
+              <a:rPr sz="1300" b="1">
+                <a:solidFill>
+                  <a:srgbClr val="333333"/>
+                </a:solidFill>
+                <a:latin typeface="メイリオ"/>
+                <a:ea typeface="メイリオ"/>
+                <a:cs typeface="メイリオ"/>
+              </a:rPr>
+              <a:t>やはりやめる</a:t>
+            </a:r>
+          </a:p>
+        </p:txBody>
+      </p:sp>
+      <p:sp>
+        <p:nvSpPr>
+          <p:cNvPr id="25" name="TextBox 24"/>
+          <p:cNvSpPr txBox="1"/>
+          <p:nvPr/>
+        </p:nvSpPr>
+        <p:spPr>
+          <a:xfrm>
+            <a:off x="2426400" y="4226399"/>
+            <a:ext cx="6847199" cy="259200"/>
+          </a:xfrm>
+          <a:prstGeom prst="rect">
+            <a:avLst/>
+          </a:prstGeom>
+          <a:noFill/>
+        </p:spPr>
+        <p:txBody>
+          <a:bodyPr wrap="square" anchor="t" lIns="36000" rIns="36000" tIns="10800" bIns="10800">
+            <a:spAutoFit/>
+          </a:bodyPr>
+          <a:lstStyle/>
+          <a:p>
+            <a:pPr algn="l">
+              <a:lnSpc>
+                <a:spcPct val="105000"/>
+              </a:lnSpc>
+              <a:spcAft>
+                <a:spcPts val="200"/>
+              </a:spcAft>
+            </a:pPr>
+            <a:r>
+              <a:rPr sz="1300" b="0">
+                <a:solidFill>
+                  <a:srgbClr val="333333"/>
+                </a:solidFill>
+                <a:latin typeface="メイリオ"/>
+                <a:ea typeface="メイリオ"/>
+                <a:cs typeface="メイリオ"/>
+              </a:rPr>
+              <a:t>働き方・条件・働く方の声で、不安をなくす</a:t>
+            </a:r>
+          </a:p>
+        </p:txBody>
+      </p:sp>
+      <p:sp>
+        <p:nvSpPr>
+          <p:cNvPr id="26" name="TextBox 25"/>
+          <p:cNvSpPr txBox="1"/>
+          <p:nvPr/>
+        </p:nvSpPr>
+        <p:spPr>
+          <a:xfrm>
+            <a:off x="770400" y="4485600"/>
+            <a:ext cx="1655999" cy="259200"/>
+          </a:xfrm>
+          <a:prstGeom prst="rect">
+            <a:avLst/>
+          </a:prstGeom>
+          <a:noFill/>
+        </p:spPr>
+        <p:txBody>
+          <a:bodyPr wrap="square" anchor="t" lIns="36000" rIns="36000" tIns="10800" bIns="10800">
+            <a:spAutoFit/>
+          </a:bodyPr>
+          <a:lstStyle/>
+          <a:p>
+            <a:pPr algn="l">
+              <a:lnSpc>
+                <a:spcPct val="105000"/>
+              </a:lnSpc>
+              <a:spcAft>
+                <a:spcPts val="200"/>
+              </a:spcAft>
+            </a:pPr>
+            <a:r>
+              <a:rPr sz="1300" b="1">
+                <a:solidFill>
+                  <a:srgbClr val="333333"/>
+                </a:solidFill>
+                <a:latin typeface="メイリオ"/>
+                <a:ea typeface="メイリオ"/>
+                <a:cs typeface="メイリオ"/>
+              </a:rPr>
+              <a:t>会社側に理由</a:t>
+            </a:r>
+          </a:p>
+        </p:txBody>
+      </p:sp>
+      <p:sp>
+        <p:nvSpPr>
+          <p:cNvPr id="27" name="TextBox 26"/>
+          <p:cNvSpPr txBox="1"/>
+          <p:nvPr/>
+        </p:nvSpPr>
+        <p:spPr>
+          <a:xfrm>
+            <a:off x="2426400" y="4485600"/>
+            <a:ext cx="6847199" cy="259200"/>
+          </a:xfrm>
+          <a:prstGeom prst="rect">
+            <a:avLst/>
+          </a:prstGeom>
+          <a:noFill/>
+        </p:spPr>
+        <p:txBody>
+          <a:bodyPr wrap="square" anchor="t" lIns="36000" rIns="36000" tIns="10800" bIns="10800">
+            <a:spAutoFit/>
+          </a:bodyPr>
+          <a:lstStyle/>
+          <a:p>
+            <a:pPr algn="l">
+              <a:lnSpc>
+                <a:spcPct val="105000"/>
+              </a:lnSpc>
+              <a:spcAft>
+                <a:spcPts val="200"/>
+              </a:spcAft>
+            </a:pPr>
+            <a:r>
+              <a:rPr sz="1300" b="0">
+                <a:solidFill>
+                  <a:srgbClr val="333333"/>
+                </a:solidFill>
+                <a:latin typeface="メイリオ"/>
+                <a:ea typeface="メイリオ"/>
+                <a:cs typeface="メイリオ"/>
+              </a:rPr>
+              <a:t>連絡の仕方・条件など、見直した点のお知らせ</a:t>
             </a:r>
           </a:p>
         </p:txBody>
@@ -8112,7 +8552,95 @@
                 <a:ea typeface="メイリオ"/>
                 <a:cs typeface="メイリオ"/>
               </a:rPr>
-              <a:t>通知メッセージは面接日程の再調整などのお知らせ。募集の案内はステップ配信で</a:t>
+              <a:t>通知メッセージは日程の再調整・辞退の受付などのお知らせに使う</a:t>
+            </a:r>
+          </a:p>
+        </p:txBody>
+      </p:sp>
+      <p:sp>
+        <p:nvSpPr>
+          <p:cNvPr id="25" name="TextBox 24"/>
+          <p:cNvSpPr txBox="1"/>
+          <p:nvPr/>
+        </p:nvSpPr>
+        <p:spPr>
+          <a:xfrm>
+            <a:off x="770400" y="3747599"/>
+            <a:ext cx="1655999" cy="259200"/>
+          </a:xfrm>
+          <a:prstGeom prst="rect">
+            <a:avLst/>
+          </a:prstGeom>
+          <a:noFill/>
+        </p:spPr>
+        <p:txBody>
+          <a:bodyPr wrap="square" anchor="t" lIns="36000" rIns="36000" tIns="10800" bIns="10800">
+            <a:spAutoFit/>
+          </a:bodyPr>
+          <a:lstStyle/>
+          <a:p>
+            <a:pPr algn="l">
+              <a:lnSpc>
+                <a:spcPct val="105000"/>
+              </a:lnSpc>
+              <a:spcAft>
+                <a:spcPts val="200"/>
+              </a:spcAft>
+            </a:pPr>
+            <a:r>
+              <a:rPr sz="1300" b="1">
+                <a:solidFill>
+                  <a:srgbClr val="333333"/>
+                </a:solidFill>
+                <a:latin typeface="メイリオ"/>
+                <a:ea typeface="メイリオ"/>
+                <a:cs typeface="メイリオ"/>
+              </a:rPr>
+              <a:t>募集の案内</a:t>
+            </a:r>
+          </a:p>
+        </p:txBody>
+      </p:sp>
+      <p:sp>
+        <p:nvSpPr>
+          <p:cNvPr id="26" name="TextBox 25"/>
+          <p:cNvSpPr txBox="1"/>
+          <p:nvPr/>
+        </p:nvSpPr>
+        <p:spPr>
+          <a:xfrm>
+            <a:off x="2426400" y="3747599"/>
+            <a:ext cx="6847199" cy="259200"/>
+          </a:xfrm>
+          <a:prstGeom prst="rect">
+            <a:avLst/>
+          </a:prstGeom>
+          <a:noFill/>
+        </p:spPr>
+        <p:txBody>
+          <a:bodyPr wrap="square" anchor="t" lIns="36000" rIns="36000" tIns="10800" bIns="10800">
+            <a:spAutoFit/>
+          </a:bodyPr>
+          <a:lstStyle/>
+          <a:p>
+            <a:pPr algn="l">
+              <a:lnSpc>
+                <a:spcPct val="105000"/>
+              </a:lnSpc>
+              <a:spcAft>
+                <a:spcPts val="200"/>
+              </a:spcAft>
+            </a:pPr>
+            <a:r>
+              <a:rPr sz="1300" b="0">
+                <a:solidFill>
+                  <a:srgbClr val="333333"/>
+                </a:solidFill>
+                <a:latin typeface="メイリオ"/>
+                <a:ea typeface="メイリオ"/>
+                <a:cs typeface="メイリオ"/>
+              </a:rPr>
+              <a:t>友だち追加の後、ステップ配信で送る</a:t>
             </a:r>
           </a:p>
         </p:txBody>

--- a/20261013_セキュリティー京葉御中_LINE採用追客のご提案.pptx
+++ b/20261013_セキュリティー京葉御中_LINE採用追客のご提案.pptx
@@ -6605,7 +6605,7 @@
                 <a:ea typeface="メイリオ"/>
                 <a:cs typeface="メイリオ"/>
               </a:rPr>
-              <a:t>「面接に来なかった」「辞退した（理由別）」をタグで分けて管理</a:t>
+              <a:t>「面接に来なかった」「辞退した」をタグで分けて管理</a:t>
             </a:r>
           </a:p>
         </p:txBody>
@@ -6958,446 +6958,6 @@
                 <a:cs typeface="メイリオ"/>
               </a:rPr>
               <a:t>誰がどのリンクを押したかを確認し、次の連絡につなげる</a:t>
-            </a:r>
-          </a:p>
-        </p:txBody>
-      </p:sp>
-      <p:sp>
-        <p:nvSpPr>
-          <p:cNvPr id="18" name="Rectangle 17"/>
-          <p:cNvSpPr/>
-          <p:nvPr/>
-        </p:nvSpPr>
-        <p:spPr>
-          <a:xfrm>
-            <a:off x="644400" y="3452400"/>
-            <a:ext cx="54000" cy="180000"/>
-          </a:xfrm>
-          <a:prstGeom prst="rect">
-            <a:avLst/>
-          </a:prstGeom>
-          <a:solidFill>
-            <a:srgbClr val="1F285A"/>
-          </a:solidFill>
-          <a:ln>
-            <a:noFill/>
-          </a:ln>
-          <a:effectLst/>
-        </p:spPr>
-        <p:style>
-          <a:lnRef idx="1">
-            <a:schemeClr val="accent1"/>
-          </a:lnRef>
-          <a:fillRef idx="3">
-            <a:schemeClr val="accent1"/>
-          </a:fillRef>
-          <a:effectRef idx="0">
-            <a:schemeClr val="accent1"/>
-          </a:effectRef>
-          <a:fontRef idx="minor">
-            <a:schemeClr val="lt1"/>
-          </a:fontRef>
-        </p:style>
-        <p:txBody>
-          <a:bodyPr rtlCol="0" anchor="ctr" wrap="square" lIns="72000" tIns="18000" rIns="72000" bIns="18000"/>
-          <a:lstStyle/>
-          <a:p>
-            <a:pPr algn="ctr"/>
-          </a:p>
-        </p:txBody>
-      </p:sp>
-      <p:sp>
-        <p:nvSpPr>
-          <p:cNvPr id="19" name="TextBox 18"/>
-          <p:cNvSpPr txBox="1"/>
-          <p:nvPr/>
-        </p:nvSpPr>
-        <p:spPr>
-          <a:xfrm>
-            <a:off x="770400" y="3401999"/>
-            <a:ext cx="8503200" cy="288000"/>
-          </a:xfrm>
-          <a:prstGeom prst="rect">
-            <a:avLst/>
-          </a:prstGeom>
-          <a:noFill/>
-        </p:spPr>
-        <p:txBody>
-          <a:bodyPr wrap="square" anchor="t" lIns="36000" rIns="36000" tIns="10800" bIns="10800">
-            <a:spAutoFit/>
-          </a:bodyPr>
-          <a:lstStyle/>
-          <a:p>
-            <a:pPr algn="l">
-              <a:lnSpc>
-                <a:spcPct val="105000"/>
-              </a:lnSpc>
-              <a:spcAft>
-                <a:spcPts val="200"/>
-              </a:spcAft>
-            </a:pPr>
-            <a:r>
-              <a:rPr sz="1350" b="1">
-                <a:solidFill>
-                  <a:srgbClr val="1F285A"/>
-                </a:solidFill>
-                <a:latin typeface="メイリオ"/>
-                <a:ea typeface="メイリオ"/>
-                <a:cs typeface="メイリオ"/>
-              </a:rPr>
-              <a:t>辞退の理由ごとの送り方</a:t>
-            </a:r>
-          </a:p>
-        </p:txBody>
-      </p:sp>
-      <p:sp>
-        <p:nvSpPr>
-          <p:cNvPr id="20" name="TextBox 19"/>
-          <p:cNvSpPr txBox="1"/>
-          <p:nvPr/>
-        </p:nvSpPr>
-        <p:spPr>
-          <a:xfrm>
-            <a:off x="770400" y="3707999"/>
-            <a:ext cx="1655999" cy="259200"/>
-          </a:xfrm>
-          <a:prstGeom prst="rect">
-            <a:avLst/>
-          </a:prstGeom>
-          <a:noFill/>
-        </p:spPr>
-        <p:txBody>
-          <a:bodyPr wrap="square" anchor="t" lIns="36000" rIns="36000" tIns="10800" bIns="10800">
-            <a:spAutoFit/>
-          </a:bodyPr>
-          <a:lstStyle/>
-          <a:p>
-            <a:pPr algn="l">
-              <a:lnSpc>
-                <a:spcPct val="105000"/>
-              </a:lnSpc>
-              <a:spcAft>
-                <a:spcPts val="200"/>
-              </a:spcAft>
-            </a:pPr>
-            <a:r>
-              <a:rPr sz="1300" b="1">
-                <a:solidFill>
-                  <a:srgbClr val="333333"/>
-                </a:solidFill>
-                <a:latin typeface="メイリオ"/>
-                <a:ea typeface="メイリオ"/>
-                <a:cs typeface="メイリオ"/>
-              </a:rPr>
-              <a:t>日程が合わない</a:t>
-            </a:r>
-          </a:p>
-        </p:txBody>
-      </p:sp>
-      <p:sp>
-        <p:nvSpPr>
-          <p:cNvPr id="21" name="TextBox 20"/>
-          <p:cNvSpPr txBox="1"/>
-          <p:nvPr/>
-        </p:nvSpPr>
-        <p:spPr>
-          <a:xfrm>
-            <a:off x="2426400" y="3707999"/>
-            <a:ext cx="6847199" cy="259200"/>
-          </a:xfrm>
-          <a:prstGeom prst="rect">
-            <a:avLst/>
-          </a:prstGeom>
-          <a:noFill/>
-        </p:spPr>
-        <p:txBody>
-          <a:bodyPr wrap="square" anchor="t" lIns="36000" rIns="36000" tIns="10800" bIns="10800">
-            <a:spAutoFit/>
-          </a:bodyPr>
-          <a:lstStyle/>
-          <a:p>
-            <a:pPr algn="l">
-              <a:lnSpc>
-                <a:spcPct val="105000"/>
-              </a:lnSpc>
-              <a:spcAft>
-                <a:spcPts val="200"/>
-              </a:spcAft>
-            </a:pPr>
-            <a:r>
-              <a:rPr sz="1300" b="0">
-                <a:solidFill>
-                  <a:srgbClr val="333333"/>
-                </a:solidFill>
-                <a:latin typeface="メイリオ"/>
-                <a:ea typeface="メイリオ"/>
-                <a:cs typeface="メイリオ"/>
-              </a:rPr>
-              <a:t>次の面接日・スポット勤務のご案内</a:t>
-            </a:r>
-          </a:p>
-        </p:txBody>
-      </p:sp>
-      <p:sp>
-        <p:nvSpPr>
-          <p:cNvPr id="22" name="TextBox 21"/>
-          <p:cNvSpPr txBox="1"/>
-          <p:nvPr/>
-        </p:nvSpPr>
-        <p:spPr>
-          <a:xfrm>
-            <a:off x="770400" y="3967200"/>
-            <a:ext cx="1655999" cy="259200"/>
-          </a:xfrm>
-          <a:prstGeom prst="rect">
-            <a:avLst/>
-          </a:prstGeom>
-          <a:noFill/>
-        </p:spPr>
-        <p:txBody>
-          <a:bodyPr wrap="square" anchor="t" lIns="36000" rIns="36000" tIns="10800" bIns="10800">
-            <a:spAutoFit/>
-          </a:bodyPr>
-          <a:lstStyle/>
-          <a:p>
-            <a:pPr algn="l">
-              <a:lnSpc>
-                <a:spcPct val="105000"/>
-              </a:lnSpc>
-              <a:spcAft>
-                <a:spcPts val="200"/>
-              </a:spcAft>
-            </a:pPr>
-            <a:r>
-              <a:rPr sz="1300" b="1">
-                <a:solidFill>
-                  <a:srgbClr val="333333"/>
-                </a:solidFill>
-                <a:latin typeface="メイリオ"/>
-                <a:ea typeface="メイリオ"/>
-                <a:cs typeface="メイリオ"/>
-              </a:rPr>
-              <a:t>今回は見送り</a:t>
-            </a:r>
-          </a:p>
-        </p:txBody>
-      </p:sp>
-      <p:sp>
-        <p:nvSpPr>
-          <p:cNvPr id="23" name="TextBox 22"/>
-          <p:cNvSpPr txBox="1"/>
-          <p:nvPr/>
-        </p:nvSpPr>
-        <p:spPr>
-          <a:xfrm>
-            <a:off x="2426400" y="3967200"/>
-            <a:ext cx="6847199" cy="259200"/>
-          </a:xfrm>
-          <a:prstGeom prst="rect">
-            <a:avLst/>
-          </a:prstGeom>
-          <a:noFill/>
-        </p:spPr>
-        <p:txBody>
-          <a:bodyPr wrap="square" anchor="t" lIns="36000" rIns="36000" tIns="10800" bIns="10800">
-            <a:spAutoFit/>
-          </a:bodyPr>
-          <a:lstStyle/>
-          <a:p>
-            <a:pPr algn="l">
-              <a:lnSpc>
-                <a:spcPct val="105000"/>
-              </a:lnSpc>
-              <a:spcAft>
-                <a:spcPts val="200"/>
-              </a:spcAft>
-            </a:pPr>
-            <a:r>
-              <a:rPr sz="1300" b="0">
-                <a:solidFill>
-                  <a:srgbClr val="333333"/>
-                </a:solidFill>
-                <a:latin typeface="メイリオ"/>
-                <a:ea typeface="メイリオ"/>
-                <a:cs typeface="メイリオ"/>
-              </a:rPr>
-              <a:t>時期をあけて、募集のお知らせ</a:t>
-            </a:r>
-          </a:p>
-        </p:txBody>
-      </p:sp>
-      <p:sp>
-        <p:nvSpPr>
-          <p:cNvPr id="24" name="TextBox 23"/>
-          <p:cNvSpPr txBox="1"/>
-          <p:nvPr/>
-        </p:nvSpPr>
-        <p:spPr>
-          <a:xfrm>
-            <a:off x="770400" y="4226399"/>
-            <a:ext cx="1655999" cy="259200"/>
-          </a:xfrm>
-          <a:prstGeom prst="rect">
-            <a:avLst/>
-          </a:prstGeom>
-          <a:noFill/>
-        </p:spPr>
-        <p:txBody>
-          <a:bodyPr wrap="square" anchor="t" lIns="36000" rIns="36000" tIns="10800" bIns="10800">
-            <a:spAutoFit/>
-          </a:bodyPr>
-          <a:lstStyle/>
-          <a:p>
-            <a:pPr algn="l">
-              <a:lnSpc>
-                <a:spcPct val="105000"/>
-              </a:lnSpc>
-              <a:spcAft>
-                <a:spcPts val="200"/>
-              </a:spcAft>
-            </a:pPr>
-            <a:r>
-              <a:rPr sz="1300" b="1">
-                <a:solidFill>
-                  <a:srgbClr val="333333"/>
-                </a:solidFill>
-                <a:latin typeface="メイリオ"/>
-                <a:ea typeface="メイリオ"/>
-                <a:cs typeface="メイリオ"/>
-              </a:rPr>
-              <a:t>やはりやめる</a:t>
-            </a:r>
-          </a:p>
-        </p:txBody>
-      </p:sp>
-      <p:sp>
-        <p:nvSpPr>
-          <p:cNvPr id="25" name="TextBox 24"/>
-          <p:cNvSpPr txBox="1"/>
-          <p:nvPr/>
-        </p:nvSpPr>
-        <p:spPr>
-          <a:xfrm>
-            <a:off x="2426400" y="4226399"/>
-            <a:ext cx="6847199" cy="259200"/>
-          </a:xfrm>
-          <a:prstGeom prst="rect">
-            <a:avLst/>
-          </a:prstGeom>
-          <a:noFill/>
-        </p:spPr>
-        <p:txBody>
-          <a:bodyPr wrap="square" anchor="t" lIns="36000" rIns="36000" tIns="10800" bIns="10800">
-            <a:spAutoFit/>
-          </a:bodyPr>
-          <a:lstStyle/>
-          <a:p>
-            <a:pPr algn="l">
-              <a:lnSpc>
-                <a:spcPct val="105000"/>
-              </a:lnSpc>
-              <a:spcAft>
-                <a:spcPts val="200"/>
-              </a:spcAft>
-            </a:pPr>
-            <a:r>
-              <a:rPr sz="1300" b="0">
-                <a:solidFill>
-                  <a:srgbClr val="333333"/>
-                </a:solidFill>
-                <a:latin typeface="メイリオ"/>
-                <a:ea typeface="メイリオ"/>
-                <a:cs typeface="メイリオ"/>
-              </a:rPr>
-              <a:t>働き方・条件・働く方の声で、不安をなくす</a:t>
-            </a:r>
-          </a:p>
-        </p:txBody>
-      </p:sp>
-      <p:sp>
-        <p:nvSpPr>
-          <p:cNvPr id="26" name="TextBox 25"/>
-          <p:cNvSpPr txBox="1"/>
-          <p:nvPr/>
-        </p:nvSpPr>
-        <p:spPr>
-          <a:xfrm>
-            <a:off x="770400" y="4485600"/>
-            <a:ext cx="1655999" cy="259200"/>
-          </a:xfrm>
-          <a:prstGeom prst="rect">
-            <a:avLst/>
-          </a:prstGeom>
-          <a:noFill/>
-        </p:spPr>
-        <p:txBody>
-          <a:bodyPr wrap="square" anchor="t" lIns="36000" rIns="36000" tIns="10800" bIns="10800">
-            <a:spAutoFit/>
-          </a:bodyPr>
-          <a:lstStyle/>
-          <a:p>
-            <a:pPr algn="l">
-              <a:lnSpc>
-                <a:spcPct val="105000"/>
-              </a:lnSpc>
-              <a:spcAft>
-                <a:spcPts val="200"/>
-              </a:spcAft>
-            </a:pPr>
-            <a:r>
-              <a:rPr sz="1300" b="1">
-                <a:solidFill>
-                  <a:srgbClr val="333333"/>
-                </a:solidFill>
-                <a:latin typeface="メイリオ"/>
-                <a:ea typeface="メイリオ"/>
-                <a:cs typeface="メイリオ"/>
-              </a:rPr>
-              <a:t>会社側に理由</a:t>
-            </a:r>
-          </a:p>
-        </p:txBody>
-      </p:sp>
-      <p:sp>
-        <p:nvSpPr>
-          <p:cNvPr id="27" name="TextBox 26"/>
-          <p:cNvSpPr txBox="1"/>
-          <p:nvPr/>
-        </p:nvSpPr>
-        <p:spPr>
-          <a:xfrm>
-            <a:off x="2426400" y="4485600"/>
-            <a:ext cx="6847199" cy="259200"/>
-          </a:xfrm>
-          <a:prstGeom prst="rect">
-            <a:avLst/>
-          </a:prstGeom>
-          <a:noFill/>
-        </p:spPr>
-        <p:txBody>
-          <a:bodyPr wrap="square" anchor="t" lIns="36000" rIns="36000" tIns="10800" bIns="10800">
-            <a:spAutoFit/>
-          </a:bodyPr>
-          <a:lstStyle/>
-          <a:p>
-            <a:pPr algn="l">
-              <a:lnSpc>
-                <a:spcPct val="105000"/>
-              </a:lnSpc>
-              <a:spcAft>
-                <a:spcPts val="200"/>
-              </a:spcAft>
-            </a:pPr>
-            <a:r>
-              <a:rPr sz="1300" b="0">
-                <a:solidFill>
-                  <a:srgbClr val="333333"/>
-                </a:solidFill>
-                <a:latin typeface="メイリオ"/>
-                <a:ea typeface="メイリオ"/>
-                <a:cs typeface="メイリオ"/>
-              </a:rPr>
-              <a:t>連絡の仕方・条件など、見直した点のお知らせ</a:t>
             </a:r>
           </a:p>
         </p:txBody>

--- a/20261013_セキュリティー京葉御中_LINE採用追客のご提案.pptx
+++ b/20261013_セキュリティー京葉御中_LINE採用追客のご提案.pptx
@@ -5245,8 +5245,8 @@
         </p:nvCxnSpPr>
         <p:spPr>
           <a:xfrm>
-            <a:off x="7412400" y="3519000"/>
-            <a:ext cx="126000" cy="0"/>
+            <a:off x="7441199" y="2997000"/>
+            <a:ext cx="212401" cy="0"/>
           </a:xfrm>
           <a:prstGeom prst="line">
             <a:avLst/>
@@ -5255,6 +5255,7 @@
             <a:solidFill>
               <a:srgbClr val="1F285A"/>
             </a:solidFill>
+            <a:tailEnd type="triangle" w="med" len="med"/>
           </a:ln>
         </p:spPr>
         <p:style>
@@ -5272,16 +5273,211 @@
           </a:fontRef>
         </p:style>
       </p:cxnSp>
+      <p:sp>
+        <p:nvSpPr>
+          <p:cNvPr id="22" name="Rounded Rectangle 21"/>
+          <p:cNvSpPr/>
+          <p:nvPr/>
+        </p:nvSpPr>
+        <p:spPr>
+          <a:xfrm>
+            <a:off x="7682400" y="2619000"/>
+            <a:ext cx="1591200" cy="756000"/>
+          </a:xfrm>
+          <a:prstGeom prst="roundRect">
+            <a:avLst>
+              <a:gd name="adj" fmla="val 8000"/>
+            </a:avLst>
+          </a:prstGeom>
+          <a:solidFill>
+            <a:srgbClr val="1F285A"/>
+          </a:solidFill>
+          <a:ln w="12700">
+            <a:solidFill>
+              <a:srgbClr val="1F285A"/>
+            </a:solidFill>
+          </a:ln>
+          <a:effectLst/>
+        </p:spPr>
+        <p:style>
+          <a:lnRef idx="1">
+            <a:schemeClr val="accent1"/>
+          </a:lnRef>
+          <a:fillRef idx="3">
+            <a:schemeClr val="accent1"/>
+          </a:fillRef>
+          <a:effectRef idx="0">
+            <a:schemeClr val="accent1"/>
+          </a:effectRef>
+          <a:fontRef idx="minor">
+            <a:schemeClr val="lt1"/>
+          </a:fontRef>
+        </p:style>
+        <p:txBody>
+          <a:bodyPr rtlCol="0" anchor="ctr" wrap="square" lIns="36000" tIns="18000" rIns="36000" bIns="18000"/>
+          <a:lstStyle/>
+          <a:p>
+            <a:pPr algn="ctr">
+              <a:lnSpc>
+                <a:spcPct val="110000"/>
+              </a:lnSpc>
+              <a:spcAft>
+                <a:spcPts val="0"/>
+              </a:spcAft>
+            </a:pPr>
+            <a:r>
+              <a:rPr sz="1200" b="1">
+                <a:solidFill>
+                  <a:srgbClr val="FFFFFF"/>
+                </a:solidFill>
+                <a:latin typeface="メイリオ"/>
+                <a:ea typeface="メイリオ"/>
+                <a:cs typeface="メイリオ"/>
+              </a:rPr>
+              <a:t>CV①</a:t>
+            </a:r>
+          </a:p>
+          <a:p>
+            <a:pPr algn="ctr">
+              <a:lnSpc>
+                <a:spcPct val="110000"/>
+              </a:lnSpc>
+              <a:spcAft>
+                <a:spcPts val="0"/>
+              </a:spcAft>
+            </a:pPr>
+            <a:r>
+              <a:rPr sz="1800" b="1">
+                <a:solidFill>
+                  <a:srgbClr val="FFFFFF"/>
+                </a:solidFill>
+                <a:latin typeface="メイリオ"/>
+                <a:ea typeface="メイリオ"/>
+                <a:cs typeface="メイリオ"/>
+              </a:rPr>
+              <a:t>応募数</a:t>
+            </a:r>
+          </a:p>
+          <a:p>
+            <a:pPr algn="ctr">
+              <a:lnSpc>
+                <a:spcPct val="110000"/>
+              </a:lnSpc>
+              <a:spcAft>
+                <a:spcPts val="0"/>
+              </a:spcAft>
+            </a:pPr>
+            <a:r>
+              <a:rPr sz="1100" b="0">
+                <a:solidFill>
+                  <a:srgbClr val="FFFFFF"/>
+                </a:solidFill>
+                <a:latin typeface="メイリオ"/>
+                <a:ea typeface="メイリオ"/>
+                <a:cs typeface="メイリオ"/>
+              </a:rPr>
+              <a:t>（再応募を含む）</a:t>
+            </a:r>
+          </a:p>
+        </p:txBody>
+      </p:sp>
+      <p:sp>
+        <p:nvSpPr>
+          <p:cNvPr id="23" name="Rounded Rectangle 22"/>
+          <p:cNvSpPr/>
+          <p:nvPr/>
+        </p:nvSpPr>
+        <p:spPr>
+          <a:xfrm>
+            <a:off x="7682400" y="3663000"/>
+            <a:ext cx="1591200" cy="756000"/>
+          </a:xfrm>
+          <a:prstGeom prst="roundRect">
+            <a:avLst>
+              <a:gd name="adj" fmla="val 8000"/>
+            </a:avLst>
+          </a:prstGeom>
+          <a:solidFill>
+            <a:srgbClr val="1F285A"/>
+          </a:solidFill>
+          <a:ln w="12700">
+            <a:solidFill>
+              <a:srgbClr val="1F285A"/>
+            </a:solidFill>
+          </a:ln>
+          <a:effectLst/>
+        </p:spPr>
+        <p:style>
+          <a:lnRef idx="1">
+            <a:schemeClr val="accent1"/>
+          </a:lnRef>
+          <a:fillRef idx="3">
+            <a:schemeClr val="accent1"/>
+          </a:fillRef>
+          <a:effectRef idx="0">
+            <a:schemeClr val="accent1"/>
+          </a:effectRef>
+          <a:fontRef idx="minor">
+            <a:schemeClr val="lt1"/>
+          </a:fontRef>
+        </p:style>
+        <p:txBody>
+          <a:bodyPr rtlCol="0" anchor="ctr" wrap="square" lIns="36000" tIns="18000" rIns="36000" bIns="18000"/>
+          <a:lstStyle/>
+          <a:p>
+            <a:pPr algn="ctr">
+              <a:lnSpc>
+                <a:spcPct val="110000"/>
+              </a:lnSpc>
+              <a:spcAft>
+                <a:spcPts val="0"/>
+              </a:spcAft>
+            </a:pPr>
+            <a:r>
+              <a:rPr sz="1200" b="1">
+                <a:solidFill>
+                  <a:srgbClr val="FFFFFF"/>
+                </a:solidFill>
+                <a:latin typeface="メイリオ"/>
+                <a:ea typeface="メイリオ"/>
+                <a:cs typeface="メイリオ"/>
+              </a:rPr>
+              <a:t>CV②</a:t>
+            </a:r>
+          </a:p>
+          <a:p>
+            <a:pPr algn="ctr">
+              <a:lnSpc>
+                <a:spcPct val="110000"/>
+              </a:lnSpc>
+              <a:spcAft>
+                <a:spcPts val="0"/>
+              </a:spcAft>
+            </a:pPr>
+            <a:r>
+              <a:rPr sz="1800" b="1">
+                <a:solidFill>
+                  <a:srgbClr val="FFFFFF"/>
+                </a:solidFill>
+                <a:latin typeface="メイリオ"/>
+                <a:ea typeface="メイリオ"/>
+                <a:cs typeface="メイリオ"/>
+              </a:rPr>
+              <a:t>面接予約数</a:t>
+            </a:r>
+          </a:p>
+        </p:txBody>
+      </p:sp>
       <p:cxnSp>
         <p:nvCxnSpPr>
-          <p:cNvPr id="22" name="Connector 21"/>
+          <p:cNvPr id="24" name="Connector 23"/>
           <p:cNvCxnSpPr/>
           <p:nvPr/>
         </p:nvCxnSpPr>
         <p:spPr>
           <a:xfrm>
-            <a:off x="7538400" y="2997000"/>
-            <a:ext cx="0" cy="1044000"/>
+            <a:off x="8478000" y="3403800"/>
+            <a:ext cx="0" cy="230400"/>
           </a:xfrm>
           <a:prstGeom prst="line">
             <a:avLst/>
@@ -5290,6 +5486,7 @@
             <a:solidFill>
               <a:srgbClr val="1F285A"/>
             </a:solidFill>
+            <a:tailEnd type="triangle" w="med" len="med"/>
           </a:ln>
         </p:spPr>
         <p:style>
@@ -5309,274 +5506,7 @@
       </p:cxnSp>
       <p:sp>
         <p:nvSpPr>
-          <p:cNvPr id="23" name="Rounded Rectangle 22"/>
-          <p:cNvSpPr/>
-          <p:nvPr/>
-        </p:nvSpPr>
-        <p:spPr>
-          <a:xfrm>
-            <a:off x="7682400" y="2619000"/>
-            <a:ext cx="1591200" cy="756000"/>
-          </a:xfrm>
-          <a:prstGeom prst="roundRect">
-            <a:avLst>
-              <a:gd name="adj" fmla="val 8000"/>
-            </a:avLst>
-          </a:prstGeom>
-          <a:solidFill>
-            <a:srgbClr val="1F285A"/>
-          </a:solidFill>
-          <a:ln w="12700">
-            <a:solidFill>
-              <a:srgbClr val="1F285A"/>
-            </a:solidFill>
-          </a:ln>
-          <a:effectLst/>
-        </p:spPr>
-        <p:style>
-          <a:lnRef idx="1">
-            <a:schemeClr val="accent1"/>
-          </a:lnRef>
-          <a:fillRef idx="3">
-            <a:schemeClr val="accent1"/>
-          </a:fillRef>
-          <a:effectRef idx="0">
-            <a:schemeClr val="accent1"/>
-          </a:effectRef>
-          <a:fontRef idx="minor">
-            <a:schemeClr val="lt1"/>
-          </a:fontRef>
-        </p:style>
-        <p:txBody>
-          <a:bodyPr rtlCol="0" anchor="ctr" wrap="square" lIns="36000" tIns="18000" rIns="36000" bIns="18000"/>
-          <a:lstStyle/>
-          <a:p>
-            <a:pPr algn="ctr">
-              <a:lnSpc>
-                <a:spcPct val="110000"/>
-              </a:lnSpc>
-              <a:spcAft>
-                <a:spcPts val="0"/>
-              </a:spcAft>
-            </a:pPr>
-            <a:r>
-              <a:rPr sz="1200" b="1">
-                <a:solidFill>
-                  <a:srgbClr val="FFFFFF"/>
-                </a:solidFill>
-                <a:latin typeface="メイリオ"/>
-                <a:ea typeface="メイリオ"/>
-                <a:cs typeface="メイリオ"/>
-              </a:rPr>
-              <a:t>CV①</a:t>
-            </a:r>
-          </a:p>
-          <a:p>
-            <a:pPr algn="ctr">
-              <a:lnSpc>
-                <a:spcPct val="110000"/>
-              </a:lnSpc>
-              <a:spcAft>
-                <a:spcPts val="0"/>
-              </a:spcAft>
-            </a:pPr>
-            <a:r>
-              <a:rPr sz="1800" b="1">
-                <a:solidFill>
-                  <a:srgbClr val="FFFFFF"/>
-                </a:solidFill>
-                <a:latin typeface="メイリオ"/>
-                <a:ea typeface="メイリオ"/>
-                <a:cs typeface="メイリオ"/>
-              </a:rPr>
-              <a:t>応募数</a:t>
-            </a:r>
-          </a:p>
-          <a:p>
-            <a:pPr algn="ctr">
-              <a:lnSpc>
-                <a:spcPct val="110000"/>
-              </a:lnSpc>
-              <a:spcAft>
-                <a:spcPts val="0"/>
-              </a:spcAft>
-            </a:pPr>
-            <a:r>
-              <a:rPr sz="1100" b="0">
-                <a:solidFill>
-                  <a:srgbClr val="FFFFFF"/>
-                </a:solidFill>
-                <a:latin typeface="メイリオ"/>
-                <a:ea typeface="メイリオ"/>
-                <a:cs typeface="メイリオ"/>
-              </a:rPr>
-              <a:t>（再応募を含む）</a:t>
-            </a:r>
-          </a:p>
-        </p:txBody>
-      </p:sp>
-      <p:cxnSp>
-        <p:nvCxnSpPr>
-          <p:cNvPr id="24" name="Connector 23"/>
-          <p:cNvCxnSpPr/>
-          <p:nvPr/>
-        </p:nvCxnSpPr>
-        <p:spPr>
-          <a:xfrm>
-            <a:off x="7538400" y="2997000"/>
-            <a:ext cx="115200" cy="0"/>
-          </a:xfrm>
-          <a:prstGeom prst="line">
-            <a:avLst/>
-          </a:prstGeom>
-          <a:ln w="25400">
-            <a:solidFill>
-              <a:srgbClr val="1F285A"/>
-            </a:solidFill>
-            <a:tailEnd type="triangle" w="med" len="med"/>
-          </a:ln>
-        </p:spPr>
-        <p:style>
-          <a:lnRef idx="2">
-            <a:schemeClr val="accent1"/>
-          </a:lnRef>
-          <a:fillRef idx="0">
-            <a:schemeClr val="accent1"/>
-          </a:fillRef>
-          <a:effectRef idx="0">
-            <a:schemeClr val="accent1"/>
-          </a:effectRef>
-          <a:fontRef idx="minor">
-            <a:schemeClr val="tx1"/>
-          </a:fontRef>
-        </p:style>
-      </p:cxnSp>
-      <p:sp>
-        <p:nvSpPr>
-          <p:cNvPr id="25" name="Rounded Rectangle 24"/>
-          <p:cNvSpPr/>
-          <p:nvPr/>
-        </p:nvSpPr>
-        <p:spPr>
-          <a:xfrm>
-            <a:off x="7682400" y="3663000"/>
-            <a:ext cx="1591200" cy="756000"/>
-          </a:xfrm>
-          <a:prstGeom prst="roundRect">
-            <a:avLst>
-              <a:gd name="adj" fmla="val 8000"/>
-            </a:avLst>
-          </a:prstGeom>
-          <a:solidFill>
-            <a:srgbClr val="1F285A"/>
-          </a:solidFill>
-          <a:ln w="12700">
-            <a:solidFill>
-              <a:srgbClr val="1F285A"/>
-            </a:solidFill>
-          </a:ln>
-          <a:effectLst/>
-        </p:spPr>
-        <p:style>
-          <a:lnRef idx="1">
-            <a:schemeClr val="accent1"/>
-          </a:lnRef>
-          <a:fillRef idx="3">
-            <a:schemeClr val="accent1"/>
-          </a:fillRef>
-          <a:effectRef idx="0">
-            <a:schemeClr val="accent1"/>
-          </a:effectRef>
-          <a:fontRef idx="minor">
-            <a:schemeClr val="lt1"/>
-          </a:fontRef>
-        </p:style>
-        <p:txBody>
-          <a:bodyPr rtlCol="0" anchor="ctr" wrap="square" lIns="36000" tIns="18000" rIns="36000" bIns="18000"/>
-          <a:lstStyle/>
-          <a:p>
-            <a:pPr algn="ctr">
-              <a:lnSpc>
-                <a:spcPct val="110000"/>
-              </a:lnSpc>
-              <a:spcAft>
-                <a:spcPts val="0"/>
-              </a:spcAft>
-            </a:pPr>
-            <a:r>
-              <a:rPr sz="1200" b="1">
-                <a:solidFill>
-                  <a:srgbClr val="FFFFFF"/>
-                </a:solidFill>
-                <a:latin typeface="メイリオ"/>
-                <a:ea typeface="メイリオ"/>
-                <a:cs typeface="メイリオ"/>
-              </a:rPr>
-              <a:t>CV②</a:t>
-            </a:r>
-          </a:p>
-          <a:p>
-            <a:pPr algn="ctr">
-              <a:lnSpc>
-                <a:spcPct val="110000"/>
-              </a:lnSpc>
-              <a:spcAft>
-                <a:spcPts val="0"/>
-              </a:spcAft>
-            </a:pPr>
-            <a:r>
-              <a:rPr sz="1800" b="1">
-                <a:solidFill>
-                  <a:srgbClr val="FFFFFF"/>
-                </a:solidFill>
-                <a:latin typeface="メイリオ"/>
-                <a:ea typeface="メイリオ"/>
-                <a:cs typeface="メイリオ"/>
-              </a:rPr>
-              <a:t>面接予約数</a:t>
-            </a:r>
-          </a:p>
-        </p:txBody>
-      </p:sp>
-      <p:cxnSp>
-        <p:nvCxnSpPr>
-          <p:cNvPr id="26" name="Connector 25"/>
-          <p:cNvCxnSpPr/>
-          <p:nvPr/>
-        </p:nvCxnSpPr>
-        <p:spPr>
-          <a:xfrm>
-            <a:off x="7538400" y="4041000"/>
-            <a:ext cx="115200" cy="0"/>
-          </a:xfrm>
-          <a:prstGeom prst="line">
-            <a:avLst/>
-          </a:prstGeom>
-          <a:ln w="25400">
-            <a:solidFill>
-              <a:srgbClr val="1F285A"/>
-            </a:solidFill>
-            <a:tailEnd type="triangle" w="med" len="med"/>
-          </a:ln>
-        </p:spPr>
-        <p:style>
-          <a:lnRef idx="2">
-            <a:schemeClr val="accent1"/>
-          </a:lnRef>
-          <a:fillRef idx="0">
-            <a:schemeClr val="accent1"/>
-          </a:fillRef>
-          <a:effectRef idx="0">
-            <a:schemeClr val="accent1"/>
-          </a:effectRef>
-          <a:fontRef idx="minor">
-            <a:schemeClr val="tx1"/>
-          </a:fontRef>
-        </p:style>
-      </p:cxnSp>
-      <p:sp>
-        <p:nvSpPr>
-          <p:cNvPr id="27" name="TextBox 26"/>
+          <p:cNvPr id="25" name="TextBox 24"/>
           <p:cNvSpPr txBox="1"/>
           <p:nvPr/>
         </p:nvSpPr>
@@ -11527,16 +11457,52 @@
           </a:p>
         </p:txBody>
       </p:sp>
-      <p:sp>
-        <p:nvSpPr>
-          <p:cNvPr id="42" name="Rounded Rectangle 41"/>
+      <p:cxnSp>
+        <p:nvCxnSpPr>
+          <p:cNvPr id="42" name="Connector 41"/>
+          <p:cNvCxnSpPr/>
+          <p:nvPr/>
+        </p:nvCxnSpPr>
+        <p:spPr>
+          <a:xfrm>
+            <a:off x="4860000" y="5724000"/>
+            <a:ext cx="324000" cy="0"/>
+          </a:xfrm>
+          <a:prstGeom prst="line">
+            <a:avLst/>
+          </a:prstGeom>
+          <a:ln w="31750">
+            <a:solidFill>
+              <a:srgbClr val="1F285A"/>
+            </a:solidFill>
+            <a:tailEnd type="triangle" w="med" len="med"/>
+          </a:ln>
+        </p:spPr>
+        <p:style>
+          <a:lnRef idx="2">
+            <a:schemeClr val="accent1"/>
+          </a:lnRef>
+          <a:fillRef idx="0">
+            <a:schemeClr val="accent1"/>
+          </a:fillRef>
+          <a:effectRef idx="0">
+            <a:schemeClr val="accent1"/>
+          </a:effectRef>
+          <a:fontRef idx="minor">
+            <a:schemeClr val="tx1"/>
+          </a:fontRef>
+        </p:style>
+      </p:cxnSp>
+      <p:sp>
+        <p:nvSpPr>
+          <p:cNvPr id="43" name="Rounded Rectangle 42"/>
           <p:cNvSpPr/>
           <p:nvPr/>
         </p:nvSpPr>
         <p:spPr>
           <a:xfrm>
             <a:off x="770400" y="5454000"/>
-            <a:ext cx="4143600" cy="540000"/>
+            <a:ext cx="3999600" cy="540000"/>
           </a:xfrm>
           <a:prstGeom prst="roundRect">
             <a:avLst>
@@ -11577,7 +11543,7 @@
       </p:sp>
       <p:sp>
         <p:nvSpPr>
-          <p:cNvPr id="43" name="Rounded Rectangle 42"/>
+          <p:cNvPr id="44" name="Rounded Rectangle 43"/>
           <p:cNvSpPr/>
           <p:nvPr/>
         </p:nvSpPr>
@@ -11643,14 +11609,14 @@
       </p:sp>
       <p:sp>
         <p:nvSpPr>
-          <p:cNvPr id="44" name="TextBox 43"/>
+          <p:cNvPr id="45" name="TextBox 44"/>
           <p:cNvSpPr txBox="1"/>
           <p:nvPr/>
         </p:nvSpPr>
         <p:spPr>
           <a:xfrm>
             <a:off x="1634400" y="5454000"/>
-            <a:ext cx="3207600" cy="540000"/>
+            <a:ext cx="3063600" cy="540000"/>
           </a:xfrm>
           <a:prstGeom prst="rect">
             <a:avLst/>
@@ -11687,14 +11653,14 @@
       </p:sp>
       <p:sp>
         <p:nvSpPr>
-          <p:cNvPr id="45" name="Rounded Rectangle 44"/>
+          <p:cNvPr id="46" name="Rounded Rectangle 45"/>
           <p:cNvSpPr/>
           <p:nvPr/>
         </p:nvSpPr>
         <p:spPr>
           <a:xfrm>
-            <a:off x="5130000" y="5454000"/>
-            <a:ext cx="4143600" cy="540000"/>
+            <a:off x="5274000" y="5454000"/>
+            <a:ext cx="3999600" cy="540000"/>
           </a:xfrm>
           <a:prstGeom prst="roundRect">
             <a:avLst>
@@ -11735,13 +11701,13 @@
       </p:sp>
       <p:sp>
         <p:nvSpPr>
-          <p:cNvPr id="46" name="Rounded Rectangle 45"/>
+          <p:cNvPr id="47" name="Rounded Rectangle 46"/>
           <p:cNvSpPr/>
           <p:nvPr/>
         </p:nvSpPr>
         <p:spPr>
           <a:xfrm>
-            <a:off x="5238000" y="5544000"/>
+            <a:off x="5382000" y="5544000"/>
             <a:ext cx="648000" cy="360000"/>
           </a:xfrm>
           <a:prstGeom prst="roundRect">
@@ -11801,14 +11767,14 @@
       </p:sp>
       <p:sp>
         <p:nvSpPr>
-          <p:cNvPr id="47" name="TextBox 46"/>
+          <p:cNvPr id="48" name="TextBox 47"/>
           <p:cNvSpPr txBox="1"/>
           <p:nvPr/>
         </p:nvSpPr>
         <p:spPr>
           <a:xfrm>
-            <a:off x="5993999" y="5454000"/>
-            <a:ext cx="3207600" cy="540000"/>
+            <a:off x="6138000" y="5454000"/>
+            <a:ext cx="3063600" cy="540000"/>
           </a:xfrm>
           <a:prstGeom prst="rect">
             <a:avLst/>

--- a/20261013_セキュリティー京葉御中_LINE採用追客のご提案.pptx
+++ b/20261013_セキュリティー京葉御中_LINE採用追客のご提案.pptx
@@ -4246,7 +4246,7 @@
                 <a:ea typeface="メイリオ"/>
                 <a:cs typeface="メイリオ"/>
               </a:rPr>
-              <a:t>方針｜過去・新規の応募者をLINEでつなぎ、追い続ける</a:t>
+              <a:t>方針｜過去の応募者をLINEでつなぎ、追い続ける</a:t>
             </a:r>
             <a:endParaRPr sz="1600" b="1" dirty="0">
               <a:solidFill>
@@ -4295,7 +4295,7 @@
                 <a:ea typeface="メイリオ"/>
                 <a:cs typeface="メイリオ"/>
               </a:rPr>
-              <a:t>2つの入口からLINEの友だちを増やし、Lステップで応募・面接予約につなげる</a:t>
+              <a:t>面接に来なかった方・辞退した方をLINEでつなぎ、応募・面接予約まで追う</a:t>
             </a:r>
             <a:endParaRPr sz="1050" dirty="0">
               <a:solidFill>
@@ -4345,14 +4345,102 @@
       </p:cxnSp>
       <p:sp>
         <p:nvSpPr>
-          <p:cNvPr id="6" name="Rounded Rectangle 5"/>
+          <p:cNvPr id="6" name="Rectangle 5"/>
           <p:cNvSpPr/>
           <p:nvPr/>
         </p:nvSpPr>
         <p:spPr>
           <a:xfrm>
-            <a:off x="644400" y="1620000"/>
-            <a:ext cx="2736000" cy="1800000"/>
+            <a:off x="644400" y="1634400"/>
+            <a:ext cx="54000" cy="187200"/>
+          </a:xfrm>
+          <a:prstGeom prst="rect">
+            <a:avLst/>
+          </a:prstGeom>
+          <a:solidFill>
+            <a:srgbClr val="1F285A"/>
+          </a:solidFill>
+          <a:ln>
+            <a:noFill/>
+          </a:ln>
+          <a:effectLst/>
+        </p:spPr>
+        <p:style>
+          <a:lnRef idx="1">
+            <a:schemeClr val="accent1"/>
+          </a:lnRef>
+          <a:fillRef idx="3">
+            <a:schemeClr val="accent1"/>
+          </a:fillRef>
+          <a:effectRef idx="0">
+            <a:schemeClr val="accent1"/>
+          </a:effectRef>
+          <a:fontRef idx="minor">
+            <a:schemeClr val="lt1"/>
+          </a:fontRef>
+        </p:style>
+        <p:txBody>
+          <a:bodyPr rtlCol="0" anchor="ctr" wrap="square" lIns="72000" tIns="18000" rIns="72000" bIns="18000"/>
+          <a:lstStyle/>
+          <a:p>
+            <a:pPr algn="ctr"/>
+          </a:p>
+        </p:txBody>
+      </p:sp>
+      <p:sp>
+        <p:nvSpPr>
+          <p:cNvPr id="7" name="TextBox 6"/>
+          <p:cNvSpPr txBox="1"/>
+          <p:nvPr/>
+        </p:nvSpPr>
+        <p:spPr>
+          <a:xfrm>
+            <a:off x="770400" y="1584000"/>
+            <a:ext cx="8503200" cy="288000"/>
+          </a:xfrm>
+          <a:prstGeom prst="rect">
+            <a:avLst/>
+          </a:prstGeom>
+          <a:noFill/>
+        </p:spPr>
+        <p:txBody>
+          <a:bodyPr wrap="square" anchor="t" lIns="36000" rIns="36000" tIns="10800" bIns="10800">
+            <a:spAutoFit/>
+          </a:bodyPr>
+          <a:lstStyle/>
+          <a:p>
+            <a:pPr algn="l">
+              <a:lnSpc>
+                <a:spcPct val="105000"/>
+              </a:lnSpc>
+              <a:spcAft>
+                <a:spcPts val="200"/>
+              </a:spcAft>
+            </a:pPr>
+            <a:r>
+              <a:rPr sz="1500" b="1">
+                <a:solidFill>
+                  <a:srgbClr val="1F285A"/>
+                </a:solidFill>
+                <a:latin typeface="メイリオ"/>
+                <a:ea typeface="メイリオ"/>
+                <a:cs typeface="メイリオ"/>
+              </a:rPr>
+              <a:t>追客の流れ</a:t>
+            </a:r>
+          </a:p>
+        </p:txBody>
+      </p:sp>
+      <p:sp>
+        <p:nvSpPr>
+          <p:cNvPr id="8" name="Rounded Rectangle 7"/>
+          <p:cNvSpPr/>
+          <p:nvPr/>
+        </p:nvSpPr>
+        <p:spPr>
+          <a:xfrm>
+            <a:off x="644400" y="2412000"/>
+            <a:ext cx="2880000" cy="2304000"/>
           </a:xfrm>
           <a:prstGeom prst="roundRect">
             <a:avLst>
@@ -4393,14 +4481,14 @@
       </p:sp>
       <p:sp>
         <p:nvSpPr>
-          <p:cNvPr id="7" name="Rectangle 6"/>
+          <p:cNvPr id="9" name="Rectangle 8"/>
           <p:cNvSpPr/>
           <p:nvPr/>
         </p:nvSpPr>
         <p:spPr>
           <a:xfrm>
-            <a:off x="644400" y="1620000"/>
-            <a:ext cx="2736000" cy="342000"/>
+            <a:off x="644400" y="2412000"/>
+            <a:ext cx="2880000" cy="360000"/>
           </a:xfrm>
           <a:prstGeom prst="rect">
             <a:avLst/>
@@ -4440,7 +4528,7 @@
               </a:spcAft>
             </a:pPr>
             <a:r>
-              <a:rPr sz="1350" b="1">
+              <a:rPr sz="1500" b="1">
                 <a:solidFill>
                   <a:srgbClr val="FFFFFF"/>
                 </a:solidFill>
@@ -4448,21 +4536,21 @@
                 <a:ea typeface="メイリオ"/>
                 <a:cs typeface="メイリオ"/>
               </a:rPr>
-              <a:t>入口①　過去の応募者（重点）</a:t>
-            </a:r>
-          </a:p>
-        </p:txBody>
-      </p:sp>
-      <p:sp>
-        <p:nvSpPr>
-          <p:cNvPr id="8" name="TextBox 7"/>
+              <a:t>過去の応募者</a:t>
+            </a:r>
+          </a:p>
+        </p:txBody>
+      </p:sp>
+      <p:sp>
+        <p:nvSpPr>
+          <p:cNvPr id="10" name="TextBox 9"/>
           <p:cNvSpPr txBox="1"/>
           <p:nvPr/>
         </p:nvSpPr>
         <p:spPr>
           <a:xfrm>
-            <a:off x="770400" y="2015999"/>
-            <a:ext cx="2484000" cy="503999"/>
+            <a:off x="806400" y="2898000"/>
+            <a:ext cx="2556000" cy="576000"/>
           </a:xfrm>
           <a:prstGeom prst="rect">
             <a:avLst/>
@@ -4484,7 +4572,7 @@
               </a:spcAft>
             </a:pPr>
             <a:r>
-              <a:rPr sz="1450" b="1">
+              <a:rPr sz="1600" b="1">
                 <a:solidFill>
                   <a:srgbClr val="1F285A"/>
                 </a:solidFill>
@@ -4505,7 +4593,7 @@
               </a:spcAft>
             </a:pPr>
             <a:r>
-              <a:rPr sz="1450" b="1">
+              <a:rPr sz="1600" b="1">
                 <a:solidFill>
                   <a:srgbClr val="1F285A"/>
                 </a:solidFill>
@@ -4520,14 +4608,14 @@
       </p:sp>
       <p:sp>
         <p:nvSpPr>
-          <p:cNvPr id="9" name="TextBox 8"/>
+          <p:cNvPr id="11" name="TextBox 10"/>
           <p:cNvSpPr txBox="1"/>
           <p:nvPr/>
         </p:nvSpPr>
         <p:spPr>
           <a:xfrm>
-            <a:off x="770400" y="2628000"/>
-            <a:ext cx="2484000" cy="720000"/>
+            <a:off x="806400" y="3581999"/>
+            <a:ext cx="2556000" cy="1007999"/>
           </a:xfrm>
           <a:prstGeom prst="rect">
             <a:avLst/>
@@ -4549,7 +4637,7 @@
               </a:spcAft>
             </a:pPr>
             <a:r>
-              <a:rPr sz="1350" b="0">
+              <a:rPr sz="1450" b="0">
                 <a:solidFill>
                   <a:srgbClr val="333333"/>
                 </a:solidFill>
@@ -4570,7 +4658,7 @@
               </a:spcAft>
             </a:pPr>
             <a:r>
-              <a:rPr sz="1350" b="0">
+              <a:rPr sz="1450" b="0">
                 <a:solidFill>
                   <a:srgbClr val="333333"/>
                 </a:solidFill>
@@ -4591,7 +4679,7 @@
               </a:spcAft>
             </a:pPr>
             <a:r>
-              <a:rPr sz="1350" b="0">
+              <a:rPr sz="1450" b="0">
                 <a:solidFill>
                   <a:srgbClr val="333333"/>
                 </a:solidFill>
@@ -4600,260 +4688,20 @@
                 <a:cs typeface="メイリオ"/>
               </a:rPr>
               <a:t>ご案内</a:t>
-            </a:r>
-          </a:p>
-        </p:txBody>
-      </p:sp>
-      <p:sp>
-        <p:nvSpPr>
-          <p:cNvPr id="10" name="Rounded Rectangle 9"/>
-          <p:cNvSpPr/>
-          <p:nvPr/>
-        </p:nvSpPr>
-        <p:spPr>
-          <a:xfrm>
-            <a:off x="644400" y="3618000"/>
-            <a:ext cx="2736000" cy="1800000"/>
-          </a:xfrm>
-          <a:prstGeom prst="roundRect">
-            <a:avLst>
-              <a:gd name="adj" fmla="val 8000"/>
-            </a:avLst>
-          </a:prstGeom>
-          <a:solidFill>
-            <a:srgbClr val="FFFFFF"/>
-          </a:solidFill>
-          <a:ln w="15875">
-            <a:solidFill>
-              <a:srgbClr val="1F285A"/>
-            </a:solidFill>
-          </a:ln>
-          <a:effectLst/>
-        </p:spPr>
-        <p:style>
-          <a:lnRef idx="1">
-            <a:schemeClr val="accent1"/>
-          </a:lnRef>
-          <a:fillRef idx="3">
-            <a:schemeClr val="accent1"/>
-          </a:fillRef>
-          <a:effectRef idx="0">
-            <a:schemeClr val="accent1"/>
-          </a:effectRef>
-          <a:fontRef idx="minor">
-            <a:schemeClr val="lt1"/>
-          </a:fontRef>
-        </p:style>
-        <p:txBody>
-          <a:bodyPr rtlCol="0" anchor="ctr" wrap="square" lIns="72000" tIns="36000" rIns="72000" bIns="36000"/>
-          <a:lstStyle/>
-          <a:p>
-            <a:pPr algn="ctr"/>
-          </a:p>
-        </p:txBody>
-      </p:sp>
-      <p:sp>
-        <p:nvSpPr>
-          <p:cNvPr id="11" name="Rectangle 10"/>
-          <p:cNvSpPr/>
-          <p:nvPr/>
-        </p:nvSpPr>
-        <p:spPr>
-          <a:xfrm>
-            <a:off x="644400" y="3618000"/>
-            <a:ext cx="2736000" cy="342000"/>
-          </a:xfrm>
-          <a:prstGeom prst="rect">
-            <a:avLst/>
-          </a:prstGeom>
-          <a:solidFill>
-            <a:srgbClr val="1F285A"/>
-          </a:solidFill>
-          <a:ln>
-            <a:noFill/>
-          </a:ln>
-          <a:effectLst/>
-        </p:spPr>
-        <p:style>
-          <a:lnRef idx="1">
-            <a:schemeClr val="accent1"/>
-          </a:lnRef>
-          <a:fillRef idx="3">
-            <a:schemeClr val="accent1"/>
-          </a:fillRef>
-          <a:effectRef idx="0">
-            <a:schemeClr val="accent1"/>
-          </a:effectRef>
-          <a:fontRef idx="minor">
-            <a:schemeClr val="lt1"/>
-          </a:fontRef>
-        </p:style>
-        <p:txBody>
-          <a:bodyPr rtlCol="0" anchor="ctr" wrap="square" lIns="72000" tIns="18000" rIns="72000" bIns="18000"/>
-          <a:lstStyle/>
-          <a:p>
-            <a:pPr algn="ctr">
-              <a:lnSpc>
-                <a:spcPct val="110000"/>
-              </a:lnSpc>
-              <a:spcAft>
-                <a:spcPts val="0"/>
-              </a:spcAft>
-            </a:pPr>
-            <a:r>
-              <a:rPr sz="1350" b="1">
-                <a:solidFill>
-                  <a:srgbClr val="FFFFFF"/>
-                </a:solidFill>
-                <a:latin typeface="メイリオ"/>
-                <a:ea typeface="メイリオ"/>
-                <a:cs typeface="メイリオ"/>
-              </a:rPr>
-              <a:t>入口②　今後の新規応募者</a:t>
-            </a:r>
-          </a:p>
-        </p:txBody>
-      </p:sp>
-      <p:sp>
-        <p:nvSpPr>
-          <p:cNvPr id="12" name="TextBox 11"/>
-          <p:cNvSpPr txBox="1"/>
-          <p:nvPr/>
-        </p:nvSpPr>
-        <p:spPr>
-          <a:xfrm>
-            <a:off x="770400" y="4014000"/>
-            <a:ext cx="2484000" cy="251999"/>
-          </a:xfrm>
-          <a:prstGeom prst="rect">
-            <a:avLst/>
-          </a:prstGeom>
-          <a:noFill/>
-        </p:spPr>
-        <p:txBody>
-          <a:bodyPr wrap="square" anchor="t" lIns="36000" rIns="36000" tIns="10800" bIns="10800">
-            <a:spAutoFit/>
-          </a:bodyPr>
-          <a:lstStyle/>
-          <a:p>
-            <a:pPr algn="l">
-              <a:lnSpc>
-                <a:spcPct val="105000"/>
-              </a:lnSpc>
-              <a:spcAft>
-                <a:spcPts val="200"/>
-              </a:spcAft>
-            </a:pPr>
-            <a:r>
-              <a:rPr sz="1450" b="1">
-                <a:solidFill>
-                  <a:srgbClr val="1F285A"/>
-                </a:solidFill>
-                <a:latin typeface="メイリオ"/>
-                <a:ea typeface="メイリオ"/>
-                <a:cs typeface="メイリオ"/>
-              </a:rPr>
-              <a:t>これから応募する方</a:t>
-            </a:r>
-          </a:p>
-        </p:txBody>
-      </p:sp>
-      <p:sp>
-        <p:nvSpPr>
-          <p:cNvPr id="13" name="TextBox 12"/>
-          <p:cNvSpPr txBox="1"/>
-          <p:nvPr/>
-        </p:nvSpPr>
-        <p:spPr>
-          <a:xfrm>
-            <a:off x="770400" y="4374000"/>
-            <a:ext cx="2484000" cy="720000"/>
-          </a:xfrm>
-          <a:prstGeom prst="rect">
-            <a:avLst/>
-          </a:prstGeom>
-          <a:noFill/>
-        </p:spPr>
-        <p:txBody>
-          <a:bodyPr wrap="square" anchor="t" lIns="36000" rIns="36000" tIns="10800" bIns="10800">
-            <a:spAutoFit/>
-          </a:bodyPr>
-          <a:lstStyle/>
-          <a:p>
-            <a:pPr algn="l">
-              <a:lnSpc>
-                <a:spcPct val="105000"/>
-              </a:lnSpc>
-              <a:spcAft>
-                <a:spcPts val="200"/>
-              </a:spcAft>
-            </a:pPr>
-            <a:r>
-              <a:rPr sz="1350" b="0">
-                <a:solidFill>
-                  <a:srgbClr val="333333"/>
-                </a:solidFill>
-                <a:latin typeface="メイリオ"/>
-                <a:ea typeface="メイリオ"/>
-                <a:cs typeface="メイリオ"/>
-              </a:rPr>
-              <a:t>応募完了後に</a:t>
-            </a:r>
-          </a:p>
-          <a:p>
-            <a:pPr algn="l">
-              <a:lnSpc>
-                <a:spcPct val="105000"/>
-              </a:lnSpc>
-              <a:spcAft>
-                <a:spcPts val="200"/>
-              </a:spcAft>
-            </a:pPr>
-            <a:r>
-              <a:rPr sz="1350" b="0">
-                <a:solidFill>
-                  <a:srgbClr val="333333"/>
-                </a:solidFill>
-                <a:latin typeface="メイリオ"/>
-                <a:ea typeface="メイリオ"/>
-                <a:cs typeface="メイリオ"/>
-              </a:rPr>
-              <a:t>サンクスLINE誘導で</a:t>
-            </a:r>
-          </a:p>
-          <a:p>
-            <a:pPr algn="l">
-              <a:lnSpc>
-                <a:spcPct val="105000"/>
-              </a:lnSpc>
-              <a:spcAft>
-                <a:spcPts val="200"/>
-              </a:spcAft>
-            </a:pPr>
-            <a:r>
-              <a:rPr sz="1350" b="0">
-                <a:solidFill>
-                  <a:srgbClr val="333333"/>
-                </a:solidFill>
-                <a:latin typeface="メイリオ"/>
-                <a:ea typeface="メイリオ"/>
-                <a:cs typeface="メイリオ"/>
-              </a:rPr>
-              <a:t>友だち追加</a:t>
             </a:r>
           </a:p>
         </p:txBody>
       </p:sp>
       <p:cxnSp>
         <p:nvCxnSpPr>
-          <p:cNvPr id="14" name="Connector 13"/>
+          <p:cNvPr id="12" name="Connector 11"/>
           <p:cNvCxnSpPr/>
           <p:nvPr/>
         </p:nvCxnSpPr>
         <p:spPr>
           <a:xfrm>
-            <a:off x="3380400" y="2520000"/>
-            <a:ext cx="180000" cy="0"/>
+            <a:off x="3553199" y="3564000"/>
+            <a:ext cx="212400" cy="0"/>
           </a:xfrm>
           <a:prstGeom prst="line">
             <a:avLst/>
@@ -4862,6 +4710,7 @@
             <a:solidFill>
               <a:srgbClr val="1F285A"/>
             </a:solidFill>
+            <a:tailEnd type="triangle" w="med" len="med"/>
           </a:ln>
         </p:spPr>
         <p:style>
@@ -4879,16 +4728,103 @@
           </a:fontRef>
         </p:style>
       </p:cxnSp>
+      <p:sp>
+        <p:nvSpPr>
+          <p:cNvPr id="13" name="Rounded Rectangle 12"/>
+          <p:cNvSpPr/>
+          <p:nvPr/>
+        </p:nvSpPr>
+        <p:spPr>
+          <a:xfrm>
+            <a:off x="3794399" y="3096000"/>
+            <a:ext cx="1260000" cy="936000"/>
+          </a:xfrm>
+          <a:prstGeom prst="roundRect">
+            <a:avLst>
+              <a:gd name="adj" fmla="val 8000"/>
+            </a:avLst>
+          </a:prstGeom>
+          <a:solidFill>
+            <a:srgbClr val="06C755"/>
+          </a:solidFill>
+          <a:ln w="12700">
+            <a:solidFill>
+              <a:srgbClr val="06C755"/>
+            </a:solidFill>
+          </a:ln>
+          <a:effectLst/>
+        </p:spPr>
+        <p:style>
+          <a:lnRef idx="1">
+            <a:schemeClr val="accent1"/>
+          </a:lnRef>
+          <a:fillRef idx="3">
+            <a:schemeClr val="accent1"/>
+          </a:fillRef>
+          <a:effectRef idx="0">
+            <a:schemeClr val="accent1"/>
+          </a:effectRef>
+          <a:fontRef idx="minor">
+            <a:schemeClr val="lt1"/>
+          </a:fontRef>
+        </p:style>
+        <p:txBody>
+          <a:bodyPr rtlCol="0" anchor="ctr" wrap="square" lIns="72000" tIns="36000" rIns="72000" bIns="36000"/>
+          <a:lstStyle/>
+          <a:p>
+            <a:pPr algn="ctr">
+              <a:lnSpc>
+                <a:spcPct val="110000"/>
+              </a:lnSpc>
+              <a:spcAft>
+                <a:spcPts val="0"/>
+              </a:spcAft>
+            </a:pPr>
+            <a:r>
+              <a:rPr sz="1500" b="1">
+                <a:solidFill>
+                  <a:srgbClr val="FFFFFF"/>
+                </a:solidFill>
+                <a:latin typeface="メイリオ"/>
+                <a:ea typeface="メイリオ"/>
+                <a:cs typeface="メイリオ"/>
+              </a:rPr>
+              <a:t>LINE</a:t>
+            </a:r>
+          </a:p>
+          <a:p>
+            <a:pPr algn="ctr">
+              <a:lnSpc>
+                <a:spcPct val="110000"/>
+              </a:lnSpc>
+              <a:spcAft>
+                <a:spcPts val="0"/>
+              </a:spcAft>
+            </a:pPr>
+            <a:r>
+              <a:rPr sz="1500" b="1">
+                <a:solidFill>
+                  <a:srgbClr val="FFFFFF"/>
+                </a:solidFill>
+                <a:latin typeface="メイリオ"/>
+                <a:ea typeface="メイリオ"/>
+                <a:cs typeface="メイリオ"/>
+              </a:rPr>
+              <a:t>友だち追加</a:t>
+            </a:r>
+          </a:p>
+        </p:txBody>
+      </p:sp>
       <p:cxnSp>
         <p:nvCxnSpPr>
-          <p:cNvPr id="15" name="Connector 14"/>
+          <p:cNvPr id="14" name="Connector 13"/>
           <p:cNvCxnSpPr/>
           <p:nvPr/>
         </p:nvCxnSpPr>
         <p:spPr>
           <a:xfrm>
-            <a:off x="3380400" y="4518000"/>
-            <a:ext cx="180000" cy="0"/>
+            <a:off x="5083200" y="3564000"/>
+            <a:ext cx="194399" cy="0"/>
           </a:xfrm>
           <a:prstGeom prst="line">
             <a:avLst/>
@@ -4897,6 +4833,7 @@
             <a:solidFill>
               <a:srgbClr val="1F285A"/>
             </a:solidFill>
+            <a:tailEnd type="triangle" w="med" len="med"/>
           </a:ln>
         </p:spPr>
         <p:style>
@@ -4914,6 +4851,135 @@
           </a:fontRef>
         </p:style>
       </p:cxnSp>
+      <p:sp>
+        <p:nvSpPr>
+          <p:cNvPr id="15" name="Rounded Rectangle 14"/>
+          <p:cNvSpPr/>
+          <p:nvPr/>
+        </p:nvSpPr>
+        <p:spPr>
+          <a:xfrm>
+            <a:off x="5306399" y="2664000"/>
+            <a:ext cx="2088000" cy="1800000"/>
+          </a:xfrm>
+          <a:prstGeom prst="roundRect">
+            <a:avLst>
+              <a:gd name="adj" fmla="val 8000"/>
+            </a:avLst>
+          </a:prstGeom>
+          <a:solidFill>
+            <a:srgbClr val="FFFFFF"/>
+          </a:solidFill>
+          <a:ln w="19050">
+            <a:solidFill>
+              <a:srgbClr val="1F285A"/>
+            </a:solidFill>
+          </a:ln>
+          <a:effectLst/>
+        </p:spPr>
+        <p:style>
+          <a:lnRef idx="1">
+            <a:schemeClr val="accent1"/>
+          </a:lnRef>
+          <a:fillRef idx="3">
+            <a:schemeClr val="accent1"/>
+          </a:fillRef>
+          <a:effectRef idx="0">
+            <a:schemeClr val="accent1"/>
+          </a:effectRef>
+          <a:fontRef idx="minor">
+            <a:schemeClr val="lt1"/>
+          </a:fontRef>
+        </p:style>
+        <p:txBody>
+          <a:bodyPr rtlCol="0" anchor="ctr" wrap="square" lIns="144000" tIns="72000" rIns="108000" bIns="72000"/>
+          <a:lstStyle/>
+          <a:p>
+            <a:pPr algn="l">
+              <a:lnSpc>
+                <a:spcPct val="110000"/>
+              </a:lnSpc>
+              <a:spcAft>
+                <a:spcPts val="1000"/>
+              </a:spcAft>
+            </a:pPr>
+            <a:r>
+              <a:rPr sz="1550" b="1">
+                <a:solidFill>
+                  <a:srgbClr val="1F285A"/>
+                </a:solidFill>
+                <a:latin typeface="メイリオ"/>
+                <a:ea typeface="メイリオ"/>
+                <a:cs typeface="メイリオ"/>
+              </a:rPr>
+              <a:t>Lステップで追客</a:t>
+            </a:r>
+          </a:p>
+          <a:p>
+            <a:pPr algn="l">
+              <a:lnSpc>
+                <a:spcPct val="110000"/>
+              </a:lnSpc>
+              <a:spcAft>
+                <a:spcPts val="400"/>
+              </a:spcAft>
+            </a:pPr>
+            <a:r>
+              <a:rPr sz="1350" b="0">
+                <a:solidFill>
+                  <a:srgbClr val="333333"/>
+                </a:solidFill>
+                <a:latin typeface="メイリオ"/>
+                <a:ea typeface="メイリオ"/>
+                <a:cs typeface="メイリオ"/>
+              </a:rPr>
+              <a:t>・タグで状況を管理</a:t>
+            </a:r>
+          </a:p>
+          <a:p>
+            <a:pPr algn="l">
+              <a:lnSpc>
+                <a:spcPct val="110000"/>
+              </a:lnSpc>
+              <a:spcAft>
+                <a:spcPts val="400"/>
+              </a:spcAft>
+            </a:pPr>
+            <a:r>
+              <a:rPr sz="1350" b="0">
+                <a:solidFill>
+                  <a:srgbClr val="333333"/>
+                </a:solidFill>
+                <a:latin typeface="メイリオ"/>
+                <a:ea typeface="メイリオ"/>
+                <a:cs typeface="メイリオ"/>
+              </a:rPr>
+              <a:t>・状況に合わせて配信</a:t>
+            </a:r>
+          </a:p>
+          <a:p>
+            <a:pPr algn="l">
+              <a:lnSpc>
+                <a:spcPct val="110000"/>
+              </a:lnSpc>
+              <a:spcAft>
+                <a:spcPts val="0"/>
+              </a:spcAft>
+            </a:pPr>
+            <a:r>
+              <a:rPr sz="1350" b="0">
+                <a:solidFill>
+                  <a:srgbClr val="333333"/>
+                </a:solidFill>
+                <a:latin typeface="メイリオ"/>
+                <a:ea typeface="メイリオ"/>
+                <a:cs typeface="メイリオ"/>
+              </a:rPr>
+              <a:t>・LINEで面接予約</a:t>
+            </a:r>
+          </a:p>
+        </p:txBody>
+      </p:sp>
       <p:cxnSp>
         <p:nvCxnSpPr>
           <p:cNvPr id="16" name="Connector 15"/>
@@ -4922,8 +4988,8 @@
         </p:nvCxnSpPr>
         <p:spPr>
           <a:xfrm>
-            <a:off x="3560400" y="2520000"/>
-            <a:ext cx="0" cy="1998000"/>
+            <a:off x="7423199" y="3042000"/>
+            <a:ext cx="212401" cy="0"/>
           </a:xfrm>
           <a:prstGeom prst="line">
             <a:avLst/>
@@ -4932,6 +4998,7 @@
             <a:solidFill>
               <a:srgbClr val="1F285A"/>
             </a:solidFill>
+            <a:tailEnd type="triangle" w="med" len="med"/>
           </a:ln>
         </p:spPr>
         <p:style>
@@ -4949,16 +5016,211 @@
           </a:fontRef>
         </p:style>
       </p:cxnSp>
+      <p:sp>
+        <p:nvSpPr>
+          <p:cNvPr id="17" name="Rounded Rectangle 16"/>
+          <p:cNvSpPr/>
+          <p:nvPr/>
+        </p:nvSpPr>
+        <p:spPr>
+          <a:xfrm>
+            <a:off x="7664400" y="2664000"/>
+            <a:ext cx="1609200" cy="756000"/>
+          </a:xfrm>
+          <a:prstGeom prst="roundRect">
+            <a:avLst>
+              <a:gd name="adj" fmla="val 8000"/>
+            </a:avLst>
+          </a:prstGeom>
+          <a:solidFill>
+            <a:srgbClr val="1F285A"/>
+          </a:solidFill>
+          <a:ln w="12700">
+            <a:solidFill>
+              <a:srgbClr val="1F285A"/>
+            </a:solidFill>
+          </a:ln>
+          <a:effectLst/>
+        </p:spPr>
+        <p:style>
+          <a:lnRef idx="1">
+            <a:schemeClr val="accent1"/>
+          </a:lnRef>
+          <a:fillRef idx="3">
+            <a:schemeClr val="accent1"/>
+          </a:fillRef>
+          <a:effectRef idx="0">
+            <a:schemeClr val="accent1"/>
+          </a:effectRef>
+          <a:fontRef idx="minor">
+            <a:schemeClr val="lt1"/>
+          </a:fontRef>
+        </p:style>
+        <p:txBody>
+          <a:bodyPr rtlCol="0" anchor="ctr" wrap="square" lIns="36000" tIns="18000" rIns="36000" bIns="18000"/>
+          <a:lstStyle/>
+          <a:p>
+            <a:pPr algn="ctr">
+              <a:lnSpc>
+                <a:spcPct val="110000"/>
+              </a:lnSpc>
+              <a:spcAft>
+                <a:spcPts val="0"/>
+              </a:spcAft>
+            </a:pPr>
+            <a:r>
+              <a:rPr sz="1200" b="1">
+                <a:solidFill>
+                  <a:srgbClr val="FFFFFF"/>
+                </a:solidFill>
+                <a:latin typeface="メイリオ"/>
+                <a:ea typeface="メイリオ"/>
+                <a:cs typeface="メイリオ"/>
+              </a:rPr>
+              <a:t>CV①</a:t>
+            </a:r>
+          </a:p>
+          <a:p>
+            <a:pPr algn="ctr">
+              <a:lnSpc>
+                <a:spcPct val="110000"/>
+              </a:lnSpc>
+              <a:spcAft>
+                <a:spcPts val="0"/>
+              </a:spcAft>
+            </a:pPr>
+            <a:r>
+              <a:rPr sz="1800" b="1">
+                <a:solidFill>
+                  <a:srgbClr val="FFFFFF"/>
+                </a:solidFill>
+                <a:latin typeface="メイリオ"/>
+                <a:ea typeface="メイリオ"/>
+                <a:cs typeface="メイリオ"/>
+              </a:rPr>
+              <a:t>応募数</a:t>
+            </a:r>
+          </a:p>
+          <a:p>
+            <a:pPr algn="ctr">
+              <a:lnSpc>
+                <a:spcPct val="110000"/>
+              </a:lnSpc>
+              <a:spcAft>
+                <a:spcPts val="0"/>
+              </a:spcAft>
+            </a:pPr>
+            <a:r>
+              <a:rPr sz="1100" b="0">
+                <a:solidFill>
+                  <a:srgbClr val="FFFFFF"/>
+                </a:solidFill>
+                <a:latin typeface="メイリオ"/>
+                <a:ea typeface="メイリオ"/>
+                <a:cs typeface="メイリオ"/>
+              </a:rPr>
+              <a:t>（再応募を含む）</a:t>
+            </a:r>
+          </a:p>
+        </p:txBody>
+      </p:sp>
+      <p:sp>
+        <p:nvSpPr>
+          <p:cNvPr id="18" name="Rounded Rectangle 17"/>
+          <p:cNvSpPr/>
+          <p:nvPr/>
+        </p:nvSpPr>
+        <p:spPr>
+          <a:xfrm>
+            <a:off x="7664400" y="3708000"/>
+            <a:ext cx="1609200" cy="756000"/>
+          </a:xfrm>
+          <a:prstGeom prst="roundRect">
+            <a:avLst>
+              <a:gd name="adj" fmla="val 8000"/>
+            </a:avLst>
+          </a:prstGeom>
+          <a:solidFill>
+            <a:srgbClr val="1F285A"/>
+          </a:solidFill>
+          <a:ln w="12700">
+            <a:solidFill>
+              <a:srgbClr val="1F285A"/>
+            </a:solidFill>
+          </a:ln>
+          <a:effectLst/>
+        </p:spPr>
+        <p:style>
+          <a:lnRef idx="1">
+            <a:schemeClr val="accent1"/>
+          </a:lnRef>
+          <a:fillRef idx="3">
+            <a:schemeClr val="accent1"/>
+          </a:fillRef>
+          <a:effectRef idx="0">
+            <a:schemeClr val="accent1"/>
+          </a:effectRef>
+          <a:fontRef idx="minor">
+            <a:schemeClr val="lt1"/>
+          </a:fontRef>
+        </p:style>
+        <p:txBody>
+          <a:bodyPr rtlCol="0" anchor="ctr" wrap="square" lIns="36000" tIns="18000" rIns="36000" bIns="18000"/>
+          <a:lstStyle/>
+          <a:p>
+            <a:pPr algn="ctr">
+              <a:lnSpc>
+                <a:spcPct val="110000"/>
+              </a:lnSpc>
+              <a:spcAft>
+                <a:spcPts val="0"/>
+              </a:spcAft>
+            </a:pPr>
+            <a:r>
+              <a:rPr sz="1200" b="1">
+                <a:solidFill>
+                  <a:srgbClr val="FFFFFF"/>
+                </a:solidFill>
+                <a:latin typeface="メイリオ"/>
+                <a:ea typeface="メイリオ"/>
+                <a:cs typeface="メイリオ"/>
+              </a:rPr>
+              <a:t>CV②</a:t>
+            </a:r>
+          </a:p>
+          <a:p>
+            <a:pPr algn="ctr">
+              <a:lnSpc>
+                <a:spcPct val="110000"/>
+              </a:lnSpc>
+              <a:spcAft>
+                <a:spcPts val="0"/>
+              </a:spcAft>
+            </a:pPr>
+            <a:r>
+              <a:rPr sz="1800" b="1">
+                <a:solidFill>
+                  <a:srgbClr val="FFFFFF"/>
+                </a:solidFill>
+                <a:latin typeface="メイリオ"/>
+                <a:ea typeface="メイリオ"/>
+                <a:cs typeface="メイリオ"/>
+              </a:rPr>
+              <a:t>面接予約数</a:t>
+            </a:r>
+          </a:p>
+        </p:txBody>
+      </p:sp>
       <p:cxnSp>
         <p:nvCxnSpPr>
-          <p:cNvPr id="17" name="Connector 16"/>
+          <p:cNvPr id="19" name="Connector 18"/>
           <p:cNvCxnSpPr/>
           <p:nvPr/>
         </p:nvCxnSpPr>
         <p:spPr>
           <a:xfrm>
-            <a:off x="3560400" y="3519000"/>
-            <a:ext cx="223200" cy="0"/>
+            <a:off x="8469000" y="3448800"/>
+            <a:ext cx="0" cy="230400"/>
           </a:xfrm>
           <a:prstGeom prst="line">
             <a:avLst/>
@@ -4987,526 +5249,7 @@
       </p:cxnSp>
       <p:sp>
         <p:nvSpPr>
-          <p:cNvPr id="18" name="Rounded Rectangle 17"/>
-          <p:cNvSpPr/>
-          <p:nvPr/>
-        </p:nvSpPr>
-        <p:spPr>
-          <a:xfrm>
-            <a:off x="3812400" y="3051000"/>
-            <a:ext cx="1260000" cy="936000"/>
-          </a:xfrm>
-          <a:prstGeom prst="roundRect">
-            <a:avLst>
-              <a:gd name="adj" fmla="val 8000"/>
-            </a:avLst>
-          </a:prstGeom>
-          <a:solidFill>
-            <a:srgbClr val="06C755"/>
-          </a:solidFill>
-          <a:ln w="12700">
-            <a:solidFill>
-              <a:srgbClr val="06C755"/>
-            </a:solidFill>
-          </a:ln>
-          <a:effectLst/>
-        </p:spPr>
-        <p:style>
-          <a:lnRef idx="1">
-            <a:schemeClr val="accent1"/>
-          </a:lnRef>
-          <a:fillRef idx="3">
-            <a:schemeClr val="accent1"/>
-          </a:fillRef>
-          <a:effectRef idx="0">
-            <a:schemeClr val="accent1"/>
-          </a:effectRef>
-          <a:fontRef idx="minor">
-            <a:schemeClr val="lt1"/>
-          </a:fontRef>
-        </p:style>
-        <p:txBody>
-          <a:bodyPr rtlCol="0" anchor="ctr" wrap="square" lIns="72000" tIns="36000" rIns="72000" bIns="36000"/>
-          <a:lstStyle/>
-          <a:p>
-            <a:pPr algn="ctr">
-              <a:lnSpc>
-                <a:spcPct val="110000"/>
-              </a:lnSpc>
-              <a:spcAft>
-                <a:spcPts val="0"/>
-              </a:spcAft>
-            </a:pPr>
-            <a:r>
-              <a:rPr sz="1500" b="1">
-                <a:solidFill>
-                  <a:srgbClr val="FFFFFF"/>
-                </a:solidFill>
-                <a:latin typeface="メイリオ"/>
-                <a:ea typeface="メイリオ"/>
-                <a:cs typeface="メイリオ"/>
-              </a:rPr>
-              <a:t>LINE</a:t>
-            </a:r>
-          </a:p>
-          <a:p>
-            <a:pPr algn="ctr">
-              <a:lnSpc>
-                <a:spcPct val="110000"/>
-              </a:lnSpc>
-              <a:spcAft>
-                <a:spcPts val="0"/>
-              </a:spcAft>
-            </a:pPr>
-            <a:r>
-              <a:rPr sz="1500" b="1">
-                <a:solidFill>
-                  <a:srgbClr val="FFFFFF"/>
-                </a:solidFill>
-                <a:latin typeface="メイリオ"/>
-                <a:ea typeface="メイリオ"/>
-                <a:cs typeface="メイリオ"/>
-              </a:rPr>
-              <a:t>友だち追加</a:t>
-            </a:r>
-          </a:p>
-        </p:txBody>
-      </p:sp>
-      <p:cxnSp>
-        <p:nvCxnSpPr>
-          <p:cNvPr id="19" name="Connector 18"/>
-          <p:cNvCxnSpPr/>
-          <p:nvPr/>
-        </p:nvCxnSpPr>
-        <p:spPr>
-          <a:xfrm>
-            <a:off x="5101200" y="3519000"/>
-            <a:ext cx="194400" cy="0"/>
-          </a:xfrm>
-          <a:prstGeom prst="line">
-            <a:avLst/>
-          </a:prstGeom>
-          <a:ln w="25400">
-            <a:solidFill>
-              <a:srgbClr val="1F285A"/>
-            </a:solidFill>
-            <a:tailEnd type="triangle" w="med" len="med"/>
-          </a:ln>
-        </p:spPr>
-        <p:style>
-          <a:lnRef idx="2">
-            <a:schemeClr val="accent1"/>
-          </a:lnRef>
-          <a:fillRef idx="0">
-            <a:schemeClr val="accent1"/>
-          </a:fillRef>
-          <a:effectRef idx="0">
-            <a:schemeClr val="accent1"/>
-          </a:effectRef>
-          <a:fontRef idx="minor">
-            <a:schemeClr val="tx1"/>
-          </a:fontRef>
-        </p:style>
-      </p:cxnSp>
-      <p:sp>
-        <p:nvSpPr>
-          <p:cNvPr id="20" name="Rounded Rectangle 19"/>
-          <p:cNvSpPr/>
-          <p:nvPr/>
-        </p:nvSpPr>
-        <p:spPr>
-          <a:xfrm>
-            <a:off x="5324400" y="2619000"/>
-            <a:ext cx="2088000" cy="1800000"/>
-          </a:xfrm>
-          <a:prstGeom prst="roundRect">
-            <a:avLst>
-              <a:gd name="adj" fmla="val 8000"/>
-            </a:avLst>
-          </a:prstGeom>
-          <a:solidFill>
-            <a:srgbClr val="FFFFFF"/>
-          </a:solidFill>
-          <a:ln w="19050">
-            <a:solidFill>
-              <a:srgbClr val="1F285A"/>
-            </a:solidFill>
-          </a:ln>
-          <a:effectLst/>
-        </p:spPr>
-        <p:style>
-          <a:lnRef idx="1">
-            <a:schemeClr val="accent1"/>
-          </a:lnRef>
-          <a:fillRef idx="3">
-            <a:schemeClr val="accent1"/>
-          </a:fillRef>
-          <a:effectRef idx="0">
-            <a:schemeClr val="accent1"/>
-          </a:effectRef>
-          <a:fontRef idx="minor">
-            <a:schemeClr val="lt1"/>
-          </a:fontRef>
-        </p:style>
-        <p:txBody>
-          <a:bodyPr rtlCol="0" anchor="ctr" wrap="square" lIns="144000" tIns="72000" rIns="108000" bIns="72000"/>
-          <a:lstStyle/>
-          <a:p>
-            <a:pPr algn="l">
-              <a:lnSpc>
-                <a:spcPct val="110000"/>
-              </a:lnSpc>
-              <a:spcAft>
-                <a:spcPts val="1000"/>
-              </a:spcAft>
-            </a:pPr>
-            <a:r>
-              <a:rPr sz="1550" b="1">
-                <a:solidFill>
-                  <a:srgbClr val="1F285A"/>
-                </a:solidFill>
-                <a:latin typeface="メイリオ"/>
-                <a:ea typeface="メイリオ"/>
-                <a:cs typeface="メイリオ"/>
-              </a:rPr>
-              <a:t>Lステップで追客</a:t>
-            </a:r>
-          </a:p>
-          <a:p>
-            <a:pPr algn="l">
-              <a:lnSpc>
-                <a:spcPct val="110000"/>
-              </a:lnSpc>
-              <a:spcAft>
-                <a:spcPts val="400"/>
-              </a:spcAft>
-            </a:pPr>
-            <a:r>
-              <a:rPr sz="1350" b="0">
-                <a:solidFill>
-                  <a:srgbClr val="333333"/>
-                </a:solidFill>
-                <a:latin typeface="メイリオ"/>
-                <a:ea typeface="メイリオ"/>
-                <a:cs typeface="メイリオ"/>
-              </a:rPr>
-              <a:t>・タグで状況を管理</a:t>
-            </a:r>
-          </a:p>
-          <a:p>
-            <a:pPr algn="l">
-              <a:lnSpc>
-                <a:spcPct val="110000"/>
-              </a:lnSpc>
-              <a:spcAft>
-                <a:spcPts val="400"/>
-              </a:spcAft>
-            </a:pPr>
-            <a:r>
-              <a:rPr sz="1350" b="0">
-                <a:solidFill>
-                  <a:srgbClr val="333333"/>
-                </a:solidFill>
-                <a:latin typeface="メイリオ"/>
-                <a:ea typeface="メイリオ"/>
-                <a:cs typeface="メイリオ"/>
-              </a:rPr>
-              <a:t>・状況に合わせて配信</a:t>
-            </a:r>
-          </a:p>
-          <a:p>
-            <a:pPr algn="l">
-              <a:lnSpc>
-                <a:spcPct val="110000"/>
-              </a:lnSpc>
-              <a:spcAft>
-                <a:spcPts val="0"/>
-              </a:spcAft>
-            </a:pPr>
-            <a:r>
-              <a:rPr sz="1350" b="0">
-                <a:solidFill>
-                  <a:srgbClr val="333333"/>
-                </a:solidFill>
-                <a:latin typeface="メイリオ"/>
-                <a:ea typeface="メイリオ"/>
-                <a:cs typeface="メイリオ"/>
-              </a:rPr>
-              <a:t>・LINEで面接予約</a:t>
-            </a:r>
-          </a:p>
-        </p:txBody>
-      </p:sp>
-      <p:cxnSp>
-        <p:nvCxnSpPr>
-          <p:cNvPr id="21" name="Connector 20"/>
-          <p:cNvCxnSpPr/>
-          <p:nvPr/>
-        </p:nvCxnSpPr>
-        <p:spPr>
-          <a:xfrm>
-            <a:off x="7441199" y="2997000"/>
-            <a:ext cx="212401" cy="0"/>
-          </a:xfrm>
-          <a:prstGeom prst="line">
-            <a:avLst/>
-          </a:prstGeom>
-          <a:ln w="25400">
-            <a:solidFill>
-              <a:srgbClr val="1F285A"/>
-            </a:solidFill>
-            <a:tailEnd type="triangle" w="med" len="med"/>
-          </a:ln>
-        </p:spPr>
-        <p:style>
-          <a:lnRef idx="2">
-            <a:schemeClr val="accent1"/>
-          </a:lnRef>
-          <a:fillRef idx="0">
-            <a:schemeClr val="accent1"/>
-          </a:fillRef>
-          <a:effectRef idx="0">
-            <a:schemeClr val="accent1"/>
-          </a:effectRef>
-          <a:fontRef idx="minor">
-            <a:schemeClr val="tx1"/>
-          </a:fontRef>
-        </p:style>
-      </p:cxnSp>
-      <p:sp>
-        <p:nvSpPr>
-          <p:cNvPr id="22" name="Rounded Rectangle 21"/>
-          <p:cNvSpPr/>
-          <p:nvPr/>
-        </p:nvSpPr>
-        <p:spPr>
-          <a:xfrm>
-            <a:off x="7682400" y="2619000"/>
-            <a:ext cx="1591200" cy="756000"/>
-          </a:xfrm>
-          <a:prstGeom prst="roundRect">
-            <a:avLst>
-              <a:gd name="adj" fmla="val 8000"/>
-            </a:avLst>
-          </a:prstGeom>
-          <a:solidFill>
-            <a:srgbClr val="1F285A"/>
-          </a:solidFill>
-          <a:ln w="12700">
-            <a:solidFill>
-              <a:srgbClr val="1F285A"/>
-            </a:solidFill>
-          </a:ln>
-          <a:effectLst/>
-        </p:spPr>
-        <p:style>
-          <a:lnRef idx="1">
-            <a:schemeClr val="accent1"/>
-          </a:lnRef>
-          <a:fillRef idx="3">
-            <a:schemeClr val="accent1"/>
-          </a:fillRef>
-          <a:effectRef idx="0">
-            <a:schemeClr val="accent1"/>
-          </a:effectRef>
-          <a:fontRef idx="minor">
-            <a:schemeClr val="lt1"/>
-          </a:fontRef>
-        </p:style>
-        <p:txBody>
-          <a:bodyPr rtlCol="0" anchor="ctr" wrap="square" lIns="36000" tIns="18000" rIns="36000" bIns="18000"/>
-          <a:lstStyle/>
-          <a:p>
-            <a:pPr algn="ctr">
-              <a:lnSpc>
-                <a:spcPct val="110000"/>
-              </a:lnSpc>
-              <a:spcAft>
-                <a:spcPts val="0"/>
-              </a:spcAft>
-            </a:pPr>
-            <a:r>
-              <a:rPr sz="1200" b="1">
-                <a:solidFill>
-                  <a:srgbClr val="FFFFFF"/>
-                </a:solidFill>
-                <a:latin typeface="メイリオ"/>
-                <a:ea typeface="メイリオ"/>
-                <a:cs typeface="メイリオ"/>
-              </a:rPr>
-              <a:t>CV①</a:t>
-            </a:r>
-          </a:p>
-          <a:p>
-            <a:pPr algn="ctr">
-              <a:lnSpc>
-                <a:spcPct val="110000"/>
-              </a:lnSpc>
-              <a:spcAft>
-                <a:spcPts val="0"/>
-              </a:spcAft>
-            </a:pPr>
-            <a:r>
-              <a:rPr sz="1800" b="1">
-                <a:solidFill>
-                  <a:srgbClr val="FFFFFF"/>
-                </a:solidFill>
-                <a:latin typeface="メイリオ"/>
-                <a:ea typeface="メイリオ"/>
-                <a:cs typeface="メイリオ"/>
-              </a:rPr>
-              <a:t>応募数</a:t>
-            </a:r>
-          </a:p>
-          <a:p>
-            <a:pPr algn="ctr">
-              <a:lnSpc>
-                <a:spcPct val="110000"/>
-              </a:lnSpc>
-              <a:spcAft>
-                <a:spcPts val="0"/>
-              </a:spcAft>
-            </a:pPr>
-            <a:r>
-              <a:rPr sz="1100" b="0">
-                <a:solidFill>
-                  <a:srgbClr val="FFFFFF"/>
-                </a:solidFill>
-                <a:latin typeface="メイリオ"/>
-                <a:ea typeface="メイリオ"/>
-                <a:cs typeface="メイリオ"/>
-              </a:rPr>
-              <a:t>（再応募を含む）</a:t>
-            </a:r>
-          </a:p>
-        </p:txBody>
-      </p:sp>
-      <p:sp>
-        <p:nvSpPr>
-          <p:cNvPr id="23" name="Rounded Rectangle 22"/>
-          <p:cNvSpPr/>
-          <p:nvPr/>
-        </p:nvSpPr>
-        <p:spPr>
-          <a:xfrm>
-            <a:off x="7682400" y="3663000"/>
-            <a:ext cx="1591200" cy="756000"/>
-          </a:xfrm>
-          <a:prstGeom prst="roundRect">
-            <a:avLst>
-              <a:gd name="adj" fmla="val 8000"/>
-            </a:avLst>
-          </a:prstGeom>
-          <a:solidFill>
-            <a:srgbClr val="1F285A"/>
-          </a:solidFill>
-          <a:ln w="12700">
-            <a:solidFill>
-              <a:srgbClr val="1F285A"/>
-            </a:solidFill>
-          </a:ln>
-          <a:effectLst/>
-        </p:spPr>
-        <p:style>
-          <a:lnRef idx="1">
-            <a:schemeClr val="accent1"/>
-          </a:lnRef>
-          <a:fillRef idx="3">
-            <a:schemeClr val="accent1"/>
-          </a:fillRef>
-          <a:effectRef idx="0">
-            <a:schemeClr val="accent1"/>
-          </a:effectRef>
-          <a:fontRef idx="minor">
-            <a:schemeClr val="lt1"/>
-          </a:fontRef>
-        </p:style>
-        <p:txBody>
-          <a:bodyPr rtlCol="0" anchor="ctr" wrap="square" lIns="36000" tIns="18000" rIns="36000" bIns="18000"/>
-          <a:lstStyle/>
-          <a:p>
-            <a:pPr algn="ctr">
-              <a:lnSpc>
-                <a:spcPct val="110000"/>
-              </a:lnSpc>
-              <a:spcAft>
-                <a:spcPts val="0"/>
-              </a:spcAft>
-            </a:pPr>
-            <a:r>
-              <a:rPr sz="1200" b="1">
-                <a:solidFill>
-                  <a:srgbClr val="FFFFFF"/>
-                </a:solidFill>
-                <a:latin typeface="メイリオ"/>
-                <a:ea typeface="メイリオ"/>
-                <a:cs typeface="メイリオ"/>
-              </a:rPr>
-              <a:t>CV②</a:t>
-            </a:r>
-          </a:p>
-          <a:p>
-            <a:pPr algn="ctr">
-              <a:lnSpc>
-                <a:spcPct val="110000"/>
-              </a:lnSpc>
-              <a:spcAft>
-                <a:spcPts val="0"/>
-              </a:spcAft>
-            </a:pPr>
-            <a:r>
-              <a:rPr sz="1800" b="1">
-                <a:solidFill>
-                  <a:srgbClr val="FFFFFF"/>
-                </a:solidFill>
-                <a:latin typeface="メイリオ"/>
-                <a:ea typeface="メイリオ"/>
-                <a:cs typeface="メイリオ"/>
-              </a:rPr>
-              <a:t>面接予約数</a:t>
-            </a:r>
-          </a:p>
-        </p:txBody>
-      </p:sp>
-      <p:cxnSp>
-        <p:nvCxnSpPr>
-          <p:cNvPr id="24" name="Connector 23"/>
-          <p:cNvCxnSpPr/>
-          <p:nvPr/>
-        </p:nvCxnSpPr>
-        <p:spPr>
-          <a:xfrm>
-            <a:off x="8478000" y="3403800"/>
-            <a:ext cx="0" cy="230400"/>
-          </a:xfrm>
-          <a:prstGeom prst="line">
-            <a:avLst/>
-          </a:prstGeom>
-          <a:ln w="25400">
-            <a:solidFill>
-              <a:srgbClr val="1F285A"/>
-            </a:solidFill>
-            <a:tailEnd type="triangle" w="med" len="med"/>
-          </a:ln>
-        </p:spPr>
-        <p:style>
-          <a:lnRef idx="2">
-            <a:schemeClr val="accent1"/>
-          </a:lnRef>
-          <a:fillRef idx="0">
-            <a:schemeClr val="accent1"/>
-          </a:fillRef>
-          <a:effectRef idx="0">
-            <a:schemeClr val="accent1"/>
-          </a:effectRef>
-          <a:fontRef idx="minor">
-            <a:schemeClr val="tx1"/>
-          </a:fontRef>
-        </p:style>
-      </p:cxnSp>
-      <p:sp>
-        <p:nvSpPr>
-          <p:cNvPr id="25" name="TextBox 24"/>
+          <p:cNvPr id="20" name="TextBox 19"/>
           <p:cNvSpPr txBox="1"/>
           <p:nvPr/>
         </p:nvSpPr>
@@ -5564,7 +5307,7 @@
                 <a:ea typeface="メイリオ"/>
                 <a:cs typeface="メイリオ"/>
               </a:rPr>
-              <a:t>※サンクスLINE誘導は、採用管理サービスとの連携可否を確認のうえ実施</a:t>
+              <a:t>※今後の応募者も、応募完了後にLINEへご案内可能（採用管理サービスと連携できる場合）</a:t>
             </a:r>
           </a:p>
         </p:txBody>
@@ -10506,7 +10249,7 @@
                 <a:ea typeface="メイリオ"/>
                 <a:cs typeface="メイリオ"/>
               </a:rPr>
-              <a:t>過去の応募者：</a:t>
+              <a:t>過去の応募者へ</a:t>
             </a:r>
           </a:p>
           <a:p>
@@ -10548,7 +10291,7 @@
                 <a:ea typeface="メイリオ"/>
                 <a:cs typeface="メイリオ"/>
               </a:rPr>
-              <a:t>ご案内</a:t>
+              <a:t>LINEの友だち</a:t>
             </a:r>
           </a:p>
           <a:p>
@@ -10569,28 +10312,7 @@
                 <a:ea typeface="メイリオ"/>
                 <a:cs typeface="メイリオ"/>
               </a:rPr>
-              <a:t>新規応募者：</a:t>
-            </a:r>
-          </a:p>
-          <a:p>
-            <a:pPr algn="l">
-              <a:lnSpc>
-                <a:spcPct val="105000"/>
-              </a:lnSpc>
-              <a:spcAft>
-                <a:spcPts val="200"/>
-              </a:spcAft>
-            </a:pPr>
-            <a:r>
-              <a:rPr sz="1200" b="0">
-                <a:solidFill>
-                  <a:srgbClr val="333333"/>
-                </a:solidFill>
-                <a:latin typeface="メイリオ"/>
-                <a:ea typeface="メイリオ"/>
-                <a:cs typeface="メイリオ"/>
-              </a:rPr>
-              <a:t>サンクスLINE誘導</a:t>
+              <a:t>追加をご案内</a:t>
             </a:r>
           </a:p>
         </p:txBody>

--- a/20261013_セキュリティー京葉御中_LINE採用追客のご提案.pptx
+++ b/20261013_セキュリティー京葉御中_LINE採用追客のご提案.pptx
@@ -2742,7 +2742,7 @@
                 <a:ea typeface="メイリオ"/>
                 <a:cs typeface="メイリオ"/>
               </a:rPr>
-              <a:t>警備を含む保安職業の求人倍率は6.41倍。集めた応募者を、選考の途中で手放さない</a:t>
+              <a:t>警備を含む保安職業の求人倍率は6.41倍。</a:t>
             </a:r>
             <a:endParaRPr sz="1050" dirty="0">
               <a:solidFill>
@@ -2753,6 +2753,32 @@
               <a:cs typeface="メイリオ"/>
             </a:endParaRPr>
           </a:p>
+          <a:p>
+            <a:pPr algn="l">
+              <a:lnSpc>
+                <a:spcPct val="130000"/>
+              </a:lnSpc>
+            </a:pPr>
+            <a:r>
+              <a:rPr sz="1600" dirty="0" err="1">
+                <a:solidFill>
+                  <a:srgbClr val="333333"/>
+                </a:solidFill>
+                <a:latin typeface="メイリオ"/>
+                <a:ea typeface="メイリオ"/>
+                <a:cs typeface="メイリオ"/>
+              </a:rPr>
+              <a:t>一度応募した方との接点を維持・再構築する導線を設計</a:t>
+            </a:r>
+            <a:endParaRPr sz="1050" dirty="0">
+              <a:solidFill>
+                <a:srgbClr val="333333"/>
+              </a:solidFill>
+              <a:latin typeface="メイリオ"/>
+              <a:ea typeface="メイリオ"/>
+              <a:cs typeface="メイリオ"/>
+            </a:endParaRPr>
+          </a:p>
         </p:txBody>
       </p:sp>
       <p:cxnSp>
@@ -3796,7 +3822,7 @@
         <p:spPr>
           <a:xfrm>
             <a:off x="770400" y="4662000"/>
-            <a:ext cx="4143600" cy="1044000"/>
+            <a:ext cx="4143600" cy="1224000"/>
           </a:xfrm>
           <a:prstGeom prst="roundRect">
             <a:avLst>
@@ -3844,7 +3870,7 @@
         <p:spPr>
           <a:xfrm>
             <a:off x="770400" y="4662000"/>
-            <a:ext cx="64800" cy="1044000"/>
+            <a:ext cx="64800" cy="1224000"/>
           </a:xfrm>
           <a:prstGeom prst="rect">
             <a:avLst/>
@@ -3918,7 +3944,7 @@
                 <a:ea typeface="メイリオ"/>
                 <a:cs typeface="メイリオ"/>
               </a:rPr>
-              <a:t>外れた方の共通点</a:t>
+              <a:t>再アプローチ対象の特徴</a:t>
             </a:r>
           </a:p>
         </p:txBody>
@@ -3932,7 +3958,7 @@
         <p:spPr>
           <a:xfrm>
             <a:off x="950400" y="5004000"/>
-            <a:ext cx="3855599" cy="648000"/>
+            <a:ext cx="3855599" cy="827999"/>
           </a:xfrm>
           <a:prstGeom prst="rect">
             <a:avLst/>
@@ -3962,7 +3988,7 @@
                 <a:ea typeface="メイリオ"/>
                 <a:cs typeface="メイリオ"/>
               </a:rPr>
-              <a:t>一度は応募している＝</a:t>
+              <a:t>一度は警備の仕事に関心を示し、</a:t>
             </a:r>
           </a:p>
           <a:p>
@@ -3983,7 +4009,7 @@
                 <a:ea typeface="メイリオ"/>
                 <a:cs typeface="メイリオ"/>
               </a:rPr>
-              <a:t>警備の仕事に関心がある方</a:t>
+              <a:t>応募した方</a:t>
             </a:r>
           </a:p>
         </p:txBody>
@@ -3997,7 +4023,7 @@
         <p:spPr>
           <a:xfrm>
             <a:off x="5130000" y="4662000"/>
-            <a:ext cx="4143600" cy="1044000"/>
+            <a:ext cx="4143600" cy="1224000"/>
           </a:xfrm>
           <a:prstGeom prst="roundRect">
             <a:avLst>
@@ -4045,7 +4071,7 @@
         <p:spPr>
           <a:xfrm>
             <a:off x="5130000" y="4662000"/>
-            <a:ext cx="64800" cy="1044000"/>
+            <a:ext cx="64800" cy="1224000"/>
           </a:xfrm>
           <a:prstGeom prst="rect">
             <a:avLst/>
@@ -4119,7 +4145,7 @@
                 <a:ea typeface="メイリオ"/>
                 <a:cs typeface="メイリオ"/>
               </a:rPr>
-              <a:t>いまの対応</a:t>
+              <a:t>再アプローチ上の課題（仮説）</a:t>
             </a:r>
           </a:p>
         </p:txBody>
@@ -4133,7 +4159,7 @@
         <p:spPr>
           <a:xfrm>
             <a:off x="5310000" y="5004000"/>
-            <a:ext cx="3855599" cy="648000"/>
+            <a:ext cx="3855599" cy="827999"/>
           </a:xfrm>
           <a:prstGeom prst="rect">
             <a:avLst/>
@@ -4163,7 +4189,7 @@
                 <a:ea typeface="メイリオ"/>
                 <a:cs typeface="メイリオ"/>
               </a:rPr>
-              <a:t>電話・メールでの再連絡は</a:t>
+              <a:t>電話・メールだけでは継続的な連絡に</a:t>
             </a:r>
           </a:p>
           <a:p>
@@ -4184,7 +4210,28 @@
                 <a:ea typeface="メイリオ"/>
                 <a:cs typeface="メイリオ"/>
               </a:rPr>
-              <a:t>手間がかかり、続けにくい</a:t>
+              <a:t>工数がかかり、相手からの反応に</a:t>
+            </a:r>
+          </a:p>
+          <a:p>
+            <a:pPr algn="l">
+              <a:lnSpc>
+                <a:spcPct val="105000"/>
+              </a:lnSpc>
+              <a:spcAft>
+                <a:spcPts val="200"/>
+              </a:spcAft>
+            </a:pPr>
+            <a:r>
+              <a:rPr sz="1500" b="1">
+                <a:solidFill>
+                  <a:srgbClr val="333333"/>
+                </a:solidFill>
+                <a:latin typeface="メイリオ"/>
+                <a:ea typeface="メイリオ"/>
+                <a:cs typeface="メイリオ"/>
+              </a:rPr>
+              <a:t>つながりにくい可能性がある</a:t>
             </a:r>
           </a:p>
         </p:txBody>
@@ -5369,7 +5416,7 @@
                 <a:ea typeface="メイリオ"/>
                 <a:cs typeface="メイリオ"/>
               </a:rPr>
-              <a:t>ステップ配信｜働き方を少しずつ届ける</a:t>
+              <a:t>ステップ配信｜14日間で応募・面接予約を目指す</a:t>
             </a:r>
           </a:p>
         </p:txBody>
@@ -5410,7 +5457,7 @@
                 <a:ea typeface="メイリオ"/>
                 <a:cs typeface="メイリオ"/>
               </a:rPr>
-              <a:t>給与・働き方・現場の様子を順番に届け、もう一度応募したくなる状態をつくる</a:t>
+              <a:t>友だち追加から14日間、働き方を順番に届け、応募・面接予約につなげる</a:t>
             </a:r>
             <a:endParaRPr sz="1050" dirty="0">
               <a:solidFill>
@@ -5541,7 +5588,7 @@
                 <a:ea typeface="メイリオ"/>
                 <a:cs typeface="メイリオ"/>
               </a:rPr>
-              <a:t>配信の流れ（例）</a:t>
+              <a:t>14日間のステップ配信（例）</a:t>
             </a:r>
           </a:p>
         </p:txBody>
@@ -5554,8 +5601,8 @@
         </p:nvCxnSpPr>
         <p:spPr>
           <a:xfrm>
-            <a:off x="1434000" y="2034000"/>
-            <a:ext cx="7176000" cy="0"/>
+            <a:off x="1570320" y="2034000"/>
+            <a:ext cx="6903360" cy="0"/>
           </a:xfrm>
           <a:prstGeom prst="line">
             <a:avLst/>
@@ -5589,8 +5636,8 @@
         </p:nvSpPr>
         <p:spPr>
           <a:xfrm>
-            <a:off x="1333200" y="1933200"/>
-            <a:ext cx="201600" cy="201600"/>
+            <a:off x="1462320" y="1926000"/>
+            <a:ext cx="216000" cy="216000"/>
           </a:xfrm>
           <a:prstGeom prst="ellipse">
             <a:avLst/>
@@ -5634,7 +5681,7 @@
         <p:spPr>
           <a:xfrm>
             <a:off x="770400" y="2232000"/>
-            <a:ext cx="1327200" cy="306000"/>
+            <a:ext cx="1599840" cy="306000"/>
           </a:xfrm>
           <a:prstGeom prst="roundRect">
             <a:avLst>
@@ -5678,7 +5725,7 @@
               </a:spcAft>
             </a:pPr>
             <a:r>
-              <a:rPr sz="1300" b="1">
+              <a:rPr sz="1400" b="1">
                 <a:solidFill>
                   <a:srgbClr val="FFFFFF"/>
                 </a:solidFill>
@@ -5700,7 +5747,7 @@
         <p:spPr>
           <a:xfrm>
             <a:off x="770400" y="2610000"/>
-            <a:ext cx="1327200" cy="1800000"/>
+            <a:ext cx="1599840" cy="2070000"/>
           </a:xfrm>
           <a:prstGeom prst="roundRect">
             <a:avLst>
@@ -5747,8 +5794,8 @@
         </p:nvSpPr>
         <p:spPr>
           <a:xfrm>
-            <a:off x="824400" y="2664000"/>
-            <a:ext cx="1219200" cy="468000"/>
+            <a:off x="842400" y="2664000"/>
+            <a:ext cx="1455840" cy="468000"/>
           </a:xfrm>
           <a:prstGeom prst="rect">
             <a:avLst/>
@@ -5770,7 +5817,7 @@
               </a:spcAft>
             </a:pPr>
             <a:r>
-              <a:rPr sz="1300" b="1">
+              <a:rPr sz="1350" b="1">
                 <a:solidFill>
                   <a:srgbClr val="1F285A"/>
                 </a:solidFill>
@@ -5778,7 +5825,28 @@
                 <a:ea typeface="メイリオ"/>
                 <a:cs typeface="メイリオ"/>
               </a:rPr>
-              <a:t>お礼・働き方の紹介</a:t>
+              <a:t>お礼・</a:t>
+            </a:r>
+          </a:p>
+          <a:p>
+            <a:pPr algn="l">
+              <a:lnSpc>
+                <a:spcPct val="105000"/>
+              </a:lnSpc>
+              <a:spcAft>
+                <a:spcPts val="200"/>
+              </a:spcAft>
+            </a:pPr>
+            <a:r>
+              <a:rPr sz="1350" b="1">
+                <a:solidFill>
+                  <a:srgbClr val="1F285A"/>
+                </a:solidFill>
+                <a:latin typeface="メイリオ"/>
+                <a:ea typeface="メイリオ"/>
+                <a:cs typeface="メイリオ"/>
+              </a:rPr>
+              <a:t>働き方の紹介</a:t>
             </a:r>
           </a:p>
         </p:txBody>
@@ -5791,8 +5859,8 @@
         </p:nvSpPr>
         <p:spPr>
           <a:xfrm>
-            <a:off x="824400" y="3186000"/>
-            <a:ext cx="1219200" cy="1188000"/>
+            <a:off x="842400" y="3150000"/>
+            <a:ext cx="1455840" cy="522000"/>
           </a:xfrm>
           <a:prstGeom prst="rect">
             <a:avLst/>
@@ -5814,6 +5882,71 @@
               </a:spcAft>
             </a:pPr>
             <a:r>
+              <a:rPr sz="1050" b="1">
+                <a:solidFill>
+                  <a:srgbClr val="7F7F7F"/>
+                </a:solidFill>
+                <a:latin typeface="メイリオ"/>
+                <a:ea typeface="メイリオ"/>
+                <a:cs typeface="メイリオ"/>
+              </a:rPr>
+              <a:t>狙い</a:t>
+            </a:r>
+          </a:p>
+          <a:p>
+            <a:pPr algn="l">
+              <a:lnSpc>
+                <a:spcPct val="105000"/>
+              </a:lnSpc>
+              <a:spcAft>
+                <a:spcPts val="200"/>
+              </a:spcAft>
+            </a:pPr>
+            <a:r>
+              <a:rPr sz="1200" b="1">
+                <a:solidFill>
+                  <a:srgbClr val="0B7A3B"/>
+                </a:solidFill>
+                <a:latin typeface="メイリオ"/>
+                <a:ea typeface="メイリオ"/>
+                <a:cs typeface="メイリオ"/>
+              </a:rPr>
+              <a:t>興味喚起</a:t>
+            </a:r>
+          </a:p>
+        </p:txBody>
+      </p:sp>
+      <p:sp>
+        <p:nvSpPr>
+          <p:cNvPr id="14" name="TextBox 13"/>
+          <p:cNvSpPr txBox="1"/>
+          <p:nvPr/>
+        </p:nvSpPr>
+        <p:spPr>
+          <a:xfrm>
+            <a:off x="842400" y="3798000"/>
+            <a:ext cx="1455840" cy="864000"/>
+          </a:xfrm>
+          <a:prstGeom prst="rect">
+            <a:avLst/>
+          </a:prstGeom>
+          <a:noFill/>
+        </p:spPr>
+        <p:txBody>
+          <a:bodyPr wrap="square" anchor="t" lIns="36000" rIns="36000" tIns="10800" bIns="10800">
+            <a:spAutoFit/>
+          </a:bodyPr>
+          <a:lstStyle/>
+          <a:p>
+            <a:pPr algn="l">
+              <a:lnSpc>
+                <a:spcPct val="105000"/>
+              </a:lnSpc>
+              <a:spcAft>
+                <a:spcPts val="200"/>
+              </a:spcAft>
+            </a:pPr>
+            <a:r>
               <a:rPr sz="1200" b="0">
                 <a:solidFill>
                   <a:srgbClr val="333333"/>
@@ -5829,14 +5962,14 @@
       </p:sp>
       <p:sp>
         <p:nvSpPr>
-          <p:cNvPr id="14" name="Oval 13"/>
+          <p:cNvPr id="15" name="Oval 14"/>
           <p:cNvSpPr/>
           <p:nvPr/>
         </p:nvSpPr>
         <p:spPr>
           <a:xfrm>
-            <a:off x="2768400" y="1933200"/>
-            <a:ext cx="201600" cy="201600"/>
+            <a:off x="3188160" y="1926000"/>
+            <a:ext cx="216000" cy="216000"/>
           </a:xfrm>
           <a:prstGeom prst="ellipse">
             <a:avLst/>
@@ -5873,14 +6006,14 @@
       </p:sp>
       <p:sp>
         <p:nvSpPr>
-          <p:cNvPr id="15" name="Rounded Rectangle 14"/>
+          <p:cNvPr id="16" name="Rounded Rectangle 15"/>
           <p:cNvSpPr/>
           <p:nvPr/>
         </p:nvSpPr>
         <p:spPr>
           <a:xfrm>
-            <a:off x="2205600" y="2232000"/>
-            <a:ext cx="1327200" cy="306000"/>
+            <a:off x="2496240" y="2232000"/>
+            <a:ext cx="1599840" cy="306000"/>
           </a:xfrm>
           <a:prstGeom prst="roundRect">
             <a:avLst>
@@ -5924,7 +6057,7 @@
               </a:spcAft>
             </a:pPr>
             <a:r>
-              <a:rPr sz="1300" b="1">
+              <a:rPr sz="1400" b="1">
                 <a:solidFill>
                   <a:srgbClr val="FFFFFF"/>
                 </a:solidFill>
@@ -5939,14 +6072,14 @@
       </p:sp>
       <p:sp>
         <p:nvSpPr>
-          <p:cNvPr id="16" name="Rounded Rectangle 15"/>
+          <p:cNvPr id="17" name="Rounded Rectangle 16"/>
           <p:cNvSpPr/>
           <p:nvPr/>
         </p:nvSpPr>
         <p:spPr>
           <a:xfrm>
-            <a:off x="2205600" y="2610000"/>
-            <a:ext cx="1327200" cy="1800000"/>
+            <a:off x="2496240" y="2610000"/>
+            <a:ext cx="1599840" cy="2070000"/>
           </a:xfrm>
           <a:prstGeom prst="roundRect">
             <a:avLst>
@@ -5987,14 +6120,14 @@
       </p:sp>
       <p:sp>
         <p:nvSpPr>
-          <p:cNvPr id="17" name="TextBox 16"/>
+          <p:cNvPr id="18" name="TextBox 17"/>
           <p:cNvSpPr txBox="1"/>
           <p:nvPr/>
         </p:nvSpPr>
         <p:spPr>
           <a:xfrm>
-            <a:off x="2259600" y="2664000"/>
-            <a:ext cx="1219200" cy="468000"/>
+            <a:off x="2568240" y="2664000"/>
+            <a:ext cx="1455840" cy="468000"/>
           </a:xfrm>
           <a:prstGeom prst="rect">
             <a:avLst/>
@@ -6016,7 +6149,7 @@
               </a:spcAft>
             </a:pPr>
             <a:r>
-              <a:rPr sz="1300" b="1">
+              <a:rPr sz="1350" b="1">
                 <a:solidFill>
                   <a:srgbClr val="1F285A"/>
                 </a:solidFill>
@@ -6024,21 +6157,42 @@
                 <a:ea typeface="メイリオ"/>
                 <a:cs typeface="メイリオ"/>
               </a:rPr>
-              <a:t>給与・条件</a:t>
-            </a:r>
-          </a:p>
-        </p:txBody>
-      </p:sp>
-      <p:sp>
-        <p:nvSpPr>
-          <p:cNvPr id="18" name="TextBox 17"/>
+              <a:t>給与・</a:t>
+            </a:r>
+          </a:p>
+          <a:p>
+            <a:pPr algn="l">
+              <a:lnSpc>
+                <a:spcPct val="105000"/>
+              </a:lnSpc>
+              <a:spcAft>
+                <a:spcPts val="200"/>
+              </a:spcAft>
+            </a:pPr>
+            <a:r>
+              <a:rPr sz="1350" b="1">
+                <a:solidFill>
+                  <a:srgbClr val="1F285A"/>
+                </a:solidFill>
+                <a:latin typeface="メイリオ"/>
+                <a:ea typeface="メイリオ"/>
+                <a:cs typeface="メイリオ"/>
+              </a:rPr>
+              <a:t>勤務条件の紹介</a:t>
+            </a:r>
+          </a:p>
+        </p:txBody>
+      </p:sp>
+      <p:sp>
+        <p:nvSpPr>
+          <p:cNvPr id="19" name="TextBox 18"/>
           <p:cNvSpPr txBox="1"/>
           <p:nvPr/>
         </p:nvSpPr>
         <p:spPr>
           <a:xfrm>
-            <a:off x="2259600" y="3186000"/>
-            <a:ext cx="1219200" cy="1188000"/>
+            <a:off x="2568240" y="3150000"/>
+            <a:ext cx="1455840" cy="522000"/>
           </a:xfrm>
           <a:prstGeom prst="rect">
             <a:avLst/>
@@ -6060,6 +6214,71 @@
               </a:spcAft>
             </a:pPr>
             <a:r>
+              <a:rPr sz="1050" b="1">
+                <a:solidFill>
+                  <a:srgbClr val="7F7F7F"/>
+                </a:solidFill>
+                <a:latin typeface="メイリオ"/>
+                <a:ea typeface="メイリオ"/>
+                <a:cs typeface="メイリオ"/>
+              </a:rPr>
+              <a:t>狙い</a:t>
+            </a:r>
+          </a:p>
+          <a:p>
+            <a:pPr algn="l">
+              <a:lnSpc>
+                <a:spcPct val="105000"/>
+              </a:lnSpc>
+              <a:spcAft>
+                <a:spcPts val="200"/>
+              </a:spcAft>
+            </a:pPr>
+            <a:r>
+              <a:rPr sz="1200" b="1">
+                <a:solidFill>
+                  <a:srgbClr val="0B7A3B"/>
+                </a:solidFill>
+                <a:latin typeface="メイリオ"/>
+                <a:ea typeface="メイリオ"/>
+                <a:cs typeface="メイリオ"/>
+              </a:rPr>
+              <a:t>条件面の理解</a:t>
+            </a:r>
+          </a:p>
+        </p:txBody>
+      </p:sp>
+      <p:sp>
+        <p:nvSpPr>
+          <p:cNvPr id="20" name="TextBox 19"/>
+          <p:cNvSpPr txBox="1"/>
+          <p:nvPr/>
+        </p:nvSpPr>
+        <p:spPr>
+          <a:xfrm>
+            <a:off x="2568240" y="3798000"/>
+            <a:ext cx="1455840" cy="864000"/>
+          </a:xfrm>
+          <a:prstGeom prst="rect">
+            <a:avLst/>
+          </a:prstGeom>
+          <a:noFill/>
+        </p:spPr>
+        <p:txBody>
+          <a:bodyPr wrap="square" anchor="t" lIns="36000" rIns="36000" tIns="10800" bIns="10800">
+            <a:spAutoFit/>
+          </a:bodyPr>
+          <a:lstStyle/>
+          <a:p>
+            <a:pPr algn="l">
+              <a:lnSpc>
+                <a:spcPct val="105000"/>
+              </a:lnSpc>
+              <a:spcAft>
+                <a:spcPts val="200"/>
+              </a:spcAft>
+            </a:pPr>
+            <a:r>
               <a:rPr sz="1200" b="0">
                 <a:solidFill>
                   <a:srgbClr val="333333"/>
@@ -6075,14 +6294,14 @@
       </p:sp>
       <p:sp>
         <p:nvSpPr>
-          <p:cNvPr id="19" name="Oval 18"/>
+          <p:cNvPr id="21" name="Oval 20"/>
           <p:cNvSpPr/>
           <p:nvPr/>
         </p:nvSpPr>
         <p:spPr>
           <a:xfrm>
-            <a:off x="4203600" y="1933200"/>
-            <a:ext cx="201600" cy="201600"/>
+            <a:off x="4914000" y="1926000"/>
+            <a:ext cx="216000" cy="216000"/>
           </a:xfrm>
           <a:prstGeom prst="ellipse">
             <a:avLst/>
@@ -6119,14 +6338,14 @@
       </p:sp>
       <p:sp>
         <p:nvSpPr>
-          <p:cNvPr id="20" name="Rounded Rectangle 19"/>
+          <p:cNvPr id="22" name="Rounded Rectangle 21"/>
           <p:cNvSpPr/>
           <p:nvPr/>
         </p:nvSpPr>
         <p:spPr>
           <a:xfrm>
-            <a:off x="3640800" y="2232000"/>
-            <a:ext cx="1327200" cy="306000"/>
+            <a:off x="4222080" y="2232000"/>
+            <a:ext cx="1599840" cy="306000"/>
           </a:xfrm>
           <a:prstGeom prst="roundRect">
             <a:avLst>
@@ -6170,7 +6389,7 @@
               </a:spcAft>
             </a:pPr>
             <a:r>
-              <a:rPr sz="1300" b="1">
+              <a:rPr sz="1400" b="1">
                 <a:solidFill>
                   <a:srgbClr val="FFFFFF"/>
                 </a:solidFill>
@@ -6178,21 +6397,21 @@
                 <a:ea typeface="メイリオ"/>
                 <a:cs typeface="メイリオ"/>
               </a:rPr>
-              <a:t>1週間後</a:t>
-            </a:r>
-          </a:p>
-        </p:txBody>
-      </p:sp>
-      <p:sp>
-        <p:nvSpPr>
-          <p:cNvPr id="21" name="Rounded Rectangle 20"/>
+              <a:t>7日後</a:t>
+            </a:r>
+          </a:p>
+        </p:txBody>
+      </p:sp>
+      <p:sp>
+        <p:nvSpPr>
+          <p:cNvPr id="23" name="Rounded Rectangle 22"/>
           <p:cNvSpPr/>
           <p:nvPr/>
         </p:nvSpPr>
         <p:spPr>
           <a:xfrm>
-            <a:off x="3640800" y="2610000"/>
-            <a:ext cx="1327200" cy="1800000"/>
+            <a:off x="4222080" y="2610000"/>
+            <a:ext cx="1599840" cy="2070000"/>
           </a:xfrm>
           <a:prstGeom prst="roundRect">
             <a:avLst>
@@ -6233,14 +6452,14 @@
       </p:sp>
       <p:sp>
         <p:nvSpPr>
-          <p:cNvPr id="22" name="TextBox 21"/>
+          <p:cNvPr id="24" name="TextBox 23"/>
           <p:cNvSpPr txBox="1"/>
           <p:nvPr/>
         </p:nvSpPr>
         <p:spPr>
           <a:xfrm>
-            <a:off x="3694800" y="2664000"/>
-            <a:ext cx="1219200" cy="468000"/>
+            <a:off x="4294080" y="2664000"/>
+            <a:ext cx="1455840" cy="468000"/>
           </a:xfrm>
           <a:prstGeom prst="rect">
             <a:avLst/>
@@ -6262,7 +6481,7 @@
               </a:spcAft>
             </a:pPr>
             <a:r>
-              <a:rPr sz="1300" b="1">
+              <a:rPr sz="1350" b="1">
                 <a:solidFill>
                   <a:srgbClr val="1F285A"/>
                 </a:solidFill>
@@ -6270,21 +6489,42 @@
                 <a:ea typeface="メイリオ"/>
                 <a:cs typeface="メイリオ"/>
               </a:rPr>
-              <a:t>働く方の声</a:t>
-            </a:r>
-          </a:p>
-        </p:txBody>
-      </p:sp>
-      <p:sp>
-        <p:nvSpPr>
-          <p:cNvPr id="23" name="TextBox 22"/>
+              <a:t>働く方の声・</a:t>
+            </a:r>
+          </a:p>
+          <a:p>
+            <a:pPr algn="l">
+              <a:lnSpc>
+                <a:spcPct val="105000"/>
+              </a:lnSpc>
+              <a:spcAft>
+                <a:spcPts val="200"/>
+              </a:spcAft>
+            </a:pPr>
+            <a:r>
+              <a:rPr sz="1350" b="1">
+                <a:solidFill>
+                  <a:srgbClr val="1F285A"/>
+                </a:solidFill>
+                <a:latin typeface="メイリオ"/>
+                <a:ea typeface="メイリオ"/>
+                <a:cs typeface="メイリオ"/>
+              </a:rPr>
+              <a:t>安心材料</a:t>
+            </a:r>
+          </a:p>
+        </p:txBody>
+      </p:sp>
+      <p:sp>
+        <p:nvSpPr>
+          <p:cNvPr id="25" name="TextBox 24"/>
           <p:cNvSpPr txBox="1"/>
           <p:nvPr/>
         </p:nvSpPr>
         <p:spPr>
           <a:xfrm>
-            <a:off x="3694800" y="3186000"/>
-            <a:ext cx="1219200" cy="1188000"/>
+            <a:off x="4294080" y="3150000"/>
+            <a:ext cx="1455840" cy="522000"/>
           </a:xfrm>
           <a:prstGeom prst="rect">
             <a:avLst/>
@@ -6306,6 +6546,71 @@
               </a:spcAft>
             </a:pPr>
             <a:r>
+              <a:rPr sz="1050" b="1">
+                <a:solidFill>
+                  <a:srgbClr val="7F7F7F"/>
+                </a:solidFill>
+                <a:latin typeface="メイリオ"/>
+                <a:ea typeface="メイリオ"/>
+                <a:cs typeface="メイリオ"/>
+              </a:rPr>
+              <a:t>狙い</a:t>
+            </a:r>
+          </a:p>
+          <a:p>
+            <a:pPr algn="l">
+              <a:lnSpc>
+                <a:spcPct val="105000"/>
+              </a:lnSpc>
+              <a:spcAft>
+                <a:spcPts val="200"/>
+              </a:spcAft>
+            </a:pPr>
+            <a:r>
+              <a:rPr sz="1200" b="1">
+                <a:solidFill>
+                  <a:srgbClr val="0B7A3B"/>
+                </a:solidFill>
+                <a:latin typeface="メイリオ"/>
+                <a:ea typeface="メイリオ"/>
+                <a:cs typeface="メイリオ"/>
+              </a:rPr>
+              <a:t>不安の解消</a:t>
+            </a:r>
+          </a:p>
+        </p:txBody>
+      </p:sp>
+      <p:sp>
+        <p:nvSpPr>
+          <p:cNvPr id="26" name="TextBox 25"/>
+          <p:cNvSpPr txBox="1"/>
+          <p:nvPr/>
+        </p:nvSpPr>
+        <p:spPr>
+          <a:xfrm>
+            <a:off x="4294080" y="3798000"/>
+            <a:ext cx="1455840" cy="864000"/>
+          </a:xfrm>
+          <a:prstGeom prst="rect">
+            <a:avLst/>
+          </a:prstGeom>
+          <a:noFill/>
+        </p:spPr>
+        <p:txBody>
+          <a:bodyPr wrap="square" anchor="t" lIns="36000" rIns="36000" tIns="10800" bIns="10800">
+            <a:spAutoFit/>
+          </a:bodyPr>
+          <a:lstStyle/>
+          <a:p>
+            <a:pPr algn="l">
+              <a:lnSpc>
+                <a:spcPct val="105000"/>
+              </a:lnSpc>
+              <a:spcAft>
+                <a:spcPts val="200"/>
+              </a:spcAft>
+            </a:pPr>
+            <a:r>
               <a:rPr sz="1200" b="0">
                 <a:solidFill>
                   <a:srgbClr val="333333"/>
@@ -6314,21 +6619,21 @@
                 <a:ea typeface="メイリオ"/>
                 <a:cs typeface="メイリオ"/>
               </a:rPr>
-              <a:t>「平均年齢64歳。84歳の方も活躍しています」</a:t>
-            </a:r>
-          </a:p>
-        </p:txBody>
-      </p:sp>
-      <p:sp>
-        <p:nvSpPr>
-          <p:cNvPr id="24" name="Oval 23"/>
+              <a:t>「平均年齢64歳。84歳の方も活躍中。資格取得の支援もあります」</a:t>
+            </a:r>
+          </a:p>
+        </p:txBody>
+      </p:sp>
+      <p:sp>
+        <p:nvSpPr>
+          <p:cNvPr id="27" name="Oval 26"/>
           <p:cNvSpPr/>
           <p:nvPr/>
         </p:nvSpPr>
         <p:spPr>
           <a:xfrm>
-            <a:off x="5638800" y="1933200"/>
-            <a:ext cx="201600" cy="201600"/>
+            <a:off x="6639840" y="1926000"/>
+            <a:ext cx="216000" cy="216000"/>
           </a:xfrm>
           <a:prstGeom prst="ellipse">
             <a:avLst/>
@@ -6365,14 +6670,14 @@
       </p:sp>
       <p:sp>
         <p:nvSpPr>
-          <p:cNvPr id="25" name="Rounded Rectangle 24"/>
+          <p:cNvPr id="28" name="Rounded Rectangle 27"/>
           <p:cNvSpPr/>
           <p:nvPr/>
         </p:nvSpPr>
         <p:spPr>
           <a:xfrm>
-            <a:off x="5076000" y="2232000"/>
-            <a:ext cx="1327200" cy="306000"/>
+            <a:off x="5947920" y="2232000"/>
+            <a:ext cx="1599840" cy="306000"/>
           </a:xfrm>
           <a:prstGeom prst="roundRect">
             <a:avLst>
@@ -6416,7 +6721,7 @@
               </a:spcAft>
             </a:pPr>
             <a:r>
-              <a:rPr sz="1300" b="1">
+              <a:rPr sz="1400" b="1">
                 <a:solidFill>
                   <a:srgbClr val="FFFFFF"/>
                 </a:solidFill>
@@ -6424,21 +6729,21 @@
                 <a:ea typeface="メイリオ"/>
                 <a:cs typeface="メイリオ"/>
               </a:rPr>
-              <a:t>2週間後</a:t>
-            </a:r>
-          </a:p>
-        </p:txBody>
-      </p:sp>
-      <p:sp>
-        <p:nvSpPr>
-          <p:cNvPr id="26" name="Rounded Rectangle 25"/>
+              <a:t>10日後</a:t>
+            </a:r>
+          </a:p>
+        </p:txBody>
+      </p:sp>
+      <p:sp>
+        <p:nvSpPr>
+          <p:cNvPr id="29" name="Rounded Rectangle 28"/>
           <p:cNvSpPr/>
           <p:nvPr/>
         </p:nvSpPr>
         <p:spPr>
           <a:xfrm>
-            <a:off x="5076000" y="2610000"/>
-            <a:ext cx="1327200" cy="1800000"/>
+            <a:off x="5947920" y="2610000"/>
+            <a:ext cx="1599840" cy="2070000"/>
           </a:xfrm>
           <a:prstGeom prst="roundRect">
             <a:avLst>
@@ -6479,14 +6784,14 @@
       </p:sp>
       <p:sp>
         <p:nvSpPr>
-          <p:cNvPr id="27" name="TextBox 26"/>
+          <p:cNvPr id="30" name="TextBox 29"/>
           <p:cNvSpPr txBox="1"/>
           <p:nvPr/>
         </p:nvSpPr>
         <p:spPr>
           <a:xfrm>
-            <a:off x="5130000" y="2664000"/>
-            <a:ext cx="1219200" cy="468000"/>
+            <a:off x="6019920" y="2664000"/>
+            <a:ext cx="1455840" cy="468000"/>
           </a:xfrm>
           <a:prstGeom prst="rect">
             <a:avLst/>
@@ -6508,7 +6813,7 @@
               </a:spcAft>
             </a:pPr>
             <a:r>
-              <a:rPr sz="1300" b="1">
+              <a:rPr sz="1350" b="1">
                 <a:solidFill>
                   <a:srgbClr val="1F285A"/>
                 </a:solidFill>
@@ -6516,21 +6821,42 @@
                 <a:ea typeface="メイリオ"/>
                 <a:cs typeface="メイリオ"/>
               </a:rPr>
-              <a:t>短期・スポット勤務</a:t>
-            </a:r>
-          </a:p>
-        </p:txBody>
-      </p:sp>
-      <p:sp>
-        <p:nvSpPr>
-          <p:cNvPr id="28" name="TextBox 27"/>
+              <a:t>スポット勤務・</a:t>
+            </a:r>
+          </a:p>
+          <a:p>
+            <a:pPr algn="l">
+              <a:lnSpc>
+                <a:spcPct val="105000"/>
+              </a:lnSpc>
+              <a:spcAft>
+                <a:spcPts val="200"/>
+              </a:spcAft>
+            </a:pPr>
+            <a:r>
+              <a:rPr sz="1350" b="1">
+                <a:solidFill>
+                  <a:srgbClr val="1F285A"/>
+                </a:solidFill>
+                <a:latin typeface="メイリオ"/>
+                <a:ea typeface="メイリオ"/>
+                <a:cs typeface="メイリオ"/>
+              </a:rPr>
+              <a:t>希望条件の確認</a:t>
+            </a:r>
+          </a:p>
+        </p:txBody>
+      </p:sp>
+      <p:sp>
+        <p:nvSpPr>
+          <p:cNvPr id="31" name="TextBox 30"/>
           <p:cNvSpPr txBox="1"/>
           <p:nvPr/>
         </p:nvSpPr>
         <p:spPr>
           <a:xfrm>
-            <a:off x="5130000" y="3186000"/>
-            <a:ext cx="1219200" cy="1188000"/>
+            <a:off x="6019920" y="3150000"/>
+            <a:ext cx="1455840" cy="522000"/>
           </a:xfrm>
           <a:prstGeom prst="rect">
             <a:avLst/>
@@ -6552,6 +6878,92 @@
               </a:spcAft>
             </a:pPr>
             <a:r>
+              <a:rPr sz="1050" b="1">
+                <a:solidFill>
+                  <a:srgbClr val="7F7F7F"/>
+                </a:solidFill>
+                <a:latin typeface="メイリオ"/>
+                <a:ea typeface="メイリオ"/>
+                <a:cs typeface="メイリオ"/>
+              </a:rPr>
+              <a:t>狙い</a:t>
+            </a:r>
+          </a:p>
+          <a:p>
+            <a:pPr algn="l">
+              <a:lnSpc>
+                <a:spcPct val="105000"/>
+              </a:lnSpc>
+              <a:spcAft>
+                <a:spcPts val="200"/>
+              </a:spcAft>
+            </a:pPr>
+            <a:r>
+              <a:rPr sz="1200" b="1">
+                <a:solidFill>
+                  <a:srgbClr val="0B7A3B"/>
+                </a:solidFill>
+                <a:latin typeface="メイリオ"/>
+                <a:ea typeface="メイリオ"/>
+                <a:cs typeface="メイリオ"/>
+              </a:rPr>
+              <a:t>応募ハードルの</a:t>
+            </a:r>
+          </a:p>
+          <a:p>
+            <a:pPr algn="l">
+              <a:lnSpc>
+                <a:spcPct val="105000"/>
+              </a:lnSpc>
+              <a:spcAft>
+                <a:spcPts val="200"/>
+              </a:spcAft>
+            </a:pPr>
+            <a:r>
+              <a:rPr sz="1200" b="1">
+                <a:solidFill>
+                  <a:srgbClr val="0B7A3B"/>
+                </a:solidFill>
+                <a:latin typeface="メイリオ"/>
+                <a:ea typeface="メイリオ"/>
+                <a:cs typeface="メイリオ"/>
+              </a:rPr>
+              <a:t>低減</a:t>
+            </a:r>
+          </a:p>
+        </p:txBody>
+      </p:sp>
+      <p:sp>
+        <p:nvSpPr>
+          <p:cNvPr id="32" name="TextBox 31"/>
+          <p:cNvSpPr txBox="1"/>
+          <p:nvPr/>
+        </p:nvSpPr>
+        <p:spPr>
+          <a:xfrm>
+            <a:off x="6019920" y="3798000"/>
+            <a:ext cx="1455840" cy="864000"/>
+          </a:xfrm>
+          <a:prstGeom prst="rect">
+            <a:avLst/>
+          </a:prstGeom>
+          <a:noFill/>
+        </p:spPr>
+        <p:txBody>
+          <a:bodyPr wrap="square" anchor="t" lIns="36000" rIns="36000" tIns="10800" bIns="10800">
+            <a:spAutoFit/>
+          </a:bodyPr>
+          <a:lstStyle/>
+          <a:p>
+            <a:pPr algn="l">
+              <a:lnSpc>
+                <a:spcPct val="105000"/>
+              </a:lnSpc>
+              <a:spcAft>
+                <a:spcPts val="200"/>
+              </a:spcAft>
+            </a:pPr>
+            <a:r>
               <a:rPr sz="1200" b="0">
                 <a:solidFill>
                   <a:srgbClr val="333333"/>
@@ -6560,27 +6972,27 @@
                 <a:ea typeface="メイリオ"/>
                 <a:cs typeface="メイリオ"/>
               </a:rPr>
-              <a:t>「年末年始だけ、などのスポット勤務もあります」</a:t>
-            </a:r>
-          </a:p>
-        </p:txBody>
-      </p:sp>
-      <p:sp>
-        <p:nvSpPr>
-          <p:cNvPr id="29" name="Oval 28"/>
+              <a:t>「スポット勤務もあります。ご希望の勤務地・日数を教えてください」</a:t>
+            </a:r>
+          </a:p>
+        </p:txBody>
+      </p:sp>
+      <p:sp>
+        <p:nvSpPr>
+          <p:cNvPr id="33" name="Oval 32"/>
           <p:cNvSpPr/>
           <p:nvPr/>
         </p:nvSpPr>
         <p:spPr>
           <a:xfrm>
-            <a:off x="7073999" y="1933200"/>
-            <a:ext cx="201600" cy="201600"/>
+            <a:off x="8365680" y="1926000"/>
+            <a:ext cx="216000" cy="216000"/>
           </a:xfrm>
           <a:prstGeom prst="ellipse">
             <a:avLst/>
           </a:prstGeom>
           <a:solidFill>
-            <a:srgbClr val="1F285A"/>
+            <a:srgbClr val="06C755"/>
           </a:solidFill>
           <a:ln>
             <a:noFill/>
@@ -6611,14 +7023,14 @@
       </p:sp>
       <p:sp>
         <p:nvSpPr>
-          <p:cNvPr id="30" name="Rounded Rectangle 29"/>
+          <p:cNvPr id="34" name="Rounded Rectangle 33"/>
           <p:cNvSpPr/>
           <p:nvPr/>
         </p:nvSpPr>
         <p:spPr>
           <a:xfrm>
-            <a:off x="6511200" y="2232000"/>
-            <a:ext cx="1327200" cy="306000"/>
+            <a:off x="7673760" y="2232000"/>
+            <a:ext cx="1599840" cy="306000"/>
           </a:xfrm>
           <a:prstGeom prst="roundRect">
             <a:avLst>
@@ -6626,9 +7038,75 @@
             </a:avLst>
           </a:prstGeom>
           <a:solidFill>
+            <a:srgbClr val="06C755"/>
+          </a:solidFill>
+          <a:ln w="12700">
+            <a:solidFill>
+              <a:srgbClr val="06C755"/>
+            </a:solidFill>
+          </a:ln>
+          <a:effectLst/>
+        </p:spPr>
+        <p:style>
+          <a:lnRef idx="1">
+            <a:schemeClr val="accent1"/>
+          </a:lnRef>
+          <a:fillRef idx="3">
+            <a:schemeClr val="accent1"/>
+          </a:fillRef>
+          <a:effectRef idx="0">
+            <a:schemeClr val="accent1"/>
+          </a:effectRef>
+          <a:fontRef idx="minor">
+            <a:schemeClr val="lt1"/>
+          </a:fontRef>
+        </p:style>
+        <p:txBody>
+          <a:bodyPr rtlCol="0" anchor="ctr" wrap="square" lIns="18000" tIns="7200" rIns="18000" bIns="7200"/>
+          <a:lstStyle/>
+          <a:p>
+            <a:pPr algn="ctr">
+              <a:lnSpc>
+                <a:spcPct val="110000"/>
+              </a:lnSpc>
+              <a:spcAft>
+                <a:spcPts val="0"/>
+              </a:spcAft>
+            </a:pPr>
+            <a:r>
+              <a:rPr sz="1400" b="1">
+                <a:solidFill>
+                  <a:srgbClr val="FFFFFF"/>
+                </a:solidFill>
+                <a:latin typeface="メイリオ"/>
+                <a:ea typeface="メイリオ"/>
+                <a:cs typeface="メイリオ"/>
+              </a:rPr>
+              <a:t>14日後</a:t>
+            </a:r>
+          </a:p>
+        </p:txBody>
+      </p:sp>
+      <p:sp>
+        <p:nvSpPr>
+          <p:cNvPr id="35" name="Rounded Rectangle 34"/>
+          <p:cNvSpPr/>
+          <p:nvPr/>
+        </p:nvSpPr>
+        <p:spPr>
+          <a:xfrm>
+            <a:off x="7673760" y="2610000"/>
+            <a:ext cx="1599840" cy="2070000"/>
+          </a:xfrm>
+          <a:prstGeom prst="roundRect">
+            <a:avLst>
+              <a:gd name="adj" fmla="val 8000"/>
+            </a:avLst>
+          </a:prstGeom>
+          <a:solidFill>
             <a:srgbClr val="1F285A"/>
           </a:solidFill>
-          <a:ln w="12700">
+          <a:ln w="19050">
             <a:solidFill>
               <a:srgbClr val="1F285A"/>
             </a:solidFill>
@@ -6650,19 +7128,45 @@
           </a:fontRef>
         </p:style>
         <p:txBody>
-          <a:bodyPr rtlCol="0" anchor="ctr" wrap="square" lIns="18000" tIns="7200" rIns="18000" bIns="7200"/>
-          <a:lstStyle/>
-          <a:p>
-            <a:pPr algn="ctr">
-              <a:lnSpc>
-                <a:spcPct val="110000"/>
-              </a:lnSpc>
-              <a:spcAft>
-                <a:spcPts val="0"/>
-              </a:spcAft>
-            </a:pPr>
-            <a:r>
-              <a:rPr sz="1300" b="1">
+          <a:bodyPr rtlCol="0" anchor="ctr" wrap="square" lIns="72000" tIns="36000" rIns="72000" bIns="36000"/>
+          <a:lstStyle/>
+          <a:p>
+            <a:pPr algn="ctr"/>
+          </a:p>
+        </p:txBody>
+      </p:sp>
+      <p:sp>
+        <p:nvSpPr>
+          <p:cNvPr id="36" name="TextBox 35"/>
+          <p:cNvSpPr txBox="1"/>
+          <p:nvPr/>
+        </p:nvSpPr>
+        <p:spPr>
+          <a:xfrm>
+            <a:off x="7745760" y="2664000"/>
+            <a:ext cx="1455840" cy="468000"/>
+          </a:xfrm>
+          <a:prstGeom prst="rect">
+            <a:avLst/>
+          </a:prstGeom>
+          <a:noFill/>
+        </p:spPr>
+        <p:txBody>
+          <a:bodyPr wrap="square" anchor="t" lIns="36000" rIns="36000" tIns="10800" bIns="10800">
+            <a:spAutoFit/>
+          </a:bodyPr>
+          <a:lstStyle/>
+          <a:p>
+            <a:pPr algn="l">
+              <a:lnSpc>
+                <a:spcPct val="105000"/>
+              </a:lnSpc>
+              <a:spcAft>
+                <a:spcPts val="200"/>
+              </a:spcAft>
+            </a:pPr>
+            <a:r>
+              <a:rPr sz="1350" b="1">
                 <a:solidFill>
                   <a:srgbClr val="FFFFFF"/>
                 </a:solidFill>
@@ -6670,21 +7174,172 @@
                 <a:ea typeface="メイリオ"/>
                 <a:cs typeface="メイリオ"/>
               </a:rPr>
-              <a:t>1か月後</a:t>
-            </a:r>
-          </a:p>
-        </p:txBody>
-      </p:sp>
-      <p:sp>
-        <p:nvSpPr>
-          <p:cNvPr id="31" name="Rounded Rectangle 30"/>
+              <a:t>再応募・</a:t>
+            </a:r>
+          </a:p>
+          <a:p>
+            <a:pPr algn="l">
+              <a:lnSpc>
+                <a:spcPct val="105000"/>
+              </a:lnSpc>
+              <a:spcAft>
+                <a:spcPts val="200"/>
+              </a:spcAft>
+            </a:pPr>
+            <a:r>
+              <a:rPr sz="1350" b="1">
+                <a:solidFill>
+                  <a:srgbClr val="FFFFFF"/>
+                </a:solidFill>
+                <a:latin typeface="メイリオ"/>
+                <a:ea typeface="メイリオ"/>
+                <a:cs typeface="メイリオ"/>
+              </a:rPr>
+              <a:t>面接予約の案内</a:t>
+            </a:r>
+          </a:p>
+        </p:txBody>
+      </p:sp>
+      <p:sp>
+        <p:nvSpPr>
+          <p:cNvPr id="37" name="TextBox 36"/>
+          <p:cNvSpPr txBox="1"/>
+          <p:nvPr/>
+        </p:nvSpPr>
+        <p:spPr>
+          <a:xfrm>
+            <a:off x="7745760" y="3150000"/>
+            <a:ext cx="1455840" cy="522000"/>
+          </a:xfrm>
+          <a:prstGeom prst="rect">
+            <a:avLst/>
+          </a:prstGeom>
+          <a:noFill/>
+        </p:spPr>
+        <p:txBody>
+          <a:bodyPr wrap="square" anchor="t" lIns="36000" rIns="36000" tIns="10800" bIns="10800">
+            <a:spAutoFit/>
+          </a:bodyPr>
+          <a:lstStyle/>
+          <a:p>
+            <a:pPr algn="l">
+              <a:lnSpc>
+                <a:spcPct val="105000"/>
+              </a:lnSpc>
+              <a:spcAft>
+                <a:spcPts val="200"/>
+              </a:spcAft>
+            </a:pPr>
+            <a:r>
+              <a:rPr sz="1050" b="1">
+                <a:solidFill>
+                  <a:srgbClr val="FFFFFF"/>
+                </a:solidFill>
+                <a:latin typeface="メイリオ"/>
+                <a:ea typeface="メイリオ"/>
+                <a:cs typeface="メイリオ"/>
+              </a:rPr>
+              <a:t>狙い</a:t>
+            </a:r>
+          </a:p>
+          <a:p>
+            <a:pPr algn="l">
+              <a:lnSpc>
+                <a:spcPct val="105000"/>
+              </a:lnSpc>
+              <a:spcAft>
+                <a:spcPts val="200"/>
+              </a:spcAft>
+            </a:pPr>
+            <a:r>
+              <a:rPr sz="1200" b="1">
+                <a:solidFill>
+                  <a:srgbClr val="FFFFFF"/>
+                </a:solidFill>
+                <a:latin typeface="メイリオ"/>
+                <a:ea typeface="メイリオ"/>
+                <a:cs typeface="メイリオ"/>
+              </a:rPr>
+              <a:t>CV①・CV②への</a:t>
+            </a:r>
+          </a:p>
+          <a:p>
+            <a:pPr algn="l">
+              <a:lnSpc>
+                <a:spcPct val="105000"/>
+              </a:lnSpc>
+              <a:spcAft>
+                <a:spcPts val="200"/>
+              </a:spcAft>
+            </a:pPr>
+            <a:r>
+              <a:rPr sz="1200" b="1">
+                <a:solidFill>
+                  <a:srgbClr val="FFFFFF"/>
+                </a:solidFill>
+                <a:latin typeface="メイリオ"/>
+                <a:ea typeface="メイリオ"/>
+                <a:cs typeface="メイリオ"/>
+              </a:rPr>
+              <a:t>誘導</a:t>
+            </a:r>
+          </a:p>
+        </p:txBody>
+      </p:sp>
+      <p:sp>
+        <p:nvSpPr>
+          <p:cNvPr id="38" name="TextBox 37"/>
+          <p:cNvSpPr txBox="1"/>
+          <p:nvPr/>
+        </p:nvSpPr>
+        <p:spPr>
+          <a:xfrm>
+            <a:off x="7745760" y="3798000"/>
+            <a:ext cx="1455840" cy="864000"/>
+          </a:xfrm>
+          <a:prstGeom prst="rect">
+            <a:avLst/>
+          </a:prstGeom>
+          <a:noFill/>
+        </p:spPr>
+        <p:txBody>
+          <a:bodyPr wrap="square" anchor="t" lIns="36000" rIns="36000" tIns="10800" bIns="10800">
+            <a:spAutoFit/>
+          </a:bodyPr>
+          <a:lstStyle/>
+          <a:p>
+            <a:pPr algn="l">
+              <a:lnSpc>
+                <a:spcPct val="105000"/>
+              </a:lnSpc>
+              <a:spcAft>
+                <a:spcPts val="200"/>
+              </a:spcAft>
+            </a:pPr>
+            <a:r>
+              <a:rPr sz="1200" b="0">
+                <a:solidFill>
+                  <a:srgbClr val="FFFFFF"/>
+                </a:solidFill>
+                <a:latin typeface="メイリオ"/>
+                <a:ea typeface="メイリオ"/>
+                <a:cs typeface="メイリオ"/>
+              </a:rPr>
+              <a:t>「柏・松戸・熊谷で現場があります。応募・面接予約はこちら」</a:t>
+            </a:r>
+          </a:p>
+        </p:txBody>
+      </p:sp>
+      <p:sp>
+        <p:nvSpPr>
+          <p:cNvPr id="39" name="Rounded Rectangle 38"/>
           <p:cNvSpPr/>
           <p:nvPr/>
         </p:nvSpPr>
         <p:spPr>
           <a:xfrm>
-            <a:off x="6511200" y="2610000"/>
-            <a:ext cx="1327200" cy="1800000"/>
+            <a:off x="770400" y="4806000"/>
+            <a:ext cx="8503200" cy="450000"/>
           </a:xfrm>
           <a:prstGeom prst="roundRect">
             <a:avLst>
@@ -6693,6 +7348,252 @@
           </a:prstGeom>
           <a:solidFill>
             <a:srgbClr val="FFFFFF"/>
+          </a:solidFill>
+          <a:ln w="12700">
+            <a:solidFill>
+              <a:srgbClr val="7F7F7F"/>
+            </a:solidFill>
+          </a:ln>
+          <a:effectLst/>
+        </p:spPr>
+        <p:style>
+          <a:lnRef idx="1">
+            <a:schemeClr val="accent1"/>
+          </a:lnRef>
+          <a:fillRef idx="3">
+            <a:schemeClr val="accent1"/>
+          </a:fillRef>
+          <a:effectRef idx="0">
+            <a:schemeClr val="accent1"/>
+          </a:effectRef>
+          <a:fontRef idx="minor">
+            <a:schemeClr val="lt1"/>
+          </a:fontRef>
+        </p:style>
+        <p:txBody>
+          <a:bodyPr rtlCol="0" anchor="ctr" wrap="square" lIns="72000" tIns="36000" rIns="72000" bIns="36000"/>
+          <a:lstStyle/>
+          <a:p>
+            <a:pPr algn="ctr"/>
+          </a:p>
+        </p:txBody>
+      </p:sp>
+      <p:sp>
+        <p:nvSpPr>
+          <p:cNvPr id="40" name="Rounded Rectangle 39"/>
+          <p:cNvSpPr/>
+          <p:nvPr/>
+        </p:nvSpPr>
+        <p:spPr>
+          <a:xfrm>
+            <a:off x="860400" y="4878000"/>
+            <a:ext cx="1655999" cy="306000"/>
+          </a:xfrm>
+          <a:prstGeom prst="roundRect">
+            <a:avLst>
+              <a:gd name="adj" fmla="val 8000"/>
+            </a:avLst>
+          </a:prstGeom>
+          <a:solidFill>
+            <a:srgbClr val="7F7F7F"/>
+          </a:solidFill>
+          <a:ln w="12700">
+            <a:solidFill>
+              <a:srgbClr val="7F7F7F"/>
+            </a:solidFill>
+          </a:ln>
+          <a:effectLst/>
+        </p:spPr>
+        <p:style>
+          <a:lnRef idx="1">
+            <a:schemeClr val="accent1"/>
+          </a:lnRef>
+          <a:fillRef idx="3">
+            <a:schemeClr val="accent1"/>
+          </a:fillRef>
+          <a:effectRef idx="0">
+            <a:schemeClr val="accent1"/>
+          </a:effectRef>
+          <a:fontRef idx="minor">
+            <a:schemeClr val="lt1"/>
+          </a:fontRef>
+        </p:style>
+        <p:txBody>
+          <a:bodyPr rtlCol="0" anchor="ctr" wrap="square" lIns="18000" tIns="7200" rIns="18000" bIns="7200"/>
+          <a:lstStyle/>
+          <a:p>
+            <a:pPr algn="ctr">
+              <a:lnSpc>
+                <a:spcPct val="110000"/>
+              </a:lnSpc>
+              <a:spcAft>
+                <a:spcPts val="0"/>
+              </a:spcAft>
+            </a:pPr>
+            <a:r>
+              <a:rPr sz="1300" b="1">
+                <a:solidFill>
+                  <a:srgbClr val="FFFFFF"/>
+                </a:solidFill>
+                <a:latin typeface="メイリオ"/>
+                <a:ea typeface="メイリオ"/>
+                <a:cs typeface="メイリオ"/>
+              </a:rPr>
+              <a:t>14日以降（別施策）</a:t>
+            </a:r>
+          </a:p>
+        </p:txBody>
+      </p:sp>
+      <p:sp>
+        <p:nvSpPr>
+          <p:cNvPr id="41" name="TextBox 40"/>
+          <p:cNvSpPr txBox="1"/>
+          <p:nvPr/>
+        </p:nvSpPr>
+        <p:spPr>
+          <a:xfrm>
+            <a:off x="2624400" y="4806000"/>
+            <a:ext cx="6559200" cy="450000"/>
+          </a:xfrm>
+          <a:prstGeom prst="rect">
+            <a:avLst/>
+          </a:prstGeom>
+          <a:noFill/>
+        </p:spPr>
+        <p:txBody>
+          <a:bodyPr wrap="square" anchor="ctr" lIns="36000" rIns="36000" tIns="10800" bIns="10800">
+            <a:spAutoFit/>
+          </a:bodyPr>
+          <a:lstStyle/>
+          <a:p>
+            <a:pPr algn="l">
+              <a:lnSpc>
+                <a:spcPct val="105000"/>
+              </a:lnSpc>
+              <a:spcAft>
+                <a:spcPts val="200"/>
+              </a:spcAft>
+            </a:pPr>
+            <a:r>
+              <a:rPr sz="1350" b="0">
+                <a:solidFill>
+                  <a:srgbClr val="333333"/>
+                </a:solidFill>
+                <a:latin typeface="メイリオ"/>
+                <a:ea typeface="メイリオ"/>
+                <a:cs typeface="メイリオ"/>
+              </a:rPr>
+              <a:t>月1回程度の企画配信（募集・現場のお知らせなど）で、継続的に接点を維持</a:t>
+            </a:r>
+          </a:p>
+        </p:txBody>
+      </p:sp>
+      <p:sp>
+        <p:nvSpPr>
+          <p:cNvPr id="42" name="Rectangle 41"/>
+          <p:cNvSpPr/>
+          <p:nvPr/>
+        </p:nvSpPr>
+        <p:spPr>
+          <a:xfrm>
+            <a:off x="644400" y="5378400"/>
+            <a:ext cx="54000" cy="187200"/>
+          </a:xfrm>
+          <a:prstGeom prst="rect">
+            <a:avLst/>
+          </a:prstGeom>
+          <a:solidFill>
+            <a:srgbClr val="1F285A"/>
+          </a:solidFill>
+          <a:ln>
+            <a:noFill/>
+          </a:ln>
+          <a:effectLst/>
+        </p:spPr>
+        <p:style>
+          <a:lnRef idx="1">
+            <a:schemeClr val="accent1"/>
+          </a:lnRef>
+          <a:fillRef idx="3">
+            <a:schemeClr val="accent1"/>
+          </a:fillRef>
+          <a:effectRef idx="0">
+            <a:schemeClr val="accent1"/>
+          </a:effectRef>
+          <a:fontRef idx="minor">
+            <a:schemeClr val="lt1"/>
+          </a:fontRef>
+        </p:style>
+        <p:txBody>
+          <a:bodyPr rtlCol="0" anchor="ctr" wrap="square" lIns="72000" tIns="18000" rIns="72000" bIns="18000"/>
+          <a:lstStyle/>
+          <a:p>
+            <a:pPr algn="ctr"/>
+          </a:p>
+        </p:txBody>
+      </p:sp>
+      <p:sp>
+        <p:nvSpPr>
+          <p:cNvPr id="43" name="TextBox 42"/>
+          <p:cNvSpPr txBox="1"/>
+          <p:nvPr/>
+        </p:nvSpPr>
+        <p:spPr>
+          <a:xfrm>
+            <a:off x="770400" y="5328000"/>
+            <a:ext cx="8503200" cy="288000"/>
+          </a:xfrm>
+          <a:prstGeom prst="rect">
+            <a:avLst/>
+          </a:prstGeom>
+          <a:noFill/>
+        </p:spPr>
+        <p:txBody>
+          <a:bodyPr wrap="square" anchor="t" lIns="36000" rIns="36000" tIns="10800" bIns="10800">
+            <a:spAutoFit/>
+          </a:bodyPr>
+          <a:lstStyle/>
+          <a:p>
+            <a:pPr algn="l">
+              <a:lnSpc>
+                <a:spcPct val="105000"/>
+              </a:lnSpc>
+              <a:spcAft>
+                <a:spcPts val="200"/>
+              </a:spcAft>
+            </a:pPr>
+            <a:r>
+              <a:rPr sz="1500" b="1">
+                <a:solidFill>
+                  <a:srgbClr val="1F285A"/>
+                </a:solidFill>
+                <a:latin typeface="メイリオ"/>
+                <a:ea typeface="メイリオ"/>
+                <a:cs typeface="メイリオ"/>
+              </a:rPr>
+              <a:t>そのほかに伝えられること</a:t>
+            </a:r>
+          </a:p>
+        </p:txBody>
+      </p:sp>
+      <p:sp>
+        <p:nvSpPr>
+          <p:cNvPr id="44" name="Rounded Rectangle 43"/>
+          <p:cNvSpPr/>
+          <p:nvPr/>
+        </p:nvSpPr>
+        <p:spPr>
+          <a:xfrm>
+            <a:off x="770400" y="5670000"/>
+            <a:ext cx="4143600" cy="684000"/>
+          </a:xfrm>
+          <a:prstGeom prst="roundRect">
+            <a:avLst>
+              <a:gd name="adj" fmla="val 8000"/>
+            </a:avLst>
+          </a:prstGeom>
+          <a:solidFill>
+            <a:srgbClr val="F4F7FF"/>
           </a:solidFill>
           <a:ln w="12700">
             <a:solidFill>
@@ -6725,108 +7626,20 @@
       </p:sp>
       <p:sp>
         <p:nvSpPr>
-          <p:cNvPr id="32" name="TextBox 31"/>
-          <p:cNvSpPr txBox="1"/>
-          <p:nvPr/>
-        </p:nvSpPr>
-        <p:spPr>
-          <a:xfrm>
-            <a:off x="6565199" y="2664000"/>
-            <a:ext cx="1219200" cy="468000"/>
+          <p:cNvPr id="45" name="Rectangle 44"/>
+          <p:cNvSpPr/>
+          <p:nvPr/>
+        </p:nvSpPr>
+        <p:spPr>
+          <a:xfrm>
+            <a:off x="770400" y="5670000"/>
+            <a:ext cx="64800" cy="684000"/>
           </a:xfrm>
           <a:prstGeom prst="rect">
             <a:avLst/>
           </a:prstGeom>
-          <a:noFill/>
-        </p:spPr>
-        <p:txBody>
-          <a:bodyPr wrap="square" anchor="t" lIns="36000" rIns="36000" tIns="10800" bIns="10800">
-            <a:spAutoFit/>
-          </a:bodyPr>
-          <a:lstStyle/>
-          <a:p>
-            <a:pPr algn="l">
-              <a:lnSpc>
-                <a:spcPct val="105000"/>
-              </a:lnSpc>
-              <a:spcAft>
-                <a:spcPts val="200"/>
-              </a:spcAft>
-            </a:pPr>
-            <a:r>
-              <a:rPr sz="1300" b="1">
-                <a:solidFill>
-                  <a:srgbClr val="1F285A"/>
-                </a:solidFill>
-                <a:latin typeface="メイリオ"/>
-                <a:ea typeface="メイリオ"/>
-                <a:cs typeface="メイリオ"/>
-              </a:rPr>
-              <a:t>現場・面接のご案内</a:t>
-            </a:r>
-          </a:p>
-        </p:txBody>
-      </p:sp>
-      <p:sp>
-        <p:nvSpPr>
-          <p:cNvPr id="33" name="TextBox 32"/>
-          <p:cNvSpPr txBox="1"/>
-          <p:nvPr/>
-        </p:nvSpPr>
-        <p:spPr>
-          <a:xfrm>
-            <a:off x="6565199" y="3186000"/>
-            <a:ext cx="1219200" cy="1188000"/>
-          </a:xfrm>
-          <a:prstGeom prst="rect">
-            <a:avLst/>
-          </a:prstGeom>
-          <a:noFill/>
-        </p:spPr>
-        <p:txBody>
-          <a:bodyPr wrap="square" anchor="t" lIns="36000" rIns="36000" tIns="10800" bIns="10800">
-            <a:spAutoFit/>
-          </a:bodyPr>
-          <a:lstStyle/>
-          <a:p>
-            <a:pPr algn="l">
-              <a:lnSpc>
-                <a:spcPct val="105000"/>
-              </a:lnSpc>
-              <a:spcAft>
-                <a:spcPts val="200"/>
-              </a:spcAft>
-            </a:pPr>
-            <a:r>
-              <a:rPr sz="1200" b="0">
-                <a:solidFill>
-                  <a:srgbClr val="333333"/>
-                </a:solidFill>
-                <a:latin typeface="メイリオ"/>
-                <a:ea typeface="メイリオ"/>
-                <a:cs typeface="メイリオ"/>
-              </a:rPr>
-              <a:t>「柏・松戸・熊谷で現場があります。面接日はこちら」</a:t>
-            </a:r>
-          </a:p>
-        </p:txBody>
-      </p:sp>
-      <p:sp>
-        <p:nvSpPr>
-          <p:cNvPr id="34" name="Oval 33"/>
-          <p:cNvSpPr/>
-          <p:nvPr/>
-        </p:nvSpPr>
-        <p:spPr>
-          <a:xfrm>
-            <a:off x="8509200" y="1933200"/>
-            <a:ext cx="201600" cy="201600"/>
-          </a:xfrm>
-          <a:prstGeom prst="ellipse">
-            <a:avLst/>
-          </a:prstGeom>
-          <a:solidFill>
-            <a:srgbClr val="06C755"/>
+          <a:solidFill>
+            <a:srgbClr val="1F285A"/>
           </a:solidFill>
           <a:ln>
             <a:noFill/>
@@ -6857,14 +7670,123 @@
       </p:sp>
       <p:sp>
         <p:nvSpPr>
-          <p:cNvPr id="35" name="Rounded Rectangle 34"/>
+          <p:cNvPr id="46" name="TextBox 45"/>
+          <p:cNvSpPr txBox="1"/>
+          <p:nvPr/>
+        </p:nvSpPr>
+        <p:spPr>
+          <a:xfrm>
+            <a:off x="950400" y="5706000"/>
+            <a:ext cx="864000" cy="612000"/>
+          </a:xfrm>
+          <a:prstGeom prst="rect">
+            <a:avLst/>
+          </a:prstGeom>
+          <a:noFill/>
+        </p:spPr>
+        <p:txBody>
+          <a:bodyPr wrap="square" anchor="ctr" lIns="36000" rIns="36000" tIns="10800" bIns="10800">
+            <a:spAutoFit/>
+          </a:bodyPr>
+          <a:lstStyle/>
+          <a:p>
+            <a:pPr algn="l">
+              <a:lnSpc>
+                <a:spcPct val="105000"/>
+              </a:lnSpc>
+              <a:spcAft>
+                <a:spcPts val="200"/>
+              </a:spcAft>
+            </a:pPr>
+            <a:r>
+              <a:rPr sz="1400" b="1">
+                <a:solidFill>
+                  <a:srgbClr val="1F285A"/>
+                </a:solidFill>
+                <a:latin typeface="メイリオ"/>
+                <a:ea typeface="メイリオ"/>
+                <a:cs typeface="メイリオ"/>
+              </a:rPr>
+              <a:t>待遇</a:t>
+            </a:r>
+          </a:p>
+        </p:txBody>
+      </p:sp>
+      <p:sp>
+        <p:nvSpPr>
+          <p:cNvPr id="47" name="TextBox 46"/>
+          <p:cNvSpPr txBox="1"/>
+          <p:nvPr/>
+        </p:nvSpPr>
+        <p:spPr>
+          <a:xfrm>
+            <a:off x="1778399" y="5706000"/>
+            <a:ext cx="3081599" cy="612000"/>
+          </a:xfrm>
+          <a:prstGeom prst="rect">
+            <a:avLst/>
+          </a:prstGeom>
+          <a:noFill/>
+        </p:spPr>
+        <p:txBody>
+          <a:bodyPr wrap="square" anchor="ctr" lIns="36000" rIns="36000" tIns="10800" bIns="10800">
+            <a:spAutoFit/>
+          </a:bodyPr>
+          <a:lstStyle/>
+          <a:p>
+            <a:pPr algn="l">
+              <a:lnSpc>
+                <a:spcPct val="105000"/>
+              </a:lnSpc>
+              <a:spcAft>
+                <a:spcPts val="200"/>
+              </a:spcAft>
+            </a:pPr>
+            <a:r>
+              <a:rPr sz="1300" b="0">
+                <a:solidFill>
+                  <a:srgbClr val="333333"/>
+                </a:solidFill>
+                <a:latin typeface="メイリオ"/>
+                <a:ea typeface="メイリオ"/>
+                <a:cs typeface="メイリオ"/>
+              </a:rPr>
+              <a:t>ガソリン代・駐車場代の全額支給</a:t>
+            </a:r>
+          </a:p>
+          <a:p>
+            <a:pPr algn="l">
+              <a:lnSpc>
+                <a:spcPct val="105000"/>
+              </a:lnSpc>
+              <a:spcAft>
+                <a:spcPts val="200"/>
+              </a:spcAft>
+            </a:pPr>
+            <a:r>
+              <a:rPr sz="1300" b="0">
+                <a:solidFill>
+                  <a:srgbClr val="333333"/>
+                </a:solidFill>
+                <a:latin typeface="メイリオ"/>
+                <a:ea typeface="メイリオ"/>
+                <a:cs typeface="メイリオ"/>
+              </a:rPr>
+              <a:t>空調服・ネッククーラー支給</a:t>
+            </a:r>
+          </a:p>
+        </p:txBody>
+      </p:sp>
+      <p:sp>
+        <p:nvSpPr>
+          <p:cNvPr id="48" name="Rounded Rectangle 47"/>
           <p:cNvSpPr/>
           <p:nvPr/>
         </p:nvSpPr>
         <p:spPr>
           <a:xfrm>
-            <a:off x="7946400" y="2232000"/>
-            <a:ext cx="1327200" cy="306000"/>
+            <a:off x="5130000" y="5670000"/>
+            <a:ext cx="4143600" cy="684000"/>
           </a:xfrm>
           <a:prstGeom prst="roundRect">
             <a:avLst>
@@ -6872,73 +7794,7 @@
             </a:avLst>
           </a:prstGeom>
           <a:solidFill>
-            <a:srgbClr val="1F285A"/>
-          </a:solidFill>
-          <a:ln w="12700">
-            <a:solidFill>
-              <a:srgbClr val="1F285A"/>
-            </a:solidFill>
-          </a:ln>
-          <a:effectLst/>
-        </p:spPr>
-        <p:style>
-          <a:lnRef idx="1">
-            <a:schemeClr val="accent1"/>
-          </a:lnRef>
-          <a:fillRef idx="3">
-            <a:schemeClr val="accent1"/>
-          </a:fillRef>
-          <a:effectRef idx="0">
-            <a:schemeClr val="accent1"/>
-          </a:effectRef>
-          <a:fontRef idx="minor">
-            <a:schemeClr val="lt1"/>
-          </a:fontRef>
-        </p:style>
-        <p:txBody>
-          <a:bodyPr rtlCol="0" anchor="ctr" wrap="square" lIns="18000" tIns="7200" rIns="18000" bIns="7200"/>
-          <a:lstStyle/>
-          <a:p>
-            <a:pPr algn="ctr">
-              <a:lnSpc>
-                <a:spcPct val="110000"/>
-              </a:lnSpc>
-              <a:spcAft>
-                <a:spcPts val="0"/>
-              </a:spcAft>
-            </a:pPr>
-            <a:r>
-              <a:rPr sz="1300" b="1">
-                <a:solidFill>
-                  <a:srgbClr val="FFFFFF"/>
-                </a:solidFill>
-                <a:latin typeface="メイリオ"/>
-                <a:ea typeface="メイリオ"/>
-                <a:cs typeface="メイリオ"/>
-              </a:rPr>
-              <a:t>以降 月1回</a:t>
-            </a:r>
-          </a:p>
-        </p:txBody>
-      </p:sp>
-      <p:sp>
-        <p:nvSpPr>
-          <p:cNvPr id="36" name="Rounded Rectangle 35"/>
-          <p:cNvSpPr/>
-          <p:nvPr/>
-        </p:nvSpPr>
-        <p:spPr>
-          <a:xfrm>
-            <a:off x="7946400" y="2610000"/>
-            <a:ext cx="1327200" cy="1800000"/>
-          </a:xfrm>
-          <a:prstGeom prst="roundRect">
-            <a:avLst>
-              <a:gd name="adj" fmla="val 8000"/>
-            </a:avLst>
-          </a:prstGeom>
-          <a:solidFill>
-            <a:srgbClr val="FFFFFF"/>
+            <a:srgbClr val="F4F7FF"/>
           </a:solidFill>
           <a:ln w="12700">
             <a:solidFill>
@@ -6971,102 +7827,14 @@
       </p:sp>
       <p:sp>
         <p:nvSpPr>
-          <p:cNvPr id="37" name="TextBox 36"/>
-          <p:cNvSpPr txBox="1"/>
-          <p:nvPr/>
-        </p:nvSpPr>
-        <p:spPr>
-          <a:xfrm>
-            <a:off x="8000400" y="2664000"/>
-            <a:ext cx="1219200" cy="468000"/>
-          </a:xfrm>
-          <a:prstGeom prst="rect">
-            <a:avLst/>
-          </a:prstGeom>
-          <a:noFill/>
-        </p:spPr>
-        <p:txBody>
-          <a:bodyPr wrap="square" anchor="t" lIns="36000" rIns="36000" tIns="10800" bIns="10800">
-            <a:spAutoFit/>
-          </a:bodyPr>
-          <a:lstStyle/>
-          <a:p>
-            <a:pPr algn="l">
-              <a:lnSpc>
-                <a:spcPct val="105000"/>
-              </a:lnSpc>
-              <a:spcAft>
-                <a:spcPts val="200"/>
-              </a:spcAft>
-            </a:pPr>
-            <a:r>
-              <a:rPr sz="1300" b="1">
-                <a:solidFill>
-                  <a:srgbClr val="1F285A"/>
-                </a:solidFill>
-                <a:latin typeface="メイリオ"/>
-                <a:ea typeface="メイリオ"/>
-                <a:cs typeface="メイリオ"/>
-              </a:rPr>
-              <a:t>募集のお知らせ</a:t>
-            </a:r>
-          </a:p>
-        </p:txBody>
-      </p:sp>
-      <p:sp>
-        <p:nvSpPr>
-          <p:cNvPr id="38" name="TextBox 37"/>
-          <p:cNvSpPr txBox="1"/>
-          <p:nvPr/>
-        </p:nvSpPr>
-        <p:spPr>
-          <a:xfrm>
-            <a:off x="8000400" y="3186000"/>
-            <a:ext cx="1219200" cy="1188000"/>
-          </a:xfrm>
-          <a:prstGeom prst="rect">
-            <a:avLst/>
-          </a:prstGeom>
-          <a:noFill/>
-        </p:spPr>
-        <p:txBody>
-          <a:bodyPr wrap="square" anchor="t" lIns="36000" rIns="36000" tIns="10800" bIns="10800">
-            <a:spAutoFit/>
-          </a:bodyPr>
-          <a:lstStyle/>
-          <a:p>
-            <a:pPr algn="l">
-              <a:lnSpc>
-                <a:spcPct val="105000"/>
-              </a:lnSpc>
-              <a:spcAft>
-                <a:spcPts val="200"/>
-              </a:spcAft>
-            </a:pPr>
-            <a:r>
-              <a:rPr sz="1200" b="0">
-                <a:solidFill>
-                  <a:srgbClr val="333333"/>
-                </a:solidFill>
-                <a:latin typeface="メイリオ"/>
-                <a:ea typeface="メイリオ"/>
-                <a:cs typeface="メイリオ"/>
-              </a:rPr>
-              <a:t>「今月の募集をお知らせします」</a:t>
-            </a:r>
-          </a:p>
-        </p:txBody>
-      </p:sp>
-      <p:sp>
-        <p:nvSpPr>
-          <p:cNvPr id="39" name="Rectangle 38"/>
+          <p:cNvPr id="49" name="Rectangle 48"/>
           <p:cNvSpPr/>
           <p:nvPr/>
         </p:nvSpPr>
         <p:spPr>
           <a:xfrm>
-            <a:off x="644400" y="4640400"/>
-            <a:ext cx="54000" cy="187200"/>
+            <a:off x="5130000" y="5670000"/>
+            <a:ext cx="64800" cy="684000"/>
           </a:xfrm>
           <a:prstGeom prst="rect">
             <a:avLst/>
@@ -7103,150 +7871,14 @@
       </p:sp>
       <p:sp>
         <p:nvSpPr>
-          <p:cNvPr id="40" name="TextBox 39"/>
+          <p:cNvPr id="50" name="TextBox 49"/>
           <p:cNvSpPr txBox="1"/>
           <p:nvPr/>
         </p:nvSpPr>
         <p:spPr>
           <a:xfrm>
-            <a:off x="770400" y="4590000"/>
-            <a:ext cx="8503200" cy="288000"/>
-          </a:xfrm>
-          <a:prstGeom prst="rect">
-            <a:avLst/>
-          </a:prstGeom>
-          <a:noFill/>
-        </p:spPr>
-        <p:txBody>
-          <a:bodyPr wrap="square" anchor="t" lIns="36000" rIns="36000" tIns="10800" bIns="10800">
-            <a:spAutoFit/>
-          </a:bodyPr>
-          <a:lstStyle/>
-          <a:p>
-            <a:pPr algn="l">
-              <a:lnSpc>
-                <a:spcPct val="105000"/>
-              </a:lnSpc>
-              <a:spcAft>
-                <a:spcPts val="200"/>
-              </a:spcAft>
-            </a:pPr>
-            <a:r>
-              <a:rPr sz="1500" b="1">
-                <a:solidFill>
-                  <a:srgbClr val="1F285A"/>
-                </a:solidFill>
-                <a:latin typeface="メイリオ"/>
-                <a:ea typeface="メイリオ"/>
-                <a:cs typeface="メイリオ"/>
-              </a:rPr>
-              <a:t>そのほかに伝えられること</a:t>
-            </a:r>
-          </a:p>
-        </p:txBody>
-      </p:sp>
-      <p:sp>
-        <p:nvSpPr>
-          <p:cNvPr id="41" name="Rounded Rectangle 40"/>
-          <p:cNvSpPr/>
-          <p:nvPr/>
-        </p:nvSpPr>
-        <p:spPr>
-          <a:xfrm>
-            <a:off x="770400" y="4932000"/>
-            <a:ext cx="4143600" cy="756000"/>
-          </a:xfrm>
-          <a:prstGeom prst="roundRect">
-            <a:avLst>
-              <a:gd name="adj" fmla="val 8000"/>
-            </a:avLst>
-          </a:prstGeom>
-          <a:solidFill>
-            <a:srgbClr val="F4F7FF"/>
-          </a:solidFill>
-          <a:ln w="12700">
-            <a:solidFill>
-              <a:srgbClr val="D9D9D9"/>
-            </a:solidFill>
-          </a:ln>
-          <a:effectLst/>
-        </p:spPr>
-        <p:style>
-          <a:lnRef idx="1">
-            <a:schemeClr val="accent1"/>
-          </a:lnRef>
-          <a:fillRef idx="3">
-            <a:schemeClr val="accent1"/>
-          </a:fillRef>
-          <a:effectRef idx="0">
-            <a:schemeClr val="accent1"/>
-          </a:effectRef>
-          <a:fontRef idx="minor">
-            <a:schemeClr val="lt1"/>
-          </a:fontRef>
-        </p:style>
-        <p:txBody>
-          <a:bodyPr rtlCol="0" anchor="ctr" wrap="square" lIns="72000" tIns="36000" rIns="72000" bIns="36000"/>
-          <a:lstStyle/>
-          <a:p>
-            <a:pPr algn="ctr"/>
-          </a:p>
-        </p:txBody>
-      </p:sp>
-      <p:sp>
-        <p:nvSpPr>
-          <p:cNvPr id="42" name="Rectangle 41"/>
-          <p:cNvSpPr/>
-          <p:nvPr/>
-        </p:nvSpPr>
-        <p:spPr>
-          <a:xfrm>
-            <a:off x="770400" y="4932000"/>
-            <a:ext cx="64800" cy="756000"/>
-          </a:xfrm>
-          <a:prstGeom prst="rect">
-            <a:avLst/>
-          </a:prstGeom>
-          <a:solidFill>
-            <a:srgbClr val="1F285A"/>
-          </a:solidFill>
-          <a:ln>
-            <a:noFill/>
-          </a:ln>
-          <a:effectLst/>
-        </p:spPr>
-        <p:style>
-          <a:lnRef idx="1">
-            <a:schemeClr val="accent1"/>
-          </a:lnRef>
-          <a:fillRef idx="3">
-            <a:schemeClr val="accent1"/>
-          </a:fillRef>
-          <a:effectRef idx="0">
-            <a:schemeClr val="accent1"/>
-          </a:effectRef>
-          <a:fontRef idx="minor">
-            <a:schemeClr val="lt1"/>
-          </a:fontRef>
-        </p:style>
-        <p:txBody>
-          <a:bodyPr rtlCol="0" anchor="ctr" wrap="square" lIns="72000" tIns="18000" rIns="72000" bIns="18000"/>
-          <a:lstStyle/>
-          <a:p>
-            <a:pPr algn="ctr"/>
-          </a:p>
-        </p:txBody>
-      </p:sp>
-      <p:sp>
-        <p:nvSpPr>
-          <p:cNvPr id="43" name="TextBox 42"/>
-          <p:cNvSpPr txBox="1"/>
-          <p:nvPr/>
-        </p:nvSpPr>
-        <p:spPr>
-          <a:xfrm>
-            <a:off x="950400" y="4986000"/>
-            <a:ext cx="864000" cy="648000"/>
+            <a:off x="5310000" y="5706000"/>
+            <a:ext cx="864000" cy="612000"/>
           </a:xfrm>
           <a:prstGeom prst="rect">
             <a:avLst/>
@@ -7276,222 +7908,21 @@
                 <a:ea typeface="メイリオ"/>
                 <a:cs typeface="メイリオ"/>
               </a:rPr>
-              <a:t>待遇</a:t>
-            </a:r>
-          </a:p>
-        </p:txBody>
-      </p:sp>
-      <p:sp>
-        <p:nvSpPr>
-          <p:cNvPr id="44" name="TextBox 43"/>
+              <a:t>安心材料</a:t>
+            </a:r>
+          </a:p>
+        </p:txBody>
+      </p:sp>
+      <p:sp>
+        <p:nvSpPr>
+          <p:cNvPr id="51" name="TextBox 50"/>
           <p:cNvSpPr txBox="1"/>
           <p:nvPr/>
         </p:nvSpPr>
         <p:spPr>
           <a:xfrm>
-            <a:off x="1778399" y="4986000"/>
-            <a:ext cx="3081599" cy="648000"/>
-          </a:xfrm>
-          <a:prstGeom prst="rect">
-            <a:avLst/>
-          </a:prstGeom>
-          <a:noFill/>
-        </p:spPr>
-        <p:txBody>
-          <a:bodyPr wrap="square" anchor="ctr" lIns="36000" rIns="36000" tIns="10800" bIns="10800">
-            <a:spAutoFit/>
-          </a:bodyPr>
-          <a:lstStyle/>
-          <a:p>
-            <a:pPr algn="l">
-              <a:lnSpc>
-                <a:spcPct val="105000"/>
-              </a:lnSpc>
-              <a:spcAft>
-                <a:spcPts val="200"/>
-              </a:spcAft>
-            </a:pPr>
-            <a:r>
-              <a:rPr sz="1300" b="0">
-                <a:solidFill>
-                  <a:srgbClr val="333333"/>
-                </a:solidFill>
-                <a:latin typeface="メイリオ"/>
-                <a:ea typeface="メイリオ"/>
-                <a:cs typeface="メイリオ"/>
-              </a:rPr>
-              <a:t>ガソリン代・駐車場代の全額支給</a:t>
-            </a:r>
-          </a:p>
-          <a:p>
-            <a:pPr algn="l">
-              <a:lnSpc>
-                <a:spcPct val="105000"/>
-              </a:lnSpc>
-              <a:spcAft>
-                <a:spcPts val="200"/>
-              </a:spcAft>
-            </a:pPr>
-            <a:r>
-              <a:rPr sz="1300" b="0">
-                <a:solidFill>
-                  <a:srgbClr val="333333"/>
-                </a:solidFill>
-                <a:latin typeface="メイリオ"/>
-                <a:ea typeface="メイリオ"/>
-                <a:cs typeface="メイリオ"/>
-              </a:rPr>
-              <a:t>空調服・ネッククーラー支給</a:t>
-            </a:r>
-          </a:p>
-        </p:txBody>
-      </p:sp>
-      <p:sp>
-        <p:nvSpPr>
-          <p:cNvPr id="45" name="Rounded Rectangle 44"/>
-          <p:cNvSpPr/>
-          <p:nvPr/>
-        </p:nvSpPr>
-        <p:spPr>
-          <a:xfrm>
-            <a:off x="5130000" y="4932000"/>
-            <a:ext cx="4143600" cy="756000"/>
-          </a:xfrm>
-          <a:prstGeom prst="roundRect">
-            <a:avLst>
-              <a:gd name="adj" fmla="val 8000"/>
-            </a:avLst>
-          </a:prstGeom>
-          <a:solidFill>
-            <a:srgbClr val="F4F7FF"/>
-          </a:solidFill>
-          <a:ln w="12700">
-            <a:solidFill>
-              <a:srgbClr val="D9D9D9"/>
-            </a:solidFill>
-          </a:ln>
-          <a:effectLst/>
-        </p:spPr>
-        <p:style>
-          <a:lnRef idx="1">
-            <a:schemeClr val="accent1"/>
-          </a:lnRef>
-          <a:fillRef idx="3">
-            <a:schemeClr val="accent1"/>
-          </a:fillRef>
-          <a:effectRef idx="0">
-            <a:schemeClr val="accent1"/>
-          </a:effectRef>
-          <a:fontRef idx="minor">
-            <a:schemeClr val="lt1"/>
-          </a:fontRef>
-        </p:style>
-        <p:txBody>
-          <a:bodyPr rtlCol="0" anchor="ctr" wrap="square" lIns="72000" tIns="36000" rIns="72000" bIns="36000"/>
-          <a:lstStyle/>
-          <a:p>
-            <a:pPr algn="ctr"/>
-          </a:p>
-        </p:txBody>
-      </p:sp>
-      <p:sp>
-        <p:nvSpPr>
-          <p:cNvPr id="46" name="Rectangle 45"/>
-          <p:cNvSpPr/>
-          <p:nvPr/>
-        </p:nvSpPr>
-        <p:spPr>
-          <a:xfrm>
-            <a:off x="5130000" y="4932000"/>
-            <a:ext cx="64800" cy="756000"/>
-          </a:xfrm>
-          <a:prstGeom prst="rect">
-            <a:avLst/>
-          </a:prstGeom>
-          <a:solidFill>
-            <a:srgbClr val="1F285A"/>
-          </a:solidFill>
-          <a:ln>
-            <a:noFill/>
-          </a:ln>
-          <a:effectLst/>
-        </p:spPr>
-        <p:style>
-          <a:lnRef idx="1">
-            <a:schemeClr val="accent1"/>
-          </a:lnRef>
-          <a:fillRef idx="3">
-            <a:schemeClr val="accent1"/>
-          </a:fillRef>
-          <a:effectRef idx="0">
-            <a:schemeClr val="accent1"/>
-          </a:effectRef>
-          <a:fontRef idx="minor">
-            <a:schemeClr val="lt1"/>
-          </a:fontRef>
-        </p:style>
-        <p:txBody>
-          <a:bodyPr rtlCol="0" anchor="ctr" wrap="square" lIns="72000" tIns="18000" rIns="72000" bIns="18000"/>
-          <a:lstStyle/>
-          <a:p>
-            <a:pPr algn="ctr"/>
-          </a:p>
-        </p:txBody>
-      </p:sp>
-      <p:sp>
-        <p:nvSpPr>
-          <p:cNvPr id="47" name="TextBox 46"/>
-          <p:cNvSpPr txBox="1"/>
-          <p:nvPr/>
-        </p:nvSpPr>
-        <p:spPr>
-          <a:xfrm>
-            <a:off x="5310000" y="4986000"/>
-            <a:ext cx="864000" cy="648000"/>
-          </a:xfrm>
-          <a:prstGeom prst="rect">
-            <a:avLst/>
-          </a:prstGeom>
-          <a:noFill/>
-        </p:spPr>
-        <p:txBody>
-          <a:bodyPr wrap="square" anchor="ctr" lIns="36000" rIns="36000" tIns="10800" bIns="10800">
-            <a:spAutoFit/>
-          </a:bodyPr>
-          <a:lstStyle/>
-          <a:p>
-            <a:pPr algn="l">
-              <a:lnSpc>
-                <a:spcPct val="105000"/>
-              </a:lnSpc>
-              <a:spcAft>
-                <a:spcPts val="200"/>
-              </a:spcAft>
-            </a:pPr>
-            <a:r>
-              <a:rPr sz="1400" b="1">
-                <a:solidFill>
-                  <a:srgbClr val="1F285A"/>
-                </a:solidFill>
-                <a:latin typeface="メイリオ"/>
-                <a:ea typeface="メイリオ"/>
-                <a:cs typeface="メイリオ"/>
-              </a:rPr>
-              <a:t>安心材料</a:t>
-            </a:r>
-          </a:p>
-        </p:txBody>
-      </p:sp>
-      <p:sp>
-        <p:nvSpPr>
-          <p:cNvPr id="48" name="TextBox 47"/>
-          <p:cNvSpPr txBox="1"/>
-          <p:nvPr/>
-        </p:nvSpPr>
-        <p:spPr>
-          <a:xfrm>
-            <a:off x="6138000" y="4986000"/>
-            <a:ext cx="3081599" cy="648000"/>
+            <a:off x="6138000" y="5706000"/>
+            <a:ext cx="3081599" cy="612000"/>
           </a:xfrm>
           <a:prstGeom prst="rect">
             <a:avLst/>

--- a/20261013_セキュリティー京葉御中_LINE採用追客のご提案.pptx
+++ b/20261013_セキュリティー京葉御中_LINE採用追客のご提案.pptx
@@ -3822,7 +3822,7 @@
         <p:spPr>
           <a:xfrm>
             <a:off x="770400" y="4662000"/>
-            <a:ext cx="4143600" cy="1224000"/>
+            <a:ext cx="4143600" cy="1044000"/>
           </a:xfrm>
           <a:prstGeom prst="roundRect">
             <a:avLst>
@@ -3870,7 +3870,7 @@
         <p:spPr>
           <a:xfrm>
             <a:off x="770400" y="4662000"/>
-            <a:ext cx="64800" cy="1224000"/>
+            <a:ext cx="64800" cy="1044000"/>
           </a:xfrm>
           <a:prstGeom prst="rect">
             <a:avLst/>
@@ -3958,7 +3958,7 @@
         <p:spPr>
           <a:xfrm>
             <a:off x="950400" y="5004000"/>
-            <a:ext cx="3855599" cy="827999"/>
+            <a:ext cx="3855599" cy="648000"/>
           </a:xfrm>
           <a:prstGeom prst="rect">
             <a:avLst/>
@@ -4023,7 +4023,7 @@
         <p:spPr>
           <a:xfrm>
             <a:off x="5130000" y="4662000"/>
-            <a:ext cx="4143600" cy="1224000"/>
+            <a:ext cx="4143600" cy="1044000"/>
           </a:xfrm>
           <a:prstGeom prst="roundRect">
             <a:avLst>
@@ -4071,7 +4071,7 @@
         <p:spPr>
           <a:xfrm>
             <a:off x="5130000" y="4662000"/>
-            <a:ext cx="64800" cy="1224000"/>
+            <a:ext cx="64800" cy="1044000"/>
           </a:xfrm>
           <a:prstGeom prst="rect">
             <a:avLst/>
@@ -4145,7 +4145,7 @@
                 <a:ea typeface="メイリオ"/>
                 <a:cs typeface="メイリオ"/>
               </a:rPr>
-              <a:t>再アプローチ上の課題（仮説）</a:t>
+              <a:t>再アプローチの課題</a:t>
             </a:r>
           </a:p>
         </p:txBody>
@@ -4159,7 +4159,7 @@
         <p:spPr>
           <a:xfrm>
             <a:off x="5310000" y="5004000"/>
-            <a:ext cx="3855599" cy="827999"/>
+            <a:ext cx="3855599" cy="648000"/>
           </a:xfrm>
           <a:prstGeom prst="rect">
             <a:avLst/>
@@ -4189,7 +4189,7 @@
                 <a:ea typeface="メイリオ"/>
                 <a:cs typeface="メイリオ"/>
               </a:rPr>
-              <a:t>電話・メールだけでは継続的な連絡に</a:t>
+              <a:t>電話・メールでは、一度外れた方に</a:t>
             </a:r>
           </a:p>
           <a:p>
@@ -4210,28 +4210,7 @@
                 <a:ea typeface="メイリオ"/>
                 <a:cs typeface="メイリオ"/>
               </a:rPr>
-              <a:t>工数がかかり、相手からの反応に</a:t>
-            </a:r>
-          </a:p>
-          <a:p>
-            <a:pPr algn="l">
-              <a:lnSpc>
-                <a:spcPct val="105000"/>
-              </a:lnSpc>
-              <a:spcAft>
-                <a:spcPts val="200"/>
-              </a:spcAft>
-            </a:pPr>
-            <a:r>
-              <a:rPr sz="1500" b="1">
-                <a:solidFill>
-                  <a:srgbClr val="333333"/>
-                </a:solidFill>
-                <a:latin typeface="メイリオ"/>
-                <a:ea typeface="メイリオ"/>
-                <a:cs typeface="メイリオ"/>
-              </a:rPr>
-              <a:t>つながりにくい可能性がある</a:t>
+              <a:t>連絡を続けにくい</a:t>
             </a:r>
           </a:p>
         </p:txBody>
@@ -7325,7 +7304,7 @@
                 <a:ea typeface="メイリオ"/>
                 <a:cs typeface="メイリオ"/>
               </a:rPr>
-              <a:t>「柏・松戸・熊谷で現場があります。応募・面接予約はこちら」</a:t>
+              <a:t>「ご希望に合う現場・日程をご案内します。応募・面接予約はこちら」</a:t>
             </a:r>
           </a:p>
         </p:txBody>
@@ -7387,7 +7366,7 @@
         <p:spPr>
           <a:xfrm>
             <a:off x="860400" y="4878000"/>
-            <a:ext cx="1655999" cy="306000"/>
+            <a:ext cx="1944000" cy="306000"/>
           </a:xfrm>
           <a:prstGeom prst="roundRect">
             <a:avLst>
@@ -7439,7 +7418,7 @@
                 <a:ea typeface="メイリオ"/>
                 <a:cs typeface="メイリオ"/>
               </a:rPr>
-              <a:t>14日以降（別施策）</a:t>
+              <a:t>14日以降（企画配信）</a:t>
             </a:r>
           </a:p>
         </p:txBody>
@@ -7452,8 +7431,8 @@
         </p:nvSpPr>
         <p:spPr>
           <a:xfrm>
-            <a:off x="2624400" y="4806000"/>
-            <a:ext cx="6559200" cy="450000"/>
+            <a:off x="2912400" y="4806000"/>
+            <a:ext cx="6271200" cy="450000"/>
           </a:xfrm>
           <a:prstGeom prst="rect">
             <a:avLst/>
@@ -7483,7 +7462,7 @@
                 <a:ea typeface="メイリオ"/>
                 <a:cs typeface="メイリオ"/>
               </a:rPr>
-              <a:t>月1回程度の企画配信（募集・現場のお知らせなど）で、継続的に接点を維持</a:t>
+              <a:t>新しい現場・募集が出るたびに、希望勤務地・勤務条件のタグごとに配信</a:t>
             </a:r>
           </a:p>
         </p:txBody>

--- a/20261013_セキュリティー京葉御中_LINE採用追客のご提案.pptx
+++ b/20261013_セキュリティー京葉御中_LINE採用追客のご提案.pptx
@@ -4189,7 +4189,7 @@
                 <a:ea typeface="メイリオ"/>
                 <a:cs typeface="メイリオ"/>
               </a:rPr>
-              <a:t>電話・メールでは、一度外れた方に</a:t>
+              <a:t>一人ずつの連絡は手間がかかり、</a:t>
             </a:r>
           </a:p>
           <a:p>
@@ -4210,7 +4210,7 @@
                 <a:ea typeface="メイリオ"/>
                 <a:cs typeface="メイリオ"/>
               </a:rPr>
-              <a:t>連絡を続けにくい</a:t>
+              <a:t>次の募集を届け続ける仕組みがない</a:t>
             </a:r>
           </a:p>
         </p:txBody>

--- a/20261013_セキュリティー京葉御中_LINE採用追客のご提案.pptx
+++ b/20261013_セキュリティー京葉御中_LINE採用追客のご提案.pptx
@@ -3822,7 +3822,7 @@
         <p:spPr>
           <a:xfrm>
             <a:off x="770400" y="4662000"/>
-            <a:ext cx="4143600" cy="1044000"/>
+            <a:ext cx="4143600" cy="1224000"/>
           </a:xfrm>
           <a:prstGeom prst="roundRect">
             <a:avLst>
@@ -3870,7 +3870,7 @@
         <p:spPr>
           <a:xfrm>
             <a:off x="770400" y="4662000"/>
-            <a:ext cx="64800" cy="1044000"/>
+            <a:ext cx="64800" cy="1224000"/>
           </a:xfrm>
           <a:prstGeom prst="rect">
             <a:avLst/>
@@ -3958,7 +3958,7 @@
         <p:spPr>
           <a:xfrm>
             <a:off x="950400" y="5004000"/>
-            <a:ext cx="3855599" cy="648000"/>
+            <a:ext cx="3855599" cy="827999"/>
           </a:xfrm>
           <a:prstGeom prst="rect">
             <a:avLst/>
@@ -4023,7 +4023,7 @@
         <p:spPr>
           <a:xfrm>
             <a:off x="5130000" y="4662000"/>
-            <a:ext cx="4143600" cy="1044000"/>
+            <a:ext cx="4143600" cy="1224000"/>
           </a:xfrm>
           <a:prstGeom prst="roundRect">
             <a:avLst>
@@ -4071,7 +4071,7 @@
         <p:spPr>
           <a:xfrm>
             <a:off x="5130000" y="4662000"/>
-            <a:ext cx="64800" cy="1044000"/>
+            <a:ext cx="64800" cy="1224000"/>
           </a:xfrm>
           <a:prstGeom prst="rect">
             <a:avLst/>
@@ -4159,7 +4159,7 @@
         <p:spPr>
           <a:xfrm>
             <a:off x="5310000" y="5004000"/>
-            <a:ext cx="3855599" cy="648000"/>
+            <a:ext cx="3855599" cy="827999"/>
           </a:xfrm>
           <a:prstGeom prst="rect">
             <a:avLst/>
@@ -4189,7 +4189,28 @@
                 <a:ea typeface="メイリオ"/>
                 <a:cs typeface="メイリオ"/>
               </a:rPr>
-              <a:t>一人ずつの連絡は手間がかかり、</a:t>
+              <a:t>メール・電話での一人ずつの連絡は</a:t>
+            </a:r>
+          </a:p>
+          <a:p>
+            <a:pPr algn="l">
+              <a:lnSpc>
+                <a:spcPct val="105000"/>
+              </a:lnSpc>
+              <a:spcAft>
+                <a:spcPts val="200"/>
+              </a:spcAft>
+            </a:pPr>
+            <a:r>
+              <a:rPr sz="1500" b="1">
+                <a:solidFill>
+                  <a:srgbClr val="333333"/>
+                </a:solidFill>
+                <a:latin typeface="メイリオ"/>
+                <a:ea typeface="メイリオ"/>
+                <a:cs typeface="メイリオ"/>
+              </a:rPr>
+              <a:t>手間がかかり、</a:t>
             </a:r>
           </a:p>
           <a:p>

--- a/20261013_セキュリティー京葉御中_LINE採用追客のご提案.pptx
+++ b/20261013_セキュリティー京葉御中_LINE採用追客のご提案.pptx
@@ -12060,7 +12060,7 @@
                 <a:ea typeface="メイリオ"/>
                 <a:cs typeface="メイリオ"/>
               </a:rPr>
-              <a:t>初期構築費10万円・月額費用30万円で、開設から運用・改善まで支援</a:t>
+              <a:t>初期構築費10万円・月額費用20万円で、開設から運用・改善まで支援</a:t>
             </a:r>
             <a:endParaRPr sz="1050" dirty="0">
               <a:solidFill>
@@ -12614,7 +12614,7 @@
                 <a:ea typeface="メイリオ"/>
                 <a:cs typeface="メイリオ"/>
               </a:rPr>
-              <a:t>300,000円</a:t>
+              <a:t>200,000円</a:t>
             </a:r>
           </a:p>
         </p:txBody>

--- a/20261013_セキュリティー京葉御中_LINE採用追客のご提案.pptx
+++ b/20261013_セキュリティー京葉御中_LINE採用追客のご提案.pptx
@@ -4293,7 +4293,7 @@
                 <a:ea typeface="メイリオ"/>
                 <a:cs typeface="メイリオ"/>
               </a:rPr>
-              <a:t>方針｜過去の応募者をLINEでつなぎ、追い続ける</a:t>
+              <a:t>方針｜応募の時点でLINEにつなぎ、追い続ける</a:t>
             </a:r>
             <a:endParaRPr sz="1600" b="1" dirty="0">
               <a:solidFill>
@@ -4342,7 +4342,7 @@
                 <a:ea typeface="メイリオ"/>
                 <a:cs typeface="メイリオ"/>
               </a:rPr>
-              <a:t>面接に来なかった方・辞退した方をLINEでつなぎ、応募・面接予約まで追う</a:t>
+              <a:t>応募時からLINEでつながり、外れても応募・面接予約まで追い続ける</a:t>
             </a:r>
             <a:endParaRPr sz="1050" dirty="0">
               <a:solidFill>
@@ -4486,8 +4486,8 @@
         </p:nvSpPr>
         <p:spPr>
           <a:xfrm>
-            <a:off x="644400" y="2412000"/>
-            <a:ext cx="2880000" cy="2304000"/>
+            <a:off x="644400" y="2034000"/>
+            <a:ext cx="2736000" cy="1800000"/>
           </a:xfrm>
           <a:prstGeom prst="roundRect">
             <a:avLst>
@@ -4497,7 +4497,7 @@
           <a:solidFill>
             <a:srgbClr val="FFFFFF"/>
           </a:solidFill>
-          <a:ln w="15875">
+          <a:ln w="19050">
             <a:solidFill>
               <a:srgbClr val="1F285A"/>
             </a:solidFill>
@@ -4534,8 +4534,8 @@
         </p:nvSpPr>
         <p:spPr>
           <a:xfrm>
-            <a:off x="644400" y="2412000"/>
-            <a:ext cx="2880000" cy="360000"/>
+            <a:off x="644400" y="2034000"/>
+            <a:ext cx="2736000" cy="342000"/>
           </a:xfrm>
           <a:prstGeom prst="rect">
             <a:avLst/>
@@ -4575,7 +4575,7 @@
               </a:spcAft>
             </a:pPr>
             <a:r>
-              <a:rPr sz="1500" b="1">
+              <a:rPr sz="1350" b="1">
                 <a:solidFill>
                   <a:srgbClr val="FFFFFF"/>
                 </a:solidFill>
@@ -4583,7 +4583,7 @@
                 <a:ea typeface="メイリオ"/>
                 <a:cs typeface="メイリオ"/>
               </a:rPr>
-              <a:t>過去の応募者</a:t>
+              <a:t>入口①　応募したとき（主）</a:t>
             </a:r>
           </a:p>
         </p:txBody>
@@ -4596,8 +4596,8 @@
         </p:nvSpPr>
         <p:spPr>
           <a:xfrm>
-            <a:off x="806400" y="2898000"/>
-            <a:ext cx="2556000" cy="576000"/>
+            <a:off x="770400" y="2430000"/>
+            <a:ext cx="2484000" cy="270000"/>
           </a:xfrm>
           <a:prstGeom prst="rect">
             <a:avLst/>
@@ -4619,7 +4619,7 @@
               </a:spcAft>
             </a:pPr>
             <a:r>
-              <a:rPr sz="1600" b="1">
+              <a:rPr sz="1550" b="1">
                 <a:solidFill>
                   <a:srgbClr val="1F285A"/>
                 </a:solidFill>
@@ -4627,28 +4627,7 @@
                 <a:ea typeface="メイリオ"/>
                 <a:cs typeface="メイリオ"/>
               </a:rPr>
-              <a:t>面接に来なかった方・</a:t>
-            </a:r>
-          </a:p>
-          <a:p>
-            <a:pPr algn="l">
-              <a:lnSpc>
-                <a:spcPct val="105000"/>
-              </a:lnSpc>
-              <a:spcAft>
-                <a:spcPts val="200"/>
-              </a:spcAft>
-            </a:pPr>
-            <a:r>
-              <a:rPr sz="1600" b="1">
-                <a:solidFill>
-                  <a:srgbClr val="1F285A"/>
-                </a:solidFill>
-                <a:latin typeface="メイリオ"/>
-                <a:ea typeface="メイリオ"/>
-                <a:cs typeface="メイリオ"/>
-              </a:rPr>
-              <a:t>辞退した方</a:t>
+              <a:t>これから応募する方</a:t>
             </a:r>
           </a:p>
         </p:txBody>
@@ -4661,8 +4640,8 @@
         </p:nvSpPr>
         <p:spPr>
           <a:xfrm>
-            <a:off x="806400" y="3581999"/>
-            <a:ext cx="2556000" cy="1007999"/>
+            <a:off x="770400" y="2700000"/>
+            <a:ext cx="2484000" cy="468000"/>
           </a:xfrm>
           <a:prstGeom prst="rect">
             <a:avLst/>
@@ -4684,7 +4663,7 @@
               </a:spcAft>
             </a:pPr>
             <a:r>
-              <a:rPr sz="1450" b="0">
+              <a:rPr sz="1350" b="0">
                 <a:solidFill>
                   <a:srgbClr val="333333"/>
                 </a:solidFill>
@@ -4692,6 +4671,333 @@
                 <a:ea typeface="メイリオ"/>
                 <a:cs typeface="メイリオ"/>
               </a:rPr>
+              <a:t>採用管理サービスのSMSで</a:t>
+            </a:r>
+          </a:p>
+          <a:p>
+            <a:pPr algn="l">
+              <a:lnSpc>
+                <a:spcPct val="105000"/>
+              </a:lnSpc>
+              <a:spcAft>
+                <a:spcPts val="200"/>
+              </a:spcAft>
+            </a:pPr>
+            <a:r>
+              <a:rPr sz="1350" b="0">
+                <a:solidFill>
+                  <a:srgbClr val="333333"/>
+                </a:solidFill>
+                <a:latin typeface="メイリオ"/>
+                <a:ea typeface="メイリオ"/>
+                <a:cs typeface="メイリオ"/>
+              </a:rPr>
+              <a:t>LINEの友だち追加をご案内</a:t>
+            </a:r>
+          </a:p>
+        </p:txBody>
+      </p:sp>
+      <p:sp>
+        <p:nvSpPr>
+          <p:cNvPr id="12" name="Rounded Rectangle 11"/>
+          <p:cNvSpPr/>
+          <p:nvPr/>
+        </p:nvSpPr>
+        <p:spPr>
+          <a:xfrm>
+            <a:off x="770400" y="3221999"/>
+            <a:ext cx="2484000" cy="522000"/>
+          </a:xfrm>
+          <a:prstGeom prst="roundRect">
+            <a:avLst>
+              <a:gd name="adj" fmla="val 8000"/>
+            </a:avLst>
+          </a:prstGeom>
+          <a:solidFill>
+            <a:srgbClr val="E8F8EE"/>
+          </a:solidFill>
+          <a:ln w="12700">
+            <a:solidFill>
+              <a:srgbClr val="06C755"/>
+            </a:solidFill>
+          </a:ln>
+          <a:effectLst/>
+        </p:spPr>
+        <p:style>
+          <a:lnRef idx="1">
+            <a:schemeClr val="accent1"/>
+          </a:lnRef>
+          <a:fillRef idx="3">
+            <a:schemeClr val="accent1"/>
+          </a:fillRef>
+          <a:effectRef idx="0">
+            <a:schemeClr val="accent1"/>
+          </a:effectRef>
+          <a:fontRef idx="minor">
+            <a:schemeClr val="lt1"/>
+          </a:fontRef>
+        </p:style>
+        <p:txBody>
+          <a:bodyPr rtlCol="0" anchor="ctr" wrap="square" lIns="54000" tIns="18000" rIns="54000" bIns="18000"/>
+          <a:lstStyle/>
+          <a:p>
+            <a:pPr algn="ctr">
+              <a:lnSpc>
+                <a:spcPct val="110000"/>
+              </a:lnSpc>
+              <a:spcAft>
+                <a:spcPts val="0"/>
+              </a:spcAft>
+            </a:pPr>
+            <a:r>
+              <a:rPr sz="1250" b="1">
+                <a:solidFill>
+                  <a:srgbClr val="0B7A3B"/>
+                </a:solidFill>
+                <a:latin typeface="メイリオ"/>
+                <a:ea typeface="メイリオ"/>
+                <a:cs typeface="メイリオ"/>
+              </a:rPr>
+              <a:t>「面接の日程・場所は</a:t>
+            </a:r>
+          </a:p>
+          <a:p>
+            <a:pPr algn="ctr">
+              <a:lnSpc>
+                <a:spcPct val="110000"/>
+              </a:lnSpc>
+              <a:spcAft>
+                <a:spcPts val="0"/>
+              </a:spcAft>
+            </a:pPr>
+            <a:r>
+              <a:rPr sz="1250" b="1">
+                <a:solidFill>
+                  <a:srgbClr val="0B7A3B"/>
+                </a:solidFill>
+                <a:latin typeface="メイリオ"/>
+                <a:ea typeface="メイリオ"/>
+                <a:cs typeface="メイリオ"/>
+              </a:rPr>
+              <a:t>LINEでお送りします」</a:t>
+            </a:r>
+          </a:p>
+        </p:txBody>
+      </p:sp>
+      <p:sp>
+        <p:nvSpPr>
+          <p:cNvPr id="13" name="Rounded Rectangle 12"/>
+          <p:cNvSpPr/>
+          <p:nvPr/>
+        </p:nvSpPr>
+        <p:spPr>
+          <a:xfrm>
+            <a:off x="644400" y="3960000"/>
+            <a:ext cx="2736000" cy="1548000"/>
+          </a:xfrm>
+          <a:prstGeom prst="roundRect">
+            <a:avLst>
+              <a:gd name="adj" fmla="val 8000"/>
+            </a:avLst>
+          </a:prstGeom>
+          <a:solidFill>
+            <a:srgbClr val="FFFFFF"/>
+          </a:solidFill>
+          <a:ln w="15875">
+            <a:solidFill>
+              <a:srgbClr val="8E9BC4"/>
+            </a:solidFill>
+          </a:ln>
+          <a:effectLst/>
+        </p:spPr>
+        <p:style>
+          <a:lnRef idx="1">
+            <a:schemeClr val="accent1"/>
+          </a:lnRef>
+          <a:fillRef idx="3">
+            <a:schemeClr val="accent1"/>
+          </a:fillRef>
+          <a:effectRef idx="0">
+            <a:schemeClr val="accent1"/>
+          </a:effectRef>
+          <a:fontRef idx="minor">
+            <a:schemeClr val="lt1"/>
+          </a:fontRef>
+        </p:style>
+        <p:txBody>
+          <a:bodyPr rtlCol="0" anchor="ctr" wrap="square" lIns="72000" tIns="36000" rIns="72000" bIns="36000"/>
+          <a:lstStyle/>
+          <a:p>
+            <a:pPr algn="ctr"/>
+          </a:p>
+        </p:txBody>
+      </p:sp>
+      <p:sp>
+        <p:nvSpPr>
+          <p:cNvPr id="14" name="Rectangle 13"/>
+          <p:cNvSpPr/>
+          <p:nvPr/>
+        </p:nvSpPr>
+        <p:spPr>
+          <a:xfrm>
+            <a:off x="644400" y="3960000"/>
+            <a:ext cx="2736000" cy="342000"/>
+          </a:xfrm>
+          <a:prstGeom prst="rect">
+            <a:avLst/>
+          </a:prstGeom>
+          <a:solidFill>
+            <a:srgbClr val="8E9BC4"/>
+          </a:solidFill>
+          <a:ln>
+            <a:noFill/>
+          </a:ln>
+          <a:effectLst/>
+        </p:spPr>
+        <p:style>
+          <a:lnRef idx="1">
+            <a:schemeClr val="accent1"/>
+          </a:lnRef>
+          <a:fillRef idx="3">
+            <a:schemeClr val="accent1"/>
+          </a:fillRef>
+          <a:effectRef idx="0">
+            <a:schemeClr val="accent1"/>
+          </a:effectRef>
+          <a:fontRef idx="minor">
+            <a:schemeClr val="lt1"/>
+          </a:fontRef>
+        </p:style>
+        <p:txBody>
+          <a:bodyPr rtlCol="0" anchor="ctr" wrap="square" lIns="72000" tIns="18000" rIns="72000" bIns="18000"/>
+          <a:lstStyle/>
+          <a:p>
+            <a:pPr algn="ctr">
+              <a:lnSpc>
+                <a:spcPct val="110000"/>
+              </a:lnSpc>
+              <a:spcAft>
+                <a:spcPts val="0"/>
+              </a:spcAft>
+            </a:pPr>
+            <a:r>
+              <a:rPr sz="1350" b="1">
+                <a:solidFill>
+                  <a:srgbClr val="FFFFFF"/>
+                </a:solidFill>
+                <a:latin typeface="メイリオ"/>
+                <a:ea typeface="メイリオ"/>
+                <a:cs typeface="メイリオ"/>
+              </a:rPr>
+              <a:t>入口②　過去の応募者（補助）</a:t>
+            </a:r>
+          </a:p>
+        </p:txBody>
+      </p:sp>
+      <p:sp>
+        <p:nvSpPr>
+          <p:cNvPr id="15" name="TextBox 14"/>
+          <p:cNvSpPr txBox="1"/>
+          <p:nvPr/>
+        </p:nvSpPr>
+        <p:spPr>
+          <a:xfrm>
+            <a:off x="770400" y="4356000"/>
+            <a:ext cx="2484000" cy="468000"/>
+          </a:xfrm>
+          <a:prstGeom prst="rect">
+            <a:avLst/>
+          </a:prstGeom>
+          <a:noFill/>
+        </p:spPr>
+        <p:txBody>
+          <a:bodyPr wrap="square" anchor="t" lIns="36000" rIns="36000" tIns="10800" bIns="10800">
+            <a:spAutoFit/>
+          </a:bodyPr>
+          <a:lstStyle/>
+          <a:p>
+            <a:pPr algn="l">
+              <a:lnSpc>
+                <a:spcPct val="105000"/>
+              </a:lnSpc>
+              <a:spcAft>
+                <a:spcPts val="200"/>
+              </a:spcAft>
+            </a:pPr>
+            <a:r>
+              <a:rPr sz="1450" b="1">
+                <a:solidFill>
+                  <a:srgbClr val="1F285A"/>
+                </a:solidFill>
+                <a:latin typeface="メイリオ"/>
+                <a:ea typeface="メイリオ"/>
+                <a:cs typeface="メイリオ"/>
+              </a:rPr>
+              <a:t>面接に来なかった方・</a:t>
+            </a:r>
+          </a:p>
+          <a:p>
+            <a:pPr algn="l">
+              <a:lnSpc>
+                <a:spcPct val="105000"/>
+              </a:lnSpc>
+              <a:spcAft>
+                <a:spcPts val="200"/>
+              </a:spcAft>
+            </a:pPr>
+            <a:r>
+              <a:rPr sz="1450" b="1">
+                <a:solidFill>
+                  <a:srgbClr val="1F285A"/>
+                </a:solidFill>
+                <a:latin typeface="メイリオ"/>
+                <a:ea typeface="メイリオ"/>
+                <a:cs typeface="メイリオ"/>
+              </a:rPr>
+              <a:t>辞退した方</a:t>
+            </a:r>
+          </a:p>
+        </p:txBody>
+      </p:sp>
+      <p:sp>
+        <p:nvSpPr>
+          <p:cNvPr id="16" name="TextBox 15"/>
+          <p:cNvSpPr txBox="1"/>
+          <p:nvPr/>
+        </p:nvSpPr>
+        <p:spPr>
+          <a:xfrm>
+            <a:off x="770400" y="4896000"/>
+            <a:ext cx="2484000" cy="468000"/>
+          </a:xfrm>
+          <a:prstGeom prst="rect">
+            <a:avLst/>
+          </a:prstGeom>
+          <a:noFill/>
+        </p:spPr>
+        <p:txBody>
+          <a:bodyPr wrap="square" anchor="t" lIns="36000" rIns="36000" tIns="10800" bIns="10800">
+            <a:spAutoFit/>
+          </a:bodyPr>
+          <a:lstStyle/>
+          <a:p>
+            <a:pPr algn="l">
+              <a:lnSpc>
+                <a:spcPct val="105000"/>
+              </a:lnSpc>
+              <a:spcAft>
+                <a:spcPts val="200"/>
+              </a:spcAft>
+            </a:pPr>
+            <a:r>
+              <a:rPr sz="1350" b="0">
+                <a:solidFill>
+                  <a:srgbClr val="333333"/>
+                </a:solidFill>
+                <a:latin typeface="メイリオ"/>
+                <a:ea typeface="メイリオ"/>
+                <a:cs typeface="メイリオ"/>
+              </a:rPr>
               <a:t>SMS・メール等で</a:t>
             </a:r>
           </a:p>
@@ -4705,7 +5011,7 @@
               </a:spcAft>
             </a:pPr>
             <a:r>
-              <a:rPr sz="1450" b="0">
+              <a:rPr sz="1350" b="0">
                 <a:solidFill>
                   <a:srgbClr val="333333"/>
                 </a:solidFill>
@@ -4713,42 +5019,126 @@
                 <a:ea typeface="メイリオ"/>
                 <a:cs typeface="メイリオ"/>
               </a:rPr>
-              <a:t>LINEの友だち追加を</a:t>
-            </a:r>
-          </a:p>
-          <a:p>
-            <a:pPr algn="l">
-              <a:lnSpc>
-                <a:spcPct val="105000"/>
-              </a:lnSpc>
-              <a:spcAft>
-                <a:spcPts val="200"/>
-              </a:spcAft>
-            </a:pPr>
-            <a:r>
-              <a:rPr sz="1450" b="0">
-                <a:solidFill>
-                  <a:srgbClr val="333333"/>
-                </a:solidFill>
-                <a:latin typeface="メイリオ"/>
-                <a:ea typeface="メイリオ"/>
-                <a:cs typeface="メイリオ"/>
-              </a:rPr>
-              <a:t>ご案内</a:t>
+              <a:t>LINEの友だち追加をご案内</a:t>
             </a:r>
           </a:p>
         </p:txBody>
       </p:sp>
       <p:cxnSp>
         <p:nvCxnSpPr>
-          <p:cNvPr id="12" name="Connector 11"/>
+          <p:cNvPr id="17" name="Connector 16"/>
           <p:cNvCxnSpPr/>
           <p:nvPr/>
         </p:nvCxnSpPr>
         <p:spPr>
           <a:xfrm>
-            <a:off x="3553199" y="3564000"/>
-            <a:ext cx="212400" cy="0"/>
+            <a:off x="3380400" y="2934000"/>
+            <a:ext cx="180000" cy="0"/>
+          </a:xfrm>
+          <a:prstGeom prst="line">
+            <a:avLst/>
+          </a:prstGeom>
+          <a:ln w="25400">
+            <a:solidFill>
+              <a:srgbClr val="1F285A"/>
+            </a:solidFill>
+          </a:ln>
+        </p:spPr>
+        <p:style>
+          <a:lnRef idx="2">
+            <a:schemeClr val="accent1"/>
+          </a:lnRef>
+          <a:fillRef idx="0">
+            <a:schemeClr val="accent1"/>
+          </a:fillRef>
+          <a:effectRef idx="0">
+            <a:schemeClr val="accent1"/>
+          </a:effectRef>
+          <a:fontRef idx="minor">
+            <a:schemeClr val="tx1"/>
+          </a:fontRef>
+        </p:style>
+      </p:cxnSp>
+      <p:cxnSp>
+        <p:nvCxnSpPr>
+          <p:cNvPr id="18" name="Connector 17"/>
+          <p:cNvCxnSpPr/>
+          <p:nvPr/>
+        </p:nvCxnSpPr>
+        <p:spPr>
+          <a:xfrm>
+            <a:off x="3380400" y="4734000"/>
+            <a:ext cx="180000" cy="0"/>
+          </a:xfrm>
+          <a:prstGeom prst="line">
+            <a:avLst/>
+          </a:prstGeom>
+          <a:ln w="25400">
+            <a:solidFill>
+              <a:srgbClr val="1F285A"/>
+            </a:solidFill>
+          </a:ln>
+        </p:spPr>
+        <p:style>
+          <a:lnRef idx="2">
+            <a:schemeClr val="accent1"/>
+          </a:lnRef>
+          <a:fillRef idx="0">
+            <a:schemeClr val="accent1"/>
+          </a:fillRef>
+          <a:effectRef idx="0">
+            <a:schemeClr val="accent1"/>
+          </a:effectRef>
+          <a:fontRef idx="minor">
+            <a:schemeClr val="tx1"/>
+          </a:fontRef>
+        </p:style>
+      </p:cxnSp>
+      <p:cxnSp>
+        <p:nvCxnSpPr>
+          <p:cNvPr id="19" name="Connector 18"/>
+          <p:cNvCxnSpPr/>
+          <p:nvPr/>
+        </p:nvCxnSpPr>
+        <p:spPr>
+          <a:xfrm>
+            <a:off x="3560400" y="2934000"/>
+            <a:ext cx="0" cy="1800000"/>
+          </a:xfrm>
+          <a:prstGeom prst="line">
+            <a:avLst/>
+          </a:prstGeom>
+          <a:ln w="25400">
+            <a:solidFill>
+              <a:srgbClr val="1F285A"/>
+            </a:solidFill>
+          </a:ln>
+        </p:spPr>
+        <p:style>
+          <a:lnRef idx="2">
+            <a:schemeClr val="accent1"/>
+          </a:lnRef>
+          <a:fillRef idx="0">
+            <a:schemeClr val="accent1"/>
+          </a:fillRef>
+          <a:effectRef idx="0">
+            <a:schemeClr val="accent1"/>
+          </a:effectRef>
+          <a:fontRef idx="minor">
+            <a:schemeClr val="tx1"/>
+          </a:fontRef>
+        </p:style>
+      </p:cxnSp>
+      <p:cxnSp>
+        <p:nvCxnSpPr>
+          <p:cNvPr id="20" name="Connector 19"/>
+          <p:cNvCxnSpPr/>
+          <p:nvPr/>
+        </p:nvCxnSpPr>
+        <p:spPr>
+          <a:xfrm>
+            <a:off x="3560400" y="3834000"/>
+            <a:ext cx="223200" cy="0"/>
           </a:xfrm>
           <a:prstGeom prst="line">
             <a:avLst/>
@@ -4777,13 +5167,13 @@
       </p:cxnSp>
       <p:sp>
         <p:nvSpPr>
-          <p:cNvPr id="13" name="Rounded Rectangle 12"/>
+          <p:cNvPr id="21" name="Rounded Rectangle 20"/>
           <p:cNvSpPr/>
           <p:nvPr/>
         </p:nvSpPr>
         <p:spPr>
           <a:xfrm>
-            <a:off x="3794399" y="3096000"/>
+            <a:off x="3812400" y="3366000"/>
             <a:ext cx="1260000" cy="936000"/>
           </a:xfrm>
           <a:prstGeom prst="roundRect">
@@ -4864,14 +5254,14 @@
       </p:sp>
       <p:cxnSp>
         <p:nvCxnSpPr>
-          <p:cNvPr id="14" name="Connector 13"/>
+          <p:cNvPr id="22" name="Connector 21"/>
           <p:cNvCxnSpPr/>
           <p:nvPr/>
         </p:nvCxnSpPr>
         <p:spPr>
           <a:xfrm>
-            <a:off x="5083200" y="3564000"/>
-            <a:ext cx="194399" cy="0"/>
+            <a:off x="5101200" y="3834000"/>
+            <a:ext cx="194400" cy="0"/>
           </a:xfrm>
           <a:prstGeom prst="line">
             <a:avLst/>
@@ -4900,13 +5290,13 @@
       </p:cxnSp>
       <p:sp>
         <p:nvSpPr>
-          <p:cNvPr id="15" name="Rounded Rectangle 14"/>
+          <p:cNvPr id="23" name="Rounded Rectangle 22"/>
           <p:cNvSpPr/>
           <p:nvPr/>
         </p:nvSpPr>
         <p:spPr>
           <a:xfrm>
-            <a:off x="5306399" y="2664000"/>
+            <a:off x="5324400" y="2934000"/>
             <a:ext cx="2088000" cy="1800000"/>
           </a:xfrm>
           <a:prstGeom prst="roundRect">
@@ -5029,13 +5419,13 @@
       </p:sp>
       <p:cxnSp>
         <p:nvCxnSpPr>
-          <p:cNvPr id="16" name="Connector 15"/>
+          <p:cNvPr id="24" name="Connector 23"/>
           <p:cNvCxnSpPr/>
           <p:nvPr/>
         </p:nvCxnSpPr>
         <p:spPr>
           <a:xfrm>
-            <a:off x="7423199" y="3042000"/>
+            <a:off x="7441199" y="3312000"/>
             <a:ext cx="212401" cy="0"/>
           </a:xfrm>
           <a:prstGeom prst="line">
@@ -5065,14 +5455,14 @@
       </p:cxnSp>
       <p:sp>
         <p:nvSpPr>
-          <p:cNvPr id="17" name="Rounded Rectangle 16"/>
+          <p:cNvPr id="25" name="Rounded Rectangle 24"/>
           <p:cNvSpPr/>
           <p:nvPr/>
         </p:nvSpPr>
         <p:spPr>
           <a:xfrm>
-            <a:off x="7664400" y="2664000"/>
-            <a:ext cx="1609200" cy="756000"/>
+            <a:off x="7682400" y="2934000"/>
+            <a:ext cx="1591200" cy="756000"/>
           </a:xfrm>
           <a:prstGeom prst="roundRect">
             <a:avLst>
@@ -5173,14 +5563,14 @@
       </p:sp>
       <p:sp>
         <p:nvSpPr>
-          <p:cNvPr id="18" name="Rounded Rectangle 17"/>
+          <p:cNvPr id="26" name="Rounded Rectangle 25"/>
           <p:cNvSpPr/>
           <p:nvPr/>
         </p:nvSpPr>
         <p:spPr>
           <a:xfrm>
-            <a:off x="7664400" y="3708000"/>
-            <a:ext cx="1609200" cy="756000"/>
+            <a:off x="7682400" y="3978000"/>
+            <a:ext cx="1591200" cy="756000"/>
           </a:xfrm>
           <a:prstGeom prst="roundRect">
             <a:avLst>
@@ -5260,13 +5650,13 @@
       </p:sp>
       <p:cxnSp>
         <p:nvCxnSpPr>
-          <p:cNvPr id="19" name="Connector 18"/>
+          <p:cNvPr id="27" name="Connector 26"/>
           <p:cNvCxnSpPr/>
           <p:nvPr/>
         </p:nvCxnSpPr>
         <p:spPr>
           <a:xfrm>
-            <a:off x="8469000" y="3448800"/>
+            <a:off x="8478000" y="3718800"/>
             <a:ext cx="0" cy="230400"/>
           </a:xfrm>
           <a:prstGeom prst="line">
@@ -5296,13 +5686,13 @@
       </p:cxnSp>
       <p:sp>
         <p:nvSpPr>
-          <p:cNvPr id="20" name="TextBox 19"/>
+          <p:cNvPr id="28" name="TextBox 27"/>
           <p:cNvSpPr txBox="1"/>
           <p:nvPr/>
         </p:nvSpPr>
         <p:spPr>
           <a:xfrm>
-            <a:off x="644400" y="5562000"/>
+            <a:off x="644400" y="5634000"/>
             <a:ext cx="8629200" cy="432000"/>
           </a:xfrm>
           <a:prstGeom prst="rect">
@@ -5354,7 +5744,7 @@
                 <a:ea typeface="メイリオ"/>
                 <a:cs typeface="メイリオ"/>
               </a:rPr>
-              <a:t>※今後の応募者も、応募完了後にLINEへご案内可能（採用管理サービスと連携できる場合）</a:t>
+              <a:t>※応募時のSMSは、採用管理サービスでの設定を確認のうえ実施</a:t>
             </a:r>
           </a:p>
         </p:txBody>
@@ -10680,7 +11070,7 @@
                 <a:ea typeface="メイリオ"/>
                 <a:cs typeface="メイリオ"/>
               </a:rPr>
-              <a:t>過去の応募者へ</a:t>
+              <a:t>応募時：</a:t>
             </a:r>
           </a:p>
           <a:p>
@@ -10701,6 +11091,69 @@
                 <a:ea typeface="メイリオ"/>
                 <a:cs typeface="メイリオ"/>
               </a:rPr>
+              <a:t>採用管理サービス</a:t>
+            </a:r>
+          </a:p>
+          <a:p>
+            <a:pPr algn="l">
+              <a:lnSpc>
+                <a:spcPct val="105000"/>
+              </a:lnSpc>
+              <a:spcAft>
+                <a:spcPts val="200"/>
+              </a:spcAft>
+            </a:pPr>
+            <a:r>
+              <a:rPr sz="1200" b="0">
+                <a:solidFill>
+                  <a:srgbClr val="333333"/>
+                </a:solidFill>
+                <a:latin typeface="メイリオ"/>
+                <a:ea typeface="メイリオ"/>
+                <a:cs typeface="メイリオ"/>
+              </a:rPr>
+              <a:t>のSMSでご案内</a:t>
+            </a:r>
+          </a:p>
+          <a:p>
+            <a:pPr algn="l">
+              <a:lnSpc>
+                <a:spcPct val="105000"/>
+              </a:lnSpc>
+              <a:spcAft>
+                <a:spcPts val="200"/>
+              </a:spcAft>
+            </a:pPr>
+            <a:r>
+              <a:rPr sz="1200" b="0">
+                <a:solidFill>
+                  <a:srgbClr val="333333"/>
+                </a:solidFill>
+                <a:latin typeface="メイリオ"/>
+                <a:ea typeface="メイリオ"/>
+                <a:cs typeface="メイリオ"/>
+              </a:rPr>
+              <a:t>過去の応募者：</a:t>
+            </a:r>
+          </a:p>
+          <a:p>
+            <a:pPr algn="l">
+              <a:lnSpc>
+                <a:spcPct val="105000"/>
+              </a:lnSpc>
+              <a:spcAft>
+                <a:spcPts val="200"/>
+              </a:spcAft>
+            </a:pPr>
+            <a:r>
+              <a:rPr sz="1200" b="0">
+                <a:solidFill>
+                  <a:srgbClr val="333333"/>
+                </a:solidFill>
+                <a:latin typeface="メイリオ"/>
+                <a:ea typeface="メイリオ"/>
+                <a:cs typeface="メイリオ"/>
+              </a:rPr>
               <a:t>SMS・メール等で</a:t>
             </a:r>
           </a:p>
@@ -10722,28 +11175,7 @@
                 <a:ea typeface="メイリオ"/>
                 <a:cs typeface="メイリオ"/>
               </a:rPr>
-              <a:t>LINEの友だち</a:t>
-            </a:r>
-          </a:p>
-          <a:p>
-            <a:pPr algn="l">
-              <a:lnSpc>
-                <a:spcPct val="105000"/>
-              </a:lnSpc>
-              <a:spcAft>
-                <a:spcPts val="200"/>
-              </a:spcAft>
-            </a:pPr>
-            <a:r>
-              <a:rPr sz="1200" b="0">
-                <a:solidFill>
-                  <a:srgbClr val="333333"/>
-                </a:solidFill>
-                <a:latin typeface="メイリオ"/>
-                <a:ea typeface="メイリオ"/>
-                <a:cs typeface="メイリオ"/>
-              </a:rPr>
-              <a:t>追加をご案内</a:t>
+              <a:t>ご案内</a:t>
             </a:r>
           </a:p>
         </p:txBody>

--- a/20261013_セキュリティー京葉御中_LINE採用追客のご提案.pptx
+++ b/20261013_セキュリティー京葉御中_LINE採用追客のご提案.pptx
@@ -7722,14 +7722,752 @@
       </p:sp>
       <p:sp>
         <p:nvSpPr>
-          <p:cNvPr id="39" name="Rounded Rectangle 38"/>
+          <p:cNvPr id="39" name="Rectangle 38"/>
           <p:cNvSpPr/>
           <p:nvPr/>
         </p:nvSpPr>
         <p:spPr>
           <a:xfrm>
-            <a:off x="770400" y="4806000"/>
-            <a:ext cx="8503200" cy="450000"/>
+            <a:off x="644400" y="4820400"/>
+            <a:ext cx="54000" cy="187200"/>
+          </a:xfrm>
+          <a:prstGeom prst="rect">
+            <a:avLst/>
+          </a:prstGeom>
+          <a:solidFill>
+            <a:srgbClr val="1F285A"/>
+          </a:solidFill>
+          <a:ln>
+            <a:noFill/>
+          </a:ln>
+          <a:effectLst/>
+        </p:spPr>
+        <p:style>
+          <a:lnRef idx="1">
+            <a:schemeClr val="accent1"/>
+          </a:lnRef>
+          <a:fillRef idx="3">
+            <a:schemeClr val="accent1"/>
+          </a:fillRef>
+          <a:effectRef idx="0">
+            <a:schemeClr val="accent1"/>
+          </a:effectRef>
+          <a:fontRef idx="minor">
+            <a:schemeClr val="lt1"/>
+          </a:fontRef>
+        </p:style>
+        <p:txBody>
+          <a:bodyPr rtlCol="0" anchor="ctr" wrap="square" lIns="72000" tIns="18000" rIns="72000" bIns="18000"/>
+          <a:lstStyle/>
+          <a:p>
+            <a:pPr algn="ctr"/>
+          </a:p>
+        </p:txBody>
+      </p:sp>
+      <p:sp>
+        <p:nvSpPr>
+          <p:cNvPr id="40" name="TextBox 39"/>
+          <p:cNvSpPr txBox="1"/>
+          <p:nvPr/>
+        </p:nvSpPr>
+        <p:spPr>
+          <a:xfrm>
+            <a:off x="770400" y="4770000"/>
+            <a:ext cx="8503200" cy="288000"/>
+          </a:xfrm>
+          <a:prstGeom prst="rect">
+            <a:avLst/>
+          </a:prstGeom>
+          <a:noFill/>
+        </p:spPr>
+        <p:txBody>
+          <a:bodyPr wrap="square" anchor="t" lIns="36000" rIns="36000" tIns="10800" bIns="10800">
+            <a:spAutoFit/>
+          </a:bodyPr>
+          <a:lstStyle/>
+          <a:p>
+            <a:pPr algn="l">
+              <a:lnSpc>
+                <a:spcPct val="105000"/>
+              </a:lnSpc>
+              <a:spcAft>
+                <a:spcPts val="200"/>
+              </a:spcAft>
+            </a:pPr>
+            <a:r>
+              <a:rPr sz="1500" b="1">
+                <a:solidFill>
+                  <a:srgbClr val="1F285A"/>
+                </a:solidFill>
+                <a:latin typeface="メイリオ"/>
+                <a:ea typeface="メイリオ"/>
+                <a:cs typeface="メイリオ"/>
+              </a:rPr>
+              <a:t>14日以降の長期ステップ（例）</a:t>
+            </a:r>
+          </a:p>
+        </p:txBody>
+      </p:sp>
+      <p:sp>
+        <p:nvSpPr>
+          <p:cNvPr id="41" name="TextBox 40"/>
+          <p:cNvSpPr txBox="1"/>
+          <p:nvPr/>
+        </p:nvSpPr>
+        <p:spPr>
+          <a:xfrm>
+            <a:off x="4010400" y="4824000"/>
+            <a:ext cx="5263200" cy="216000"/>
+          </a:xfrm>
+          <a:prstGeom prst="rect">
+            <a:avLst/>
+          </a:prstGeom>
+          <a:noFill/>
+        </p:spPr>
+        <p:txBody>
+          <a:bodyPr wrap="square" anchor="t" lIns="36000" rIns="36000" tIns="10800" bIns="10800">
+            <a:spAutoFit/>
+          </a:bodyPr>
+          <a:lstStyle/>
+          <a:p>
+            <a:pPr algn="r">
+              <a:lnSpc>
+                <a:spcPct val="105000"/>
+              </a:lnSpc>
+              <a:spcAft>
+                <a:spcPts val="200"/>
+              </a:spcAft>
+            </a:pPr>
+            <a:r>
+              <a:rPr sz="1050" b="0">
+                <a:solidFill>
+                  <a:srgbClr val="7F7F7F"/>
+                </a:solidFill>
+                <a:latin typeface="メイリオ"/>
+                <a:ea typeface="メイリオ"/>
+                <a:cs typeface="メイリオ"/>
+              </a:rPr>
+              <a:t>※どの配信にも応募・面接予約の入口を付け、応募・面接予約済みの方には送らない</a:t>
+            </a:r>
+          </a:p>
+        </p:txBody>
+      </p:sp>
+      <p:sp>
+        <p:nvSpPr>
+          <p:cNvPr id="42" name="Rounded Rectangle 41"/>
+          <p:cNvSpPr/>
+          <p:nvPr/>
+        </p:nvSpPr>
+        <p:spPr>
+          <a:xfrm>
+            <a:off x="770400" y="5112000"/>
+            <a:ext cx="2738400" cy="792000"/>
+          </a:xfrm>
+          <a:prstGeom prst="roundRect">
+            <a:avLst>
+              <a:gd name="adj" fmla="val 8000"/>
+            </a:avLst>
+          </a:prstGeom>
+          <a:solidFill>
+            <a:srgbClr val="F4F7FF"/>
+          </a:solidFill>
+          <a:ln w="12700">
+            <a:solidFill>
+              <a:srgbClr val="D9D9D9"/>
+            </a:solidFill>
+          </a:ln>
+          <a:effectLst/>
+        </p:spPr>
+        <p:style>
+          <a:lnRef idx="1">
+            <a:schemeClr val="accent1"/>
+          </a:lnRef>
+          <a:fillRef idx="3">
+            <a:schemeClr val="accent1"/>
+          </a:fillRef>
+          <a:effectRef idx="0">
+            <a:schemeClr val="accent1"/>
+          </a:effectRef>
+          <a:fontRef idx="minor">
+            <a:schemeClr val="lt1"/>
+          </a:fontRef>
+        </p:style>
+        <p:txBody>
+          <a:bodyPr rtlCol="0" anchor="ctr" wrap="square" lIns="72000" tIns="36000" rIns="72000" bIns="36000"/>
+          <a:lstStyle/>
+          <a:p>
+            <a:pPr algn="ctr"/>
+          </a:p>
+        </p:txBody>
+      </p:sp>
+      <p:sp>
+        <p:nvSpPr>
+          <p:cNvPr id="43" name="Rounded Rectangle 42"/>
+          <p:cNvSpPr/>
+          <p:nvPr/>
+        </p:nvSpPr>
+        <p:spPr>
+          <a:xfrm>
+            <a:off x="842400" y="5166000"/>
+            <a:ext cx="720000" cy="234000"/>
+          </a:xfrm>
+          <a:prstGeom prst="roundRect">
+            <a:avLst>
+              <a:gd name="adj" fmla="val 8000"/>
+            </a:avLst>
+          </a:prstGeom>
+          <a:solidFill>
+            <a:srgbClr val="1F285A"/>
+          </a:solidFill>
+          <a:ln w="12700">
+            <a:solidFill>
+              <a:srgbClr val="1F285A"/>
+            </a:solidFill>
+          </a:ln>
+          <a:effectLst/>
+        </p:spPr>
+        <p:style>
+          <a:lnRef idx="1">
+            <a:schemeClr val="accent1"/>
+          </a:lnRef>
+          <a:fillRef idx="3">
+            <a:schemeClr val="accent1"/>
+          </a:fillRef>
+          <a:effectRef idx="0">
+            <a:schemeClr val="accent1"/>
+          </a:effectRef>
+          <a:fontRef idx="minor">
+            <a:schemeClr val="lt1"/>
+          </a:fontRef>
+        </p:style>
+        <p:txBody>
+          <a:bodyPr rtlCol="0" anchor="ctr" wrap="square" lIns="7200" tIns="7200" rIns="7200" bIns="7200"/>
+          <a:lstStyle/>
+          <a:p>
+            <a:pPr algn="ctr">
+              <a:lnSpc>
+                <a:spcPct val="110000"/>
+              </a:lnSpc>
+              <a:spcAft>
+                <a:spcPts val="0"/>
+              </a:spcAft>
+            </a:pPr>
+            <a:r>
+              <a:rPr sz="1250" b="1">
+                <a:solidFill>
+                  <a:srgbClr val="FFFFFF"/>
+                </a:solidFill>
+                <a:latin typeface="メイリオ"/>
+                <a:ea typeface="メイリオ"/>
+                <a:cs typeface="メイリオ"/>
+              </a:rPr>
+              <a:t>1か月後</a:t>
+            </a:r>
+          </a:p>
+        </p:txBody>
+      </p:sp>
+      <p:sp>
+        <p:nvSpPr>
+          <p:cNvPr id="44" name="TextBox 43"/>
+          <p:cNvSpPr txBox="1"/>
+          <p:nvPr/>
+        </p:nvSpPr>
+        <p:spPr>
+          <a:xfrm>
+            <a:off x="1616400" y="5155200"/>
+            <a:ext cx="1838400" cy="251999"/>
+          </a:xfrm>
+          <a:prstGeom prst="rect">
+            <a:avLst/>
+          </a:prstGeom>
+          <a:noFill/>
+        </p:spPr>
+        <p:txBody>
+          <a:bodyPr wrap="square" anchor="ctr" lIns="36000" rIns="36000" tIns="10800" bIns="10800">
+            <a:spAutoFit/>
+          </a:bodyPr>
+          <a:lstStyle/>
+          <a:p>
+            <a:pPr algn="l">
+              <a:lnSpc>
+                <a:spcPct val="105000"/>
+              </a:lnSpc>
+              <a:spcAft>
+                <a:spcPts val="200"/>
+              </a:spcAft>
+            </a:pPr>
+            <a:r>
+              <a:rPr sz="1250" b="1">
+                <a:solidFill>
+                  <a:srgbClr val="1F285A"/>
+                </a:solidFill>
+                <a:latin typeface="メイリオ"/>
+                <a:ea typeface="メイリオ"/>
+                <a:cs typeface="メイリオ"/>
+              </a:rPr>
+              <a:t>近況・希望の確認</a:t>
+            </a:r>
+          </a:p>
+        </p:txBody>
+      </p:sp>
+      <p:sp>
+        <p:nvSpPr>
+          <p:cNvPr id="45" name="TextBox 44"/>
+          <p:cNvSpPr txBox="1"/>
+          <p:nvPr/>
+        </p:nvSpPr>
+        <p:spPr>
+          <a:xfrm>
+            <a:off x="842400" y="5436000"/>
+            <a:ext cx="2594400" cy="450000"/>
+          </a:xfrm>
+          <a:prstGeom prst="rect">
+            <a:avLst/>
+          </a:prstGeom>
+          <a:noFill/>
+        </p:spPr>
+        <p:txBody>
+          <a:bodyPr wrap="square" anchor="t" lIns="36000" rIns="36000" tIns="10800" bIns="10800">
+            <a:spAutoFit/>
+          </a:bodyPr>
+          <a:lstStyle/>
+          <a:p>
+            <a:pPr algn="l">
+              <a:lnSpc>
+                <a:spcPct val="105000"/>
+              </a:lnSpc>
+              <a:spcAft>
+                <a:spcPts val="200"/>
+              </a:spcAft>
+            </a:pPr>
+            <a:r>
+              <a:rPr sz="1150" b="0">
+                <a:solidFill>
+                  <a:srgbClr val="333333"/>
+                </a:solidFill>
+                <a:latin typeface="メイリオ"/>
+                <a:ea typeface="メイリオ"/>
+                <a:cs typeface="メイリオ"/>
+              </a:rPr>
+              <a:t>「その後いかがですか？ご希望の勤務地・日数を教えてください」</a:t>
+            </a:r>
+          </a:p>
+        </p:txBody>
+      </p:sp>
+      <p:sp>
+        <p:nvSpPr>
+          <p:cNvPr id="46" name="Rounded Rectangle 45"/>
+          <p:cNvSpPr/>
+          <p:nvPr/>
+        </p:nvSpPr>
+        <p:spPr>
+          <a:xfrm>
+            <a:off x="3652800" y="5112000"/>
+            <a:ext cx="2738400" cy="792000"/>
+          </a:xfrm>
+          <a:prstGeom prst="roundRect">
+            <a:avLst>
+              <a:gd name="adj" fmla="val 8000"/>
+            </a:avLst>
+          </a:prstGeom>
+          <a:solidFill>
+            <a:srgbClr val="F4F7FF"/>
+          </a:solidFill>
+          <a:ln w="12700">
+            <a:solidFill>
+              <a:srgbClr val="D9D9D9"/>
+            </a:solidFill>
+          </a:ln>
+          <a:effectLst/>
+        </p:spPr>
+        <p:style>
+          <a:lnRef idx="1">
+            <a:schemeClr val="accent1"/>
+          </a:lnRef>
+          <a:fillRef idx="3">
+            <a:schemeClr val="accent1"/>
+          </a:fillRef>
+          <a:effectRef idx="0">
+            <a:schemeClr val="accent1"/>
+          </a:effectRef>
+          <a:fontRef idx="minor">
+            <a:schemeClr val="lt1"/>
+          </a:fontRef>
+        </p:style>
+        <p:txBody>
+          <a:bodyPr rtlCol="0" anchor="ctr" wrap="square" lIns="72000" tIns="36000" rIns="72000" bIns="36000"/>
+          <a:lstStyle/>
+          <a:p>
+            <a:pPr algn="ctr"/>
+          </a:p>
+        </p:txBody>
+      </p:sp>
+      <p:sp>
+        <p:nvSpPr>
+          <p:cNvPr id="47" name="Rounded Rectangle 46"/>
+          <p:cNvSpPr/>
+          <p:nvPr/>
+        </p:nvSpPr>
+        <p:spPr>
+          <a:xfrm>
+            <a:off x="3724799" y="5166000"/>
+            <a:ext cx="720000" cy="234000"/>
+          </a:xfrm>
+          <a:prstGeom prst="roundRect">
+            <a:avLst>
+              <a:gd name="adj" fmla="val 8000"/>
+            </a:avLst>
+          </a:prstGeom>
+          <a:solidFill>
+            <a:srgbClr val="1F285A"/>
+          </a:solidFill>
+          <a:ln w="12700">
+            <a:solidFill>
+              <a:srgbClr val="1F285A"/>
+            </a:solidFill>
+          </a:ln>
+          <a:effectLst/>
+        </p:spPr>
+        <p:style>
+          <a:lnRef idx="1">
+            <a:schemeClr val="accent1"/>
+          </a:lnRef>
+          <a:fillRef idx="3">
+            <a:schemeClr val="accent1"/>
+          </a:fillRef>
+          <a:effectRef idx="0">
+            <a:schemeClr val="accent1"/>
+          </a:effectRef>
+          <a:fontRef idx="minor">
+            <a:schemeClr val="lt1"/>
+          </a:fontRef>
+        </p:style>
+        <p:txBody>
+          <a:bodyPr rtlCol="0" anchor="ctr" wrap="square" lIns="7200" tIns="7200" rIns="7200" bIns="7200"/>
+          <a:lstStyle/>
+          <a:p>
+            <a:pPr algn="ctr">
+              <a:lnSpc>
+                <a:spcPct val="110000"/>
+              </a:lnSpc>
+              <a:spcAft>
+                <a:spcPts val="0"/>
+              </a:spcAft>
+            </a:pPr>
+            <a:r>
+              <a:rPr sz="1250" b="1">
+                <a:solidFill>
+                  <a:srgbClr val="FFFFFF"/>
+                </a:solidFill>
+                <a:latin typeface="メイリオ"/>
+                <a:ea typeface="メイリオ"/>
+                <a:cs typeface="メイリオ"/>
+              </a:rPr>
+              <a:t>3か月後</a:t>
+            </a:r>
+          </a:p>
+        </p:txBody>
+      </p:sp>
+      <p:sp>
+        <p:nvSpPr>
+          <p:cNvPr id="48" name="TextBox 47"/>
+          <p:cNvSpPr txBox="1"/>
+          <p:nvPr/>
+        </p:nvSpPr>
+        <p:spPr>
+          <a:xfrm>
+            <a:off x="4498800" y="5155200"/>
+            <a:ext cx="1838400" cy="251999"/>
+          </a:xfrm>
+          <a:prstGeom prst="rect">
+            <a:avLst/>
+          </a:prstGeom>
+          <a:noFill/>
+        </p:spPr>
+        <p:txBody>
+          <a:bodyPr wrap="square" anchor="ctr" lIns="36000" rIns="36000" tIns="10800" bIns="10800">
+            <a:spAutoFit/>
+          </a:bodyPr>
+          <a:lstStyle/>
+          <a:p>
+            <a:pPr algn="l">
+              <a:lnSpc>
+                <a:spcPct val="105000"/>
+              </a:lnSpc>
+              <a:spcAft>
+                <a:spcPts val="200"/>
+              </a:spcAft>
+            </a:pPr>
+            <a:r>
+              <a:rPr sz="1250" b="1">
+                <a:solidFill>
+                  <a:srgbClr val="1F285A"/>
+                </a:solidFill>
+                <a:latin typeface="メイリオ"/>
+                <a:ea typeface="メイリオ"/>
+                <a:cs typeface="メイリオ"/>
+              </a:rPr>
+              <a:t>待遇のご紹介</a:t>
+            </a:r>
+          </a:p>
+        </p:txBody>
+      </p:sp>
+      <p:sp>
+        <p:nvSpPr>
+          <p:cNvPr id="49" name="TextBox 48"/>
+          <p:cNvSpPr txBox="1"/>
+          <p:nvPr/>
+        </p:nvSpPr>
+        <p:spPr>
+          <a:xfrm>
+            <a:off x="3724799" y="5436000"/>
+            <a:ext cx="2594400" cy="450000"/>
+          </a:xfrm>
+          <a:prstGeom prst="rect">
+            <a:avLst/>
+          </a:prstGeom>
+          <a:noFill/>
+        </p:spPr>
+        <p:txBody>
+          <a:bodyPr wrap="square" anchor="t" lIns="36000" rIns="36000" tIns="10800" bIns="10800">
+            <a:spAutoFit/>
+          </a:bodyPr>
+          <a:lstStyle/>
+          <a:p>
+            <a:pPr algn="l">
+              <a:lnSpc>
+                <a:spcPct val="105000"/>
+              </a:lnSpc>
+              <a:spcAft>
+                <a:spcPts val="200"/>
+              </a:spcAft>
+            </a:pPr>
+            <a:r>
+              <a:rPr sz="1150" b="0">
+                <a:solidFill>
+                  <a:srgbClr val="333333"/>
+                </a:solidFill>
+                <a:latin typeface="メイリオ"/>
+                <a:ea typeface="メイリオ"/>
+                <a:cs typeface="メイリオ"/>
+              </a:rPr>
+              <a:t>「ガソリン代・駐車場代は全額支給。空調服・ネッククーラーも支給」</a:t>
+            </a:r>
+          </a:p>
+        </p:txBody>
+      </p:sp>
+      <p:sp>
+        <p:nvSpPr>
+          <p:cNvPr id="50" name="Rounded Rectangle 49"/>
+          <p:cNvSpPr/>
+          <p:nvPr/>
+        </p:nvSpPr>
+        <p:spPr>
+          <a:xfrm>
+            <a:off x="6535200" y="5112000"/>
+            <a:ext cx="2738400" cy="792000"/>
+          </a:xfrm>
+          <a:prstGeom prst="roundRect">
+            <a:avLst>
+              <a:gd name="adj" fmla="val 8000"/>
+            </a:avLst>
+          </a:prstGeom>
+          <a:solidFill>
+            <a:srgbClr val="F4F7FF"/>
+          </a:solidFill>
+          <a:ln w="12700">
+            <a:solidFill>
+              <a:srgbClr val="D9D9D9"/>
+            </a:solidFill>
+          </a:ln>
+          <a:effectLst/>
+        </p:spPr>
+        <p:style>
+          <a:lnRef idx="1">
+            <a:schemeClr val="accent1"/>
+          </a:lnRef>
+          <a:fillRef idx="3">
+            <a:schemeClr val="accent1"/>
+          </a:fillRef>
+          <a:effectRef idx="0">
+            <a:schemeClr val="accent1"/>
+          </a:effectRef>
+          <a:fontRef idx="minor">
+            <a:schemeClr val="lt1"/>
+          </a:fontRef>
+        </p:style>
+        <p:txBody>
+          <a:bodyPr rtlCol="0" anchor="ctr" wrap="square" lIns="72000" tIns="36000" rIns="72000" bIns="36000"/>
+          <a:lstStyle/>
+          <a:p>
+            <a:pPr algn="ctr"/>
+          </a:p>
+        </p:txBody>
+      </p:sp>
+      <p:sp>
+        <p:nvSpPr>
+          <p:cNvPr id="51" name="Rounded Rectangle 50"/>
+          <p:cNvSpPr/>
+          <p:nvPr/>
+        </p:nvSpPr>
+        <p:spPr>
+          <a:xfrm>
+            <a:off x="6607199" y="5166000"/>
+            <a:ext cx="720000" cy="234000"/>
+          </a:xfrm>
+          <a:prstGeom prst="roundRect">
+            <a:avLst>
+              <a:gd name="adj" fmla="val 8000"/>
+            </a:avLst>
+          </a:prstGeom>
+          <a:solidFill>
+            <a:srgbClr val="1F285A"/>
+          </a:solidFill>
+          <a:ln w="12700">
+            <a:solidFill>
+              <a:srgbClr val="1F285A"/>
+            </a:solidFill>
+          </a:ln>
+          <a:effectLst/>
+        </p:spPr>
+        <p:style>
+          <a:lnRef idx="1">
+            <a:schemeClr val="accent1"/>
+          </a:lnRef>
+          <a:fillRef idx="3">
+            <a:schemeClr val="accent1"/>
+          </a:fillRef>
+          <a:effectRef idx="0">
+            <a:schemeClr val="accent1"/>
+          </a:effectRef>
+          <a:fontRef idx="minor">
+            <a:schemeClr val="lt1"/>
+          </a:fontRef>
+        </p:style>
+        <p:txBody>
+          <a:bodyPr rtlCol="0" anchor="ctr" wrap="square" lIns="7200" tIns="7200" rIns="7200" bIns="7200"/>
+          <a:lstStyle/>
+          <a:p>
+            <a:pPr algn="ctr">
+              <a:lnSpc>
+                <a:spcPct val="110000"/>
+              </a:lnSpc>
+              <a:spcAft>
+                <a:spcPts val="0"/>
+              </a:spcAft>
+            </a:pPr>
+            <a:r>
+              <a:rPr sz="1250" b="1">
+                <a:solidFill>
+                  <a:srgbClr val="FFFFFF"/>
+                </a:solidFill>
+                <a:latin typeface="メイリオ"/>
+                <a:ea typeface="メイリオ"/>
+                <a:cs typeface="メイリオ"/>
+              </a:rPr>
+              <a:t>6か月後</a:t>
+            </a:r>
+          </a:p>
+        </p:txBody>
+      </p:sp>
+      <p:sp>
+        <p:nvSpPr>
+          <p:cNvPr id="52" name="TextBox 51"/>
+          <p:cNvSpPr txBox="1"/>
+          <p:nvPr/>
+        </p:nvSpPr>
+        <p:spPr>
+          <a:xfrm>
+            <a:off x="7381200" y="5155200"/>
+            <a:ext cx="1838400" cy="251999"/>
+          </a:xfrm>
+          <a:prstGeom prst="rect">
+            <a:avLst/>
+          </a:prstGeom>
+          <a:noFill/>
+        </p:spPr>
+        <p:txBody>
+          <a:bodyPr wrap="square" anchor="ctr" lIns="36000" rIns="36000" tIns="10800" bIns="10800">
+            <a:spAutoFit/>
+          </a:bodyPr>
+          <a:lstStyle/>
+          <a:p>
+            <a:pPr algn="l">
+              <a:lnSpc>
+                <a:spcPct val="105000"/>
+              </a:lnSpc>
+              <a:spcAft>
+                <a:spcPts val="200"/>
+              </a:spcAft>
+            </a:pPr>
+            <a:r>
+              <a:rPr sz="1250" b="1">
+                <a:solidFill>
+                  <a:srgbClr val="1F285A"/>
+                </a:solidFill>
+                <a:latin typeface="メイリオ"/>
+                <a:ea typeface="メイリオ"/>
+                <a:cs typeface="メイリオ"/>
+              </a:rPr>
+              <a:t>長く働ける安心材料</a:t>
+            </a:r>
+          </a:p>
+        </p:txBody>
+      </p:sp>
+      <p:sp>
+        <p:nvSpPr>
+          <p:cNvPr id="53" name="TextBox 52"/>
+          <p:cNvSpPr txBox="1"/>
+          <p:nvPr/>
+        </p:nvSpPr>
+        <p:spPr>
+          <a:xfrm>
+            <a:off x="6607199" y="5436000"/>
+            <a:ext cx="2594400" cy="450000"/>
+          </a:xfrm>
+          <a:prstGeom prst="rect">
+            <a:avLst/>
+          </a:prstGeom>
+          <a:noFill/>
+        </p:spPr>
+        <p:txBody>
+          <a:bodyPr wrap="square" anchor="t" lIns="36000" rIns="36000" tIns="10800" bIns="10800">
+            <a:spAutoFit/>
+          </a:bodyPr>
+          <a:lstStyle/>
+          <a:p>
+            <a:pPr algn="l">
+              <a:lnSpc>
+                <a:spcPct val="105000"/>
+              </a:lnSpc>
+              <a:spcAft>
+                <a:spcPts val="200"/>
+              </a:spcAft>
+            </a:pPr>
+            <a:r>
+              <a:rPr sz="1150" b="0">
+                <a:solidFill>
+                  <a:srgbClr val="333333"/>
+                </a:solidFill>
+                <a:latin typeface="メイリオ"/>
+                <a:ea typeface="メイリオ"/>
+                <a:cs typeface="メイリオ"/>
+              </a:rPr>
+              <a:t>「月15日以上の勤務で社会保険に加入できます。面接日はこちら」</a:t>
+            </a:r>
+          </a:p>
+        </p:txBody>
+      </p:sp>
+      <p:sp>
+        <p:nvSpPr>
+          <p:cNvPr id="54" name="Rounded Rectangle 53"/>
+          <p:cNvSpPr/>
+          <p:nvPr/>
+        </p:nvSpPr>
+        <p:spPr>
+          <a:xfrm>
+            <a:off x="770400" y="5976000"/>
+            <a:ext cx="8503200" cy="378000"/>
           </a:xfrm>
           <a:prstGeom prst="roundRect">
             <a:avLst>
@@ -7770,14 +8508,14 @@
       </p:sp>
       <p:sp>
         <p:nvSpPr>
-          <p:cNvPr id="40" name="Rounded Rectangle 39"/>
+          <p:cNvPr id="55" name="Rounded Rectangle 54"/>
           <p:cNvSpPr/>
           <p:nvPr/>
         </p:nvSpPr>
         <p:spPr>
           <a:xfrm>
-            <a:off x="860400" y="4878000"/>
-            <a:ext cx="1944000" cy="306000"/>
+            <a:off x="842400" y="6030000"/>
+            <a:ext cx="1512000" cy="270000"/>
           </a:xfrm>
           <a:prstGeom prst="roundRect">
             <a:avLst>
@@ -7821,7 +8559,7 @@
               </a:spcAft>
             </a:pPr>
             <a:r>
-              <a:rPr sz="1300" b="1">
+              <a:rPr sz="1250" b="1">
                 <a:solidFill>
                   <a:srgbClr val="FFFFFF"/>
                 </a:solidFill>
@@ -7829,21 +8567,21 @@
                 <a:ea typeface="メイリオ"/>
                 <a:cs typeface="メイリオ"/>
               </a:rPr>
-              <a:t>14日以降（企画配信）</a:t>
-            </a:r>
-          </a:p>
-        </p:txBody>
-      </p:sp>
-      <p:sp>
-        <p:nvSpPr>
-          <p:cNvPr id="41" name="TextBox 40"/>
+              <a:t>企画配信（随時）</a:t>
+            </a:r>
+          </a:p>
+        </p:txBody>
+      </p:sp>
+      <p:sp>
+        <p:nvSpPr>
+          <p:cNvPr id="56" name="TextBox 55"/>
           <p:cNvSpPr txBox="1"/>
           <p:nvPr/>
         </p:nvSpPr>
         <p:spPr>
           <a:xfrm>
-            <a:off x="2912400" y="4806000"/>
-            <a:ext cx="6271200" cy="450000"/>
+            <a:off x="2444400" y="5976000"/>
+            <a:ext cx="6739200" cy="378000"/>
           </a:xfrm>
           <a:prstGeom prst="rect">
             <a:avLst/>
@@ -7865,7 +8603,7 @@
               </a:spcAft>
             </a:pPr>
             <a:r>
-              <a:rPr sz="1350" b="0">
+              <a:rPr sz="1300" b="0">
                 <a:solidFill>
                   <a:srgbClr val="333333"/>
                 </a:solidFill>
@@ -7874,496 +8612,6 @@
                 <a:cs typeface="メイリオ"/>
               </a:rPr>
               <a:t>新しい現場・募集が出るたびに、希望勤務地・勤務条件のタグごとに配信</a:t>
-            </a:r>
-          </a:p>
-        </p:txBody>
-      </p:sp>
-      <p:sp>
-        <p:nvSpPr>
-          <p:cNvPr id="42" name="Rectangle 41"/>
-          <p:cNvSpPr/>
-          <p:nvPr/>
-        </p:nvSpPr>
-        <p:spPr>
-          <a:xfrm>
-            <a:off x="644400" y="5378400"/>
-            <a:ext cx="54000" cy="187200"/>
-          </a:xfrm>
-          <a:prstGeom prst="rect">
-            <a:avLst/>
-          </a:prstGeom>
-          <a:solidFill>
-            <a:srgbClr val="1F285A"/>
-          </a:solidFill>
-          <a:ln>
-            <a:noFill/>
-          </a:ln>
-          <a:effectLst/>
-        </p:spPr>
-        <p:style>
-          <a:lnRef idx="1">
-            <a:schemeClr val="accent1"/>
-          </a:lnRef>
-          <a:fillRef idx="3">
-            <a:schemeClr val="accent1"/>
-          </a:fillRef>
-          <a:effectRef idx="0">
-            <a:schemeClr val="accent1"/>
-          </a:effectRef>
-          <a:fontRef idx="minor">
-            <a:schemeClr val="lt1"/>
-          </a:fontRef>
-        </p:style>
-        <p:txBody>
-          <a:bodyPr rtlCol="0" anchor="ctr" wrap="square" lIns="72000" tIns="18000" rIns="72000" bIns="18000"/>
-          <a:lstStyle/>
-          <a:p>
-            <a:pPr algn="ctr"/>
-          </a:p>
-        </p:txBody>
-      </p:sp>
-      <p:sp>
-        <p:nvSpPr>
-          <p:cNvPr id="43" name="TextBox 42"/>
-          <p:cNvSpPr txBox="1"/>
-          <p:nvPr/>
-        </p:nvSpPr>
-        <p:spPr>
-          <a:xfrm>
-            <a:off x="770400" y="5328000"/>
-            <a:ext cx="8503200" cy="288000"/>
-          </a:xfrm>
-          <a:prstGeom prst="rect">
-            <a:avLst/>
-          </a:prstGeom>
-          <a:noFill/>
-        </p:spPr>
-        <p:txBody>
-          <a:bodyPr wrap="square" anchor="t" lIns="36000" rIns="36000" tIns="10800" bIns="10800">
-            <a:spAutoFit/>
-          </a:bodyPr>
-          <a:lstStyle/>
-          <a:p>
-            <a:pPr algn="l">
-              <a:lnSpc>
-                <a:spcPct val="105000"/>
-              </a:lnSpc>
-              <a:spcAft>
-                <a:spcPts val="200"/>
-              </a:spcAft>
-            </a:pPr>
-            <a:r>
-              <a:rPr sz="1500" b="1">
-                <a:solidFill>
-                  <a:srgbClr val="1F285A"/>
-                </a:solidFill>
-                <a:latin typeface="メイリオ"/>
-                <a:ea typeface="メイリオ"/>
-                <a:cs typeface="メイリオ"/>
-              </a:rPr>
-              <a:t>そのほかに伝えられること</a:t>
-            </a:r>
-          </a:p>
-        </p:txBody>
-      </p:sp>
-      <p:sp>
-        <p:nvSpPr>
-          <p:cNvPr id="44" name="Rounded Rectangle 43"/>
-          <p:cNvSpPr/>
-          <p:nvPr/>
-        </p:nvSpPr>
-        <p:spPr>
-          <a:xfrm>
-            <a:off x="770400" y="5670000"/>
-            <a:ext cx="4143600" cy="684000"/>
-          </a:xfrm>
-          <a:prstGeom prst="roundRect">
-            <a:avLst>
-              <a:gd name="adj" fmla="val 8000"/>
-            </a:avLst>
-          </a:prstGeom>
-          <a:solidFill>
-            <a:srgbClr val="F4F7FF"/>
-          </a:solidFill>
-          <a:ln w="12700">
-            <a:solidFill>
-              <a:srgbClr val="D9D9D9"/>
-            </a:solidFill>
-          </a:ln>
-          <a:effectLst/>
-        </p:spPr>
-        <p:style>
-          <a:lnRef idx="1">
-            <a:schemeClr val="accent1"/>
-          </a:lnRef>
-          <a:fillRef idx="3">
-            <a:schemeClr val="accent1"/>
-          </a:fillRef>
-          <a:effectRef idx="0">
-            <a:schemeClr val="accent1"/>
-          </a:effectRef>
-          <a:fontRef idx="minor">
-            <a:schemeClr val="lt1"/>
-          </a:fontRef>
-        </p:style>
-        <p:txBody>
-          <a:bodyPr rtlCol="0" anchor="ctr" wrap="square" lIns="72000" tIns="36000" rIns="72000" bIns="36000"/>
-          <a:lstStyle/>
-          <a:p>
-            <a:pPr algn="ctr"/>
-          </a:p>
-        </p:txBody>
-      </p:sp>
-      <p:sp>
-        <p:nvSpPr>
-          <p:cNvPr id="45" name="Rectangle 44"/>
-          <p:cNvSpPr/>
-          <p:nvPr/>
-        </p:nvSpPr>
-        <p:spPr>
-          <a:xfrm>
-            <a:off x="770400" y="5670000"/>
-            <a:ext cx="64800" cy="684000"/>
-          </a:xfrm>
-          <a:prstGeom prst="rect">
-            <a:avLst/>
-          </a:prstGeom>
-          <a:solidFill>
-            <a:srgbClr val="1F285A"/>
-          </a:solidFill>
-          <a:ln>
-            <a:noFill/>
-          </a:ln>
-          <a:effectLst/>
-        </p:spPr>
-        <p:style>
-          <a:lnRef idx="1">
-            <a:schemeClr val="accent1"/>
-          </a:lnRef>
-          <a:fillRef idx="3">
-            <a:schemeClr val="accent1"/>
-          </a:fillRef>
-          <a:effectRef idx="0">
-            <a:schemeClr val="accent1"/>
-          </a:effectRef>
-          <a:fontRef idx="minor">
-            <a:schemeClr val="lt1"/>
-          </a:fontRef>
-        </p:style>
-        <p:txBody>
-          <a:bodyPr rtlCol="0" anchor="ctr" wrap="square" lIns="72000" tIns="18000" rIns="72000" bIns="18000"/>
-          <a:lstStyle/>
-          <a:p>
-            <a:pPr algn="ctr"/>
-          </a:p>
-        </p:txBody>
-      </p:sp>
-      <p:sp>
-        <p:nvSpPr>
-          <p:cNvPr id="46" name="TextBox 45"/>
-          <p:cNvSpPr txBox="1"/>
-          <p:nvPr/>
-        </p:nvSpPr>
-        <p:spPr>
-          <a:xfrm>
-            <a:off x="950400" y="5706000"/>
-            <a:ext cx="864000" cy="612000"/>
-          </a:xfrm>
-          <a:prstGeom prst="rect">
-            <a:avLst/>
-          </a:prstGeom>
-          <a:noFill/>
-        </p:spPr>
-        <p:txBody>
-          <a:bodyPr wrap="square" anchor="ctr" lIns="36000" rIns="36000" tIns="10800" bIns="10800">
-            <a:spAutoFit/>
-          </a:bodyPr>
-          <a:lstStyle/>
-          <a:p>
-            <a:pPr algn="l">
-              <a:lnSpc>
-                <a:spcPct val="105000"/>
-              </a:lnSpc>
-              <a:spcAft>
-                <a:spcPts val="200"/>
-              </a:spcAft>
-            </a:pPr>
-            <a:r>
-              <a:rPr sz="1400" b="1">
-                <a:solidFill>
-                  <a:srgbClr val="1F285A"/>
-                </a:solidFill>
-                <a:latin typeface="メイリオ"/>
-                <a:ea typeface="メイリオ"/>
-                <a:cs typeface="メイリオ"/>
-              </a:rPr>
-              <a:t>待遇</a:t>
-            </a:r>
-          </a:p>
-        </p:txBody>
-      </p:sp>
-      <p:sp>
-        <p:nvSpPr>
-          <p:cNvPr id="47" name="TextBox 46"/>
-          <p:cNvSpPr txBox="1"/>
-          <p:nvPr/>
-        </p:nvSpPr>
-        <p:spPr>
-          <a:xfrm>
-            <a:off x="1778399" y="5706000"/>
-            <a:ext cx="3081599" cy="612000"/>
-          </a:xfrm>
-          <a:prstGeom prst="rect">
-            <a:avLst/>
-          </a:prstGeom>
-          <a:noFill/>
-        </p:spPr>
-        <p:txBody>
-          <a:bodyPr wrap="square" anchor="ctr" lIns="36000" rIns="36000" tIns="10800" bIns="10800">
-            <a:spAutoFit/>
-          </a:bodyPr>
-          <a:lstStyle/>
-          <a:p>
-            <a:pPr algn="l">
-              <a:lnSpc>
-                <a:spcPct val="105000"/>
-              </a:lnSpc>
-              <a:spcAft>
-                <a:spcPts val="200"/>
-              </a:spcAft>
-            </a:pPr>
-            <a:r>
-              <a:rPr sz="1300" b="0">
-                <a:solidFill>
-                  <a:srgbClr val="333333"/>
-                </a:solidFill>
-                <a:latin typeface="メイリオ"/>
-                <a:ea typeface="メイリオ"/>
-                <a:cs typeface="メイリオ"/>
-              </a:rPr>
-              <a:t>ガソリン代・駐車場代の全額支給</a:t>
-            </a:r>
-          </a:p>
-          <a:p>
-            <a:pPr algn="l">
-              <a:lnSpc>
-                <a:spcPct val="105000"/>
-              </a:lnSpc>
-              <a:spcAft>
-                <a:spcPts val="200"/>
-              </a:spcAft>
-            </a:pPr>
-            <a:r>
-              <a:rPr sz="1300" b="0">
-                <a:solidFill>
-                  <a:srgbClr val="333333"/>
-                </a:solidFill>
-                <a:latin typeface="メイリオ"/>
-                <a:ea typeface="メイリオ"/>
-                <a:cs typeface="メイリオ"/>
-              </a:rPr>
-              <a:t>空調服・ネッククーラー支給</a:t>
-            </a:r>
-          </a:p>
-        </p:txBody>
-      </p:sp>
-      <p:sp>
-        <p:nvSpPr>
-          <p:cNvPr id="48" name="Rounded Rectangle 47"/>
-          <p:cNvSpPr/>
-          <p:nvPr/>
-        </p:nvSpPr>
-        <p:spPr>
-          <a:xfrm>
-            <a:off x="5130000" y="5670000"/>
-            <a:ext cx="4143600" cy="684000"/>
-          </a:xfrm>
-          <a:prstGeom prst="roundRect">
-            <a:avLst>
-              <a:gd name="adj" fmla="val 8000"/>
-            </a:avLst>
-          </a:prstGeom>
-          <a:solidFill>
-            <a:srgbClr val="F4F7FF"/>
-          </a:solidFill>
-          <a:ln w="12700">
-            <a:solidFill>
-              <a:srgbClr val="D9D9D9"/>
-            </a:solidFill>
-          </a:ln>
-          <a:effectLst/>
-        </p:spPr>
-        <p:style>
-          <a:lnRef idx="1">
-            <a:schemeClr val="accent1"/>
-          </a:lnRef>
-          <a:fillRef idx="3">
-            <a:schemeClr val="accent1"/>
-          </a:fillRef>
-          <a:effectRef idx="0">
-            <a:schemeClr val="accent1"/>
-          </a:effectRef>
-          <a:fontRef idx="minor">
-            <a:schemeClr val="lt1"/>
-          </a:fontRef>
-        </p:style>
-        <p:txBody>
-          <a:bodyPr rtlCol="0" anchor="ctr" wrap="square" lIns="72000" tIns="36000" rIns="72000" bIns="36000"/>
-          <a:lstStyle/>
-          <a:p>
-            <a:pPr algn="ctr"/>
-          </a:p>
-        </p:txBody>
-      </p:sp>
-      <p:sp>
-        <p:nvSpPr>
-          <p:cNvPr id="49" name="Rectangle 48"/>
-          <p:cNvSpPr/>
-          <p:nvPr/>
-        </p:nvSpPr>
-        <p:spPr>
-          <a:xfrm>
-            <a:off x="5130000" y="5670000"/>
-            <a:ext cx="64800" cy="684000"/>
-          </a:xfrm>
-          <a:prstGeom prst="rect">
-            <a:avLst/>
-          </a:prstGeom>
-          <a:solidFill>
-            <a:srgbClr val="1F285A"/>
-          </a:solidFill>
-          <a:ln>
-            <a:noFill/>
-          </a:ln>
-          <a:effectLst/>
-        </p:spPr>
-        <p:style>
-          <a:lnRef idx="1">
-            <a:schemeClr val="accent1"/>
-          </a:lnRef>
-          <a:fillRef idx="3">
-            <a:schemeClr val="accent1"/>
-          </a:fillRef>
-          <a:effectRef idx="0">
-            <a:schemeClr val="accent1"/>
-          </a:effectRef>
-          <a:fontRef idx="minor">
-            <a:schemeClr val="lt1"/>
-          </a:fontRef>
-        </p:style>
-        <p:txBody>
-          <a:bodyPr rtlCol="0" anchor="ctr" wrap="square" lIns="72000" tIns="18000" rIns="72000" bIns="18000"/>
-          <a:lstStyle/>
-          <a:p>
-            <a:pPr algn="ctr"/>
-          </a:p>
-        </p:txBody>
-      </p:sp>
-      <p:sp>
-        <p:nvSpPr>
-          <p:cNvPr id="50" name="TextBox 49"/>
-          <p:cNvSpPr txBox="1"/>
-          <p:nvPr/>
-        </p:nvSpPr>
-        <p:spPr>
-          <a:xfrm>
-            <a:off x="5310000" y="5706000"/>
-            <a:ext cx="864000" cy="612000"/>
-          </a:xfrm>
-          <a:prstGeom prst="rect">
-            <a:avLst/>
-          </a:prstGeom>
-          <a:noFill/>
-        </p:spPr>
-        <p:txBody>
-          <a:bodyPr wrap="square" anchor="ctr" lIns="36000" rIns="36000" tIns="10800" bIns="10800">
-            <a:spAutoFit/>
-          </a:bodyPr>
-          <a:lstStyle/>
-          <a:p>
-            <a:pPr algn="l">
-              <a:lnSpc>
-                <a:spcPct val="105000"/>
-              </a:lnSpc>
-              <a:spcAft>
-                <a:spcPts val="200"/>
-              </a:spcAft>
-            </a:pPr>
-            <a:r>
-              <a:rPr sz="1400" b="1">
-                <a:solidFill>
-                  <a:srgbClr val="1F285A"/>
-                </a:solidFill>
-                <a:latin typeface="メイリオ"/>
-                <a:ea typeface="メイリオ"/>
-                <a:cs typeface="メイリオ"/>
-              </a:rPr>
-              <a:t>安心材料</a:t>
-            </a:r>
-          </a:p>
-        </p:txBody>
-      </p:sp>
-      <p:sp>
-        <p:nvSpPr>
-          <p:cNvPr id="51" name="TextBox 50"/>
-          <p:cNvSpPr txBox="1"/>
-          <p:nvPr/>
-        </p:nvSpPr>
-        <p:spPr>
-          <a:xfrm>
-            <a:off x="6138000" y="5706000"/>
-            <a:ext cx="3081599" cy="612000"/>
-          </a:xfrm>
-          <a:prstGeom prst="rect">
-            <a:avLst/>
-          </a:prstGeom>
-          <a:noFill/>
-        </p:spPr>
-        <p:txBody>
-          <a:bodyPr wrap="square" anchor="ctr" lIns="36000" rIns="36000" tIns="10800" bIns="10800">
-            <a:spAutoFit/>
-          </a:bodyPr>
-          <a:lstStyle/>
-          <a:p>
-            <a:pPr algn="l">
-              <a:lnSpc>
-                <a:spcPct val="105000"/>
-              </a:lnSpc>
-              <a:spcAft>
-                <a:spcPts val="200"/>
-              </a:spcAft>
-            </a:pPr>
-            <a:r>
-              <a:rPr sz="1300" b="0">
-                <a:solidFill>
-                  <a:srgbClr val="333333"/>
-                </a:solidFill>
-                <a:latin typeface="メイリオ"/>
-                <a:ea typeface="メイリオ"/>
-                <a:cs typeface="メイリオ"/>
-              </a:rPr>
-              <a:t>資格取得の支援</a:t>
-            </a:r>
-          </a:p>
-          <a:p>
-            <a:pPr algn="l">
-              <a:lnSpc>
-                <a:spcPct val="105000"/>
-              </a:lnSpc>
-              <a:spcAft>
-                <a:spcPts val="200"/>
-              </a:spcAft>
-            </a:pPr>
-            <a:r>
-              <a:rPr sz="1300" b="0">
-                <a:solidFill>
-                  <a:srgbClr val="333333"/>
-                </a:solidFill>
-                <a:latin typeface="メイリオ"/>
-                <a:ea typeface="メイリオ"/>
-                <a:cs typeface="メイリオ"/>
-              </a:rPr>
-              <a:t>月15日以上の勤務で社会保険に加入</a:t>
             </a:r>
           </a:p>
         </p:txBody>

--- a/20261013_セキュリティー京葉御中_LINE採用追客のご提案.pptx
+++ b/20261013_セキュリティー京葉御中_LINE採用追客のご提案.pptx
@@ -6547,7 +6547,7 @@
                 <a:ea typeface="メイリオ"/>
                 <a:cs typeface="メイリオ"/>
               </a:rPr>
-              <a:t>給与・</a:t>
+              <a:t>勤務条件の</a:t>
             </a:r>
           </a:p>
           <a:p>
@@ -6568,7 +6568,7 @@
                 <a:ea typeface="メイリオ"/>
                 <a:cs typeface="メイリオ"/>
               </a:rPr>
-              <a:t>勤務条件の紹介</a:t>
+              <a:t>紹介</a:t>
             </a:r>
           </a:p>
         </p:txBody>
@@ -6677,7 +6677,7 @@
                 <a:ea typeface="メイリオ"/>
                 <a:cs typeface="メイリオ"/>
               </a:rPr>
-              <a:t>「1現場10,500円（2現場で19,500円）。直行直帰OK・夜勤なし」</a:t>
+              <a:t>「1現場3〜5時間で負担少なめ。直行直帰OK・日勤メインで夜勤なし」</a:t>
             </a:r>
           </a:p>
         </p:txBody>

--- a/20261013_セキュリティー京葉御中_LINE採用追客のご提案.pptx
+++ b/20261013_セキュリティー京葉御中_LINE採用追客のご提案.pptx
@@ -6258,8 +6258,8 @@
         </p:nvSpPr>
         <p:spPr>
           <a:xfrm>
-            <a:off x="824400" y="3924000"/>
-            <a:ext cx="1506240" cy="1530000"/>
+            <a:off x="824400" y="4032000"/>
+            <a:ext cx="1506240" cy="1440000"/>
           </a:xfrm>
           <a:prstGeom prst="roundRect">
             <a:avLst>
@@ -6675,8 +6675,8 @@
         </p:nvSpPr>
         <p:spPr>
           <a:xfrm>
-            <a:off x="2546640" y="3924000"/>
-            <a:ext cx="1506240" cy="1530000"/>
+            <a:off x="2546640" y="4032000"/>
+            <a:ext cx="1506240" cy="1440000"/>
           </a:xfrm>
           <a:prstGeom prst="roundRect">
             <a:avLst>
@@ -7113,8 +7113,8 @@
         </p:nvSpPr>
         <p:spPr>
           <a:xfrm>
-            <a:off x="4268880" y="3924000"/>
-            <a:ext cx="1506240" cy="1530000"/>
+            <a:off x="4268880" y="4032000"/>
+            <a:ext cx="1506240" cy="1440000"/>
           </a:xfrm>
           <a:prstGeom prst="roundRect">
             <a:avLst>
@@ -7572,8 +7572,8 @@
         </p:nvSpPr>
         <p:spPr>
           <a:xfrm>
-            <a:off x="5991120" y="3924000"/>
-            <a:ext cx="1506240" cy="1530000"/>
+            <a:off x="5991120" y="4032000"/>
+            <a:ext cx="1506240" cy="1440000"/>
           </a:xfrm>
           <a:prstGeom prst="roundRect">
             <a:avLst>
@@ -8031,8 +8031,8 @@
         </p:nvSpPr>
         <p:spPr>
           <a:xfrm>
-            <a:off x="7713359" y="3924000"/>
-            <a:ext cx="1506240" cy="1530000"/>
+            <a:off x="7713359" y="4032000"/>
+            <a:ext cx="1506240" cy="1440000"/>
           </a:xfrm>
           <a:prstGeom prst="roundRect">
             <a:avLst>

--- a/20261013_セキュリティー京葉御中_LINE採用追客のご提案.pptx
+++ b/20261013_セキュリティー京葉御中_LINE採用追客のご提案.pptx
@@ -12,6 +12,9 @@
     <p:handoutMasterId r:id="rId11"/>
   </p:handoutMasterIdLst>
   <p:sldIdLst>
+    <p:sldId id="263" r:id="rId16"/>
+    <p:sldId id="264" r:id="rId17"/>
+    <p:sldId id="265" r:id="rId18"/>
     <p:sldId id="257" r:id="rId3"/>
     <p:sldId id="256" r:id="rId4"/>
     <p:sldId id="259" r:id="rId5"/>
@@ -4245,6 +4248,289 @@
 </p:sld>
 </file>
 
+<file path=ppt/slides/slide10.xml><?xml version="1.0" encoding="utf-8"?>
+<p:sld xmlns:a="http://schemas.openxmlformats.org/drawingml/2006/main" xmlns:p="http://schemas.openxmlformats.org/presentationml/2006/main" xmlns:r="http://schemas.openxmlformats.org/officeDocument/2006/relationships">
+  <p:cSld>
+    <p:spTree>
+      <p:nvGrpSpPr>
+        <p:cNvPr id="1" name=""/>
+        <p:cNvGrpSpPr/>
+        <p:nvPr/>
+      </p:nvGrpSpPr>
+      <p:grpSpPr/>
+      <p:pic>
+        <p:nvPicPr>
+          <p:cNvPr id="2" name="図 1"/>
+          <p:cNvPicPr>
+            <a:picLocks noChangeAspect="1"/>
+          </p:cNvPicPr>
+          <p:nvPr/>
+        </p:nvPicPr>
+        <p:blipFill rotWithShape="1">
+          <a:blip r:embed="rId2"/>
+          <a:srcRect t="756" b="22252"/>
+          <a:stretch>
+            <a:fillRect/>
+          </a:stretch>
+        </p:blipFill>
+        <p:spPr>
+          <a:xfrm>
+            <a:off x="295975" y="1723516"/>
+            <a:ext cx="9387073" cy="3876095"/>
+          </a:xfrm>
+          <a:prstGeom prst="rect">
+            <a:avLst/>
+          </a:prstGeom>
+        </p:spPr>
+      </p:pic>
+      <p:sp>
+        <p:nvSpPr>
+          <p:cNvPr id="4" name="Google Shape;752;p28">
+            <a:extLst>
+              <a:ext uri="{FF2B5EF4-FFF2-40B4-BE49-F238E27FC236}">
+                <a16:creationId xmlns:a16="http://schemas.microsoft.com/office/drawing/2014/main" id="{FDC206AF-704B-C667-AC7C-8A98250C47FA}"/>
+              </a:ext>
+            </a:extLst>
+          </p:cNvPr>
+          <p:cNvSpPr txBox="1"/>
+          <p:nvPr/>
+        </p:nvSpPr>
+        <p:spPr>
+          <a:xfrm>
+            <a:off x="548883" y="138137"/>
+            <a:ext cx="6276325" cy="338514"/>
+          </a:xfrm>
+          <a:prstGeom prst="rect">
+            <a:avLst/>
+          </a:prstGeom>
+          <a:noFill/>
+          <a:ln>
+            <a:noFill/>
+          </a:ln>
+        </p:spPr>
+        <p:txBody>
+          <a:bodyPr spcFirstLastPara="1" wrap="square" lIns="91425" tIns="45700" rIns="91425" bIns="45700" anchor="ctr" anchorCtr="0">
+            <a:spAutoFit/>
+          </a:bodyPr>
+          <a:lstStyle/>
+          <a:p>
+            <a:pPr lvl="0"/>
+            <a:r>
+              <a:rPr lang="ja-JP" altLang="en-US" sz="1600" b="1" dirty="0">
+                <a:solidFill>
+                  <a:srgbClr val="323366"/>
+                </a:solidFill>
+                <a:latin typeface="メイリオ" panose="020B0604030504040204" pitchFamily="50" charset="-128"/>
+                <a:ea typeface="メイリオ" panose="020B0604030504040204" pitchFamily="50" charset="-128"/>
+                <a:cs typeface="Meiryo"/>
+                <a:sym typeface="Meiryo"/>
+              </a:rPr>
+              <a:t>弊社の強み</a:t>
+            </a:r>
+          </a:p>
+        </p:txBody>
+      </p:sp>
+      <p:sp>
+        <p:nvSpPr>
+          <p:cNvPr id="7" name="正方形/長方形 6">
+            <a:extLst>
+              <a:ext uri="{FF2B5EF4-FFF2-40B4-BE49-F238E27FC236}">
+                <a16:creationId xmlns:a16="http://schemas.microsoft.com/office/drawing/2014/main" id="{5B599DE5-990B-7CA4-B34C-8BC9D9739CAB}"/>
+              </a:ext>
+            </a:extLst>
+          </p:cNvPr>
+          <p:cNvSpPr/>
+          <p:nvPr/>
+        </p:nvSpPr>
+        <p:spPr>
+          <a:xfrm>
+            <a:off x="486784" y="613850"/>
+            <a:ext cx="9005456" cy="677739"/>
+          </a:xfrm>
+          <a:prstGeom prst="rect">
+            <a:avLst/>
+          </a:prstGeom>
+          <a:noFill/>
+          <a:ln>
+            <a:noFill/>
+          </a:ln>
+        </p:spPr>
+        <p:style>
+          <a:lnRef idx="2">
+            <a:schemeClr val="accent1">
+              <a:shade val="50000"/>
+            </a:schemeClr>
+          </a:lnRef>
+          <a:fillRef idx="1">
+            <a:schemeClr val="accent1"/>
+          </a:fillRef>
+          <a:effectRef idx="0">
+            <a:schemeClr val="accent1"/>
+          </a:effectRef>
+          <a:fontRef idx="minor">
+            <a:schemeClr val="lt1"/>
+          </a:fontRef>
+        </p:style>
+        <p:txBody>
+          <a:bodyPr tIns="90000" anchor="ctr"/>
+          <a:lstStyle>
+            <a:defPPr>
+              <a:defRPr lang="ja-JP"/>
+            </a:defPPr>
+            <a:lvl1pPr marL="0" algn="l" defTabSz="914400" rtl="0" eaLnBrk="1" latinLnBrk="0" hangingPunct="1">
+              <a:defRPr kumimoji="1" sz="1800" kern="1200">
+                <a:solidFill>
+                  <a:schemeClr val="lt1"/>
+                </a:solidFill>
+                <a:latin typeface="+mn-lt"/>
+                <a:ea typeface="+mn-ea"/>
+                <a:cs typeface="+mn-cs"/>
+              </a:defRPr>
+            </a:lvl1pPr>
+            <a:lvl2pPr marL="457200" algn="l" defTabSz="914400" rtl="0" eaLnBrk="1" latinLnBrk="0" hangingPunct="1">
+              <a:defRPr kumimoji="1" sz="1800" kern="1200">
+                <a:solidFill>
+                  <a:schemeClr val="lt1"/>
+                </a:solidFill>
+                <a:latin typeface="+mn-lt"/>
+                <a:ea typeface="+mn-ea"/>
+                <a:cs typeface="+mn-cs"/>
+              </a:defRPr>
+            </a:lvl2pPr>
+            <a:lvl3pPr marL="914400" algn="l" defTabSz="914400" rtl="0" eaLnBrk="1" latinLnBrk="0" hangingPunct="1">
+              <a:defRPr kumimoji="1" sz="1800" kern="1200">
+                <a:solidFill>
+                  <a:schemeClr val="lt1"/>
+                </a:solidFill>
+                <a:latin typeface="+mn-lt"/>
+                <a:ea typeface="+mn-ea"/>
+                <a:cs typeface="+mn-cs"/>
+              </a:defRPr>
+            </a:lvl3pPr>
+            <a:lvl4pPr marL="1371600" algn="l" defTabSz="914400" rtl="0" eaLnBrk="1" latinLnBrk="0" hangingPunct="1">
+              <a:defRPr kumimoji="1" sz="1800" kern="1200">
+                <a:solidFill>
+                  <a:schemeClr val="lt1"/>
+                </a:solidFill>
+                <a:latin typeface="+mn-lt"/>
+                <a:ea typeface="+mn-ea"/>
+                <a:cs typeface="+mn-cs"/>
+              </a:defRPr>
+            </a:lvl4pPr>
+            <a:lvl5pPr marL="1828800" algn="l" defTabSz="914400" rtl="0" eaLnBrk="1" latinLnBrk="0" hangingPunct="1">
+              <a:defRPr kumimoji="1" sz="1800" kern="1200">
+                <a:solidFill>
+                  <a:schemeClr val="lt1"/>
+                </a:solidFill>
+                <a:latin typeface="+mn-lt"/>
+                <a:ea typeface="+mn-ea"/>
+                <a:cs typeface="+mn-cs"/>
+              </a:defRPr>
+            </a:lvl5pPr>
+            <a:lvl6pPr marL="2286000" algn="l" defTabSz="914400" rtl="0" eaLnBrk="1" latinLnBrk="0" hangingPunct="1">
+              <a:defRPr kumimoji="1" sz="1800" kern="1200">
+                <a:solidFill>
+                  <a:schemeClr val="lt1"/>
+                </a:solidFill>
+                <a:latin typeface="+mn-lt"/>
+                <a:ea typeface="+mn-ea"/>
+                <a:cs typeface="+mn-cs"/>
+              </a:defRPr>
+            </a:lvl6pPr>
+            <a:lvl7pPr marL="2743200" algn="l" defTabSz="914400" rtl="0" eaLnBrk="1" latinLnBrk="0" hangingPunct="1">
+              <a:defRPr kumimoji="1" sz="1800" kern="1200">
+                <a:solidFill>
+                  <a:schemeClr val="lt1"/>
+                </a:solidFill>
+                <a:latin typeface="+mn-lt"/>
+                <a:ea typeface="+mn-ea"/>
+                <a:cs typeface="+mn-cs"/>
+              </a:defRPr>
+            </a:lvl7pPr>
+            <a:lvl8pPr marL="3200400" algn="l" defTabSz="914400" rtl="0" eaLnBrk="1" latinLnBrk="0" hangingPunct="1">
+              <a:defRPr kumimoji="1" sz="1800" kern="1200">
+                <a:solidFill>
+                  <a:schemeClr val="lt1"/>
+                </a:solidFill>
+                <a:latin typeface="+mn-lt"/>
+                <a:ea typeface="+mn-ea"/>
+                <a:cs typeface="+mn-cs"/>
+              </a:defRPr>
+            </a:lvl8pPr>
+            <a:lvl9pPr marL="3657600" algn="l" defTabSz="914400" rtl="0" eaLnBrk="1" latinLnBrk="0" hangingPunct="1">
+              <a:defRPr kumimoji="1" sz="1800" kern="1200">
+                <a:solidFill>
+                  <a:schemeClr val="lt1"/>
+                </a:solidFill>
+                <a:latin typeface="+mn-lt"/>
+                <a:ea typeface="+mn-ea"/>
+                <a:cs typeface="+mn-cs"/>
+              </a:defRPr>
+            </a:lvl9pPr>
+          </a:lstStyle>
+          <a:p>
+            <a:pPr algn="ctr"/>
+            <a:r>
+              <a:rPr lang="ja-JP" altLang="en-US" sz="1600" b="1" dirty="0">
+                <a:solidFill>
+                  <a:schemeClr val="tx1"/>
+                </a:solidFill>
+                <a:latin typeface="メイリオ" panose="020B0604030504040204" pitchFamily="50" charset="-128"/>
+                <a:ea typeface="メイリオ" panose="020B0604030504040204" pitchFamily="50" charset="-128"/>
+              </a:rPr>
+              <a:t>プランニング</a:t>
+            </a:r>
+            <a:r>
+              <a:rPr lang="en-US" altLang="ja-JP" sz="1600" b="1" dirty="0">
+                <a:solidFill>
+                  <a:schemeClr val="tx1"/>
+                </a:solidFill>
+                <a:latin typeface="メイリオ" panose="020B0604030504040204" pitchFamily="50" charset="-128"/>
+                <a:ea typeface="メイリオ" panose="020B0604030504040204" pitchFamily="50" charset="-128"/>
+              </a:rPr>
+              <a:t>~</a:t>
+            </a:r>
+            <a:r>
+              <a:rPr lang="ja-JP" altLang="en-US" sz="1600" b="1" dirty="0">
+                <a:solidFill>
+                  <a:schemeClr val="tx1"/>
+                </a:solidFill>
+                <a:latin typeface="メイリオ" panose="020B0604030504040204" pitchFamily="50" charset="-128"/>
+                <a:ea typeface="メイリオ" panose="020B0604030504040204" pitchFamily="50" charset="-128"/>
+              </a:rPr>
+              <a:t>運用・クリエイティブを一気通貫で行うことで、成果にコミットしやすい体制。</a:t>
+            </a:r>
+            <a:endParaRPr lang="en-US" altLang="ja-JP" sz="1600" b="1" dirty="0">
+              <a:solidFill>
+                <a:schemeClr val="tx1"/>
+              </a:solidFill>
+              <a:latin typeface="メイリオ" panose="020B0604030504040204" pitchFamily="50" charset="-128"/>
+              <a:ea typeface="メイリオ" panose="020B0604030504040204" pitchFamily="50" charset="-128"/>
+            </a:endParaRPr>
+          </a:p>
+          <a:p>
+            <a:pPr algn="ctr"/>
+            <a:r>
+              <a:rPr lang="ja-JP" altLang="en-US" sz="1600" b="1" dirty="0">
+                <a:solidFill>
+                  <a:schemeClr val="tx1"/>
+                </a:solidFill>
+                <a:latin typeface="メイリオ" panose="020B0604030504040204" pitchFamily="50" charset="-128"/>
+                <a:ea typeface="メイリオ" panose="020B0604030504040204" pitchFamily="50" charset="-128"/>
+              </a:rPr>
+              <a:t>貴社としても窓口・依頼の工数を大きく削減しながらの施策スタートが可能です。</a:t>
+            </a:r>
+          </a:p>
+        </p:txBody>
+      </p:sp>
+    </p:spTree>
+  </p:cSld>
+  <p:clrMapOvr>
+    <a:masterClrMapping/>
+  </p:clrMapOvr>
+</p:sld>
+</file>
+
 <file path=ppt/slides/slide2.xml><?xml version="1.0" encoding="utf-8"?>
 <p:sld xmlns:a="http://schemas.openxmlformats.org/drawingml/2006/main" xmlns:r="http://schemas.openxmlformats.org/officeDocument/2006/relationships" xmlns:p="http://schemas.openxmlformats.org/presentationml/2006/main">
   <p:cSld>
@@ -15372,6 +15658,6163 @@
               </a:rPr>
               <a:t>・LINE公式アカウント・Lステップの利用料</a:t>
             </a:r>
+          </a:p>
+        </p:txBody>
+      </p:sp>
+    </p:spTree>
+  </p:cSld>
+  <p:clrMapOvr>
+    <a:masterClrMapping/>
+  </p:clrMapOvr>
+</p:sld>
+</file>
+
+<file path=ppt/slides/slide8.xml><?xml version="1.0" encoding="utf-8"?>
+<p:sld xmlns:a="http://schemas.openxmlformats.org/drawingml/2006/main" xmlns:p="http://schemas.openxmlformats.org/presentationml/2006/main" xmlns:r="http://schemas.openxmlformats.org/officeDocument/2006/relationships">
+  <p:cSld>
+    <p:spTree>
+      <p:nvGrpSpPr>
+        <p:cNvPr id="1" name=""/>
+        <p:cNvGrpSpPr/>
+        <p:nvPr/>
+      </p:nvGrpSpPr>
+      <p:grpSpPr/>
+      <p:pic>
+        <p:nvPicPr>
+          <p:cNvPr id="58" name="図 57" descr="文字と写真のスクリーンショット&#10;&#10;AI 生成コンテンツは誤りを含む可能性があります。">
+            <a:extLst>
+              <a:ext uri="{FF2B5EF4-FFF2-40B4-BE49-F238E27FC236}">
+                <a16:creationId xmlns:a16="http://schemas.microsoft.com/office/drawing/2014/main" id="{BC098C34-07FA-B015-C970-B8433D9E8BE3}"/>
+              </a:ext>
+            </a:extLst>
+          </p:cNvPr>
+          <p:cNvPicPr>
+            <a:picLocks noChangeAspect="1"/>
+          </p:cNvPicPr>
+          <p:nvPr/>
+        </p:nvPicPr>
+        <p:blipFill>
+          <a:blip r:embed="rId3" cstate="print">
+            <a:extLst>
+              <a:ext uri="{28A0092B-C50C-407E-A947-70E740481C1C}">
+                <a14:useLocalDpi xmlns:a14="http://schemas.microsoft.com/office/drawing/2010/main" val="0"/>
+              </a:ext>
+            </a:extLst>
+          </a:blip>
+          <a:srcRect l="33846" t="3967" r="34188" b="52442"/>
+          <a:stretch>
+            <a:fillRect/>
+          </a:stretch>
+        </p:blipFill>
+        <p:spPr>
+          <a:xfrm>
+            <a:off x="489022" y="5068469"/>
+            <a:ext cx="2046003" cy="1464812"/>
+          </a:xfrm>
+          <a:prstGeom prst="rect">
+            <a:avLst/>
+          </a:prstGeom>
+        </p:spPr>
+      </p:pic>
+      <p:sp>
+        <p:nvSpPr>
+          <p:cNvPr id="33" name="正方形/長方形 32">
+            <a:extLst>
+              <a:ext uri="{FF2B5EF4-FFF2-40B4-BE49-F238E27FC236}">
+                <a16:creationId xmlns:a16="http://schemas.microsoft.com/office/drawing/2014/main" id="{1E52F929-5FD7-9413-24A8-2725B04E4908}"/>
+              </a:ext>
+            </a:extLst>
+          </p:cNvPr>
+          <p:cNvSpPr/>
+          <p:nvPr/>
+        </p:nvSpPr>
+        <p:spPr>
+          <a:xfrm>
+            <a:off x="388723" y="1082314"/>
+            <a:ext cx="9129600" cy="1005648"/>
+          </a:xfrm>
+          <a:prstGeom prst="rect">
+            <a:avLst/>
+          </a:prstGeom>
+          <a:solidFill>
+            <a:schemeClr val="bg1">
+              <a:lumMod val="95000"/>
+            </a:schemeClr>
+          </a:solidFill>
+          <a:ln>
+            <a:noFill/>
+          </a:ln>
+        </p:spPr>
+        <p:style>
+          <a:lnRef idx="2">
+            <a:schemeClr val="accent1">
+              <a:shade val="15000"/>
+            </a:schemeClr>
+          </a:lnRef>
+          <a:fillRef idx="1">
+            <a:schemeClr val="accent1"/>
+          </a:fillRef>
+          <a:effectRef idx="0">
+            <a:schemeClr val="accent1"/>
+          </a:effectRef>
+          <a:fontRef idx="minor">
+            <a:schemeClr val="lt1"/>
+          </a:fontRef>
+        </p:style>
+        <p:txBody>
+          <a:bodyPr rtlCol="0" anchor="ctr"/>
+          <a:lstStyle/>
+          <a:p>
+            <a:pPr algn="ctr"/>
+            <a:r>
+              <a:rPr lang="en-US" altLang="ja-JP" sz="1200" dirty="0">
+                <a:solidFill>
+                  <a:srgbClr val="000000">
+                    <a:lumMod val="95000"/>
+                    <a:lumOff val="5000"/>
+                  </a:srgbClr>
+                </a:solidFill>
+                <a:latin typeface="メイリオ" panose="020B0604030504040204" pitchFamily="50" charset="-128"/>
+                <a:ea typeface="メイリオ" panose="020B0604030504040204" pitchFamily="50" charset="-128"/>
+              </a:rPr>
+              <a:t>2025</a:t>
+            </a:r>
+            <a:r>
+              <a:rPr lang="ja-JP" altLang="en-US" sz="1200" dirty="0">
+                <a:solidFill>
+                  <a:srgbClr val="000000">
+                    <a:lumMod val="95000"/>
+                    <a:lumOff val="5000"/>
+                  </a:srgbClr>
+                </a:solidFill>
+                <a:latin typeface="メイリオ" panose="020B0604030504040204" pitchFamily="50" charset="-128"/>
+                <a:ea typeface="メイリオ" panose="020B0604030504040204" pitchFamily="50" charset="-128"/>
+              </a:rPr>
+              <a:t>年</a:t>
+            </a:r>
+            <a:r>
+              <a:rPr lang="en-US" altLang="ja-JP" sz="1200" dirty="0">
+                <a:solidFill>
+                  <a:srgbClr val="000000">
+                    <a:lumMod val="95000"/>
+                    <a:lumOff val="5000"/>
+                  </a:srgbClr>
+                </a:solidFill>
+                <a:latin typeface="メイリオ" panose="020B0604030504040204" pitchFamily="50" charset="-128"/>
+                <a:ea typeface="メイリオ" panose="020B0604030504040204" pitchFamily="50" charset="-128"/>
+              </a:rPr>
+              <a:t>11</a:t>
+            </a:r>
+            <a:r>
+              <a:rPr lang="ja-JP" altLang="en-US" sz="1200" dirty="0">
+                <a:solidFill>
+                  <a:srgbClr val="000000">
+                    <a:lumMod val="95000"/>
+                    <a:lumOff val="5000"/>
+                  </a:srgbClr>
+                </a:solidFill>
+                <a:latin typeface="メイリオ" panose="020B0604030504040204" pitchFamily="50" charset="-128"/>
+                <a:ea typeface="メイリオ" panose="020B0604030504040204" pitchFamily="50" charset="-128"/>
+              </a:rPr>
+              <a:t>月、株式会社</a:t>
+            </a:r>
+            <a:r>
+              <a:rPr lang="en-US" altLang="ja-JP" sz="1200" dirty="0">
+                <a:solidFill>
+                  <a:srgbClr val="000000">
+                    <a:lumMod val="95000"/>
+                    <a:lumOff val="5000"/>
+                  </a:srgbClr>
+                </a:solidFill>
+                <a:latin typeface="メイリオ" panose="020B0604030504040204" pitchFamily="50" charset="-128"/>
+                <a:ea typeface="メイリオ" panose="020B0604030504040204" pitchFamily="50" charset="-128"/>
+              </a:rPr>
+              <a:t>LINE</a:t>
+            </a:r>
+            <a:r>
+              <a:rPr lang="ja-JP" altLang="en-US" sz="1200" dirty="0">
+                <a:solidFill>
+                  <a:srgbClr val="000000">
+                    <a:lumMod val="95000"/>
+                    <a:lumOff val="5000"/>
+                  </a:srgbClr>
+                </a:solidFill>
+                <a:latin typeface="メイリオ" panose="020B0604030504040204" pitchFamily="50" charset="-128"/>
+                <a:ea typeface="メイリオ" panose="020B0604030504040204" pitchFamily="50" charset="-128"/>
+              </a:rPr>
+              <a:t>ヤフー社が主催する </a:t>
+            </a:r>
+            <a:r>
+              <a:rPr lang="en-US" altLang="ja-JP" sz="1200" dirty="0">
+                <a:solidFill>
+                  <a:srgbClr val="000000">
+                    <a:lumMod val="95000"/>
+                    <a:lumOff val="5000"/>
+                  </a:srgbClr>
+                </a:solidFill>
+                <a:latin typeface="メイリオ" panose="020B0604030504040204" pitchFamily="50" charset="-128"/>
+                <a:ea typeface="メイリオ" panose="020B0604030504040204" pitchFamily="50" charset="-128"/>
+              </a:rPr>
+              <a:t>”LINE</a:t>
+            </a:r>
+            <a:r>
+              <a:rPr lang="ja-JP" altLang="en-US" sz="1200" dirty="0">
+                <a:solidFill>
+                  <a:srgbClr val="000000">
+                    <a:lumMod val="95000"/>
+                    <a:lumOff val="5000"/>
+                  </a:srgbClr>
+                </a:solidFill>
+                <a:latin typeface="メイリオ" panose="020B0604030504040204" pitchFamily="50" charset="-128"/>
+                <a:ea typeface="メイリオ" panose="020B0604030504040204" pitchFamily="50" charset="-128"/>
+              </a:rPr>
+              <a:t>ヤフー </a:t>
+            </a:r>
+            <a:r>
+              <a:rPr lang="en-US" altLang="ja-JP" sz="1200" dirty="0">
+                <a:solidFill>
+                  <a:srgbClr val="000000">
+                    <a:lumMod val="95000"/>
+                    <a:lumOff val="5000"/>
+                  </a:srgbClr>
+                </a:solidFill>
+                <a:latin typeface="メイリオ" panose="020B0604030504040204" pitchFamily="50" charset="-128"/>
+                <a:ea typeface="メイリオ" panose="020B0604030504040204" pitchFamily="50" charset="-128"/>
+              </a:rPr>
+              <a:t>Partner Award 2025” </a:t>
+            </a:r>
+            <a:r>
+              <a:rPr lang="ja-JP" altLang="en-US" sz="1200" dirty="0">
+                <a:solidFill>
+                  <a:srgbClr val="000000">
+                    <a:lumMod val="95000"/>
+                    <a:lumOff val="5000"/>
+                  </a:srgbClr>
+                </a:solidFill>
+                <a:latin typeface="メイリオ" panose="020B0604030504040204" pitchFamily="50" charset="-128"/>
+                <a:ea typeface="メイリオ" panose="020B0604030504040204" pitchFamily="50" charset="-128"/>
+              </a:rPr>
+              <a:t>に株式会社</a:t>
+            </a:r>
+            <a:r>
+              <a:rPr lang="en-US" altLang="ja-JP" sz="1200" dirty="0">
+                <a:solidFill>
+                  <a:srgbClr val="000000">
+                    <a:lumMod val="95000"/>
+                    <a:lumOff val="5000"/>
+                  </a:srgbClr>
+                </a:solidFill>
+                <a:latin typeface="メイリオ" panose="020B0604030504040204" pitchFamily="50" charset="-128"/>
+                <a:ea typeface="メイリオ" panose="020B0604030504040204" pitchFamily="50" charset="-128"/>
+              </a:rPr>
+              <a:t>DYM</a:t>
+            </a:r>
+            <a:r>
+              <a:rPr lang="ja-JP" altLang="en-US" sz="1200" dirty="0">
+                <a:solidFill>
+                  <a:srgbClr val="000000">
+                    <a:lumMod val="95000"/>
+                    <a:lumOff val="5000"/>
+                  </a:srgbClr>
+                </a:solidFill>
+                <a:latin typeface="メイリオ" panose="020B0604030504040204" pitchFamily="50" charset="-128"/>
+                <a:ea typeface="メイリオ" panose="020B0604030504040204" pitchFamily="50" charset="-128"/>
+              </a:rPr>
+              <a:t>が参加。</a:t>
+            </a:r>
+            <a:br>
+              <a:rPr lang="en-US" altLang="ja-JP" sz="1200" dirty="0">
+                <a:solidFill>
+                  <a:srgbClr val="000000">
+                    <a:lumMod val="95000"/>
+                    <a:lumOff val="5000"/>
+                  </a:srgbClr>
+                </a:solidFill>
+                <a:latin typeface="メイリオ" panose="020B0604030504040204" pitchFamily="50" charset="-128"/>
+                <a:ea typeface="メイリオ" panose="020B0604030504040204" pitchFamily="50" charset="-128"/>
+              </a:rPr>
+            </a:br>
+            <a:r>
+              <a:rPr lang="ja-JP" altLang="en-US" sz="1200" dirty="0">
+                <a:solidFill>
+                  <a:srgbClr val="000000">
+                    <a:lumMod val="95000"/>
+                    <a:lumOff val="5000"/>
+                  </a:srgbClr>
+                </a:solidFill>
+                <a:latin typeface="メイリオ" panose="020B0604030504040204" pitchFamily="50" charset="-128"/>
+                <a:ea typeface="メイリオ" panose="020B0604030504040204" pitchFamily="50" charset="-128"/>
+              </a:rPr>
+              <a:t>弊社は</a:t>
+            </a:r>
+            <a:r>
+              <a:rPr lang="en-US" altLang="ja-JP" sz="1200" dirty="0">
+                <a:solidFill>
+                  <a:srgbClr val="000000">
+                    <a:lumMod val="95000"/>
+                    <a:lumOff val="5000"/>
+                  </a:srgbClr>
+                </a:solidFill>
+                <a:latin typeface="メイリオ" panose="020B0604030504040204" pitchFamily="50" charset="-128"/>
+                <a:ea typeface="メイリオ" panose="020B0604030504040204" pitchFamily="50" charset="-128"/>
+              </a:rPr>
+              <a:t>LINE</a:t>
+            </a:r>
+            <a:r>
+              <a:rPr lang="ja-JP" altLang="en-US" sz="1200" dirty="0">
+                <a:solidFill>
+                  <a:srgbClr val="000000">
+                    <a:lumMod val="95000"/>
+                    <a:lumOff val="5000"/>
+                  </a:srgbClr>
+                </a:solidFill>
+                <a:latin typeface="メイリオ" panose="020B0604030504040204" pitchFamily="50" charset="-128"/>
+                <a:ea typeface="メイリオ" panose="020B0604030504040204" pitchFamily="50" charset="-128"/>
+              </a:rPr>
+              <a:t>公式アカウントによるビジネス拡大に最も貢献したとして、</a:t>
+            </a:r>
+            <a:r>
+              <a:rPr lang="ja-JP" altLang="en-US" sz="1200" b="1" dirty="0">
+                <a:solidFill>
+                  <a:srgbClr val="C00000"/>
+                </a:solidFill>
+                <a:latin typeface="メイリオ" panose="020B0604030504040204" pitchFamily="50" charset="-128"/>
+                <a:ea typeface="メイリオ" panose="020B0604030504040204" pitchFamily="50" charset="-128"/>
+              </a:rPr>
+              <a:t>「</a:t>
+            </a:r>
+            <a:r>
+              <a:rPr lang="en-US" altLang="ja-JP" sz="1200" b="1" dirty="0">
+                <a:solidFill>
+                  <a:srgbClr val="C00000"/>
+                </a:solidFill>
+                <a:latin typeface="メイリオ" panose="020B0604030504040204" pitchFamily="50" charset="-128"/>
+                <a:ea typeface="メイリオ" panose="020B0604030504040204" pitchFamily="50" charset="-128"/>
+              </a:rPr>
+              <a:t>Best LINE</a:t>
+            </a:r>
+            <a:r>
+              <a:rPr lang="ja-JP" altLang="en-US" sz="1200" b="1" dirty="0">
+                <a:solidFill>
+                  <a:srgbClr val="C00000"/>
+                </a:solidFill>
+                <a:latin typeface="メイリオ" panose="020B0604030504040204" pitchFamily="50" charset="-128"/>
+                <a:ea typeface="メイリオ" panose="020B0604030504040204" pitchFamily="50" charset="-128"/>
+              </a:rPr>
+              <a:t>公式アカウント </a:t>
+            </a:r>
+            <a:r>
+              <a:rPr lang="en-US" altLang="ja-JP" sz="1200" b="1" dirty="0">
+                <a:solidFill>
+                  <a:srgbClr val="C00000"/>
+                </a:solidFill>
+                <a:latin typeface="メイリオ" panose="020B0604030504040204" pitchFamily="50" charset="-128"/>
+                <a:ea typeface="メイリオ" panose="020B0604030504040204" pitchFamily="50" charset="-128"/>
+              </a:rPr>
+              <a:t>Growth</a:t>
+            </a:r>
+            <a:r>
+              <a:rPr lang="en-US" altLang="ja-JP" sz="700" b="1" dirty="0">
+                <a:solidFill>
+                  <a:srgbClr val="C00000"/>
+                </a:solidFill>
+                <a:latin typeface="メイリオ" panose="020B0604030504040204" pitchFamily="50" charset="-128"/>
+                <a:ea typeface="メイリオ" panose="020B0604030504040204" pitchFamily="50" charset="-128"/>
+              </a:rPr>
+              <a:t>※</a:t>
+            </a:r>
+            <a:r>
+              <a:rPr lang="ja-JP" altLang="en-US" sz="1200" b="1" dirty="0">
+                <a:solidFill>
+                  <a:srgbClr val="C00000"/>
+                </a:solidFill>
+                <a:latin typeface="メイリオ" panose="020B0604030504040204" pitchFamily="50" charset="-128"/>
+                <a:ea typeface="メイリオ" panose="020B0604030504040204" pitchFamily="50" charset="-128"/>
+              </a:rPr>
+              <a:t>」</a:t>
+            </a:r>
+            <a:r>
+              <a:rPr lang="ja-JP" altLang="en-US" sz="1200" dirty="0">
+                <a:solidFill>
+                  <a:srgbClr val="000000">
+                    <a:lumMod val="95000"/>
+                    <a:lumOff val="5000"/>
+                  </a:srgbClr>
+                </a:solidFill>
+                <a:latin typeface="メイリオ" panose="020B0604030504040204" pitchFamily="50" charset="-128"/>
+                <a:ea typeface="メイリオ" panose="020B0604030504040204" pitchFamily="50" charset="-128"/>
+              </a:rPr>
+              <a:t>を受賞。</a:t>
+            </a:r>
+            <a:br>
+              <a:rPr lang="en-US" altLang="ja-JP" sz="1200" dirty="0">
+                <a:solidFill>
+                  <a:srgbClr val="000000">
+                    <a:lumMod val="95000"/>
+                    <a:lumOff val="5000"/>
+                  </a:srgbClr>
+                </a:solidFill>
+                <a:latin typeface="メイリオ" panose="020B0604030504040204" pitchFamily="50" charset="-128"/>
+                <a:ea typeface="メイリオ" panose="020B0604030504040204" pitchFamily="50" charset="-128"/>
+              </a:rPr>
+            </a:br>
+            <a:r>
+              <a:rPr lang="en-US" altLang="ja-JP" sz="1200" dirty="0">
+                <a:solidFill>
+                  <a:srgbClr val="000000">
+                    <a:lumMod val="95000"/>
+                    <a:lumOff val="5000"/>
+                  </a:srgbClr>
+                </a:solidFill>
+                <a:latin typeface="メイリオ" panose="020B0604030504040204" pitchFamily="50" charset="-128"/>
+                <a:ea typeface="メイリオ" panose="020B0604030504040204" pitchFamily="50" charset="-128"/>
+              </a:rPr>
+              <a:t>2025</a:t>
+            </a:r>
+            <a:r>
+              <a:rPr lang="ja-JP" altLang="en-US" sz="1200" dirty="0">
+                <a:solidFill>
+                  <a:srgbClr val="000000">
+                    <a:lumMod val="95000"/>
+                    <a:lumOff val="5000"/>
+                  </a:srgbClr>
+                </a:solidFill>
+                <a:latin typeface="メイリオ" panose="020B0604030504040204" pitchFamily="50" charset="-128"/>
+                <a:ea typeface="メイリオ" panose="020B0604030504040204" pitchFamily="50" charset="-128"/>
+              </a:rPr>
+              <a:t>年</a:t>
+            </a:r>
+            <a:r>
+              <a:rPr lang="en-US" altLang="ja-JP" sz="1200" dirty="0">
+                <a:solidFill>
+                  <a:srgbClr val="000000">
+                    <a:lumMod val="95000"/>
+                    <a:lumOff val="5000"/>
+                  </a:srgbClr>
+                </a:solidFill>
+                <a:latin typeface="メイリオ" panose="020B0604030504040204" pitchFamily="50" charset="-128"/>
+                <a:ea typeface="メイリオ" panose="020B0604030504040204" pitchFamily="50" charset="-128"/>
+              </a:rPr>
+              <a:t>10</a:t>
+            </a:r>
+            <a:r>
+              <a:rPr lang="ja-JP" altLang="en-US" sz="1200" dirty="0">
+                <a:solidFill>
+                  <a:srgbClr val="000000">
+                    <a:lumMod val="95000"/>
+                    <a:lumOff val="5000"/>
+                  </a:srgbClr>
+                </a:solidFill>
+                <a:latin typeface="メイリオ" panose="020B0604030504040204" pitchFamily="50" charset="-128"/>
+                <a:ea typeface="メイリオ" panose="020B0604030504040204" pitchFamily="50" charset="-128"/>
+              </a:rPr>
+              <a:t>月現在、</a:t>
+            </a:r>
+            <a:r>
+              <a:rPr lang="en-US" altLang="ja-JP" sz="1200" dirty="0">
+                <a:solidFill>
+                  <a:srgbClr val="000000">
+                    <a:lumMod val="95000"/>
+                    <a:lumOff val="5000"/>
+                  </a:srgbClr>
+                </a:solidFill>
+                <a:latin typeface="メイリオ" panose="020B0604030504040204" pitchFamily="50" charset="-128"/>
+                <a:ea typeface="メイリオ" panose="020B0604030504040204" pitchFamily="50" charset="-128"/>
+              </a:rPr>
+              <a:t>LINE</a:t>
+            </a:r>
+            <a:r>
+              <a:rPr lang="ja-JP" altLang="en-US" sz="1200" dirty="0">
+                <a:solidFill>
+                  <a:srgbClr val="000000">
+                    <a:lumMod val="95000"/>
+                    <a:lumOff val="5000"/>
+                  </a:srgbClr>
+                </a:solidFill>
+                <a:latin typeface="メイリオ" panose="020B0604030504040204" pitchFamily="50" charset="-128"/>
+                <a:ea typeface="メイリオ" panose="020B0604030504040204" pitchFamily="50" charset="-128"/>
+              </a:rPr>
+              <a:t>公式アカウントの取扱社数は</a:t>
+            </a:r>
+            <a:r>
+              <a:rPr lang="en-US" altLang="ja-JP" sz="1200" dirty="0">
+                <a:solidFill>
+                  <a:srgbClr val="000000">
+                    <a:lumMod val="95000"/>
+                    <a:lumOff val="5000"/>
+                  </a:srgbClr>
+                </a:solidFill>
+                <a:latin typeface="メイリオ" panose="020B0604030504040204" pitchFamily="50" charset="-128"/>
+                <a:ea typeface="メイリオ" panose="020B0604030504040204" pitchFamily="50" charset="-128"/>
+              </a:rPr>
+              <a:t>100</a:t>
+            </a:r>
+            <a:r>
+              <a:rPr lang="ja-JP" altLang="en-US" sz="1200" dirty="0">
+                <a:solidFill>
+                  <a:srgbClr val="000000">
+                    <a:lumMod val="95000"/>
+                    <a:lumOff val="5000"/>
+                  </a:srgbClr>
+                </a:solidFill>
+                <a:latin typeface="メイリオ" panose="020B0604030504040204" pitchFamily="50" charset="-128"/>
+                <a:ea typeface="メイリオ" panose="020B0604030504040204" pitchFamily="50" charset="-128"/>
+              </a:rPr>
+              <a:t>社以上、</a:t>
+            </a:r>
+            <a:r>
+              <a:rPr lang="en-US" altLang="ja-JP" sz="1200" dirty="0">
+                <a:solidFill>
+                  <a:srgbClr val="000000">
+                    <a:lumMod val="95000"/>
+                    <a:lumOff val="5000"/>
+                  </a:srgbClr>
+                </a:solidFill>
+                <a:latin typeface="メイリオ" panose="020B0604030504040204" pitchFamily="50" charset="-128"/>
+                <a:ea typeface="メイリオ" panose="020B0604030504040204" pitchFamily="50" charset="-128"/>
+              </a:rPr>
+              <a:t>400</a:t>
+            </a:r>
+            <a:r>
+              <a:rPr lang="ja-JP" altLang="en-US" sz="1200" dirty="0">
+                <a:solidFill>
+                  <a:srgbClr val="000000">
+                    <a:lumMod val="95000"/>
+                    <a:lumOff val="5000"/>
+                  </a:srgbClr>
+                </a:solidFill>
+                <a:latin typeface="メイリオ" panose="020B0604030504040204" pitchFamily="50" charset="-128"/>
+                <a:ea typeface="メイリオ" panose="020B0604030504040204" pitchFamily="50" charset="-128"/>
+              </a:rPr>
+              <a:t>アカウント以上まで拡大しており関連サービスも展開中。</a:t>
+            </a:r>
+            <a:endParaRPr lang="en-US" altLang="ja-JP" sz="1200" dirty="0">
+              <a:solidFill>
+                <a:srgbClr val="000000">
+                  <a:lumMod val="95000"/>
+                  <a:lumOff val="5000"/>
+                </a:srgbClr>
+              </a:solidFill>
+              <a:latin typeface="メイリオ" panose="020B0604030504040204" pitchFamily="50" charset="-128"/>
+              <a:ea typeface="メイリオ" panose="020B0604030504040204" pitchFamily="50" charset="-128"/>
+            </a:endParaRPr>
+          </a:p>
+          <a:p>
+            <a:pPr algn="r"/>
+            <a:r>
+              <a:rPr lang="en-US" altLang="ja-JP" sz="900" dirty="0">
+                <a:solidFill>
+                  <a:schemeClr val="tx1">
+                    <a:lumMod val="65000"/>
+                    <a:lumOff val="35000"/>
+                  </a:schemeClr>
+                </a:solidFill>
+                <a:latin typeface="メイリオ" panose="020B0604030504040204" pitchFamily="50" charset="-128"/>
+                <a:ea typeface="メイリオ" panose="020B0604030504040204" pitchFamily="50" charset="-128"/>
+              </a:rPr>
+              <a:t>※ LINE</a:t>
+            </a:r>
+            <a:r>
+              <a:rPr lang="ja-JP" altLang="en-US" sz="900" dirty="0">
+                <a:solidFill>
+                  <a:schemeClr val="tx1">
+                    <a:lumMod val="65000"/>
+                    <a:lumOff val="35000"/>
+                  </a:schemeClr>
+                </a:solidFill>
+                <a:latin typeface="メイリオ" panose="020B0604030504040204" pitchFamily="50" charset="-128"/>
+                <a:ea typeface="メイリオ" panose="020B0604030504040204" pitchFamily="50" charset="-128"/>
+              </a:rPr>
+              <a:t>公式アカウントを活用し、ビジネス拡大に最も貢献したパートナーに贈られる賞です。</a:t>
+            </a:r>
+            <a:endParaRPr lang="en-US" altLang="ja-JP" sz="900" dirty="0">
+              <a:solidFill>
+                <a:schemeClr val="tx1">
+                  <a:lumMod val="65000"/>
+                  <a:lumOff val="35000"/>
+                </a:schemeClr>
+              </a:solidFill>
+              <a:latin typeface="メイリオ" panose="020B0604030504040204" pitchFamily="50" charset="-128"/>
+              <a:ea typeface="メイリオ" panose="020B0604030504040204" pitchFamily="50" charset="-128"/>
+            </a:endParaRPr>
+          </a:p>
+        </p:txBody>
+      </p:sp>
+      <p:sp>
+        <p:nvSpPr>
+          <p:cNvPr id="22" name="Google Shape;752;p28">
+            <a:extLst>
+              <a:ext uri="{FF2B5EF4-FFF2-40B4-BE49-F238E27FC236}">
+                <a16:creationId xmlns:a16="http://schemas.microsoft.com/office/drawing/2014/main" id="{C34101C7-CA6C-6ED6-33D4-C2B82BDA5473}"/>
+              </a:ext>
+            </a:extLst>
+          </p:cNvPr>
+          <p:cNvSpPr txBox="1"/>
+          <p:nvPr/>
+        </p:nvSpPr>
+        <p:spPr>
+          <a:xfrm>
+            <a:off x="548883" y="138137"/>
+            <a:ext cx="6276325" cy="338514"/>
+          </a:xfrm>
+          <a:prstGeom prst="rect">
+            <a:avLst/>
+          </a:prstGeom>
+          <a:noFill/>
+          <a:ln>
+            <a:noFill/>
+          </a:ln>
+        </p:spPr>
+        <p:txBody>
+          <a:bodyPr spcFirstLastPara="1" wrap="square" lIns="91425" tIns="45700" rIns="91425" bIns="45700" anchor="ctr" anchorCtr="0">
+            <a:spAutoFit/>
+          </a:bodyPr>
+          <a:lstStyle/>
+          <a:p>
+            <a:pPr lvl="0"/>
+            <a:r>
+              <a:rPr lang="ja-JP" altLang="en-US" sz="1600" b="1">
+                <a:solidFill>
+                  <a:srgbClr val="323366"/>
+                </a:solidFill>
+                <a:latin typeface="メイリオ" panose="020B0604030504040204" pitchFamily="50" charset="-128"/>
+                <a:ea typeface="メイリオ" panose="020B0604030504040204" pitchFamily="50" charset="-128"/>
+                <a:cs typeface="Meiryo"/>
+                <a:sym typeface="Meiryo"/>
+              </a:rPr>
+              <a:t>弊社実績</a:t>
+            </a:r>
+            <a:endParaRPr lang="ja-JP" altLang="en-US" sz="1600" b="1" dirty="0">
+              <a:solidFill>
+                <a:srgbClr val="323366"/>
+              </a:solidFill>
+              <a:latin typeface="メイリオ" panose="020B0604030504040204" pitchFamily="50" charset="-128"/>
+              <a:ea typeface="メイリオ" panose="020B0604030504040204" pitchFamily="50" charset="-128"/>
+              <a:cs typeface="Meiryo"/>
+              <a:sym typeface="Meiryo"/>
+            </a:endParaRPr>
+          </a:p>
+        </p:txBody>
+      </p:sp>
+      <p:sp>
+        <p:nvSpPr>
+          <p:cNvPr id="49" name="正方形/長方形 48">
+            <a:extLst>
+              <a:ext uri="{FF2B5EF4-FFF2-40B4-BE49-F238E27FC236}">
+                <a16:creationId xmlns:a16="http://schemas.microsoft.com/office/drawing/2014/main" id="{9685C0AB-6B7A-94C5-EFA8-756E59EE714E}"/>
+              </a:ext>
+            </a:extLst>
+          </p:cNvPr>
+          <p:cNvSpPr/>
+          <p:nvPr/>
+        </p:nvSpPr>
+        <p:spPr>
+          <a:xfrm>
+            <a:off x="388723" y="2116303"/>
+            <a:ext cx="9128554" cy="307777"/>
+          </a:xfrm>
+          <a:prstGeom prst="rect">
+            <a:avLst/>
+          </a:prstGeom>
+          <a:solidFill>
+            <a:schemeClr val="bg1">
+              <a:lumMod val="65000"/>
+            </a:schemeClr>
+          </a:solidFill>
+          <a:ln>
+            <a:solidFill>
+              <a:schemeClr val="bg1">
+                <a:lumMod val="65000"/>
+              </a:schemeClr>
+            </a:solidFill>
+          </a:ln>
+        </p:spPr>
+        <p:txBody>
+          <a:bodyPr wrap="square">
+            <a:spAutoFit/>
+          </a:bodyPr>
+          <a:lstStyle/>
+          <a:p>
+            <a:pPr lvl="0" algn="ctr">
+              <a:buClr>
+                <a:srgbClr val="002060"/>
+              </a:buClr>
+              <a:buSzPts val="1600"/>
+            </a:pPr>
+            <a:r>
+              <a:rPr lang="ja-JP" altLang="en-US" sz="1400" b="1">
+                <a:solidFill>
+                  <a:schemeClr val="bg1"/>
+                </a:solidFill>
+                <a:latin typeface="Meiryo"/>
+                <a:ea typeface="Meiryo"/>
+                <a:cs typeface="Meiryo"/>
+                <a:sym typeface="Meiryo"/>
+              </a:rPr>
+              <a:t>弊社受賞遍歴 </a:t>
+            </a:r>
+            <a:r>
+              <a:rPr lang="en-US" altLang="ja-JP" sz="1400" b="1">
+                <a:solidFill>
+                  <a:schemeClr val="bg1"/>
+                </a:solidFill>
+                <a:latin typeface="Meiryo"/>
+                <a:ea typeface="Meiryo"/>
+                <a:cs typeface="Meiryo"/>
+                <a:sym typeface="Meiryo"/>
+              </a:rPr>
+              <a:t>Since.2024</a:t>
+            </a:r>
+            <a:r>
+              <a:rPr lang="ja-JP" altLang="en-US" sz="1400" b="1">
+                <a:solidFill>
+                  <a:schemeClr val="bg1"/>
+                </a:solidFill>
+                <a:latin typeface="Meiryo"/>
+                <a:ea typeface="Meiryo"/>
+                <a:cs typeface="Meiryo"/>
+                <a:sym typeface="Meiryo"/>
+              </a:rPr>
+              <a:t>年</a:t>
+            </a:r>
+            <a:r>
+              <a:rPr lang="en-US" altLang="ja-JP" sz="1400" b="1">
+                <a:solidFill>
+                  <a:schemeClr val="bg1"/>
+                </a:solidFill>
+                <a:latin typeface="Meiryo"/>
+                <a:ea typeface="Meiryo"/>
+                <a:cs typeface="Meiryo"/>
+                <a:sym typeface="Meiryo"/>
+              </a:rPr>
+              <a:t>5</a:t>
+            </a:r>
+            <a:r>
+              <a:rPr lang="ja-JP" altLang="en-US" sz="1400" b="1">
+                <a:solidFill>
+                  <a:schemeClr val="bg1"/>
+                </a:solidFill>
+                <a:latin typeface="Meiryo"/>
+                <a:ea typeface="Meiryo"/>
+                <a:cs typeface="Meiryo"/>
+                <a:sym typeface="Meiryo"/>
+              </a:rPr>
+              <a:t>月～</a:t>
+            </a:r>
+            <a:endParaRPr lang="en-US" altLang="ja-JP" sz="1400" b="1" dirty="0">
+              <a:solidFill>
+                <a:schemeClr val="bg1"/>
+              </a:solidFill>
+              <a:latin typeface="Meiryo"/>
+              <a:ea typeface="Meiryo"/>
+              <a:cs typeface="Meiryo"/>
+              <a:sym typeface="Meiryo"/>
+            </a:endParaRPr>
+          </a:p>
+        </p:txBody>
+      </p:sp>
+      <p:sp>
+        <p:nvSpPr>
+          <p:cNvPr id="50" name="テキスト プレースホルダー 2">
+            <a:extLst>
+              <a:ext uri="{FF2B5EF4-FFF2-40B4-BE49-F238E27FC236}">
+                <a16:creationId xmlns:a16="http://schemas.microsoft.com/office/drawing/2014/main" id="{18B78559-32E9-7E98-9E42-625866BF0637}"/>
+              </a:ext>
+            </a:extLst>
+          </p:cNvPr>
+          <p:cNvSpPr txBox="1">
+            <a:spLocks/>
+          </p:cNvSpPr>
+          <p:nvPr/>
+        </p:nvSpPr>
+        <p:spPr>
+          <a:xfrm>
+            <a:off x="4741655" y="135388"/>
+            <a:ext cx="3604551" cy="356140"/>
+          </a:xfrm>
+          <a:prstGeom prst="rect">
+            <a:avLst/>
+          </a:prstGeom>
+        </p:spPr>
+        <p:txBody>
+          <a:bodyPr lIns="0" tIns="0" rIns="0" bIns="0" anchor="t"/>
+          <a:lstStyle>
+            <a:lvl1pPr marL="0" indent="0" algn="l" defTabSz="914400" rtl="0" eaLnBrk="1" latinLnBrk="0" hangingPunct="1">
+              <a:lnSpc>
+                <a:spcPct val="130000"/>
+              </a:lnSpc>
+              <a:spcBef>
+                <a:spcPts val="0"/>
+              </a:spcBef>
+              <a:buFont typeface="Arial" panose="020B0604020202020204" pitchFamily="34" charset="0"/>
+              <a:buNone/>
+              <a:defRPr kumimoji="1" sz="1400" kern="1200">
+                <a:solidFill>
+                  <a:schemeClr val="tx1">
+                    <a:lumMod val="95000"/>
+                    <a:lumOff val="5000"/>
+                  </a:schemeClr>
+                </a:solidFill>
+                <a:latin typeface="Meiryo" panose="020B0604030504040204" pitchFamily="34" charset="-128"/>
+                <a:ea typeface="Meiryo" panose="020B0604030504040204" pitchFamily="34" charset="-128"/>
+                <a:cs typeface="+mn-cs"/>
+              </a:defRPr>
+            </a:lvl1pPr>
+            <a:lvl2pPr marL="685800" indent="-228600" algn="l" defTabSz="914400" rtl="0" eaLnBrk="1" latinLnBrk="0" hangingPunct="1">
+              <a:lnSpc>
+                <a:spcPct val="90000"/>
+              </a:lnSpc>
+              <a:spcBef>
+                <a:spcPts val="500"/>
+              </a:spcBef>
+              <a:buFont typeface="Arial" panose="020B0604020202020204" pitchFamily="34" charset="0"/>
+              <a:buChar char="•"/>
+              <a:defRPr kumimoji="1" sz="2400" kern="1200">
+                <a:solidFill>
+                  <a:schemeClr val="tx1"/>
+                </a:solidFill>
+                <a:latin typeface="+mn-lt"/>
+                <a:ea typeface="+mn-ea"/>
+                <a:cs typeface="+mn-cs"/>
+              </a:defRPr>
+            </a:lvl2pPr>
+            <a:lvl3pPr marL="1143000" indent="-228600" algn="l" defTabSz="914400" rtl="0" eaLnBrk="1" latinLnBrk="0" hangingPunct="1">
+              <a:lnSpc>
+                <a:spcPct val="90000"/>
+              </a:lnSpc>
+              <a:spcBef>
+                <a:spcPts val="500"/>
+              </a:spcBef>
+              <a:buFont typeface="Arial" panose="020B0604020202020204" pitchFamily="34" charset="0"/>
+              <a:buChar char="•"/>
+              <a:defRPr kumimoji="1" sz="2000" kern="1200">
+                <a:solidFill>
+                  <a:schemeClr val="tx1"/>
+                </a:solidFill>
+                <a:latin typeface="+mn-lt"/>
+                <a:ea typeface="+mn-ea"/>
+                <a:cs typeface="+mn-cs"/>
+              </a:defRPr>
+            </a:lvl3pPr>
+            <a:lvl4pPr marL="1600200" indent="-228600" algn="l" defTabSz="914400" rtl="0" eaLnBrk="1" latinLnBrk="0" hangingPunct="1">
+              <a:lnSpc>
+                <a:spcPct val="90000"/>
+              </a:lnSpc>
+              <a:spcBef>
+                <a:spcPts val="500"/>
+              </a:spcBef>
+              <a:buFont typeface="Arial" panose="020B0604020202020204" pitchFamily="34" charset="0"/>
+              <a:buChar char="•"/>
+              <a:defRPr kumimoji="1" sz="1800" kern="1200">
+                <a:solidFill>
+                  <a:schemeClr val="tx1"/>
+                </a:solidFill>
+                <a:latin typeface="+mn-lt"/>
+                <a:ea typeface="+mn-ea"/>
+                <a:cs typeface="+mn-cs"/>
+              </a:defRPr>
+            </a:lvl4pPr>
+            <a:lvl5pPr marL="2057400" indent="-228600" algn="l" defTabSz="914400" rtl="0" eaLnBrk="1" latinLnBrk="0" hangingPunct="1">
+              <a:lnSpc>
+                <a:spcPct val="90000"/>
+              </a:lnSpc>
+              <a:spcBef>
+                <a:spcPts val="500"/>
+              </a:spcBef>
+              <a:buFont typeface="Arial" panose="020B0604020202020204" pitchFamily="34" charset="0"/>
+              <a:buChar char="•"/>
+              <a:defRPr kumimoji="1" sz="1800" kern="1200">
+                <a:solidFill>
+                  <a:schemeClr val="tx1"/>
+                </a:solidFill>
+                <a:latin typeface="+mn-lt"/>
+                <a:ea typeface="+mn-ea"/>
+                <a:cs typeface="+mn-cs"/>
+              </a:defRPr>
+            </a:lvl5pPr>
+            <a:lvl6pPr marL="2514600" indent="-228600" algn="l" defTabSz="914400" rtl="0" eaLnBrk="1" latinLnBrk="0" hangingPunct="1">
+              <a:lnSpc>
+                <a:spcPct val="90000"/>
+              </a:lnSpc>
+              <a:spcBef>
+                <a:spcPts val="500"/>
+              </a:spcBef>
+              <a:buFont typeface="Arial" panose="020B0604020202020204" pitchFamily="34" charset="0"/>
+              <a:buChar char="•"/>
+              <a:defRPr kumimoji="1" sz="1800" kern="1200">
+                <a:solidFill>
+                  <a:schemeClr val="tx1"/>
+                </a:solidFill>
+                <a:latin typeface="+mn-lt"/>
+                <a:ea typeface="+mn-ea"/>
+                <a:cs typeface="+mn-cs"/>
+              </a:defRPr>
+            </a:lvl6pPr>
+            <a:lvl7pPr marL="2971800" indent="-228600" algn="l" defTabSz="914400" rtl="0" eaLnBrk="1" latinLnBrk="0" hangingPunct="1">
+              <a:lnSpc>
+                <a:spcPct val="90000"/>
+              </a:lnSpc>
+              <a:spcBef>
+                <a:spcPts val="500"/>
+              </a:spcBef>
+              <a:buFont typeface="Arial" panose="020B0604020202020204" pitchFamily="34" charset="0"/>
+              <a:buChar char="•"/>
+              <a:defRPr kumimoji="1" sz="1800" kern="1200">
+                <a:solidFill>
+                  <a:schemeClr val="tx1"/>
+                </a:solidFill>
+                <a:latin typeface="+mn-lt"/>
+                <a:ea typeface="+mn-ea"/>
+                <a:cs typeface="+mn-cs"/>
+              </a:defRPr>
+            </a:lvl7pPr>
+            <a:lvl8pPr marL="3429000" indent="-228600" algn="l" defTabSz="914400" rtl="0" eaLnBrk="1" latinLnBrk="0" hangingPunct="1">
+              <a:lnSpc>
+                <a:spcPct val="90000"/>
+              </a:lnSpc>
+              <a:spcBef>
+                <a:spcPts val="500"/>
+              </a:spcBef>
+              <a:buFont typeface="Arial" panose="020B0604020202020204" pitchFamily="34" charset="0"/>
+              <a:buChar char="•"/>
+              <a:defRPr kumimoji="1" sz="1800" kern="1200">
+                <a:solidFill>
+                  <a:schemeClr val="tx1"/>
+                </a:solidFill>
+                <a:latin typeface="+mn-lt"/>
+                <a:ea typeface="+mn-ea"/>
+                <a:cs typeface="+mn-cs"/>
+              </a:defRPr>
+            </a:lvl8pPr>
+            <a:lvl9pPr marL="3886200" indent="-228600" algn="l" defTabSz="914400" rtl="0" eaLnBrk="1" latinLnBrk="0" hangingPunct="1">
+              <a:lnSpc>
+                <a:spcPct val="90000"/>
+              </a:lnSpc>
+              <a:spcBef>
+                <a:spcPts val="500"/>
+              </a:spcBef>
+              <a:buFont typeface="Arial" panose="020B0604020202020204" pitchFamily="34" charset="0"/>
+              <a:buChar char="•"/>
+              <a:defRPr kumimoji="1" sz="1800" kern="1200">
+                <a:solidFill>
+                  <a:schemeClr val="tx1"/>
+                </a:solidFill>
+                <a:latin typeface="+mn-lt"/>
+                <a:ea typeface="+mn-ea"/>
+                <a:cs typeface="+mn-cs"/>
+              </a:defRPr>
+            </a:lvl9pPr>
+          </a:lstStyle>
+          <a:p>
+            <a:pPr marL="539750" lvl="0" indent="-539750">
+              <a:tabLst>
+                <a:tab pos="447675" algn="l"/>
+              </a:tabLst>
+              <a:defRPr/>
+            </a:pPr>
+            <a:r>
+              <a:rPr lang="en-US" altLang="ja-JP" sz="800" dirty="0">
+                <a:solidFill>
+                  <a:srgbClr val="000000">
+                    <a:lumMod val="95000"/>
+                    <a:lumOff val="5000"/>
+                  </a:srgbClr>
+                </a:solidFill>
+              </a:rPr>
+              <a:t>【</a:t>
+            </a:r>
+            <a:r>
+              <a:rPr lang="ja-JP" altLang="en-US" sz="800" dirty="0">
+                <a:solidFill>
+                  <a:srgbClr val="000000">
+                    <a:lumMod val="95000"/>
+                    <a:lumOff val="5000"/>
+                  </a:srgbClr>
+                </a:solidFill>
+              </a:rPr>
+              <a:t>参考情報</a:t>
+            </a:r>
+            <a:r>
+              <a:rPr lang="en-US" altLang="ja-JP" sz="800" dirty="0">
+                <a:solidFill>
+                  <a:srgbClr val="000000">
+                    <a:lumMod val="95000"/>
+                    <a:lumOff val="5000"/>
+                  </a:srgbClr>
+                </a:solidFill>
+              </a:rPr>
+              <a:t>】</a:t>
+            </a:r>
+          </a:p>
+          <a:p>
+            <a:pPr marL="88900" lvl="0">
+              <a:tabLst>
+                <a:tab pos="447675" algn="l"/>
+              </a:tabLst>
+              <a:defRPr/>
+            </a:pPr>
+            <a:r>
+              <a:rPr lang="en-US" altLang="ja-JP" sz="800" dirty="0">
+                <a:solidFill>
+                  <a:srgbClr val="000000">
+                    <a:lumMod val="95000"/>
+                    <a:lumOff val="5000"/>
+                  </a:srgbClr>
+                </a:solidFill>
+              </a:rPr>
+              <a:t>https://prtimes.jp/main/html/rd/p/000000412.000027235.html</a:t>
+            </a:r>
+            <a:endParaRPr lang="en-US" altLang="ja-JP" sz="1100" dirty="0">
+              <a:solidFill>
+                <a:srgbClr val="000000">
+                  <a:lumMod val="95000"/>
+                  <a:lumOff val="5000"/>
+                </a:srgbClr>
+              </a:solidFill>
+            </a:endParaRPr>
+          </a:p>
+        </p:txBody>
+      </p:sp>
+      <p:sp>
+        <p:nvSpPr>
+          <p:cNvPr id="45" name="正方形/長方形 44">
+            <a:extLst>
+              <a:ext uri="{FF2B5EF4-FFF2-40B4-BE49-F238E27FC236}">
+                <a16:creationId xmlns:a16="http://schemas.microsoft.com/office/drawing/2014/main" id="{02177995-9B5C-9C4B-3202-5DD03969179E}"/>
+              </a:ext>
+            </a:extLst>
+          </p:cNvPr>
+          <p:cNvSpPr/>
+          <p:nvPr/>
+        </p:nvSpPr>
+        <p:spPr>
+          <a:xfrm>
+            <a:off x="495424" y="4784484"/>
+            <a:ext cx="3561143" cy="276999"/>
+          </a:xfrm>
+          <a:prstGeom prst="rect">
+            <a:avLst/>
+          </a:prstGeom>
+          <a:solidFill>
+            <a:schemeClr val="bg1">
+              <a:lumMod val="65000"/>
+            </a:schemeClr>
+          </a:solidFill>
+          <a:ln>
+            <a:solidFill>
+              <a:schemeClr val="bg1">
+                <a:lumMod val="65000"/>
+              </a:schemeClr>
+            </a:solidFill>
+          </a:ln>
+        </p:spPr>
+        <p:txBody>
+          <a:bodyPr wrap="square">
+            <a:spAutoFit/>
+          </a:bodyPr>
+          <a:lstStyle/>
+          <a:p>
+            <a:pPr lvl="0" algn="ctr">
+              <a:buClr>
+                <a:srgbClr val="002060"/>
+              </a:buClr>
+              <a:buSzPts val="1600"/>
+            </a:pPr>
+            <a:r>
+              <a:rPr lang="ja-JP" altLang="en-US" sz="1200" b="1" dirty="0">
+                <a:solidFill>
+                  <a:schemeClr val="bg1"/>
+                </a:solidFill>
+                <a:latin typeface="Meiryo"/>
+                <a:ea typeface="Meiryo"/>
+                <a:cs typeface="Meiryo"/>
+                <a:sym typeface="Meiryo"/>
+              </a:rPr>
+              <a:t>最上位となる </a:t>
+            </a:r>
+            <a:r>
+              <a:rPr lang="en-US" altLang="ja-JP" sz="1200" b="1" dirty="0">
+                <a:solidFill>
+                  <a:schemeClr val="bg1"/>
+                </a:solidFill>
+                <a:latin typeface="Meiryo"/>
+                <a:ea typeface="Meiryo"/>
+                <a:cs typeface="Meiryo"/>
+                <a:sym typeface="Meiryo"/>
+              </a:rPr>
+              <a:t>Sales Partner Premier</a:t>
+            </a:r>
+          </a:p>
+        </p:txBody>
+      </p:sp>
+      <p:sp>
+        <p:nvSpPr>
+          <p:cNvPr id="55" name="正方形/長方形 54">
+            <a:extLst>
+              <a:ext uri="{FF2B5EF4-FFF2-40B4-BE49-F238E27FC236}">
+                <a16:creationId xmlns:a16="http://schemas.microsoft.com/office/drawing/2014/main" id="{0E12B4F2-0482-55A4-443A-115FC30E22E8}"/>
+              </a:ext>
+            </a:extLst>
+          </p:cNvPr>
+          <p:cNvSpPr/>
+          <p:nvPr/>
+        </p:nvSpPr>
+        <p:spPr>
+          <a:xfrm>
+            <a:off x="4362995" y="4784484"/>
+            <a:ext cx="5165666" cy="276999"/>
+          </a:xfrm>
+          <a:prstGeom prst="rect">
+            <a:avLst/>
+          </a:prstGeom>
+          <a:solidFill>
+            <a:schemeClr val="bg1">
+              <a:lumMod val="65000"/>
+            </a:schemeClr>
+          </a:solidFill>
+          <a:ln>
+            <a:solidFill>
+              <a:schemeClr val="bg1">
+                <a:lumMod val="65000"/>
+              </a:schemeClr>
+            </a:solidFill>
+          </a:ln>
+        </p:spPr>
+        <p:txBody>
+          <a:bodyPr wrap="square">
+            <a:spAutoFit/>
+          </a:bodyPr>
+          <a:lstStyle/>
+          <a:p>
+            <a:pPr algn="ctr">
+              <a:buClr>
+                <a:srgbClr val="002060"/>
+              </a:buClr>
+              <a:buSzPts val="1600"/>
+            </a:pPr>
+            <a:r>
+              <a:rPr lang="en-US" altLang="ja-JP" sz="1200" b="1" dirty="0">
+                <a:solidFill>
+                  <a:schemeClr val="bg1"/>
+                </a:solidFill>
+                <a:latin typeface="Meiryo"/>
+                <a:ea typeface="Meiryo"/>
+                <a:cs typeface="Meiryo"/>
+                <a:sym typeface="Meiryo"/>
+              </a:rPr>
+              <a:t>Best LINE</a:t>
+            </a:r>
+            <a:r>
+              <a:rPr lang="ja-JP" altLang="en-US" sz="1200" b="1" dirty="0">
+                <a:solidFill>
+                  <a:schemeClr val="bg1"/>
+                </a:solidFill>
+                <a:latin typeface="Meiryo"/>
+                <a:ea typeface="Meiryo"/>
+                <a:cs typeface="Meiryo"/>
+                <a:sym typeface="Meiryo"/>
+              </a:rPr>
+              <a:t>公式アカウント </a:t>
+            </a:r>
+            <a:r>
+              <a:rPr lang="en-US" altLang="ja-JP" sz="1200" b="1" dirty="0">
+                <a:solidFill>
+                  <a:schemeClr val="bg1"/>
+                </a:solidFill>
+                <a:latin typeface="Meiryo"/>
+                <a:ea typeface="Meiryo"/>
+                <a:cs typeface="Meiryo"/>
+                <a:sym typeface="Meiryo"/>
+              </a:rPr>
+              <a:t>Growth </a:t>
+            </a:r>
+            <a:r>
+              <a:rPr lang="ja-JP" altLang="en-US" sz="1200" b="1" dirty="0">
+                <a:solidFill>
+                  <a:schemeClr val="bg1"/>
+                </a:solidFill>
+                <a:latin typeface="Meiryo"/>
+                <a:ea typeface="Meiryo"/>
+                <a:cs typeface="Meiryo"/>
+                <a:sym typeface="Meiryo"/>
+              </a:rPr>
+              <a:t>の受賞を受ける</a:t>
+            </a:r>
+            <a:endParaRPr lang="en-US" altLang="ja-JP" sz="1200" b="1" dirty="0">
+              <a:solidFill>
+                <a:schemeClr val="bg1"/>
+              </a:solidFill>
+              <a:latin typeface="Meiryo"/>
+              <a:ea typeface="Meiryo"/>
+              <a:cs typeface="Meiryo"/>
+              <a:sym typeface="Meiryo"/>
+            </a:endParaRPr>
+          </a:p>
+        </p:txBody>
+      </p:sp>
+      <p:cxnSp>
+        <p:nvCxnSpPr>
+          <p:cNvPr id="2082" name="直線コネクタ 2081">
+            <a:extLst>
+              <a:ext uri="{FF2B5EF4-FFF2-40B4-BE49-F238E27FC236}">
+                <a16:creationId xmlns:a16="http://schemas.microsoft.com/office/drawing/2014/main" id="{530411FF-29F9-73B2-C470-CBF0BA20AC73}"/>
+              </a:ext>
+            </a:extLst>
+          </p:cNvPr>
+          <p:cNvCxnSpPr>
+            <a:cxnSpLocks/>
+          </p:cNvCxnSpPr>
+          <p:nvPr/>
+        </p:nvCxnSpPr>
+        <p:spPr>
+          <a:xfrm>
+            <a:off x="3212877" y="2980676"/>
+            <a:ext cx="6240687" cy="0"/>
+          </a:xfrm>
+          <a:prstGeom prst="line">
+            <a:avLst/>
+          </a:prstGeom>
+          <a:ln w="76200">
+            <a:solidFill>
+              <a:srgbClr val="10253F"/>
+            </a:solidFill>
+          </a:ln>
+        </p:spPr>
+        <p:style>
+          <a:lnRef idx="1">
+            <a:schemeClr val="accent1"/>
+          </a:lnRef>
+          <a:fillRef idx="0">
+            <a:schemeClr val="accent1"/>
+          </a:fillRef>
+          <a:effectRef idx="0">
+            <a:schemeClr val="accent1"/>
+          </a:effectRef>
+          <a:fontRef idx="minor">
+            <a:schemeClr val="tx1"/>
+          </a:fontRef>
+        </p:style>
+      </p:cxnSp>
+      <p:cxnSp>
+        <p:nvCxnSpPr>
+          <p:cNvPr id="2085" name="直線コネクタ 2084">
+            <a:extLst>
+              <a:ext uri="{FF2B5EF4-FFF2-40B4-BE49-F238E27FC236}">
+                <a16:creationId xmlns:a16="http://schemas.microsoft.com/office/drawing/2014/main" id="{D7948E6E-45A1-2B8A-2983-5CE3031B129A}"/>
+              </a:ext>
+            </a:extLst>
+          </p:cNvPr>
+          <p:cNvCxnSpPr>
+            <a:cxnSpLocks/>
+          </p:cNvCxnSpPr>
+          <p:nvPr/>
+        </p:nvCxnSpPr>
+        <p:spPr>
+          <a:xfrm>
+            <a:off x="412752" y="3985954"/>
+            <a:ext cx="5253034" cy="0"/>
+          </a:xfrm>
+          <a:prstGeom prst="line">
+            <a:avLst/>
+          </a:prstGeom>
+          <a:ln w="76200">
+            <a:solidFill>
+              <a:srgbClr val="10253F"/>
+            </a:solidFill>
+          </a:ln>
+        </p:spPr>
+        <p:style>
+          <a:lnRef idx="1">
+            <a:schemeClr val="accent1"/>
+          </a:lnRef>
+          <a:fillRef idx="0">
+            <a:schemeClr val="accent1"/>
+          </a:fillRef>
+          <a:effectRef idx="0">
+            <a:schemeClr val="accent1"/>
+          </a:effectRef>
+          <a:fontRef idx="minor">
+            <a:schemeClr val="tx1"/>
+          </a:fontRef>
+        </p:style>
+      </p:cxnSp>
+      <p:sp>
+        <p:nvSpPr>
+          <p:cNvPr id="2086" name="フローチャート: 結合子 2085">
+            <a:extLst>
+              <a:ext uri="{FF2B5EF4-FFF2-40B4-BE49-F238E27FC236}">
+                <a16:creationId xmlns:a16="http://schemas.microsoft.com/office/drawing/2014/main" id="{19617C5C-724A-7FCE-22E5-5B2ECC96F048}"/>
+              </a:ext>
+            </a:extLst>
+          </p:cNvPr>
+          <p:cNvSpPr/>
+          <p:nvPr/>
+        </p:nvSpPr>
+        <p:spPr>
+          <a:xfrm>
+            <a:off x="3076995" y="2743198"/>
+            <a:ext cx="452718" cy="452718"/>
+          </a:xfrm>
+          <a:prstGeom prst="flowChartConnector">
+            <a:avLst/>
+          </a:prstGeom>
+          <a:solidFill>
+            <a:srgbClr val="10253F"/>
+          </a:solidFill>
+          <a:ln>
+            <a:solidFill>
+              <a:srgbClr val="10253F"/>
+            </a:solidFill>
+          </a:ln>
+        </p:spPr>
+        <p:style>
+          <a:lnRef idx="2">
+            <a:schemeClr val="accent1">
+              <a:shade val="15000"/>
+            </a:schemeClr>
+          </a:lnRef>
+          <a:fillRef idx="1">
+            <a:schemeClr val="accent1"/>
+          </a:fillRef>
+          <a:effectRef idx="0">
+            <a:schemeClr val="accent1"/>
+          </a:effectRef>
+          <a:fontRef idx="minor">
+            <a:schemeClr val="lt1"/>
+          </a:fontRef>
+        </p:style>
+        <p:txBody>
+          <a:bodyPr rtlCol="0" anchor="ctr"/>
+          <a:lstStyle/>
+          <a:p>
+            <a:pPr algn="ctr"/>
+            <a:endParaRPr kumimoji="1" lang="ja-JP" altLang="en-US"/>
+          </a:p>
+        </p:txBody>
+      </p:sp>
+      <p:sp>
+        <p:nvSpPr>
+          <p:cNvPr id="2087" name="フローチャート: 結合子 2086">
+            <a:extLst>
+              <a:ext uri="{FF2B5EF4-FFF2-40B4-BE49-F238E27FC236}">
+                <a16:creationId xmlns:a16="http://schemas.microsoft.com/office/drawing/2014/main" id="{C7AB064F-FD75-D23A-C3F2-7F831805457C}"/>
+              </a:ext>
+            </a:extLst>
+          </p:cNvPr>
+          <p:cNvSpPr/>
+          <p:nvPr/>
+        </p:nvSpPr>
+        <p:spPr>
+          <a:xfrm>
+            <a:off x="970449" y="3759595"/>
+            <a:ext cx="452718" cy="452718"/>
+          </a:xfrm>
+          <a:prstGeom prst="flowChartConnector">
+            <a:avLst/>
+          </a:prstGeom>
+          <a:solidFill>
+            <a:srgbClr val="10253F"/>
+          </a:solidFill>
+          <a:ln>
+            <a:solidFill>
+              <a:srgbClr val="10253F"/>
+            </a:solidFill>
+          </a:ln>
+        </p:spPr>
+        <p:style>
+          <a:lnRef idx="2">
+            <a:schemeClr val="accent1">
+              <a:shade val="15000"/>
+            </a:schemeClr>
+          </a:lnRef>
+          <a:fillRef idx="1">
+            <a:schemeClr val="accent1"/>
+          </a:fillRef>
+          <a:effectRef idx="0">
+            <a:schemeClr val="accent1"/>
+          </a:effectRef>
+          <a:fontRef idx="minor">
+            <a:schemeClr val="lt1"/>
+          </a:fontRef>
+        </p:style>
+        <p:txBody>
+          <a:bodyPr rtlCol="0" anchor="ctr"/>
+          <a:lstStyle/>
+          <a:p>
+            <a:pPr algn="ctr"/>
+            <a:endParaRPr kumimoji="1" lang="ja-JP" altLang="en-US"/>
+          </a:p>
+        </p:txBody>
+      </p:sp>
+      <p:sp>
+        <p:nvSpPr>
+          <p:cNvPr id="2089" name="フローチャート: 結合子 2088">
+            <a:extLst>
+              <a:ext uri="{FF2B5EF4-FFF2-40B4-BE49-F238E27FC236}">
+                <a16:creationId xmlns:a16="http://schemas.microsoft.com/office/drawing/2014/main" id="{CE0B51F4-2695-E1D7-F353-BA60386FABE4}"/>
+              </a:ext>
+            </a:extLst>
+          </p:cNvPr>
+          <p:cNvSpPr/>
+          <p:nvPr/>
+        </p:nvSpPr>
+        <p:spPr>
+          <a:xfrm>
+            <a:off x="7801859" y="2743198"/>
+            <a:ext cx="452718" cy="452718"/>
+          </a:xfrm>
+          <a:prstGeom prst="flowChartConnector">
+            <a:avLst/>
+          </a:prstGeom>
+          <a:solidFill>
+            <a:srgbClr val="10253F"/>
+          </a:solidFill>
+          <a:ln>
+            <a:solidFill>
+              <a:srgbClr val="10253F"/>
+            </a:solidFill>
+          </a:ln>
+        </p:spPr>
+        <p:style>
+          <a:lnRef idx="2">
+            <a:schemeClr val="accent1">
+              <a:shade val="15000"/>
+            </a:schemeClr>
+          </a:lnRef>
+          <a:fillRef idx="1">
+            <a:schemeClr val="accent1"/>
+          </a:fillRef>
+          <a:effectRef idx="0">
+            <a:schemeClr val="accent1"/>
+          </a:effectRef>
+          <a:fontRef idx="minor">
+            <a:schemeClr val="lt1"/>
+          </a:fontRef>
+        </p:style>
+        <p:txBody>
+          <a:bodyPr rtlCol="0" anchor="ctr"/>
+          <a:lstStyle/>
+          <a:p>
+            <a:pPr algn="ctr"/>
+            <a:endParaRPr kumimoji="1" lang="ja-JP" altLang="en-US"/>
+          </a:p>
+        </p:txBody>
+      </p:sp>
+      <p:sp>
+        <p:nvSpPr>
+          <p:cNvPr id="2090" name="フローチャート: 結合子 2089">
+            <a:extLst>
+              <a:ext uri="{FF2B5EF4-FFF2-40B4-BE49-F238E27FC236}">
+                <a16:creationId xmlns:a16="http://schemas.microsoft.com/office/drawing/2014/main" id="{6F2861A8-2376-2999-4214-6F268B03A3E1}"/>
+              </a:ext>
+            </a:extLst>
+          </p:cNvPr>
+          <p:cNvSpPr/>
+          <p:nvPr/>
+        </p:nvSpPr>
+        <p:spPr>
+          <a:xfrm>
+            <a:off x="5439427" y="2743198"/>
+            <a:ext cx="452718" cy="452718"/>
+          </a:xfrm>
+          <a:prstGeom prst="flowChartConnector">
+            <a:avLst/>
+          </a:prstGeom>
+          <a:solidFill>
+            <a:srgbClr val="10253F"/>
+          </a:solidFill>
+          <a:ln>
+            <a:solidFill>
+              <a:srgbClr val="10253F"/>
+            </a:solidFill>
+          </a:ln>
+        </p:spPr>
+        <p:style>
+          <a:lnRef idx="2">
+            <a:schemeClr val="accent1">
+              <a:shade val="15000"/>
+            </a:schemeClr>
+          </a:lnRef>
+          <a:fillRef idx="1">
+            <a:schemeClr val="accent1"/>
+          </a:fillRef>
+          <a:effectRef idx="0">
+            <a:schemeClr val="accent1"/>
+          </a:effectRef>
+          <a:fontRef idx="minor">
+            <a:schemeClr val="lt1"/>
+          </a:fontRef>
+        </p:style>
+        <p:txBody>
+          <a:bodyPr rtlCol="0" anchor="ctr"/>
+          <a:lstStyle/>
+          <a:p>
+            <a:pPr algn="ctr"/>
+            <a:endParaRPr kumimoji="1" lang="ja-JP" altLang="en-US"/>
+          </a:p>
+        </p:txBody>
+      </p:sp>
+      <p:sp>
+        <p:nvSpPr>
+          <p:cNvPr id="2092" name="フローチャート: 結合子 2091">
+            <a:extLst>
+              <a:ext uri="{FF2B5EF4-FFF2-40B4-BE49-F238E27FC236}">
+                <a16:creationId xmlns:a16="http://schemas.microsoft.com/office/drawing/2014/main" id="{11455BE0-024C-CCCF-549A-5895CCF6FCA5}"/>
+              </a:ext>
+            </a:extLst>
+          </p:cNvPr>
+          <p:cNvSpPr/>
+          <p:nvPr/>
+        </p:nvSpPr>
+        <p:spPr>
+          <a:xfrm>
+            <a:off x="5454960" y="3739586"/>
+            <a:ext cx="452718" cy="452718"/>
+          </a:xfrm>
+          <a:prstGeom prst="flowChartConnector">
+            <a:avLst/>
+          </a:prstGeom>
+          <a:solidFill>
+            <a:srgbClr val="10253F"/>
+          </a:solidFill>
+          <a:ln>
+            <a:solidFill>
+              <a:srgbClr val="10253F"/>
+            </a:solidFill>
+          </a:ln>
+        </p:spPr>
+        <p:style>
+          <a:lnRef idx="2">
+            <a:schemeClr val="accent1">
+              <a:shade val="15000"/>
+            </a:schemeClr>
+          </a:lnRef>
+          <a:fillRef idx="1">
+            <a:schemeClr val="accent1"/>
+          </a:fillRef>
+          <a:effectRef idx="0">
+            <a:schemeClr val="accent1"/>
+          </a:effectRef>
+          <a:fontRef idx="minor">
+            <a:schemeClr val="lt1"/>
+          </a:fontRef>
+        </p:style>
+        <p:txBody>
+          <a:bodyPr rtlCol="0" anchor="ctr"/>
+          <a:lstStyle/>
+          <a:p>
+            <a:pPr algn="ctr"/>
+            <a:endParaRPr kumimoji="1" lang="ja-JP" altLang="en-US"/>
+          </a:p>
+        </p:txBody>
+      </p:sp>
+      <p:sp>
+        <p:nvSpPr>
+          <p:cNvPr id="2093" name="フローチャート: 結合子 2092">
+            <a:extLst>
+              <a:ext uri="{FF2B5EF4-FFF2-40B4-BE49-F238E27FC236}">
+                <a16:creationId xmlns:a16="http://schemas.microsoft.com/office/drawing/2014/main" id="{6A2B7AEE-64D5-5687-4D90-BFEBFB87978F}"/>
+              </a:ext>
+            </a:extLst>
+          </p:cNvPr>
+          <p:cNvSpPr/>
+          <p:nvPr/>
+        </p:nvSpPr>
+        <p:spPr>
+          <a:xfrm>
+            <a:off x="3076995" y="3776603"/>
+            <a:ext cx="452718" cy="452718"/>
+          </a:xfrm>
+          <a:prstGeom prst="flowChartConnector">
+            <a:avLst/>
+          </a:prstGeom>
+          <a:solidFill>
+            <a:srgbClr val="10253F"/>
+          </a:solidFill>
+          <a:ln>
+            <a:solidFill>
+              <a:srgbClr val="10253F"/>
+            </a:solidFill>
+          </a:ln>
+        </p:spPr>
+        <p:style>
+          <a:lnRef idx="2">
+            <a:schemeClr val="accent1">
+              <a:shade val="15000"/>
+            </a:schemeClr>
+          </a:lnRef>
+          <a:fillRef idx="1">
+            <a:schemeClr val="accent1"/>
+          </a:fillRef>
+          <a:effectRef idx="0">
+            <a:schemeClr val="accent1"/>
+          </a:effectRef>
+          <a:fontRef idx="minor">
+            <a:schemeClr val="lt1"/>
+          </a:fontRef>
+        </p:style>
+        <p:txBody>
+          <a:bodyPr rtlCol="0" anchor="ctr"/>
+          <a:lstStyle/>
+          <a:p>
+            <a:pPr algn="ctr"/>
+            <a:endParaRPr kumimoji="1" lang="ja-JP" altLang="en-US"/>
+          </a:p>
+        </p:txBody>
+      </p:sp>
+      <p:sp>
+        <p:nvSpPr>
+          <p:cNvPr id="2094" name="テキスト ボックス 2093">
+            <a:extLst>
+              <a:ext uri="{FF2B5EF4-FFF2-40B4-BE49-F238E27FC236}">
+                <a16:creationId xmlns:a16="http://schemas.microsoft.com/office/drawing/2014/main" id="{F181EC8C-1DAE-5AF7-1C4D-4C86090B08E7}"/>
+              </a:ext>
+            </a:extLst>
+          </p:cNvPr>
+          <p:cNvSpPr txBox="1"/>
+          <p:nvPr/>
+        </p:nvSpPr>
+        <p:spPr>
+          <a:xfrm>
+            <a:off x="2824561" y="2498440"/>
+            <a:ext cx="957586" cy="246221"/>
+          </a:xfrm>
+          <a:prstGeom prst="rect">
+            <a:avLst/>
+          </a:prstGeom>
+          <a:noFill/>
+        </p:spPr>
+        <p:txBody>
+          <a:bodyPr wrap="square" rtlCol="0">
+            <a:spAutoFit/>
+          </a:bodyPr>
+          <a:lstStyle/>
+          <a:p>
+            <a:pPr algn="ctr"/>
+            <a:r>
+              <a:rPr kumimoji="1" lang="en-US" altLang="ja-JP" sz="1000">
+                <a:latin typeface="メイリオ" panose="020B0604030504040204" pitchFamily="50" charset="-128"/>
+                <a:ea typeface="メイリオ" panose="020B0604030504040204" pitchFamily="50" charset="-128"/>
+              </a:rPr>
+              <a:t>2024</a:t>
+            </a:r>
+            <a:r>
+              <a:rPr kumimoji="1" lang="ja-JP" altLang="en-US" sz="1000">
+                <a:latin typeface="メイリオ" panose="020B0604030504040204" pitchFamily="50" charset="-128"/>
+                <a:ea typeface="メイリオ" panose="020B0604030504040204" pitchFamily="50" charset="-128"/>
+              </a:rPr>
+              <a:t>年</a:t>
+            </a:r>
+            <a:r>
+              <a:rPr kumimoji="1" lang="en-US" altLang="ja-JP" sz="1000">
+                <a:latin typeface="メイリオ" panose="020B0604030504040204" pitchFamily="50" charset="-128"/>
+                <a:ea typeface="メイリオ" panose="020B0604030504040204" pitchFamily="50" charset="-128"/>
+              </a:rPr>
+              <a:t>5</a:t>
+            </a:r>
+            <a:r>
+              <a:rPr kumimoji="1" lang="ja-JP" altLang="en-US" sz="1000">
+                <a:latin typeface="メイリオ" panose="020B0604030504040204" pitchFamily="50" charset="-128"/>
+                <a:ea typeface="メイリオ" panose="020B0604030504040204" pitchFamily="50" charset="-128"/>
+              </a:rPr>
+              <a:t>月</a:t>
+            </a:r>
+          </a:p>
+        </p:txBody>
+      </p:sp>
+      <p:sp>
+        <p:nvSpPr>
+          <p:cNvPr id="2095" name="テキスト ボックス 2094">
+            <a:extLst>
+              <a:ext uri="{FF2B5EF4-FFF2-40B4-BE49-F238E27FC236}">
+                <a16:creationId xmlns:a16="http://schemas.microsoft.com/office/drawing/2014/main" id="{E9F47648-05F6-7064-8968-91D3649440CE}"/>
+              </a:ext>
+            </a:extLst>
+          </p:cNvPr>
+          <p:cNvSpPr txBox="1"/>
+          <p:nvPr/>
+        </p:nvSpPr>
+        <p:spPr>
+          <a:xfrm>
+            <a:off x="5232177" y="2496209"/>
+            <a:ext cx="957586" cy="246221"/>
+          </a:xfrm>
+          <a:prstGeom prst="rect">
+            <a:avLst/>
+          </a:prstGeom>
+          <a:noFill/>
+        </p:spPr>
+        <p:txBody>
+          <a:bodyPr wrap="square" rtlCol="0">
+            <a:spAutoFit/>
+          </a:bodyPr>
+          <a:lstStyle/>
+          <a:p>
+            <a:pPr algn="ctr"/>
+            <a:r>
+              <a:rPr kumimoji="1" lang="en-US" altLang="ja-JP" sz="1000">
+                <a:latin typeface="メイリオ" panose="020B0604030504040204" pitchFamily="50" charset="-128"/>
+                <a:ea typeface="メイリオ" panose="020B0604030504040204" pitchFamily="50" charset="-128"/>
+              </a:rPr>
+              <a:t>2024</a:t>
+            </a:r>
+            <a:r>
+              <a:rPr kumimoji="1" lang="ja-JP" altLang="en-US" sz="1000">
+                <a:latin typeface="メイリオ" panose="020B0604030504040204" pitchFamily="50" charset="-128"/>
+                <a:ea typeface="メイリオ" panose="020B0604030504040204" pitchFamily="50" charset="-128"/>
+              </a:rPr>
+              <a:t>年</a:t>
+            </a:r>
+            <a:r>
+              <a:rPr lang="en-US" altLang="ja-JP" sz="1000">
+                <a:latin typeface="メイリオ" panose="020B0604030504040204" pitchFamily="50" charset="-128"/>
+                <a:ea typeface="メイリオ" panose="020B0604030504040204" pitchFamily="50" charset="-128"/>
+              </a:rPr>
+              <a:t>12</a:t>
+            </a:r>
+            <a:r>
+              <a:rPr kumimoji="1" lang="ja-JP" altLang="en-US" sz="1000">
+                <a:latin typeface="メイリオ" panose="020B0604030504040204" pitchFamily="50" charset="-128"/>
+                <a:ea typeface="メイリオ" panose="020B0604030504040204" pitchFamily="50" charset="-128"/>
+              </a:rPr>
+              <a:t>月</a:t>
+            </a:r>
+          </a:p>
+        </p:txBody>
+      </p:sp>
+      <p:sp>
+        <p:nvSpPr>
+          <p:cNvPr id="2096" name="テキスト ボックス 2095">
+            <a:extLst>
+              <a:ext uri="{FF2B5EF4-FFF2-40B4-BE49-F238E27FC236}">
+                <a16:creationId xmlns:a16="http://schemas.microsoft.com/office/drawing/2014/main" id="{2C8EEABD-6A90-AA4E-FBA6-2819EBF654DE}"/>
+              </a:ext>
+            </a:extLst>
+          </p:cNvPr>
+          <p:cNvSpPr txBox="1"/>
+          <p:nvPr/>
+        </p:nvSpPr>
+        <p:spPr>
+          <a:xfrm>
+            <a:off x="7623567" y="2492162"/>
+            <a:ext cx="957586" cy="246221"/>
+          </a:xfrm>
+          <a:prstGeom prst="rect">
+            <a:avLst/>
+          </a:prstGeom>
+          <a:noFill/>
+        </p:spPr>
+        <p:txBody>
+          <a:bodyPr wrap="square" rtlCol="0">
+            <a:spAutoFit/>
+          </a:bodyPr>
+          <a:lstStyle/>
+          <a:p>
+            <a:pPr algn="ctr"/>
+            <a:r>
+              <a:rPr kumimoji="1" lang="en-US" altLang="ja-JP" sz="1000">
+                <a:latin typeface="メイリオ" panose="020B0604030504040204" pitchFamily="50" charset="-128"/>
+                <a:ea typeface="メイリオ" panose="020B0604030504040204" pitchFamily="50" charset="-128"/>
+              </a:rPr>
+              <a:t>2025</a:t>
+            </a:r>
+            <a:r>
+              <a:rPr kumimoji="1" lang="ja-JP" altLang="en-US" sz="1000">
+                <a:latin typeface="メイリオ" panose="020B0604030504040204" pitchFamily="50" charset="-128"/>
+                <a:ea typeface="メイリオ" panose="020B0604030504040204" pitchFamily="50" charset="-128"/>
+              </a:rPr>
+              <a:t>年</a:t>
+            </a:r>
+            <a:r>
+              <a:rPr kumimoji="1" lang="en-US" altLang="ja-JP" sz="1000">
+                <a:latin typeface="メイリオ" panose="020B0604030504040204" pitchFamily="50" charset="-128"/>
+                <a:ea typeface="メイリオ" panose="020B0604030504040204" pitchFamily="50" charset="-128"/>
+              </a:rPr>
+              <a:t>5</a:t>
+            </a:r>
+            <a:r>
+              <a:rPr kumimoji="1" lang="ja-JP" altLang="en-US" sz="1000">
+                <a:latin typeface="メイリオ" panose="020B0604030504040204" pitchFamily="50" charset="-128"/>
+                <a:ea typeface="メイリオ" panose="020B0604030504040204" pitchFamily="50" charset="-128"/>
+              </a:rPr>
+              <a:t>月</a:t>
+            </a:r>
+          </a:p>
+        </p:txBody>
+      </p:sp>
+      <p:sp>
+        <p:nvSpPr>
+          <p:cNvPr id="2098" name="テキスト ボックス 2097">
+            <a:extLst>
+              <a:ext uri="{FF2B5EF4-FFF2-40B4-BE49-F238E27FC236}">
+                <a16:creationId xmlns:a16="http://schemas.microsoft.com/office/drawing/2014/main" id="{CE12257A-0E7E-B895-AF8E-D15F7AA1D62A}"/>
+              </a:ext>
+            </a:extLst>
+          </p:cNvPr>
+          <p:cNvSpPr txBox="1"/>
+          <p:nvPr/>
+        </p:nvSpPr>
+        <p:spPr>
+          <a:xfrm>
+            <a:off x="2895696" y="3511221"/>
+            <a:ext cx="957586" cy="246221"/>
+          </a:xfrm>
+          <a:prstGeom prst="rect">
+            <a:avLst/>
+          </a:prstGeom>
+          <a:noFill/>
+          <a:ln>
+            <a:noFill/>
+          </a:ln>
+        </p:spPr>
+        <p:txBody>
+          <a:bodyPr wrap="square" rtlCol="0">
+            <a:spAutoFit/>
+          </a:bodyPr>
+          <a:lstStyle/>
+          <a:p>
+            <a:pPr algn="ctr"/>
+            <a:r>
+              <a:rPr kumimoji="1" lang="en-US" altLang="ja-JP" sz="1000">
+                <a:latin typeface="メイリオ" panose="020B0604030504040204" pitchFamily="50" charset="-128"/>
+                <a:ea typeface="メイリオ" panose="020B0604030504040204" pitchFamily="50" charset="-128"/>
+              </a:rPr>
+              <a:t>2025</a:t>
+            </a:r>
+            <a:r>
+              <a:rPr kumimoji="1" lang="ja-JP" altLang="en-US" sz="1000">
+                <a:latin typeface="メイリオ" panose="020B0604030504040204" pitchFamily="50" charset="-128"/>
+                <a:ea typeface="メイリオ" panose="020B0604030504040204" pitchFamily="50" charset="-128"/>
+              </a:rPr>
+              <a:t>年</a:t>
+            </a:r>
+            <a:r>
+              <a:rPr lang="en-US" altLang="ja-JP" sz="1000">
+                <a:latin typeface="メイリオ" panose="020B0604030504040204" pitchFamily="50" charset="-128"/>
+                <a:ea typeface="メイリオ" panose="020B0604030504040204" pitchFamily="50" charset="-128"/>
+              </a:rPr>
+              <a:t>10</a:t>
+            </a:r>
+            <a:r>
+              <a:rPr kumimoji="1" lang="ja-JP" altLang="en-US" sz="1000">
+                <a:latin typeface="メイリオ" panose="020B0604030504040204" pitchFamily="50" charset="-128"/>
+                <a:ea typeface="メイリオ" panose="020B0604030504040204" pitchFamily="50" charset="-128"/>
+              </a:rPr>
+              <a:t>月</a:t>
+            </a:r>
+          </a:p>
+        </p:txBody>
+      </p:sp>
+      <p:sp>
+        <p:nvSpPr>
+          <p:cNvPr id="2099" name="テキスト ボックス 2098">
+            <a:extLst>
+              <a:ext uri="{FF2B5EF4-FFF2-40B4-BE49-F238E27FC236}">
+                <a16:creationId xmlns:a16="http://schemas.microsoft.com/office/drawing/2014/main" id="{82EEA8C2-D18D-B5B9-3D3F-C9BE318BD901}"/>
+              </a:ext>
+            </a:extLst>
+          </p:cNvPr>
+          <p:cNvSpPr txBox="1"/>
+          <p:nvPr/>
+        </p:nvSpPr>
+        <p:spPr>
+          <a:xfrm>
+            <a:off x="589609" y="3475317"/>
+            <a:ext cx="957586" cy="246221"/>
+          </a:xfrm>
+          <a:prstGeom prst="rect">
+            <a:avLst/>
+          </a:prstGeom>
+          <a:noFill/>
+          <a:ln>
+            <a:noFill/>
+          </a:ln>
+        </p:spPr>
+        <p:txBody>
+          <a:bodyPr wrap="square" rtlCol="0">
+            <a:spAutoFit/>
+          </a:bodyPr>
+          <a:lstStyle/>
+          <a:p>
+            <a:pPr algn="ctr"/>
+            <a:r>
+              <a:rPr kumimoji="1" lang="en-US" altLang="ja-JP" sz="1000">
+                <a:latin typeface="メイリオ" panose="020B0604030504040204" pitchFamily="50" charset="-128"/>
+                <a:ea typeface="メイリオ" panose="020B0604030504040204" pitchFamily="50" charset="-128"/>
+              </a:rPr>
+              <a:t>2025</a:t>
+            </a:r>
+            <a:r>
+              <a:rPr kumimoji="1" lang="ja-JP" altLang="en-US" sz="1000">
+                <a:latin typeface="メイリオ" panose="020B0604030504040204" pitchFamily="50" charset="-128"/>
+                <a:ea typeface="メイリオ" panose="020B0604030504040204" pitchFamily="50" charset="-128"/>
+              </a:rPr>
+              <a:t>年</a:t>
+            </a:r>
+            <a:r>
+              <a:rPr kumimoji="1" lang="en-US" altLang="ja-JP" sz="1000">
+                <a:latin typeface="メイリオ" panose="020B0604030504040204" pitchFamily="50" charset="-128"/>
+                <a:ea typeface="メイリオ" panose="020B0604030504040204" pitchFamily="50" charset="-128"/>
+              </a:rPr>
+              <a:t>8</a:t>
+            </a:r>
+            <a:r>
+              <a:rPr kumimoji="1" lang="ja-JP" altLang="en-US" sz="1000">
+                <a:latin typeface="メイリオ" panose="020B0604030504040204" pitchFamily="50" charset="-128"/>
+                <a:ea typeface="メイリオ" panose="020B0604030504040204" pitchFamily="50" charset="-128"/>
+              </a:rPr>
+              <a:t>月</a:t>
+            </a:r>
+          </a:p>
+        </p:txBody>
+      </p:sp>
+      <p:sp>
+        <p:nvSpPr>
+          <p:cNvPr id="2101" name="テキスト ボックス 2100">
+            <a:extLst>
+              <a:ext uri="{FF2B5EF4-FFF2-40B4-BE49-F238E27FC236}">
+                <a16:creationId xmlns:a16="http://schemas.microsoft.com/office/drawing/2014/main" id="{E6D4C90C-BD24-1939-D716-C6450E2AD8FC}"/>
+              </a:ext>
+            </a:extLst>
+          </p:cNvPr>
+          <p:cNvSpPr txBox="1"/>
+          <p:nvPr/>
+        </p:nvSpPr>
+        <p:spPr>
+          <a:xfrm>
+            <a:off x="309563" y="4310547"/>
+            <a:ext cx="1966105" cy="215444"/>
+          </a:xfrm>
+          <a:prstGeom prst="rect">
+            <a:avLst/>
+          </a:prstGeom>
+          <a:noFill/>
+          <a:ln>
+            <a:noFill/>
+          </a:ln>
+        </p:spPr>
+        <p:txBody>
+          <a:bodyPr wrap="square" rtlCol="0">
+            <a:spAutoFit/>
+          </a:bodyPr>
+          <a:lstStyle/>
+          <a:p>
+            <a:pPr algn="ctr"/>
+            <a:r>
+              <a:rPr lang="ja-JP" altLang="en-US" sz="800" b="1">
+                <a:solidFill>
+                  <a:srgbClr val="C00000"/>
+                </a:solidFill>
+                <a:latin typeface="メイリオ" panose="020B0604030504040204" pitchFamily="50" charset="-128"/>
+                <a:ea typeface="メイリオ" panose="020B0604030504040204" pitchFamily="50" charset="-128"/>
+              </a:rPr>
+              <a:t>単月</a:t>
+            </a:r>
+            <a:r>
+              <a:rPr lang="en-US" altLang="ja-JP" sz="800" b="1">
+                <a:solidFill>
+                  <a:srgbClr val="C00000"/>
+                </a:solidFill>
+                <a:latin typeface="メイリオ" panose="020B0604030504040204" pitchFamily="50" charset="-128"/>
+                <a:ea typeface="メイリオ" panose="020B0604030504040204" pitchFamily="50" charset="-128"/>
+              </a:rPr>
+              <a:t>6000</a:t>
+            </a:r>
+            <a:r>
+              <a:rPr lang="ja-JP" altLang="en-US" sz="800" b="1">
+                <a:solidFill>
+                  <a:srgbClr val="C00000"/>
+                </a:solidFill>
+                <a:latin typeface="メイリオ" panose="020B0604030504040204" pitchFamily="50" charset="-128"/>
+                <a:ea typeface="メイリオ" panose="020B0604030504040204" pitchFamily="50" charset="-128"/>
+              </a:rPr>
+              <a:t>万円</a:t>
+            </a:r>
+            <a:r>
+              <a:rPr lang="ja-JP" altLang="en-US" sz="800">
+                <a:latin typeface="メイリオ" panose="020B0604030504040204" pitchFamily="50" charset="-128"/>
+                <a:ea typeface="メイリオ" panose="020B0604030504040204" pitchFamily="50" charset="-128"/>
+              </a:rPr>
+              <a:t>の取り扱いを突破。</a:t>
+            </a:r>
+            <a:endParaRPr kumimoji="1" lang="ja-JP" altLang="en-US" sz="800">
+              <a:latin typeface="メイリオ" panose="020B0604030504040204" pitchFamily="50" charset="-128"/>
+              <a:ea typeface="メイリオ" panose="020B0604030504040204" pitchFamily="50" charset="-128"/>
+            </a:endParaRPr>
+          </a:p>
+        </p:txBody>
+      </p:sp>
+      <p:sp>
+        <p:nvSpPr>
+          <p:cNvPr id="2102" name="テキスト ボックス 2101">
+            <a:extLst>
+              <a:ext uri="{FF2B5EF4-FFF2-40B4-BE49-F238E27FC236}">
+                <a16:creationId xmlns:a16="http://schemas.microsoft.com/office/drawing/2014/main" id="{756F6552-3CAE-3310-D96A-5D847F286859}"/>
+              </a:ext>
+            </a:extLst>
+          </p:cNvPr>
+          <p:cNvSpPr txBox="1"/>
+          <p:nvPr/>
+        </p:nvSpPr>
+        <p:spPr>
+          <a:xfrm>
+            <a:off x="2105787" y="3209363"/>
+            <a:ext cx="2612987" cy="338554"/>
+          </a:xfrm>
+          <a:prstGeom prst="rect">
+            <a:avLst/>
+          </a:prstGeom>
+          <a:noFill/>
+          <a:ln>
+            <a:noFill/>
+          </a:ln>
+        </p:spPr>
+        <p:txBody>
+          <a:bodyPr wrap="square" rtlCol="0">
+            <a:spAutoFit/>
+          </a:bodyPr>
+          <a:lstStyle/>
+          <a:p>
+            <a:pPr algn="ctr"/>
+            <a:r>
+              <a:rPr kumimoji="1" lang="en-US" altLang="ja-JP" sz="800" dirty="0">
+                <a:latin typeface="メイリオ" panose="020B0604030504040204" pitchFamily="50" charset="-128"/>
+                <a:ea typeface="メイリオ" panose="020B0604030504040204" pitchFamily="50" charset="-128"/>
+              </a:rPr>
+              <a:t>2024</a:t>
+            </a:r>
+            <a:r>
+              <a:rPr kumimoji="1" lang="ja-JP" altLang="en-US" sz="800" dirty="0">
+                <a:latin typeface="メイリオ" panose="020B0604030504040204" pitchFamily="50" charset="-128"/>
+                <a:ea typeface="メイリオ" panose="020B0604030504040204" pitchFamily="50" charset="-128"/>
+              </a:rPr>
+              <a:t>年度上半期の</a:t>
+            </a:r>
+            <a:r>
+              <a:rPr kumimoji="1" lang="en-US" altLang="ja-JP" sz="800" dirty="0">
+                <a:latin typeface="メイリオ" panose="020B0604030504040204" pitchFamily="50" charset="-128"/>
+                <a:ea typeface="メイリオ" panose="020B0604030504040204" pitchFamily="50" charset="-128"/>
+              </a:rPr>
+              <a:t>Sales Partner</a:t>
+            </a:r>
+            <a:r>
+              <a:rPr kumimoji="1" lang="ja-JP" altLang="en-US" sz="800" dirty="0">
+                <a:latin typeface="メイリオ" panose="020B0604030504040204" pitchFamily="50" charset="-128"/>
+                <a:ea typeface="メイリオ" panose="020B0604030504040204" pitchFamily="50" charset="-128"/>
+              </a:rPr>
+              <a:t>「</a:t>
+            </a:r>
+            <a:r>
+              <a:rPr kumimoji="1" lang="en-US" altLang="ja-JP" sz="800" dirty="0">
+                <a:latin typeface="メイリオ" panose="020B0604030504040204" pitchFamily="50" charset="-128"/>
+                <a:ea typeface="メイリオ" panose="020B0604030504040204" pitchFamily="50" charset="-128"/>
+              </a:rPr>
+              <a:t>Premier</a:t>
+            </a:r>
+            <a:r>
+              <a:rPr kumimoji="1" lang="ja-JP" altLang="en-US" sz="800" dirty="0">
+                <a:latin typeface="メイリオ" panose="020B0604030504040204" pitchFamily="50" charset="-128"/>
+                <a:ea typeface="メイリオ" panose="020B0604030504040204" pitchFamily="50" charset="-128"/>
+              </a:rPr>
+              <a:t>」に認定</a:t>
+            </a:r>
+            <a:r>
+              <a:rPr lang="ja-JP" altLang="en-US" sz="800" dirty="0">
+                <a:latin typeface="メイリオ" panose="020B0604030504040204" pitchFamily="50" charset="-128"/>
+                <a:ea typeface="メイリオ" panose="020B0604030504040204" pitchFamily="50" charset="-128"/>
+              </a:rPr>
+              <a:t>。</a:t>
+            </a:r>
+            <a:endParaRPr lang="en-US" altLang="ja-JP" sz="800" dirty="0">
+              <a:latin typeface="メイリオ" panose="020B0604030504040204" pitchFamily="50" charset="-128"/>
+              <a:ea typeface="メイリオ" panose="020B0604030504040204" pitchFamily="50" charset="-128"/>
+            </a:endParaRPr>
+          </a:p>
+          <a:p>
+            <a:pPr algn="ctr"/>
+            <a:r>
+              <a:rPr lang="ja-JP" altLang="en-US" sz="800" b="1" dirty="0">
+                <a:solidFill>
+                  <a:srgbClr val="C00000"/>
+                </a:solidFill>
+                <a:latin typeface="メイリオ" panose="020B0604030504040204" pitchFamily="50" charset="-128"/>
+                <a:ea typeface="メイリオ" panose="020B0604030504040204" pitchFamily="50" charset="-128"/>
+              </a:rPr>
+              <a:t>上位</a:t>
+            </a:r>
+            <a:r>
+              <a:rPr lang="en-US" altLang="ja-JP" sz="800" b="1" dirty="0">
+                <a:solidFill>
+                  <a:srgbClr val="C00000"/>
+                </a:solidFill>
+                <a:latin typeface="メイリオ" panose="020B0604030504040204" pitchFamily="50" charset="-128"/>
+                <a:ea typeface="メイリオ" panose="020B0604030504040204" pitchFamily="50" charset="-128"/>
+              </a:rPr>
+              <a:t>20</a:t>
+            </a:r>
+            <a:r>
+              <a:rPr lang="ja-JP" altLang="en-US" sz="800" b="1" dirty="0">
+                <a:solidFill>
+                  <a:srgbClr val="C00000"/>
+                </a:solidFill>
+                <a:latin typeface="メイリオ" panose="020B0604030504040204" pitchFamily="50" charset="-128"/>
+                <a:ea typeface="メイリオ" panose="020B0604030504040204" pitchFamily="50" charset="-128"/>
+              </a:rPr>
+              <a:t>位タイ</a:t>
+            </a:r>
+            <a:endParaRPr lang="en-US" altLang="ja-JP" sz="800" b="1" dirty="0">
+              <a:solidFill>
+                <a:srgbClr val="C00000"/>
+              </a:solidFill>
+              <a:latin typeface="メイリオ" panose="020B0604030504040204" pitchFamily="50" charset="-128"/>
+              <a:ea typeface="メイリオ" panose="020B0604030504040204" pitchFamily="50" charset="-128"/>
+            </a:endParaRPr>
+          </a:p>
+        </p:txBody>
+      </p:sp>
+      <p:sp>
+        <p:nvSpPr>
+          <p:cNvPr id="2103" name="テキスト ボックス 2102">
+            <a:extLst>
+              <a:ext uri="{FF2B5EF4-FFF2-40B4-BE49-F238E27FC236}">
+                <a16:creationId xmlns:a16="http://schemas.microsoft.com/office/drawing/2014/main" id="{D5793D3E-32A5-A172-B93D-F2E02806685C}"/>
+              </a:ext>
+            </a:extLst>
+          </p:cNvPr>
+          <p:cNvSpPr txBox="1"/>
+          <p:nvPr/>
+        </p:nvSpPr>
+        <p:spPr>
+          <a:xfrm>
+            <a:off x="4837113" y="3209363"/>
+            <a:ext cx="1767520" cy="215444"/>
+          </a:xfrm>
+          <a:prstGeom prst="rect">
+            <a:avLst/>
+          </a:prstGeom>
+          <a:noFill/>
+          <a:ln>
+            <a:noFill/>
+          </a:ln>
+        </p:spPr>
+        <p:txBody>
+          <a:bodyPr wrap="square" rtlCol="0">
+            <a:spAutoFit/>
+          </a:bodyPr>
+          <a:lstStyle/>
+          <a:p>
+            <a:pPr algn="ctr"/>
+            <a:r>
+              <a:rPr lang="ja-JP" altLang="en-US" sz="800" b="1">
+                <a:solidFill>
+                  <a:srgbClr val="C00000"/>
+                </a:solidFill>
+                <a:latin typeface="メイリオ" panose="020B0604030504040204" pitchFamily="50" charset="-128"/>
+                <a:ea typeface="メイリオ" panose="020B0604030504040204" pitchFamily="50" charset="-128"/>
+              </a:rPr>
+              <a:t>単月</a:t>
+            </a:r>
+            <a:r>
+              <a:rPr lang="en-US" altLang="ja-JP" sz="800" b="1">
+                <a:solidFill>
+                  <a:srgbClr val="C00000"/>
+                </a:solidFill>
+                <a:latin typeface="メイリオ" panose="020B0604030504040204" pitchFamily="50" charset="-128"/>
+                <a:ea typeface="メイリオ" panose="020B0604030504040204" pitchFamily="50" charset="-128"/>
+              </a:rPr>
+              <a:t>2000</a:t>
+            </a:r>
+            <a:r>
+              <a:rPr lang="ja-JP" altLang="en-US" sz="800" b="1">
+                <a:solidFill>
+                  <a:srgbClr val="C00000"/>
+                </a:solidFill>
+                <a:latin typeface="メイリオ" panose="020B0604030504040204" pitchFamily="50" charset="-128"/>
+                <a:ea typeface="メイリオ" panose="020B0604030504040204" pitchFamily="50" charset="-128"/>
+              </a:rPr>
+              <a:t>万円</a:t>
+            </a:r>
+            <a:r>
+              <a:rPr lang="ja-JP" altLang="en-US" sz="800">
+                <a:latin typeface="メイリオ" panose="020B0604030504040204" pitchFamily="50" charset="-128"/>
+                <a:ea typeface="メイリオ" panose="020B0604030504040204" pitchFamily="50" charset="-128"/>
+              </a:rPr>
+              <a:t>の取り扱いを突破。</a:t>
+            </a:r>
+            <a:endParaRPr lang="en-US" altLang="ja-JP" sz="800">
+              <a:latin typeface="メイリオ" panose="020B0604030504040204" pitchFamily="50" charset="-128"/>
+              <a:ea typeface="メイリオ" panose="020B0604030504040204" pitchFamily="50" charset="-128"/>
+            </a:endParaRPr>
+          </a:p>
+        </p:txBody>
+      </p:sp>
+      <p:sp>
+        <p:nvSpPr>
+          <p:cNvPr id="2104" name="テキスト ボックス 2103">
+            <a:extLst>
+              <a:ext uri="{FF2B5EF4-FFF2-40B4-BE49-F238E27FC236}">
+                <a16:creationId xmlns:a16="http://schemas.microsoft.com/office/drawing/2014/main" id="{89EE1600-592C-F991-FBB3-472A73DB5551}"/>
+              </a:ext>
+            </a:extLst>
+          </p:cNvPr>
+          <p:cNvSpPr txBox="1"/>
+          <p:nvPr/>
+        </p:nvSpPr>
+        <p:spPr>
+          <a:xfrm>
+            <a:off x="1858111" y="4310547"/>
+            <a:ext cx="3234807" cy="338554"/>
+          </a:xfrm>
+          <a:prstGeom prst="rect">
+            <a:avLst/>
+          </a:prstGeom>
+          <a:noFill/>
+          <a:ln>
+            <a:noFill/>
+          </a:ln>
+        </p:spPr>
+        <p:txBody>
+          <a:bodyPr wrap="square" rtlCol="0">
+            <a:spAutoFit/>
+          </a:bodyPr>
+          <a:lstStyle/>
+          <a:p>
+            <a:pPr algn="ctr"/>
+            <a:r>
+              <a:rPr kumimoji="1" lang="ja-JP" altLang="en-US" sz="800">
+                <a:latin typeface="メイリオ" panose="020B0604030504040204" pitchFamily="50" charset="-128"/>
+                <a:ea typeface="メイリオ" panose="020B0604030504040204" pitchFamily="50" charset="-128"/>
+              </a:rPr>
+              <a:t>前回に続き、最高グレードである</a:t>
+            </a:r>
+            <a:r>
+              <a:rPr lang="ja-JP" altLang="en-US" sz="800">
+                <a:latin typeface="メイリオ" panose="020B0604030504040204" pitchFamily="50" charset="-128"/>
+                <a:ea typeface="メイリオ" panose="020B0604030504040204" pitchFamily="50" charset="-128"/>
+              </a:rPr>
+              <a:t>「</a:t>
+            </a:r>
+            <a:r>
+              <a:rPr lang="en-US" altLang="ja-JP" sz="800">
+                <a:latin typeface="メイリオ" panose="020B0604030504040204" pitchFamily="50" charset="-128"/>
+                <a:ea typeface="メイリオ" panose="020B0604030504040204" pitchFamily="50" charset="-128"/>
+              </a:rPr>
+              <a:t>Premier</a:t>
+            </a:r>
+            <a:r>
+              <a:rPr lang="ja-JP" altLang="en-US" sz="800">
+                <a:latin typeface="メイリオ" panose="020B0604030504040204" pitchFamily="50" charset="-128"/>
+                <a:ea typeface="メイリオ" panose="020B0604030504040204" pitchFamily="50" charset="-128"/>
+              </a:rPr>
+              <a:t>」に認定。</a:t>
+            </a:r>
+            <a:endParaRPr lang="en-US" altLang="ja-JP" sz="800">
+              <a:latin typeface="メイリオ" panose="020B0604030504040204" pitchFamily="50" charset="-128"/>
+              <a:ea typeface="メイリオ" panose="020B0604030504040204" pitchFamily="50" charset="-128"/>
+            </a:endParaRPr>
+          </a:p>
+          <a:p>
+            <a:pPr algn="ctr"/>
+            <a:r>
+              <a:rPr kumimoji="1" lang="ja-JP" altLang="en-US" sz="800" b="1">
+                <a:solidFill>
+                  <a:srgbClr val="C00000"/>
+                </a:solidFill>
+                <a:latin typeface="メイリオ" panose="020B0604030504040204" pitchFamily="50" charset="-128"/>
+                <a:ea typeface="メイリオ" panose="020B0604030504040204" pitchFamily="50" charset="-128"/>
+              </a:rPr>
+              <a:t>上位</a:t>
+            </a:r>
+            <a:r>
+              <a:rPr kumimoji="1" lang="en-US" altLang="ja-JP" sz="800" b="1">
+                <a:solidFill>
+                  <a:srgbClr val="C00000"/>
+                </a:solidFill>
+                <a:latin typeface="メイリオ" panose="020B0604030504040204" pitchFamily="50" charset="-128"/>
+                <a:ea typeface="メイリオ" panose="020B0604030504040204" pitchFamily="50" charset="-128"/>
+              </a:rPr>
+              <a:t>12</a:t>
+            </a:r>
+            <a:r>
+              <a:rPr kumimoji="1" lang="ja-JP" altLang="en-US" sz="800" b="1">
+                <a:solidFill>
+                  <a:srgbClr val="C00000"/>
+                </a:solidFill>
+                <a:latin typeface="メイリオ" panose="020B0604030504040204" pitchFamily="50" charset="-128"/>
+                <a:ea typeface="メイリオ" panose="020B0604030504040204" pitchFamily="50" charset="-128"/>
+              </a:rPr>
+              <a:t>位タイ</a:t>
+            </a:r>
+          </a:p>
+        </p:txBody>
+      </p:sp>
+      <p:sp>
+        <p:nvSpPr>
+          <p:cNvPr id="2105" name="テキスト ボックス 2104">
+            <a:extLst>
+              <a:ext uri="{FF2B5EF4-FFF2-40B4-BE49-F238E27FC236}">
+                <a16:creationId xmlns:a16="http://schemas.microsoft.com/office/drawing/2014/main" id="{735B8649-944E-38AC-EFE9-3FF466013418}"/>
+              </a:ext>
+            </a:extLst>
+          </p:cNvPr>
+          <p:cNvSpPr txBox="1"/>
+          <p:nvPr/>
+        </p:nvSpPr>
+        <p:spPr>
+          <a:xfrm>
+            <a:off x="6722972" y="3209363"/>
+            <a:ext cx="2758776" cy="338554"/>
+          </a:xfrm>
+          <a:prstGeom prst="rect">
+            <a:avLst/>
+          </a:prstGeom>
+          <a:noFill/>
+          <a:ln>
+            <a:noFill/>
+          </a:ln>
+        </p:spPr>
+        <p:txBody>
+          <a:bodyPr wrap="square" rtlCol="0">
+            <a:spAutoFit/>
+          </a:bodyPr>
+          <a:lstStyle/>
+          <a:p>
+            <a:pPr algn="ctr"/>
+            <a:r>
+              <a:rPr lang="ja-JP" altLang="en-US" sz="800">
+                <a:latin typeface="メイリオ" panose="020B0604030504040204" pitchFamily="50" charset="-128"/>
+                <a:ea typeface="メイリオ" panose="020B0604030504040204" pitchFamily="50" charset="-128"/>
+              </a:rPr>
+              <a:t>前回に続き、最高グレードである「</a:t>
+            </a:r>
+            <a:r>
+              <a:rPr lang="en-US" altLang="ja-JP" sz="800">
+                <a:latin typeface="メイリオ" panose="020B0604030504040204" pitchFamily="50" charset="-128"/>
+                <a:ea typeface="メイリオ" panose="020B0604030504040204" pitchFamily="50" charset="-128"/>
+              </a:rPr>
+              <a:t>Premier</a:t>
+            </a:r>
+            <a:r>
+              <a:rPr lang="ja-JP" altLang="en-US" sz="800">
+                <a:latin typeface="メイリオ" panose="020B0604030504040204" pitchFamily="50" charset="-128"/>
+                <a:ea typeface="メイリオ" panose="020B0604030504040204" pitchFamily="50" charset="-128"/>
+              </a:rPr>
+              <a:t>」に認定。</a:t>
+            </a:r>
+            <a:r>
+              <a:rPr lang="ja-JP" altLang="en-US" sz="800" b="1">
+                <a:solidFill>
+                  <a:srgbClr val="C00000"/>
+                </a:solidFill>
+                <a:latin typeface="メイリオ" panose="020B0604030504040204" pitchFamily="50" charset="-128"/>
+                <a:ea typeface="メイリオ" panose="020B0604030504040204" pitchFamily="50" charset="-128"/>
+              </a:rPr>
+              <a:t>上位</a:t>
+            </a:r>
+            <a:r>
+              <a:rPr lang="en-US" altLang="ja-JP" sz="800" b="1">
+                <a:solidFill>
+                  <a:srgbClr val="C00000"/>
+                </a:solidFill>
+                <a:latin typeface="メイリオ" panose="020B0604030504040204" pitchFamily="50" charset="-128"/>
+                <a:ea typeface="メイリオ" panose="020B0604030504040204" pitchFamily="50" charset="-128"/>
+              </a:rPr>
+              <a:t>15</a:t>
+            </a:r>
+            <a:r>
+              <a:rPr lang="ja-JP" altLang="en-US" sz="800" b="1">
+                <a:solidFill>
+                  <a:srgbClr val="C00000"/>
+                </a:solidFill>
+                <a:latin typeface="メイリオ" panose="020B0604030504040204" pitchFamily="50" charset="-128"/>
+                <a:ea typeface="メイリオ" panose="020B0604030504040204" pitchFamily="50" charset="-128"/>
+              </a:rPr>
+              <a:t>位タイ</a:t>
+            </a:r>
+            <a:endParaRPr lang="en-US" altLang="ja-JP" sz="800" b="1">
+              <a:solidFill>
+                <a:srgbClr val="C00000"/>
+              </a:solidFill>
+              <a:latin typeface="メイリオ" panose="020B0604030504040204" pitchFamily="50" charset="-128"/>
+              <a:ea typeface="メイリオ" panose="020B0604030504040204" pitchFamily="50" charset="-128"/>
+            </a:endParaRPr>
+          </a:p>
+        </p:txBody>
+      </p:sp>
+      <p:sp>
+        <p:nvSpPr>
+          <p:cNvPr id="2110" name="テキスト ボックス 2109">
+            <a:extLst>
+              <a:ext uri="{FF2B5EF4-FFF2-40B4-BE49-F238E27FC236}">
+                <a16:creationId xmlns:a16="http://schemas.microsoft.com/office/drawing/2014/main" id="{9364E84A-3501-3480-3E86-4181D9EDDE0D}"/>
+              </a:ext>
+            </a:extLst>
+          </p:cNvPr>
+          <p:cNvSpPr txBox="1"/>
+          <p:nvPr/>
+        </p:nvSpPr>
+        <p:spPr>
+          <a:xfrm>
+            <a:off x="5204477" y="3512494"/>
+            <a:ext cx="957586" cy="246221"/>
+          </a:xfrm>
+          <a:prstGeom prst="rect">
+            <a:avLst/>
+          </a:prstGeom>
+          <a:noFill/>
+          <a:ln>
+            <a:noFill/>
+          </a:ln>
+        </p:spPr>
+        <p:txBody>
+          <a:bodyPr wrap="square" rtlCol="0">
+            <a:spAutoFit/>
+          </a:bodyPr>
+          <a:lstStyle/>
+          <a:p>
+            <a:pPr algn="ctr"/>
+            <a:r>
+              <a:rPr kumimoji="1" lang="ja-JP" altLang="en-US" sz="1000">
+                <a:latin typeface="メイリオ" panose="020B0604030504040204" pitchFamily="50" charset="-128"/>
+                <a:ea typeface="メイリオ" panose="020B0604030504040204" pitchFamily="50" charset="-128"/>
+              </a:rPr>
+              <a:t>現在</a:t>
+            </a:r>
+          </a:p>
+        </p:txBody>
+      </p:sp>
+      <p:sp>
+        <p:nvSpPr>
+          <p:cNvPr id="2111" name="テキスト ボックス 2110">
+            <a:extLst>
+              <a:ext uri="{FF2B5EF4-FFF2-40B4-BE49-F238E27FC236}">
+                <a16:creationId xmlns:a16="http://schemas.microsoft.com/office/drawing/2014/main" id="{915149AC-7723-29BD-6D17-D471CC831F56}"/>
+              </a:ext>
+            </a:extLst>
+          </p:cNvPr>
+          <p:cNvSpPr txBox="1"/>
+          <p:nvPr/>
+        </p:nvSpPr>
+        <p:spPr>
+          <a:xfrm>
+            <a:off x="4684085" y="4310547"/>
+            <a:ext cx="2335280" cy="338554"/>
+          </a:xfrm>
+          <a:prstGeom prst="rect">
+            <a:avLst/>
+          </a:prstGeom>
+          <a:noFill/>
+          <a:ln>
+            <a:noFill/>
+          </a:ln>
+        </p:spPr>
+        <p:txBody>
+          <a:bodyPr wrap="square" rtlCol="0">
+            <a:spAutoFit/>
+          </a:bodyPr>
+          <a:lstStyle/>
+          <a:p>
+            <a:pPr algn="ctr"/>
+            <a:r>
+              <a:rPr lang="ja-JP" altLang="en-US" sz="800" dirty="0">
+                <a:latin typeface="メイリオ" panose="020B0604030504040204" pitchFamily="50" charset="-128"/>
+                <a:ea typeface="メイリオ" panose="020B0604030504040204" pitchFamily="50" charset="-128"/>
+              </a:rPr>
+              <a:t>「</a:t>
+            </a:r>
+            <a:r>
+              <a:rPr lang="en-US" altLang="ja-JP" sz="800" dirty="0">
+                <a:latin typeface="メイリオ" panose="020B0604030504040204" pitchFamily="50" charset="-128"/>
+                <a:ea typeface="メイリオ" panose="020B0604030504040204" pitchFamily="50" charset="-128"/>
+              </a:rPr>
+              <a:t>Best LINE</a:t>
+            </a:r>
+            <a:r>
+              <a:rPr lang="ja-JP" altLang="en-US" sz="800" dirty="0">
+                <a:latin typeface="メイリオ" panose="020B0604030504040204" pitchFamily="50" charset="-128"/>
+                <a:ea typeface="メイリオ" panose="020B0604030504040204" pitchFamily="50" charset="-128"/>
+              </a:rPr>
+              <a:t>公式アカウント </a:t>
+            </a:r>
+            <a:r>
+              <a:rPr lang="en-US" altLang="ja-JP" sz="800" dirty="0">
+                <a:latin typeface="メイリオ" panose="020B0604030504040204" pitchFamily="50" charset="-128"/>
+                <a:ea typeface="メイリオ" panose="020B0604030504040204" pitchFamily="50" charset="-128"/>
+              </a:rPr>
+              <a:t>Growth</a:t>
+            </a:r>
+            <a:r>
+              <a:rPr lang="ja-JP" altLang="en-US" sz="800" dirty="0">
+                <a:latin typeface="メイリオ" panose="020B0604030504040204" pitchFamily="50" charset="-128"/>
+                <a:ea typeface="メイリオ" panose="020B0604030504040204" pitchFamily="50" charset="-128"/>
+              </a:rPr>
+              <a:t>」部門で</a:t>
+            </a:r>
+            <a:r>
+              <a:rPr lang="en-US" altLang="ja-JP" sz="800" dirty="0">
+                <a:latin typeface="メイリオ" panose="020B0604030504040204" pitchFamily="50" charset="-128"/>
+                <a:ea typeface="メイリオ" panose="020B0604030504040204" pitchFamily="50" charset="-128"/>
+              </a:rPr>
+              <a:t>LINE</a:t>
+            </a:r>
+            <a:r>
+              <a:rPr lang="ja-JP" altLang="en-US" sz="800" dirty="0">
+                <a:latin typeface="メイリオ" panose="020B0604030504040204" pitchFamily="50" charset="-128"/>
+                <a:ea typeface="メイリオ" panose="020B0604030504040204" pitchFamily="50" charset="-128"/>
+              </a:rPr>
+              <a:t>ヤフー社から表彰をいただきました。</a:t>
+            </a:r>
+            <a:endParaRPr kumimoji="1" lang="ja-JP" altLang="en-US" sz="800" dirty="0">
+              <a:latin typeface="メイリオ" panose="020B0604030504040204" pitchFamily="50" charset="-128"/>
+              <a:ea typeface="メイリオ" panose="020B0604030504040204" pitchFamily="50" charset="-128"/>
+            </a:endParaRPr>
+          </a:p>
+        </p:txBody>
+      </p:sp>
+      <p:sp>
+        <p:nvSpPr>
+          <p:cNvPr id="8" name="正方形/長方形 7">
+            <a:extLst>
+              <a:ext uri="{FF2B5EF4-FFF2-40B4-BE49-F238E27FC236}">
+                <a16:creationId xmlns:a16="http://schemas.microsoft.com/office/drawing/2014/main" id="{F974FA57-9312-73D0-6461-C65486B6B90A}"/>
+              </a:ext>
+            </a:extLst>
+          </p:cNvPr>
+          <p:cNvSpPr/>
+          <p:nvPr/>
+        </p:nvSpPr>
+        <p:spPr>
+          <a:xfrm>
+            <a:off x="388723" y="675734"/>
+            <a:ext cx="9128556" cy="349010"/>
+          </a:xfrm>
+          <a:prstGeom prst="rect">
+            <a:avLst/>
+          </a:prstGeom>
+          <a:solidFill>
+            <a:schemeClr val="bg1">
+              <a:lumMod val="65000"/>
+            </a:schemeClr>
+          </a:solidFill>
+          <a:ln>
+            <a:solidFill>
+              <a:schemeClr val="bg1">
+                <a:lumMod val="65000"/>
+              </a:schemeClr>
+            </a:solidFill>
+          </a:ln>
+        </p:spPr>
+        <p:style>
+          <a:lnRef idx="2">
+            <a:schemeClr val="accent1">
+              <a:shade val="15000"/>
+            </a:schemeClr>
+          </a:lnRef>
+          <a:fillRef idx="1">
+            <a:schemeClr val="accent1"/>
+          </a:fillRef>
+          <a:effectRef idx="0">
+            <a:schemeClr val="accent1"/>
+          </a:effectRef>
+          <a:fontRef idx="minor">
+            <a:schemeClr val="lt1"/>
+          </a:fontRef>
+        </p:style>
+        <p:txBody>
+          <a:bodyPr rtlCol="0" anchor="ctr"/>
+          <a:lstStyle/>
+          <a:p>
+            <a:pPr algn="ctr"/>
+            <a:endParaRPr kumimoji="1" lang="ja-JP" altLang="en-US"/>
+          </a:p>
+        </p:txBody>
+      </p:sp>
+      <p:sp>
+        <p:nvSpPr>
+          <p:cNvPr id="3" name="正方形/長方形 2">
+            <a:extLst>
+              <a:ext uri="{FF2B5EF4-FFF2-40B4-BE49-F238E27FC236}">
+                <a16:creationId xmlns:a16="http://schemas.microsoft.com/office/drawing/2014/main" id="{4661DF32-128A-6B77-5F5D-76D78A1B8378}"/>
+              </a:ext>
+            </a:extLst>
+          </p:cNvPr>
+          <p:cNvSpPr/>
+          <p:nvPr/>
+        </p:nvSpPr>
+        <p:spPr>
+          <a:xfrm>
+            <a:off x="2853632" y="700332"/>
+            <a:ext cx="6663645" cy="306000"/>
+          </a:xfrm>
+          <a:prstGeom prst="rect">
+            <a:avLst/>
+          </a:prstGeom>
+          <a:solidFill>
+            <a:srgbClr val="10253F"/>
+          </a:solidFill>
+        </p:spPr>
+        <p:txBody>
+          <a:bodyPr wrap="square">
+            <a:spAutoFit/>
+          </a:bodyPr>
+          <a:lstStyle/>
+          <a:p>
+            <a:pPr lvl="0">
+              <a:buClr>
+                <a:srgbClr val="002060"/>
+              </a:buClr>
+              <a:buSzPts val="1600"/>
+            </a:pPr>
+            <a:r>
+              <a:rPr lang="en-US" altLang="ja-JP" sz="1300" b="1">
+                <a:solidFill>
+                  <a:schemeClr val="bg1"/>
+                </a:solidFill>
+                <a:latin typeface="Meiryo"/>
+                <a:ea typeface="Meiryo"/>
+                <a:cs typeface="Meiryo"/>
+                <a:sym typeface="Meiryo"/>
+              </a:rPr>
+              <a:t>LINE</a:t>
+            </a:r>
+            <a:r>
+              <a:rPr lang="ja-JP" altLang="en-US" sz="1300" b="1">
+                <a:solidFill>
+                  <a:schemeClr val="bg1"/>
+                </a:solidFill>
+                <a:latin typeface="Meiryo"/>
+                <a:ea typeface="Meiryo"/>
+                <a:cs typeface="Meiryo"/>
+                <a:sym typeface="Meiryo"/>
+              </a:rPr>
+              <a:t>ヤフー </a:t>
+            </a:r>
+            <a:r>
+              <a:rPr lang="en-US" altLang="ja-JP" sz="1300" b="1">
+                <a:solidFill>
+                  <a:schemeClr val="bg1"/>
+                </a:solidFill>
+                <a:latin typeface="Meiryo"/>
+                <a:ea typeface="Meiryo"/>
+                <a:cs typeface="Meiryo"/>
+                <a:sym typeface="Meiryo"/>
+              </a:rPr>
+              <a:t>Partner Award 2025</a:t>
+            </a:r>
+            <a:r>
+              <a:rPr lang="ja-JP" altLang="en-US" sz="1300" b="1">
+                <a:solidFill>
+                  <a:schemeClr val="bg1"/>
+                </a:solidFill>
+                <a:latin typeface="Meiryo"/>
+                <a:ea typeface="Meiryo"/>
+                <a:cs typeface="Meiryo"/>
+                <a:sym typeface="Meiryo"/>
+              </a:rPr>
+              <a:t>にて「</a:t>
+            </a:r>
+            <a:r>
+              <a:rPr lang="en-US" altLang="ja-JP" sz="1300" b="1">
+                <a:solidFill>
+                  <a:schemeClr val="bg1"/>
+                </a:solidFill>
+                <a:latin typeface="Meiryo"/>
+                <a:ea typeface="Meiryo"/>
+                <a:cs typeface="Meiryo"/>
+                <a:sym typeface="Meiryo"/>
+              </a:rPr>
+              <a:t>Best LINE</a:t>
+            </a:r>
+            <a:r>
+              <a:rPr lang="ja-JP" altLang="en-US" sz="1300" b="1">
+                <a:solidFill>
+                  <a:schemeClr val="bg1"/>
+                </a:solidFill>
+                <a:latin typeface="Meiryo"/>
+                <a:ea typeface="Meiryo"/>
+                <a:cs typeface="Meiryo"/>
+                <a:sym typeface="Meiryo"/>
+              </a:rPr>
+              <a:t>公式アカウント </a:t>
+            </a:r>
+            <a:r>
+              <a:rPr lang="en-US" altLang="ja-JP" sz="1300" b="1">
+                <a:solidFill>
+                  <a:schemeClr val="bg1"/>
+                </a:solidFill>
+                <a:latin typeface="Meiryo"/>
+                <a:ea typeface="Meiryo"/>
+                <a:cs typeface="Meiryo"/>
+                <a:sym typeface="Meiryo"/>
+              </a:rPr>
+              <a:t>Growth</a:t>
+            </a:r>
+            <a:r>
+              <a:rPr lang="ja-JP" altLang="en-US" sz="1300" b="1">
+                <a:solidFill>
+                  <a:schemeClr val="bg1"/>
+                </a:solidFill>
+                <a:latin typeface="Meiryo"/>
+                <a:ea typeface="Meiryo"/>
+                <a:cs typeface="Meiryo"/>
+                <a:sym typeface="Meiryo"/>
+              </a:rPr>
+              <a:t>」受賞</a:t>
+            </a:r>
+            <a:endParaRPr lang="en-US" altLang="ja-JP" sz="1300" b="1" dirty="0">
+              <a:solidFill>
+                <a:schemeClr val="bg1"/>
+              </a:solidFill>
+              <a:latin typeface="Meiryo"/>
+              <a:ea typeface="Meiryo"/>
+              <a:cs typeface="Meiryo"/>
+              <a:sym typeface="Meiryo"/>
+            </a:endParaRPr>
+          </a:p>
+        </p:txBody>
+      </p:sp>
+      <p:sp>
+        <p:nvSpPr>
+          <p:cNvPr id="6" name="正方形/長方形 5">
+            <a:extLst>
+              <a:ext uri="{FF2B5EF4-FFF2-40B4-BE49-F238E27FC236}">
+                <a16:creationId xmlns:a16="http://schemas.microsoft.com/office/drawing/2014/main" id="{DEE7F595-5FAC-C5CD-0B26-580B6DF09A53}"/>
+              </a:ext>
+            </a:extLst>
+          </p:cNvPr>
+          <p:cNvSpPr/>
+          <p:nvPr/>
+        </p:nvSpPr>
+        <p:spPr>
+          <a:xfrm>
+            <a:off x="432943" y="700332"/>
+            <a:ext cx="2391617" cy="306000"/>
+          </a:xfrm>
+          <a:prstGeom prst="rect">
+            <a:avLst/>
+          </a:prstGeom>
+          <a:solidFill>
+            <a:srgbClr val="10253F"/>
+          </a:solidFill>
+        </p:spPr>
+        <p:txBody>
+          <a:bodyPr wrap="square">
+            <a:spAutoFit/>
+          </a:bodyPr>
+          <a:lstStyle/>
+          <a:p>
+            <a:pPr lvl="0" algn="ctr">
+              <a:buClr>
+                <a:srgbClr val="002060"/>
+              </a:buClr>
+              <a:buSzPts val="1600"/>
+            </a:pPr>
+            <a:r>
+              <a:rPr lang="en-US" altLang="ja-JP" sz="1400" b="1">
+                <a:solidFill>
+                  <a:schemeClr val="bg1"/>
+                </a:solidFill>
+                <a:latin typeface="Meiryo"/>
+                <a:ea typeface="Meiryo"/>
+                <a:cs typeface="Meiryo"/>
+                <a:sym typeface="Meiryo"/>
+              </a:rPr>
+              <a:t>DYM × LINEOA</a:t>
+            </a:r>
+            <a:endParaRPr lang="en-US" altLang="ja-JP" sz="1400" b="1" dirty="0">
+              <a:solidFill>
+                <a:schemeClr val="bg1"/>
+              </a:solidFill>
+              <a:latin typeface="Meiryo"/>
+              <a:ea typeface="Meiryo"/>
+              <a:cs typeface="Meiryo"/>
+              <a:sym typeface="Meiryo"/>
+            </a:endParaRPr>
+          </a:p>
+        </p:txBody>
+      </p:sp>
+      <p:pic>
+        <p:nvPicPr>
+          <p:cNvPr id="56" name="Picture 2">
+            <a:extLst>
+              <a:ext uri="{FF2B5EF4-FFF2-40B4-BE49-F238E27FC236}">
+                <a16:creationId xmlns:a16="http://schemas.microsoft.com/office/drawing/2014/main" id="{6B503BF7-985B-8770-4643-5E3EB6E5562A}"/>
+              </a:ext>
+            </a:extLst>
+          </p:cNvPr>
+          <p:cNvPicPr>
+            <a:picLocks noChangeAspect="1" noChangeArrowheads="1"/>
+          </p:cNvPicPr>
+          <p:nvPr/>
+        </p:nvPicPr>
+        <p:blipFill>
+          <a:blip r:embed="rId2" cstate="print">
+            <a:extLst>
+              <a:ext uri="{28A0092B-C50C-407E-A947-70E740481C1C}">
+                <a14:useLocalDpi xmlns:a14="http://schemas.microsoft.com/office/drawing/2010/main" val="0"/>
+              </a:ext>
+            </a:extLst>
+          </a:blip>
+          <a:srcRect/>
+          <a:stretch>
+            <a:fillRect/>
+          </a:stretch>
+        </p:blipFill>
+        <p:spPr bwMode="auto">
+          <a:xfrm>
+            <a:off x="7069689" y="5150774"/>
+            <a:ext cx="1929199" cy="1286131"/>
+          </a:xfrm>
+          <a:prstGeom prst="rect">
+            <a:avLst/>
+          </a:prstGeom>
+          <a:noFill/>
+          <a:extLst>
+            <a:ext uri="{909E8E84-426E-40DD-AFC4-6F175D3DCCD1}">
+              <a14:hiddenFill xmlns:a14="http://schemas.microsoft.com/office/drawing/2010/main">
+                <a:solidFill>
+                  <a:srgbClr val="FFFFFF"/>
+                </a:solidFill>
+              </a14:hiddenFill>
+            </a:ext>
+          </a:extLst>
+        </p:spPr>
+      </p:pic>
+      <p:sp>
+        <p:nvSpPr>
+          <p:cNvPr id="2" name="テキスト プレースホルダー 2">
+            <a:extLst>
+              <a:ext uri="{FF2B5EF4-FFF2-40B4-BE49-F238E27FC236}">
+                <a16:creationId xmlns:a16="http://schemas.microsoft.com/office/drawing/2014/main" id="{761ADAB8-B668-8B05-EDE6-B5003466E015}"/>
+              </a:ext>
+            </a:extLst>
+          </p:cNvPr>
+          <p:cNvSpPr txBox="1">
+            <a:spLocks/>
+          </p:cNvSpPr>
+          <p:nvPr/>
+        </p:nvSpPr>
+        <p:spPr>
+          <a:xfrm>
+            <a:off x="8209814" y="6217102"/>
+            <a:ext cx="676273" cy="157797"/>
+          </a:xfrm>
+          <a:prstGeom prst="rect">
+            <a:avLst/>
+          </a:prstGeom>
+        </p:spPr>
+        <p:txBody>
+          <a:bodyPr lIns="0" tIns="0" rIns="0" bIns="0" anchor="t"/>
+          <a:lstStyle>
+            <a:lvl1pPr marL="0" indent="0" algn="l" defTabSz="914400" rtl="0" eaLnBrk="1" latinLnBrk="0" hangingPunct="1">
+              <a:lnSpc>
+                <a:spcPct val="130000"/>
+              </a:lnSpc>
+              <a:spcBef>
+                <a:spcPts val="0"/>
+              </a:spcBef>
+              <a:buFont typeface="Arial" panose="020B0604020202020204" pitchFamily="34" charset="0"/>
+              <a:buNone/>
+              <a:defRPr kumimoji="1" sz="1400" kern="1200">
+                <a:solidFill>
+                  <a:schemeClr val="tx1">
+                    <a:lumMod val="95000"/>
+                    <a:lumOff val="5000"/>
+                  </a:schemeClr>
+                </a:solidFill>
+                <a:latin typeface="Meiryo" panose="020B0604030504040204" pitchFamily="34" charset="-128"/>
+                <a:ea typeface="Meiryo" panose="020B0604030504040204" pitchFamily="34" charset="-128"/>
+                <a:cs typeface="+mn-cs"/>
+              </a:defRPr>
+            </a:lvl1pPr>
+            <a:lvl2pPr marL="685800" indent="-228600" algn="l" defTabSz="914400" rtl="0" eaLnBrk="1" latinLnBrk="0" hangingPunct="1">
+              <a:lnSpc>
+                <a:spcPct val="90000"/>
+              </a:lnSpc>
+              <a:spcBef>
+                <a:spcPts val="500"/>
+              </a:spcBef>
+              <a:buFont typeface="Arial" panose="020B0604020202020204" pitchFamily="34" charset="0"/>
+              <a:buChar char="•"/>
+              <a:defRPr kumimoji="1" sz="2400" kern="1200">
+                <a:solidFill>
+                  <a:schemeClr val="tx1"/>
+                </a:solidFill>
+                <a:latin typeface="+mn-lt"/>
+                <a:ea typeface="+mn-ea"/>
+                <a:cs typeface="+mn-cs"/>
+              </a:defRPr>
+            </a:lvl2pPr>
+            <a:lvl3pPr marL="1143000" indent="-228600" algn="l" defTabSz="914400" rtl="0" eaLnBrk="1" latinLnBrk="0" hangingPunct="1">
+              <a:lnSpc>
+                <a:spcPct val="90000"/>
+              </a:lnSpc>
+              <a:spcBef>
+                <a:spcPts val="500"/>
+              </a:spcBef>
+              <a:buFont typeface="Arial" panose="020B0604020202020204" pitchFamily="34" charset="0"/>
+              <a:buChar char="•"/>
+              <a:defRPr kumimoji="1" sz="2000" kern="1200">
+                <a:solidFill>
+                  <a:schemeClr val="tx1"/>
+                </a:solidFill>
+                <a:latin typeface="+mn-lt"/>
+                <a:ea typeface="+mn-ea"/>
+                <a:cs typeface="+mn-cs"/>
+              </a:defRPr>
+            </a:lvl3pPr>
+            <a:lvl4pPr marL="1600200" indent="-228600" algn="l" defTabSz="914400" rtl="0" eaLnBrk="1" latinLnBrk="0" hangingPunct="1">
+              <a:lnSpc>
+                <a:spcPct val="90000"/>
+              </a:lnSpc>
+              <a:spcBef>
+                <a:spcPts val="500"/>
+              </a:spcBef>
+              <a:buFont typeface="Arial" panose="020B0604020202020204" pitchFamily="34" charset="0"/>
+              <a:buChar char="•"/>
+              <a:defRPr kumimoji="1" sz="1800" kern="1200">
+                <a:solidFill>
+                  <a:schemeClr val="tx1"/>
+                </a:solidFill>
+                <a:latin typeface="+mn-lt"/>
+                <a:ea typeface="+mn-ea"/>
+                <a:cs typeface="+mn-cs"/>
+              </a:defRPr>
+            </a:lvl4pPr>
+            <a:lvl5pPr marL="2057400" indent="-228600" algn="l" defTabSz="914400" rtl="0" eaLnBrk="1" latinLnBrk="0" hangingPunct="1">
+              <a:lnSpc>
+                <a:spcPct val="90000"/>
+              </a:lnSpc>
+              <a:spcBef>
+                <a:spcPts val="500"/>
+              </a:spcBef>
+              <a:buFont typeface="Arial" panose="020B0604020202020204" pitchFamily="34" charset="0"/>
+              <a:buChar char="•"/>
+              <a:defRPr kumimoji="1" sz="1800" kern="1200">
+                <a:solidFill>
+                  <a:schemeClr val="tx1"/>
+                </a:solidFill>
+                <a:latin typeface="+mn-lt"/>
+                <a:ea typeface="+mn-ea"/>
+                <a:cs typeface="+mn-cs"/>
+              </a:defRPr>
+            </a:lvl5pPr>
+            <a:lvl6pPr marL="2514600" indent="-228600" algn="l" defTabSz="914400" rtl="0" eaLnBrk="1" latinLnBrk="0" hangingPunct="1">
+              <a:lnSpc>
+                <a:spcPct val="90000"/>
+              </a:lnSpc>
+              <a:spcBef>
+                <a:spcPts val="500"/>
+              </a:spcBef>
+              <a:buFont typeface="Arial" panose="020B0604020202020204" pitchFamily="34" charset="0"/>
+              <a:buChar char="•"/>
+              <a:defRPr kumimoji="1" sz="1800" kern="1200">
+                <a:solidFill>
+                  <a:schemeClr val="tx1"/>
+                </a:solidFill>
+                <a:latin typeface="+mn-lt"/>
+                <a:ea typeface="+mn-ea"/>
+                <a:cs typeface="+mn-cs"/>
+              </a:defRPr>
+            </a:lvl6pPr>
+            <a:lvl7pPr marL="2971800" indent="-228600" algn="l" defTabSz="914400" rtl="0" eaLnBrk="1" latinLnBrk="0" hangingPunct="1">
+              <a:lnSpc>
+                <a:spcPct val="90000"/>
+              </a:lnSpc>
+              <a:spcBef>
+                <a:spcPts val="500"/>
+              </a:spcBef>
+              <a:buFont typeface="Arial" panose="020B0604020202020204" pitchFamily="34" charset="0"/>
+              <a:buChar char="•"/>
+              <a:defRPr kumimoji="1" sz="1800" kern="1200">
+                <a:solidFill>
+                  <a:schemeClr val="tx1"/>
+                </a:solidFill>
+                <a:latin typeface="+mn-lt"/>
+                <a:ea typeface="+mn-ea"/>
+                <a:cs typeface="+mn-cs"/>
+              </a:defRPr>
+            </a:lvl7pPr>
+            <a:lvl8pPr marL="3429000" indent="-228600" algn="l" defTabSz="914400" rtl="0" eaLnBrk="1" latinLnBrk="0" hangingPunct="1">
+              <a:lnSpc>
+                <a:spcPct val="90000"/>
+              </a:lnSpc>
+              <a:spcBef>
+                <a:spcPts val="500"/>
+              </a:spcBef>
+              <a:buFont typeface="Arial" panose="020B0604020202020204" pitchFamily="34" charset="0"/>
+              <a:buChar char="•"/>
+              <a:defRPr kumimoji="1" sz="1800" kern="1200">
+                <a:solidFill>
+                  <a:schemeClr val="tx1"/>
+                </a:solidFill>
+                <a:latin typeface="+mn-lt"/>
+                <a:ea typeface="+mn-ea"/>
+                <a:cs typeface="+mn-cs"/>
+              </a:defRPr>
+            </a:lvl8pPr>
+            <a:lvl9pPr marL="3886200" indent="-228600" algn="l" defTabSz="914400" rtl="0" eaLnBrk="1" latinLnBrk="0" hangingPunct="1">
+              <a:lnSpc>
+                <a:spcPct val="90000"/>
+              </a:lnSpc>
+              <a:spcBef>
+                <a:spcPts val="500"/>
+              </a:spcBef>
+              <a:buFont typeface="Arial" panose="020B0604020202020204" pitchFamily="34" charset="0"/>
+              <a:buChar char="•"/>
+              <a:defRPr kumimoji="1" sz="1800" kern="1200">
+                <a:solidFill>
+                  <a:schemeClr val="tx1"/>
+                </a:solidFill>
+                <a:latin typeface="+mn-lt"/>
+                <a:ea typeface="+mn-ea"/>
+                <a:cs typeface="+mn-cs"/>
+              </a:defRPr>
+            </a:lvl9pPr>
+          </a:lstStyle>
+          <a:p>
+            <a:pPr lvl="0">
+              <a:defRPr/>
+            </a:pPr>
+            <a:r>
+              <a:rPr lang="en-US" altLang="ja-JP" sz="700">
+                <a:solidFill>
+                  <a:schemeClr val="bg1"/>
+                </a:solidFill>
+              </a:rPr>
+              <a:t>※</a:t>
+            </a:r>
+            <a:r>
+              <a:rPr lang="ja-JP" altLang="en-US" sz="700">
+                <a:solidFill>
+                  <a:schemeClr val="bg1"/>
+                </a:solidFill>
+              </a:rPr>
+              <a:t>受賞時の</a:t>
+            </a:r>
+            <a:r>
+              <a:rPr lang="en-US" altLang="ja-JP" sz="700">
+                <a:solidFill>
+                  <a:schemeClr val="bg1"/>
+                </a:solidFill>
+              </a:rPr>
+              <a:t>1</a:t>
+            </a:r>
+            <a:r>
+              <a:rPr lang="ja-JP" altLang="en-US" sz="700">
+                <a:solidFill>
+                  <a:schemeClr val="bg1"/>
+                </a:solidFill>
+              </a:rPr>
+              <a:t>枚</a:t>
+            </a:r>
+            <a:endParaRPr lang="en-US" altLang="ja-JP" sz="700" dirty="0">
+              <a:solidFill>
+                <a:schemeClr val="bg1"/>
+              </a:solidFill>
+            </a:endParaRPr>
+          </a:p>
+        </p:txBody>
+      </p:sp>
+      <p:pic>
+        <p:nvPicPr>
+          <p:cNvPr id="7" name="図 6" descr="アイコン が含まれている画像&#10;&#10;AI 生成コンテンツは誤りを含む可能性があります。">
+            <a:extLst>
+              <a:ext uri="{FF2B5EF4-FFF2-40B4-BE49-F238E27FC236}">
+                <a16:creationId xmlns:a16="http://schemas.microsoft.com/office/drawing/2014/main" id="{1FAB445F-372A-C0D2-7552-790613769A34}"/>
+              </a:ext>
+            </a:extLst>
+          </p:cNvPr>
+          <p:cNvPicPr>
+            <a:picLocks noChangeAspect="1"/>
+          </p:cNvPicPr>
+          <p:nvPr/>
+        </p:nvPicPr>
+        <p:blipFill>
+          <a:blip r:embed="rId5" cstate="print">
+            <a:extLst>
+              <a:ext uri="{28A0092B-C50C-407E-A947-70E740481C1C}">
+                <a14:useLocalDpi xmlns:a14="http://schemas.microsoft.com/office/drawing/2010/main" val="0"/>
+              </a:ext>
+            </a:extLst>
+          </a:blip>
+          <a:stretch>
+            <a:fillRect/>
+          </a:stretch>
+        </p:blipFill>
+        <p:spPr>
+          <a:xfrm>
+            <a:off x="4408069" y="4654614"/>
+            <a:ext cx="2886575" cy="2294826"/>
+          </a:xfrm>
+          <a:prstGeom prst="rect">
+            <a:avLst/>
+          </a:prstGeom>
+        </p:spPr>
+      </p:pic>
+      <p:sp>
+        <p:nvSpPr>
+          <p:cNvPr id="10" name="テキスト ボックス 9">
+            <a:extLst>
+              <a:ext uri="{FF2B5EF4-FFF2-40B4-BE49-F238E27FC236}">
+                <a16:creationId xmlns:a16="http://schemas.microsoft.com/office/drawing/2014/main" id="{F7A1F49B-800C-42EE-5308-93E8C2B2E88F}"/>
+              </a:ext>
+            </a:extLst>
+          </p:cNvPr>
+          <p:cNvSpPr txBox="1"/>
+          <p:nvPr/>
+        </p:nvSpPr>
+        <p:spPr>
+          <a:xfrm>
+            <a:off x="2535025" y="5767731"/>
+            <a:ext cx="4963884" cy="646331"/>
+          </a:xfrm>
+          <a:prstGeom prst="rect">
+            <a:avLst/>
+          </a:prstGeom>
+          <a:noFill/>
+        </p:spPr>
+        <p:txBody>
+          <a:bodyPr wrap="square">
+            <a:spAutoFit/>
+          </a:bodyPr>
+          <a:lstStyle/>
+          <a:p>
+            <a:r>
+              <a:rPr lang="ja-JP" altLang="en-US" sz="900" dirty="0">
+                <a:solidFill>
+                  <a:srgbClr val="000000">
+                    <a:lumMod val="95000"/>
+                    <a:lumOff val="5000"/>
+                  </a:srgbClr>
+                </a:solidFill>
+                <a:latin typeface="メイリオ" panose="020B0604030504040204" pitchFamily="50" charset="-128"/>
+                <a:ea typeface="メイリオ" panose="020B0604030504040204" pitchFamily="50" charset="-128"/>
+              </a:rPr>
+              <a:t>現在</a:t>
+            </a:r>
+            <a:r>
+              <a:rPr lang="en-US" altLang="ja-JP" sz="900" dirty="0">
+                <a:solidFill>
+                  <a:srgbClr val="000000">
+                    <a:lumMod val="95000"/>
+                    <a:lumOff val="5000"/>
+                  </a:srgbClr>
+                </a:solidFill>
+                <a:latin typeface="メイリオ" panose="020B0604030504040204" pitchFamily="50" charset="-128"/>
+                <a:ea typeface="メイリオ" panose="020B0604030504040204" pitchFamily="50" charset="-128"/>
+              </a:rPr>
+              <a:t>Sales Partner Premier</a:t>
+            </a:r>
+          </a:p>
+          <a:p>
+            <a:r>
+              <a:rPr lang="ja-JP" altLang="en-US" sz="900" dirty="0">
+                <a:solidFill>
+                  <a:srgbClr val="000000">
+                    <a:lumMod val="95000"/>
+                    <a:lumOff val="5000"/>
+                  </a:srgbClr>
+                </a:solidFill>
+                <a:latin typeface="メイリオ" panose="020B0604030504040204" pitchFamily="50" charset="-128"/>
+                <a:ea typeface="メイリオ" panose="020B0604030504040204" pitchFamily="50" charset="-128"/>
+              </a:rPr>
+              <a:t>は</a:t>
+            </a:r>
+            <a:r>
+              <a:rPr lang="en-US" altLang="ja-JP" sz="900" dirty="0">
+                <a:solidFill>
+                  <a:srgbClr val="000000">
+                    <a:lumMod val="95000"/>
+                    <a:lumOff val="5000"/>
+                  </a:srgbClr>
+                </a:solidFill>
+                <a:latin typeface="メイリオ" panose="020B0604030504040204" pitchFamily="50" charset="-128"/>
+                <a:ea typeface="メイリオ" panose="020B0604030504040204" pitchFamily="50" charset="-128"/>
+              </a:rPr>
+              <a:t>DYM</a:t>
+            </a:r>
+            <a:r>
+              <a:rPr lang="ja-JP" altLang="en-US" sz="900" dirty="0">
+                <a:solidFill>
+                  <a:srgbClr val="000000">
+                    <a:lumMod val="95000"/>
+                    <a:lumOff val="5000"/>
+                  </a:srgbClr>
+                </a:solidFill>
+                <a:latin typeface="メイリオ" panose="020B0604030504040204" pitchFamily="50" charset="-128"/>
+                <a:ea typeface="メイリオ" panose="020B0604030504040204" pitchFamily="50" charset="-128"/>
+              </a:rPr>
+              <a:t>を合わせて</a:t>
+            </a:r>
+            <a:r>
+              <a:rPr lang="en-US" altLang="ja-JP" sz="900" b="1" dirty="0">
+                <a:solidFill>
+                  <a:srgbClr val="000000">
+                    <a:lumMod val="95000"/>
+                    <a:lumOff val="5000"/>
+                  </a:srgbClr>
+                </a:solidFill>
+                <a:latin typeface="メイリオ" panose="020B0604030504040204" pitchFamily="50" charset="-128"/>
+                <a:ea typeface="メイリオ" panose="020B0604030504040204" pitchFamily="50" charset="-128"/>
+              </a:rPr>
+              <a:t>12</a:t>
+            </a:r>
+            <a:r>
+              <a:rPr lang="ja-JP" altLang="en-US" sz="900" b="1" dirty="0">
+                <a:solidFill>
+                  <a:srgbClr val="000000">
+                    <a:lumMod val="95000"/>
+                    <a:lumOff val="5000"/>
+                  </a:srgbClr>
+                </a:solidFill>
+                <a:latin typeface="メイリオ" panose="020B0604030504040204" pitchFamily="50" charset="-128"/>
+                <a:ea typeface="メイリオ" panose="020B0604030504040204" pitchFamily="50" charset="-128"/>
+              </a:rPr>
+              <a:t>社が認定</a:t>
+            </a:r>
+            <a:r>
+              <a:rPr lang="ja-JP" altLang="en-US" sz="900" dirty="0">
+                <a:solidFill>
+                  <a:srgbClr val="000000">
+                    <a:lumMod val="95000"/>
+                    <a:lumOff val="5000"/>
+                  </a:srgbClr>
+                </a:solidFill>
+                <a:latin typeface="メイリオ" panose="020B0604030504040204" pitchFamily="50" charset="-128"/>
+                <a:ea typeface="メイリオ" panose="020B0604030504040204" pitchFamily="50" charset="-128"/>
+              </a:rPr>
+              <a:t>。</a:t>
+            </a:r>
+            <a:endParaRPr lang="en-US" altLang="ja-JP" sz="900" dirty="0">
+              <a:solidFill>
+                <a:srgbClr val="000000">
+                  <a:lumMod val="95000"/>
+                  <a:lumOff val="5000"/>
+                </a:srgbClr>
+              </a:solidFill>
+              <a:latin typeface="メイリオ" panose="020B0604030504040204" pitchFamily="50" charset="-128"/>
+              <a:ea typeface="メイリオ" panose="020B0604030504040204" pitchFamily="50" charset="-128"/>
+            </a:endParaRPr>
+          </a:p>
+          <a:p>
+            <a:endParaRPr lang="en-US" altLang="ja-JP" sz="900" dirty="0">
+              <a:solidFill>
+                <a:srgbClr val="000000">
+                  <a:lumMod val="95000"/>
+                  <a:lumOff val="5000"/>
+                </a:srgbClr>
+              </a:solidFill>
+              <a:latin typeface="メイリオ" panose="020B0604030504040204" pitchFamily="50" charset="-128"/>
+              <a:ea typeface="メイリオ" panose="020B0604030504040204" pitchFamily="50" charset="-128"/>
+            </a:endParaRPr>
+          </a:p>
+          <a:p>
+            <a:r>
+              <a:rPr lang="en-US" altLang="ja-JP" sz="900" dirty="0">
+                <a:solidFill>
+                  <a:srgbClr val="000000">
+                    <a:lumMod val="95000"/>
+                    <a:lumOff val="5000"/>
+                  </a:srgbClr>
+                </a:solidFill>
+                <a:latin typeface="メイリオ" panose="020B0604030504040204" pitchFamily="50" charset="-128"/>
+                <a:ea typeface="メイリオ" panose="020B0604030504040204" pitchFamily="50" charset="-128"/>
+              </a:rPr>
+              <a:t>※</a:t>
+            </a:r>
+            <a:r>
+              <a:rPr lang="ja-JP" altLang="en-US" sz="900" dirty="0">
+                <a:solidFill>
+                  <a:srgbClr val="000000">
+                    <a:lumMod val="95000"/>
+                    <a:lumOff val="5000"/>
+                  </a:srgbClr>
+                </a:solidFill>
+                <a:latin typeface="メイリオ" panose="020B0604030504040204" pitchFamily="50" charset="-128"/>
+                <a:ea typeface="メイリオ" panose="020B0604030504040204" pitchFamily="50" charset="-128"/>
+              </a:rPr>
+              <a:t>未上場企業では</a:t>
+            </a:r>
+            <a:r>
+              <a:rPr lang="ja-JP" altLang="en-US" sz="900" b="1" dirty="0">
+                <a:solidFill>
+                  <a:srgbClr val="000000">
+                    <a:lumMod val="95000"/>
+                    <a:lumOff val="5000"/>
+                  </a:srgbClr>
+                </a:solidFill>
+                <a:latin typeface="メイリオ" panose="020B0604030504040204" pitchFamily="50" charset="-128"/>
+                <a:ea typeface="メイリオ" panose="020B0604030504040204" pitchFamily="50" charset="-128"/>
+              </a:rPr>
+              <a:t>唯一で最上位</a:t>
+            </a:r>
+            <a:r>
+              <a:rPr lang="ja-JP" altLang="en-US" sz="900" dirty="0">
+                <a:solidFill>
+                  <a:srgbClr val="000000">
+                    <a:lumMod val="95000"/>
+                    <a:lumOff val="5000"/>
+                  </a:srgbClr>
+                </a:solidFill>
+                <a:latin typeface="メイリオ" panose="020B0604030504040204" pitchFamily="50" charset="-128"/>
+                <a:ea typeface="メイリオ" panose="020B0604030504040204" pitchFamily="50" charset="-128"/>
+              </a:rPr>
+              <a:t>。</a:t>
+            </a:r>
+            <a:endParaRPr lang="ja-JP" altLang="en-US" sz="900" dirty="0"/>
+          </a:p>
+        </p:txBody>
+      </p:sp>
+      <p:pic>
+        <p:nvPicPr>
+          <p:cNvPr id="5" name="図 4">
+            <a:extLst>
+              <a:ext uri="{FF2B5EF4-FFF2-40B4-BE49-F238E27FC236}">
+                <a16:creationId xmlns:a16="http://schemas.microsoft.com/office/drawing/2014/main" id="{60ACD608-62E1-EDDE-99C7-355D55B75F7D}"/>
+              </a:ext>
+            </a:extLst>
+          </p:cNvPr>
+          <p:cNvPicPr>
+            <a:picLocks noChangeAspect="1"/>
+          </p:cNvPicPr>
+          <p:nvPr/>
+        </p:nvPicPr>
+        <p:blipFill>
+          <a:blip r:embed="rId4" cstate="print">
+            <a:extLst>
+              <a:ext uri="{28A0092B-C50C-407E-A947-70E740481C1C}">
+                <a14:useLocalDpi xmlns:a14="http://schemas.microsoft.com/office/drawing/2010/main" val="0"/>
+              </a:ext>
+            </a:extLst>
+          </a:blip>
+          <a:stretch>
+            <a:fillRect/>
+          </a:stretch>
+        </p:blipFill>
+        <p:spPr>
+          <a:xfrm>
+            <a:off x="188996" y="4759370"/>
+            <a:ext cx="2664636" cy="2074350"/>
+          </a:xfrm>
+          <a:prstGeom prst="rect">
+            <a:avLst/>
+          </a:prstGeom>
+        </p:spPr>
+      </p:pic>
+    </p:spTree>
+  </p:cSld>
+  <p:clrMapOvr>
+    <a:masterClrMapping/>
+  </p:clrMapOvr>
+</p:sld>
+</file>
+
+<file path=ppt/slides/slide9.xml><?xml version="1.0" encoding="utf-8"?>
+<p:sld xmlns:a="http://schemas.openxmlformats.org/drawingml/2006/main" xmlns:p="http://schemas.openxmlformats.org/presentationml/2006/main" xmlns:r="http://schemas.openxmlformats.org/officeDocument/2006/relationships">
+  <p:cSld>
+    <p:spTree>
+      <p:nvGrpSpPr>
+        <p:cNvPr id="1" name=""/>
+        <p:cNvGrpSpPr/>
+        <p:nvPr/>
+      </p:nvGrpSpPr>
+      <p:grpSpPr/>
+      <p:sp>
+        <p:nvSpPr>
+          <p:cNvPr id="4" name="Google Shape;752;p28">
+            <a:extLst>
+              <a:ext uri="{FF2B5EF4-FFF2-40B4-BE49-F238E27FC236}">
+                <a16:creationId xmlns:a16="http://schemas.microsoft.com/office/drawing/2014/main" id="{10815731-3923-DF64-2497-E7A37D053AD8}"/>
+              </a:ext>
+            </a:extLst>
+          </p:cNvPr>
+          <p:cNvSpPr txBox="1"/>
+          <p:nvPr/>
+        </p:nvSpPr>
+        <p:spPr>
+          <a:xfrm>
+            <a:off x="548883" y="138137"/>
+            <a:ext cx="6276325" cy="338514"/>
+          </a:xfrm>
+          <a:prstGeom prst="rect">
+            <a:avLst/>
+          </a:prstGeom>
+          <a:noFill/>
+          <a:ln>
+            <a:noFill/>
+          </a:ln>
+        </p:spPr>
+        <p:txBody>
+          <a:bodyPr spcFirstLastPara="1" wrap="square" lIns="91425" tIns="45700" rIns="91425" bIns="45700" anchor="ctr" anchorCtr="0">
+            <a:spAutoFit/>
+          </a:bodyPr>
+          <a:lstStyle/>
+          <a:p>
+            <a:pPr lvl="0"/>
+            <a:r>
+              <a:rPr lang="ja-JP" altLang="en-US" sz="1600" b="1" dirty="0">
+                <a:solidFill>
+                  <a:srgbClr val="323366"/>
+                </a:solidFill>
+                <a:latin typeface="メイリオ" panose="020B0604030504040204" pitchFamily="50" charset="-128"/>
+                <a:ea typeface="メイリオ" panose="020B0604030504040204" pitchFamily="50" charset="-128"/>
+                <a:cs typeface="Meiryo"/>
+                <a:sym typeface="Meiryo"/>
+              </a:rPr>
+              <a:t>弊社ポジショニング</a:t>
+            </a:r>
+          </a:p>
+        </p:txBody>
+      </p:sp>
+      <p:sp>
+        <p:nvSpPr>
+          <p:cNvPr id="2" name="正方形/長方形 1">
+            <a:extLst>
+              <a:ext uri="{FF2B5EF4-FFF2-40B4-BE49-F238E27FC236}">
+                <a16:creationId xmlns:a16="http://schemas.microsoft.com/office/drawing/2014/main" id="{6EE73D80-19A8-1B22-3E67-207FD67693A3}"/>
+              </a:ext>
+            </a:extLst>
+          </p:cNvPr>
+          <p:cNvSpPr/>
+          <p:nvPr/>
+        </p:nvSpPr>
+        <p:spPr>
+          <a:xfrm>
+            <a:off x="414745" y="1861522"/>
+            <a:ext cx="4383678" cy="1657101"/>
+          </a:xfrm>
+          <a:prstGeom prst="rect">
+            <a:avLst/>
+          </a:prstGeom>
+          <a:noFill/>
+          <a:ln w="6350">
+            <a:solidFill>
+              <a:schemeClr val="bg1">
+                <a:lumMod val="85000"/>
+              </a:schemeClr>
+            </a:solidFill>
+          </a:ln>
+        </p:spPr>
+        <p:style>
+          <a:lnRef idx="2">
+            <a:schemeClr val="accent1">
+              <a:shade val="15000"/>
+            </a:schemeClr>
+          </a:lnRef>
+          <a:fillRef idx="1">
+            <a:schemeClr val="accent1"/>
+          </a:fillRef>
+          <a:effectRef idx="0">
+            <a:schemeClr val="accent1"/>
+          </a:effectRef>
+          <a:fontRef idx="minor">
+            <a:schemeClr val="lt1"/>
+          </a:fontRef>
+        </p:style>
+        <p:txBody>
+          <a:bodyPr rtlCol="0" anchor="ctr"/>
+          <a:lstStyle/>
+          <a:p>
+            <a:pPr algn="ctr"/>
+            <a:endParaRPr kumimoji="1" lang="ja-JP" altLang="en-US" sz="1000">
+              <a:solidFill>
+                <a:schemeClr val="tx1"/>
+              </a:solidFill>
+              <a:latin typeface="メイリオ" panose="020B0604030504040204" pitchFamily="50" charset="-128"/>
+              <a:ea typeface="メイリオ" panose="020B0604030504040204" pitchFamily="50" charset="-128"/>
+            </a:endParaRPr>
+          </a:p>
+        </p:txBody>
+      </p:sp>
+      <p:sp>
+        <p:nvSpPr>
+          <p:cNvPr id="5" name="正方形/長方形 4">
+            <a:extLst>
+              <a:ext uri="{FF2B5EF4-FFF2-40B4-BE49-F238E27FC236}">
+                <a16:creationId xmlns:a16="http://schemas.microsoft.com/office/drawing/2014/main" id="{CD2306FC-4175-2C00-0D17-32F2AAC51C82}"/>
+              </a:ext>
+            </a:extLst>
+          </p:cNvPr>
+          <p:cNvSpPr/>
+          <p:nvPr/>
+        </p:nvSpPr>
+        <p:spPr>
+          <a:xfrm>
+            <a:off x="4892040" y="1861522"/>
+            <a:ext cx="4383678" cy="1657101"/>
+          </a:xfrm>
+          <a:prstGeom prst="rect">
+            <a:avLst/>
+          </a:prstGeom>
+          <a:noFill/>
+          <a:ln w="6350">
+            <a:solidFill>
+              <a:schemeClr val="bg1">
+                <a:lumMod val="85000"/>
+              </a:schemeClr>
+            </a:solidFill>
+          </a:ln>
+        </p:spPr>
+        <p:style>
+          <a:lnRef idx="2">
+            <a:schemeClr val="accent1">
+              <a:shade val="15000"/>
+            </a:schemeClr>
+          </a:lnRef>
+          <a:fillRef idx="1">
+            <a:schemeClr val="accent1"/>
+          </a:fillRef>
+          <a:effectRef idx="0">
+            <a:schemeClr val="accent1"/>
+          </a:effectRef>
+          <a:fontRef idx="minor">
+            <a:schemeClr val="lt1"/>
+          </a:fontRef>
+        </p:style>
+        <p:txBody>
+          <a:bodyPr rtlCol="0" anchor="ctr"/>
+          <a:lstStyle/>
+          <a:p>
+            <a:pPr algn="ctr"/>
+            <a:endParaRPr kumimoji="1" lang="ja-JP" altLang="en-US" sz="1000">
+              <a:latin typeface="メイリオ" panose="020B0604030504040204" pitchFamily="50" charset="-128"/>
+              <a:ea typeface="メイリオ" panose="020B0604030504040204" pitchFamily="50" charset="-128"/>
+            </a:endParaRPr>
+          </a:p>
+        </p:txBody>
+      </p:sp>
+      <p:sp>
+        <p:nvSpPr>
+          <p:cNvPr id="10" name="正方形/長方形 9">
+            <a:extLst>
+              <a:ext uri="{FF2B5EF4-FFF2-40B4-BE49-F238E27FC236}">
+                <a16:creationId xmlns:a16="http://schemas.microsoft.com/office/drawing/2014/main" id="{9ED6AD3F-541D-3FC5-0062-3F2A923253C9}"/>
+              </a:ext>
+            </a:extLst>
+          </p:cNvPr>
+          <p:cNvSpPr/>
+          <p:nvPr/>
+        </p:nvSpPr>
+        <p:spPr>
+          <a:xfrm>
+            <a:off x="414745" y="4308273"/>
+            <a:ext cx="4383678" cy="1657101"/>
+          </a:xfrm>
+          <a:prstGeom prst="rect">
+            <a:avLst/>
+          </a:prstGeom>
+          <a:noFill/>
+          <a:ln w="6350">
+            <a:solidFill>
+              <a:schemeClr val="bg1">
+                <a:lumMod val="85000"/>
+              </a:schemeClr>
+            </a:solidFill>
+          </a:ln>
+        </p:spPr>
+        <p:style>
+          <a:lnRef idx="2">
+            <a:schemeClr val="accent1">
+              <a:shade val="15000"/>
+            </a:schemeClr>
+          </a:lnRef>
+          <a:fillRef idx="1">
+            <a:schemeClr val="accent1"/>
+          </a:fillRef>
+          <a:effectRef idx="0">
+            <a:schemeClr val="accent1"/>
+          </a:effectRef>
+          <a:fontRef idx="minor">
+            <a:schemeClr val="lt1"/>
+          </a:fontRef>
+        </p:style>
+        <p:txBody>
+          <a:bodyPr rtlCol="0" anchor="ctr"/>
+          <a:lstStyle/>
+          <a:p>
+            <a:pPr algn="ctr"/>
+            <a:endParaRPr kumimoji="1" lang="ja-JP" altLang="en-US" sz="1000">
+              <a:latin typeface="メイリオ" panose="020B0604030504040204" pitchFamily="50" charset="-128"/>
+              <a:ea typeface="メイリオ" panose="020B0604030504040204" pitchFamily="50" charset="-128"/>
+            </a:endParaRPr>
+          </a:p>
+        </p:txBody>
+      </p:sp>
+      <p:sp>
+        <p:nvSpPr>
+          <p:cNvPr id="11" name="正方形/長方形 10">
+            <a:extLst>
+              <a:ext uri="{FF2B5EF4-FFF2-40B4-BE49-F238E27FC236}">
+                <a16:creationId xmlns:a16="http://schemas.microsoft.com/office/drawing/2014/main" id="{D4D20F90-DB1A-B6A0-8607-C0C93118158E}"/>
+              </a:ext>
+            </a:extLst>
+          </p:cNvPr>
+          <p:cNvSpPr/>
+          <p:nvPr/>
+        </p:nvSpPr>
+        <p:spPr>
+          <a:xfrm>
+            <a:off x="4892040" y="4308273"/>
+            <a:ext cx="4383678" cy="1657101"/>
+          </a:xfrm>
+          <a:prstGeom prst="rect">
+            <a:avLst/>
+          </a:prstGeom>
+          <a:noFill/>
+          <a:ln w="6350">
+            <a:solidFill>
+              <a:schemeClr val="bg1">
+                <a:lumMod val="85000"/>
+              </a:schemeClr>
+            </a:solidFill>
+          </a:ln>
+        </p:spPr>
+        <p:style>
+          <a:lnRef idx="2">
+            <a:schemeClr val="accent1">
+              <a:shade val="15000"/>
+            </a:schemeClr>
+          </a:lnRef>
+          <a:fillRef idx="1">
+            <a:schemeClr val="accent1"/>
+          </a:fillRef>
+          <a:effectRef idx="0">
+            <a:schemeClr val="accent1"/>
+          </a:effectRef>
+          <a:fontRef idx="minor">
+            <a:schemeClr val="lt1"/>
+          </a:fontRef>
+        </p:style>
+        <p:txBody>
+          <a:bodyPr rtlCol="0" anchor="ctr"/>
+          <a:lstStyle/>
+          <a:p>
+            <a:pPr algn="ctr"/>
+            <a:endParaRPr kumimoji="1" lang="ja-JP" altLang="en-US" sz="1000">
+              <a:latin typeface="メイリオ" panose="020B0604030504040204" pitchFamily="50" charset="-128"/>
+              <a:ea typeface="メイリオ" panose="020B0604030504040204" pitchFamily="50" charset="-128"/>
+            </a:endParaRPr>
+          </a:p>
+        </p:txBody>
+      </p:sp>
+      <p:sp>
+        <p:nvSpPr>
+          <p:cNvPr id="12" name="正方形/長方形 11">
+            <a:extLst>
+              <a:ext uri="{FF2B5EF4-FFF2-40B4-BE49-F238E27FC236}">
+                <a16:creationId xmlns:a16="http://schemas.microsoft.com/office/drawing/2014/main" id="{94608CEE-4C85-001A-2579-A0A698688995}"/>
+              </a:ext>
+            </a:extLst>
+          </p:cNvPr>
+          <p:cNvSpPr/>
+          <p:nvPr/>
+        </p:nvSpPr>
+        <p:spPr>
+          <a:xfrm>
+            <a:off x="414745" y="1861523"/>
+            <a:ext cx="4383678" cy="324689"/>
+          </a:xfrm>
+          <a:prstGeom prst="rect">
+            <a:avLst/>
+          </a:prstGeom>
+          <a:solidFill>
+            <a:schemeClr val="tx2">
+              <a:lumMod val="20000"/>
+              <a:lumOff val="80000"/>
+            </a:schemeClr>
+          </a:solidFill>
+          <a:ln w="6350">
+            <a:solidFill>
+              <a:schemeClr val="bg1">
+                <a:lumMod val="85000"/>
+              </a:schemeClr>
+            </a:solidFill>
+          </a:ln>
+        </p:spPr>
+        <p:style>
+          <a:lnRef idx="2">
+            <a:schemeClr val="accent1">
+              <a:shade val="15000"/>
+            </a:schemeClr>
+          </a:lnRef>
+          <a:fillRef idx="1">
+            <a:schemeClr val="accent1"/>
+          </a:fillRef>
+          <a:effectRef idx="0">
+            <a:schemeClr val="accent1"/>
+          </a:effectRef>
+          <a:fontRef idx="minor">
+            <a:schemeClr val="lt1"/>
+          </a:fontRef>
+        </p:style>
+        <p:txBody>
+          <a:bodyPr rtlCol="0" anchor="ctr"/>
+          <a:lstStyle/>
+          <a:p>
+            <a:pPr algn="ctr"/>
+            <a:r>
+              <a:rPr kumimoji="1" lang="ja-JP" altLang="en-US" sz="1000" b="1" dirty="0">
+                <a:solidFill>
+                  <a:schemeClr val="tx1"/>
+                </a:solidFill>
+                <a:latin typeface="メイリオ" panose="020B0604030504040204" pitchFamily="50" charset="-128"/>
+                <a:ea typeface="メイリオ" panose="020B0604030504040204" pitchFamily="50" charset="-128"/>
+              </a:rPr>
+              <a:t>ツール会社　</a:t>
+            </a:r>
+          </a:p>
+        </p:txBody>
+      </p:sp>
+      <p:sp>
+        <p:nvSpPr>
+          <p:cNvPr id="13" name="正方形/長方形 12">
+            <a:extLst>
+              <a:ext uri="{FF2B5EF4-FFF2-40B4-BE49-F238E27FC236}">
+                <a16:creationId xmlns:a16="http://schemas.microsoft.com/office/drawing/2014/main" id="{59A99E6E-D460-C2CE-3554-D4177944BCC1}"/>
+              </a:ext>
+            </a:extLst>
+          </p:cNvPr>
+          <p:cNvSpPr/>
+          <p:nvPr/>
+        </p:nvSpPr>
+        <p:spPr>
+          <a:xfrm>
+            <a:off x="4892040" y="1861523"/>
+            <a:ext cx="4383678" cy="324689"/>
+          </a:xfrm>
+          <a:prstGeom prst="rect">
+            <a:avLst/>
+          </a:prstGeom>
+          <a:solidFill>
+            <a:schemeClr val="tx2">
+              <a:lumMod val="20000"/>
+              <a:lumOff val="80000"/>
+            </a:schemeClr>
+          </a:solidFill>
+          <a:ln w="6350">
+            <a:solidFill>
+              <a:schemeClr val="bg1">
+                <a:lumMod val="85000"/>
+              </a:schemeClr>
+            </a:solidFill>
+          </a:ln>
+        </p:spPr>
+        <p:style>
+          <a:lnRef idx="2">
+            <a:schemeClr val="accent1">
+              <a:shade val="15000"/>
+            </a:schemeClr>
+          </a:lnRef>
+          <a:fillRef idx="1">
+            <a:schemeClr val="accent1"/>
+          </a:fillRef>
+          <a:effectRef idx="0">
+            <a:schemeClr val="accent1"/>
+          </a:effectRef>
+          <a:fontRef idx="minor">
+            <a:schemeClr val="lt1"/>
+          </a:fontRef>
+        </p:style>
+        <p:txBody>
+          <a:bodyPr rtlCol="0" anchor="ctr"/>
+          <a:lstStyle/>
+          <a:p>
+            <a:pPr algn="ctr"/>
+            <a:r>
+              <a:rPr kumimoji="1" lang="ja-JP" altLang="en-US" sz="1000" b="1" dirty="0">
+                <a:solidFill>
+                  <a:schemeClr val="tx1"/>
+                </a:solidFill>
+                <a:latin typeface="メイリオ" panose="020B0604030504040204" pitchFamily="50" charset="-128"/>
+                <a:ea typeface="メイリオ" panose="020B0604030504040204" pitchFamily="50" charset="-128"/>
+              </a:rPr>
+              <a:t> コンサル会社</a:t>
+            </a:r>
+          </a:p>
+        </p:txBody>
+      </p:sp>
+      <p:sp>
+        <p:nvSpPr>
+          <p:cNvPr id="14" name="正方形/長方形 13">
+            <a:extLst>
+              <a:ext uri="{FF2B5EF4-FFF2-40B4-BE49-F238E27FC236}">
+                <a16:creationId xmlns:a16="http://schemas.microsoft.com/office/drawing/2014/main" id="{B9B23A0A-C181-F52D-CE83-83252D57916D}"/>
+              </a:ext>
+            </a:extLst>
+          </p:cNvPr>
+          <p:cNvSpPr/>
+          <p:nvPr/>
+        </p:nvSpPr>
+        <p:spPr>
+          <a:xfrm>
+            <a:off x="414745" y="4295574"/>
+            <a:ext cx="4383678" cy="324689"/>
+          </a:xfrm>
+          <a:prstGeom prst="rect">
+            <a:avLst/>
+          </a:prstGeom>
+          <a:solidFill>
+            <a:schemeClr val="tx2">
+              <a:lumMod val="20000"/>
+              <a:lumOff val="80000"/>
+            </a:schemeClr>
+          </a:solidFill>
+          <a:ln w="6350">
+            <a:solidFill>
+              <a:schemeClr val="bg1">
+                <a:lumMod val="85000"/>
+              </a:schemeClr>
+            </a:solidFill>
+          </a:ln>
+        </p:spPr>
+        <p:style>
+          <a:lnRef idx="2">
+            <a:schemeClr val="accent1">
+              <a:shade val="15000"/>
+            </a:schemeClr>
+          </a:lnRef>
+          <a:fillRef idx="1">
+            <a:schemeClr val="accent1"/>
+          </a:fillRef>
+          <a:effectRef idx="0">
+            <a:schemeClr val="accent1"/>
+          </a:effectRef>
+          <a:fontRef idx="minor">
+            <a:schemeClr val="lt1"/>
+          </a:fontRef>
+        </p:style>
+        <p:txBody>
+          <a:bodyPr rtlCol="0" anchor="ctr"/>
+          <a:lstStyle/>
+          <a:p>
+            <a:pPr algn="ctr"/>
+            <a:r>
+              <a:rPr kumimoji="1" lang="ja-JP" altLang="en-US" sz="1000" b="1" dirty="0">
+                <a:solidFill>
+                  <a:schemeClr val="tx1"/>
+                </a:solidFill>
+                <a:latin typeface="メイリオ" panose="020B0604030504040204" pitchFamily="50" charset="-128"/>
+                <a:ea typeface="メイリオ" panose="020B0604030504040204" pitchFamily="50" charset="-128"/>
+              </a:rPr>
+              <a:t>広告専業の代理店</a:t>
+            </a:r>
+          </a:p>
+        </p:txBody>
+      </p:sp>
+      <p:sp>
+        <p:nvSpPr>
+          <p:cNvPr id="15" name="正方形/長方形 14">
+            <a:extLst>
+              <a:ext uri="{FF2B5EF4-FFF2-40B4-BE49-F238E27FC236}">
+                <a16:creationId xmlns:a16="http://schemas.microsoft.com/office/drawing/2014/main" id="{735511C6-7F11-A23D-F1BA-0FACD703798D}"/>
+              </a:ext>
+            </a:extLst>
+          </p:cNvPr>
+          <p:cNvSpPr/>
+          <p:nvPr/>
+        </p:nvSpPr>
+        <p:spPr>
+          <a:xfrm>
+            <a:off x="4892040" y="4295574"/>
+            <a:ext cx="4383678" cy="324689"/>
+          </a:xfrm>
+          <a:prstGeom prst="rect">
+            <a:avLst/>
+          </a:prstGeom>
+          <a:solidFill>
+            <a:schemeClr val="tx2">
+              <a:lumMod val="20000"/>
+              <a:lumOff val="80000"/>
+            </a:schemeClr>
+          </a:solidFill>
+          <a:ln w="6350">
+            <a:solidFill>
+              <a:schemeClr val="bg1">
+                <a:lumMod val="85000"/>
+              </a:schemeClr>
+            </a:solidFill>
+          </a:ln>
+        </p:spPr>
+        <p:style>
+          <a:lnRef idx="2">
+            <a:schemeClr val="accent1">
+              <a:shade val="15000"/>
+            </a:schemeClr>
+          </a:lnRef>
+          <a:fillRef idx="1">
+            <a:schemeClr val="accent1"/>
+          </a:fillRef>
+          <a:effectRef idx="0">
+            <a:schemeClr val="accent1"/>
+          </a:effectRef>
+          <a:fontRef idx="minor">
+            <a:schemeClr val="lt1"/>
+          </a:fontRef>
+        </p:style>
+        <p:txBody>
+          <a:bodyPr rtlCol="0" anchor="ctr"/>
+          <a:lstStyle/>
+          <a:p>
+            <a:pPr algn="ctr"/>
+            <a:r>
+              <a:rPr kumimoji="1" lang="ja-JP" altLang="en-US" sz="1000" b="1" dirty="0">
+                <a:solidFill>
+                  <a:schemeClr val="tx1"/>
+                </a:solidFill>
+                <a:latin typeface="メイリオ" panose="020B0604030504040204" pitchFamily="50" charset="-128"/>
+                <a:ea typeface="メイリオ" panose="020B0604030504040204" pitchFamily="50" charset="-128"/>
+              </a:rPr>
+              <a:t>他</a:t>
+            </a:r>
+            <a:r>
+              <a:rPr kumimoji="1" lang="en-US" altLang="ja-JP" sz="1000" b="1" dirty="0">
+                <a:solidFill>
+                  <a:schemeClr val="tx1"/>
+                </a:solidFill>
+                <a:latin typeface="メイリオ" panose="020B0604030504040204" pitchFamily="50" charset="-128"/>
+                <a:ea typeface="メイリオ" panose="020B0604030504040204" pitchFamily="50" charset="-128"/>
+              </a:rPr>
+              <a:t>CRM</a:t>
+            </a:r>
+            <a:r>
+              <a:rPr kumimoji="1" lang="ja-JP" altLang="en-US" sz="1000" b="1" dirty="0">
+                <a:solidFill>
+                  <a:schemeClr val="tx1"/>
+                </a:solidFill>
+                <a:latin typeface="メイリオ" panose="020B0604030504040204" pitchFamily="50" charset="-128"/>
+                <a:ea typeface="メイリオ" panose="020B0604030504040204" pitchFamily="50" charset="-128"/>
+              </a:rPr>
+              <a:t>の会社</a:t>
+            </a:r>
+          </a:p>
+        </p:txBody>
+      </p:sp>
+      <p:pic>
+        <p:nvPicPr>
+          <p:cNvPr id="21" name="図 20" descr="文字が書かれている&#10;&#10;AI 生成コンテンツは誤りを含む可能性があります。">
+            <a:extLst>
+              <a:ext uri="{FF2B5EF4-FFF2-40B4-BE49-F238E27FC236}">
+                <a16:creationId xmlns:a16="http://schemas.microsoft.com/office/drawing/2014/main" id="{2521257E-D1E1-307C-8244-A7D93D470795}"/>
+              </a:ext>
+            </a:extLst>
+          </p:cNvPr>
+          <p:cNvPicPr>
+            <a:picLocks noChangeAspect="1"/>
+          </p:cNvPicPr>
+          <p:nvPr/>
+        </p:nvPicPr>
+        <p:blipFill>
+          <a:blip r:embed="rId5"/>
+          <a:stretch>
+            <a:fillRect/>
+          </a:stretch>
+        </p:blipFill>
+        <p:spPr>
+          <a:xfrm>
+            <a:off x="1086533" y="2273664"/>
+            <a:ext cx="1323427" cy="315679"/>
+          </a:xfrm>
+          <a:prstGeom prst="rect">
+            <a:avLst/>
+          </a:prstGeom>
+        </p:spPr>
+      </p:pic>
+      <p:pic>
+        <p:nvPicPr>
+          <p:cNvPr id="1026" name="Picture 2" descr="特定商取引法に関する表示 | Lステップ（エルステップ）公式_LINE公式アカウント特化のマーケティングツール">
+            <a:extLst>
+              <a:ext uri="{FF2B5EF4-FFF2-40B4-BE49-F238E27FC236}">
+                <a16:creationId xmlns:a16="http://schemas.microsoft.com/office/drawing/2014/main" id="{E86AB3B4-1E56-4227-88BE-FA673F023348}"/>
+              </a:ext>
+            </a:extLst>
+          </p:cNvPr>
+          <p:cNvPicPr>
+            <a:picLocks noChangeAspect="1" noChangeArrowheads="1"/>
+          </p:cNvPicPr>
+          <p:nvPr/>
+        </p:nvPicPr>
+        <p:blipFill>
+          <a:blip r:embed="rId3" cstate="print">
+            <a:extLst>
+              <a:ext uri="{28A0092B-C50C-407E-A947-70E740481C1C}">
+                <a14:useLocalDpi xmlns:a14="http://schemas.microsoft.com/office/drawing/2010/main" val="0"/>
+              </a:ext>
+            </a:extLst>
+          </a:blip>
+          <a:srcRect/>
+          <a:stretch>
+            <a:fillRect/>
+          </a:stretch>
+        </p:blipFill>
+        <p:spPr bwMode="auto">
+          <a:xfrm>
+            <a:off x="2436417" y="2184166"/>
+            <a:ext cx="831168" cy="467532"/>
+          </a:xfrm>
+          <a:prstGeom prst="rect">
+            <a:avLst/>
+          </a:prstGeom>
+          <a:noFill/>
+          <a:extLst>
+            <a:ext uri="{909E8E84-426E-40DD-AFC4-6F175D3DCCD1}">
+              <a14:hiddenFill xmlns:a14="http://schemas.microsoft.com/office/drawing/2010/main">
+                <a:solidFill>
+                  <a:srgbClr val="FFFFFF"/>
+                </a:solidFill>
+              </a14:hiddenFill>
+            </a:ext>
+          </a:extLst>
+        </p:spPr>
+      </p:pic>
+      <p:sp>
+        <p:nvSpPr>
+          <p:cNvPr id="26" name="乗算記号 25">
+            <a:extLst>
+              <a:ext uri="{FF2B5EF4-FFF2-40B4-BE49-F238E27FC236}">
+                <a16:creationId xmlns:a16="http://schemas.microsoft.com/office/drawing/2014/main" id="{676235DE-33EB-2E33-33D6-74D321860C39}"/>
+              </a:ext>
+            </a:extLst>
+          </p:cNvPr>
+          <p:cNvSpPr/>
+          <p:nvPr/>
+        </p:nvSpPr>
+        <p:spPr>
+          <a:xfrm>
+            <a:off x="6198323" y="1838911"/>
+            <a:ext cx="360000" cy="360000"/>
+          </a:xfrm>
+          <a:prstGeom prst="mathMultiply">
+            <a:avLst>
+              <a:gd name="adj1" fmla="val 4915"/>
+            </a:avLst>
+          </a:prstGeom>
+        </p:spPr>
+        <p:style>
+          <a:lnRef idx="2">
+            <a:schemeClr val="accent1">
+              <a:shade val="15000"/>
+            </a:schemeClr>
+          </a:lnRef>
+          <a:fillRef idx="1">
+            <a:schemeClr val="accent1"/>
+          </a:fillRef>
+          <a:effectRef idx="0">
+            <a:schemeClr val="accent1"/>
+          </a:effectRef>
+          <a:fontRef idx="minor">
+            <a:schemeClr val="lt1"/>
+          </a:fontRef>
+        </p:style>
+        <p:txBody>
+          <a:bodyPr rtlCol="0" anchor="ctr"/>
+          <a:lstStyle/>
+          <a:p>
+            <a:pPr algn="ctr"/>
+            <a:endParaRPr kumimoji="1" lang="ja-JP" altLang="en-US"/>
+          </a:p>
+        </p:txBody>
+      </p:sp>
+      <p:sp>
+        <p:nvSpPr>
+          <p:cNvPr id="27" name="乗算記号 26">
+            <a:extLst>
+              <a:ext uri="{FF2B5EF4-FFF2-40B4-BE49-F238E27FC236}">
+                <a16:creationId xmlns:a16="http://schemas.microsoft.com/office/drawing/2014/main" id="{7C31A50F-57BD-64E8-DE3F-3A8FB722D839}"/>
+              </a:ext>
+            </a:extLst>
+          </p:cNvPr>
+          <p:cNvSpPr/>
+          <p:nvPr/>
+        </p:nvSpPr>
+        <p:spPr>
+          <a:xfrm>
+            <a:off x="1472312" y="4277918"/>
+            <a:ext cx="360000" cy="360000"/>
+          </a:xfrm>
+          <a:prstGeom prst="mathMultiply">
+            <a:avLst>
+              <a:gd name="adj1" fmla="val 4915"/>
+            </a:avLst>
+          </a:prstGeom>
+        </p:spPr>
+        <p:style>
+          <a:lnRef idx="2">
+            <a:schemeClr val="accent1">
+              <a:shade val="15000"/>
+            </a:schemeClr>
+          </a:lnRef>
+          <a:fillRef idx="1">
+            <a:schemeClr val="accent1"/>
+          </a:fillRef>
+          <a:effectRef idx="0">
+            <a:schemeClr val="accent1"/>
+          </a:effectRef>
+          <a:fontRef idx="minor">
+            <a:schemeClr val="lt1"/>
+          </a:fontRef>
+        </p:style>
+        <p:txBody>
+          <a:bodyPr rtlCol="0" anchor="ctr"/>
+          <a:lstStyle/>
+          <a:p>
+            <a:pPr algn="ctr"/>
+            <a:endParaRPr kumimoji="1" lang="ja-JP" altLang="en-US"/>
+          </a:p>
+        </p:txBody>
+      </p:sp>
+      <p:sp>
+        <p:nvSpPr>
+          <p:cNvPr id="28" name="乗算記号 27">
+            <a:extLst>
+              <a:ext uri="{FF2B5EF4-FFF2-40B4-BE49-F238E27FC236}">
+                <a16:creationId xmlns:a16="http://schemas.microsoft.com/office/drawing/2014/main" id="{9B7C9A4B-096B-D2DD-08B8-D421AB634155}"/>
+              </a:ext>
+            </a:extLst>
+          </p:cNvPr>
+          <p:cNvSpPr/>
+          <p:nvPr/>
+        </p:nvSpPr>
+        <p:spPr>
+          <a:xfrm>
+            <a:off x="1734353" y="1838911"/>
+            <a:ext cx="360000" cy="360000"/>
+          </a:xfrm>
+          <a:prstGeom prst="mathMultiply">
+            <a:avLst>
+              <a:gd name="adj1" fmla="val 4915"/>
+            </a:avLst>
+          </a:prstGeom>
+        </p:spPr>
+        <p:style>
+          <a:lnRef idx="2">
+            <a:schemeClr val="accent1">
+              <a:shade val="15000"/>
+            </a:schemeClr>
+          </a:lnRef>
+          <a:fillRef idx="1">
+            <a:schemeClr val="accent1"/>
+          </a:fillRef>
+          <a:effectRef idx="0">
+            <a:schemeClr val="accent1"/>
+          </a:effectRef>
+          <a:fontRef idx="minor">
+            <a:schemeClr val="lt1"/>
+          </a:fontRef>
+        </p:style>
+        <p:txBody>
+          <a:bodyPr rtlCol="0" anchor="ctr"/>
+          <a:lstStyle/>
+          <a:p>
+            <a:pPr algn="ctr"/>
+            <a:endParaRPr kumimoji="1" lang="ja-JP" altLang="en-US" dirty="0"/>
+          </a:p>
+        </p:txBody>
+      </p:sp>
+      <p:sp>
+        <p:nvSpPr>
+          <p:cNvPr id="29" name="乗算記号 28">
+            <a:extLst>
+              <a:ext uri="{FF2B5EF4-FFF2-40B4-BE49-F238E27FC236}">
+                <a16:creationId xmlns:a16="http://schemas.microsoft.com/office/drawing/2014/main" id="{E3AD3032-8560-946E-0D20-D2977D17F027}"/>
+              </a:ext>
+            </a:extLst>
+          </p:cNvPr>
+          <p:cNvSpPr/>
+          <p:nvPr/>
+        </p:nvSpPr>
+        <p:spPr>
+          <a:xfrm>
+            <a:off x="6128651" y="4274166"/>
+            <a:ext cx="360000" cy="360000"/>
+          </a:xfrm>
+          <a:prstGeom prst="mathMultiply">
+            <a:avLst>
+              <a:gd name="adj1" fmla="val 4915"/>
+            </a:avLst>
+          </a:prstGeom>
+        </p:spPr>
+        <p:style>
+          <a:lnRef idx="2">
+            <a:schemeClr val="accent1">
+              <a:shade val="15000"/>
+            </a:schemeClr>
+          </a:lnRef>
+          <a:fillRef idx="1">
+            <a:schemeClr val="accent1"/>
+          </a:fillRef>
+          <a:effectRef idx="0">
+            <a:schemeClr val="accent1"/>
+          </a:effectRef>
+          <a:fontRef idx="minor">
+            <a:schemeClr val="lt1"/>
+          </a:fontRef>
+        </p:style>
+        <p:txBody>
+          <a:bodyPr rtlCol="0" anchor="ctr"/>
+          <a:lstStyle/>
+          <a:p>
+            <a:pPr algn="ctr"/>
+            <a:endParaRPr kumimoji="1" lang="ja-JP" altLang="en-US"/>
+          </a:p>
+        </p:txBody>
+      </p:sp>
+      <p:pic>
+        <p:nvPicPr>
+          <p:cNvPr id="1028" name="Picture 4" descr="Salesforceってなに？初心者でも簡単にわかる！導入のメリットと基本機能について | CONCENTO">
+            <a:extLst>
+              <a:ext uri="{FF2B5EF4-FFF2-40B4-BE49-F238E27FC236}">
+                <a16:creationId xmlns:a16="http://schemas.microsoft.com/office/drawing/2014/main" id="{A10BCEF0-052F-BF99-39E9-5BA577F00F74}"/>
+              </a:ext>
+            </a:extLst>
+          </p:cNvPr>
+          <p:cNvPicPr>
+            <a:picLocks noChangeAspect="1" noChangeArrowheads="1"/>
+          </p:cNvPicPr>
+          <p:nvPr/>
+        </p:nvPicPr>
+        <p:blipFill>
+          <a:blip r:embed="rId8" cstate="print">
+            <a:extLst>
+              <a:ext uri="{28A0092B-C50C-407E-A947-70E740481C1C}">
+                <a14:useLocalDpi xmlns:a14="http://schemas.microsoft.com/office/drawing/2010/main" val="0"/>
+              </a:ext>
+            </a:extLst>
+          </a:blip>
+          <a:srcRect l="23384" t="14322" r="25004" b="16405"/>
+          <a:stretch>
+            <a:fillRect/>
+          </a:stretch>
+        </p:blipFill>
+        <p:spPr bwMode="auto">
+          <a:xfrm>
+            <a:off x="5388428" y="4659089"/>
+            <a:ext cx="441441" cy="311537"/>
+          </a:xfrm>
+          <a:prstGeom prst="rect">
+            <a:avLst/>
+          </a:prstGeom>
+          <a:ln>
+            <a:noFill/>
+          </a:ln>
+        </p:spPr>
+        <p:style>
+          <a:lnRef idx="2">
+            <a:schemeClr val="dk1"/>
+          </a:lnRef>
+          <a:fillRef idx="1">
+            <a:schemeClr val="lt1"/>
+          </a:fillRef>
+          <a:effectRef idx="0">
+            <a:schemeClr val="dk1"/>
+          </a:effectRef>
+          <a:fontRef idx="minor">
+            <a:schemeClr val="dk1"/>
+          </a:fontRef>
+        </p:style>
+      </p:pic>
+      <p:pic>
+        <p:nvPicPr>
+          <p:cNvPr id="31" name="図 30" descr="挿絵, 抽象 が含まれている画像&#10;&#10;AI 生成コンテンツは誤りを含む可能性があります。">
+            <a:extLst>
+              <a:ext uri="{FF2B5EF4-FFF2-40B4-BE49-F238E27FC236}">
+                <a16:creationId xmlns:a16="http://schemas.microsoft.com/office/drawing/2014/main" id="{172999E0-2479-CF51-1EFC-C4CA794CEC4E}"/>
+              </a:ext>
+            </a:extLst>
+          </p:cNvPr>
+          <p:cNvPicPr>
+            <a:picLocks noChangeAspect="1"/>
+          </p:cNvPicPr>
+          <p:nvPr/>
+        </p:nvPicPr>
+        <p:blipFill>
+          <a:blip r:embed="rId7"/>
+          <a:stretch>
+            <a:fillRect/>
+          </a:stretch>
+        </p:blipFill>
+        <p:spPr>
+          <a:xfrm>
+            <a:off x="5864283" y="4715948"/>
+            <a:ext cx="682242" cy="197819"/>
+          </a:xfrm>
+          <a:prstGeom prst="rect">
+            <a:avLst/>
+          </a:prstGeom>
+        </p:spPr>
+      </p:pic>
+      <p:pic>
+        <p:nvPicPr>
+          <p:cNvPr id="33" name="図 32" descr="黒い背景に白い文字がある&#10;&#10;AI 生成コンテンツは誤りを含む可能性があります。">
+            <a:extLst>
+              <a:ext uri="{FF2B5EF4-FFF2-40B4-BE49-F238E27FC236}">
+                <a16:creationId xmlns:a16="http://schemas.microsoft.com/office/drawing/2014/main" id="{474C051E-B596-1651-549B-F1BDC6EA898F}"/>
+              </a:ext>
+            </a:extLst>
+          </p:cNvPr>
+          <p:cNvPicPr>
+            <a:picLocks noChangeAspect="1"/>
+          </p:cNvPicPr>
+          <p:nvPr/>
+        </p:nvPicPr>
+        <p:blipFill>
+          <a:blip r:embed="rId6"/>
+          <a:stretch>
+            <a:fillRect/>
+          </a:stretch>
+        </p:blipFill>
+        <p:spPr>
+          <a:xfrm>
+            <a:off x="6580939" y="4694453"/>
+            <a:ext cx="1225076" cy="219314"/>
+          </a:xfrm>
+          <a:prstGeom prst="rect">
+            <a:avLst/>
+          </a:prstGeom>
+        </p:spPr>
+      </p:pic>
+      <p:sp>
+        <p:nvSpPr>
+          <p:cNvPr id="35" name="テキスト ボックス 34">
+            <a:extLst>
+              <a:ext uri="{FF2B5EF4-FFF2-40B4-BE49-F238E27FC236}">
+                <a16:creationId xmlns:a16="http://schemas.microsoft.com/office/drawing/2014/main" id="{A53AB6D9-AEB5-ECF4-8C73-A7EFC4F05EF1}"/>
+              </a:ext>
+            </a:extLst>
+          </p:cNvPr>
+          <p:cNvSpPr txBox="1"/>
+          <p:nvPr/>
+        </p:nvSpPr>
+        <p:spPr>
+          <a:xfrm>
+            <a:off x="4866072" y="2273664"/>
+            <a:ext cx="4459715" cy="246221"/>
+          </a:xfrm>
+          <a:prstGeom prst="rect">
+            <a:avLst/>
+          </a:prstGeom>
+          <a:noFill/>
+        </p:spPr>
+        <p:txBody>
+          <a:bodyPr wrap="square">
+            <a:spAutoFit/>
+          </a:bodyPr>
+          <a:lstStyle/>
+          <a:p>
+            <a:pPr algn="ctr"/>
+            <a:r>
+              <a:rPr lang="ja-JP" altLang="en-US" sz="1000" b="1" dirty="0">
+                <a:latin typeface="メイリオ" panose="020B0604030504040204" pitchFamily="50" charset="-128"/>
+                <a:ea typeface="メイリオ" panose="020B0604030504040204" pitchFamily="50" charset="-128"/>
+              </a:rPr>
+              <a:t>システム管理会社・ツール運用会社・デザイン会社</a:t>
+            </a:r>
+            <a:endParaRPr kumimoji="1" lang="ja-JP" altLang="en-US" sz="1000" b="1" dirty="0">
+              <a:solidFill>
+                <a:schemeClr val="tx1"/>
+              </a:solidFill>
+              <a:latin typeface="メイリオ" panose="020B0604030504040204" pitchFamily="50" charset="-128"/>
+              <a:ea typeface="メイリオ" panose="020B0604030504040204" pitchFamily="50" charset="-128"/>
+            </a:endParaRPr>
+          </a:p>
+        </p:txBody>
+      </p:sp>
+      <p:pic>
+        <p:nvPicPr>
+          <p:cNvPr id="1030" name="Picture 6" descr="お知らせ一覧｜LINEマーケティングや販促・顧客管理ならLiny">
+            <a:extLst>
+              <a:ext uri="{FF2B5EF4-FFF2-40B4-BE49-F238E27FC236}">
+                <a16:creationId xmlns:a16="http://schemas.microsoft.com/office/drawing/2014/main" id="{A11EE7F3-23DE-A03C-6953-9FC6DABEDA85}"/>
+              </a:ext>
+            </a:extLst>
+          </p:cNvPr>
+          <p:cNvPicPr>
+            <a:picLocks noChangeAspect="1" noChangeArrowheads="1"/>
+          </p:cNvPicPr>
+          <p:nvPr/>
+        </p:nvPicPr>
+        <p:blipFill rotWithShape="1">
+          <a:blip r:embed="rId4" cstate="print">
+            <a:extLst>
+              <a:ext uri="{28A0092B-C50C-407E-A947-70E740481C1C}">
+                <a14:useLocalDpi xmlns:a14="http://schemas.microsoft.com/office/drawing/2010/main" val="0"/>
+              </a:ext>
+            </a:extLst>
+          </a:blip>
+          <a:srcRect l="21448" t="26478" r="21237" b="27778"/>
+          <a:stretch>
+            <a:fillRect/>
+          </a:stretch>
+        </p:blipFill>
+        <p:spPr bwMode="auto">
+          <a:xfrm>
+            <a:off x="3335235" y="2279400"/>
+            <a:ext cx="571287" cy="304207"/>
+          </a:xfrm>
+          <a:prstGeom prst="rect">
+            <a:avLst/>
+          </a:prstGeom>
+          <a:noFill/>
+          <a:extLst>
+            <a:ext uri="{909E8E84-426E-40DD-AFC4-6F175D3DCCD1}">
+              <a14:hiddenFill xmlns:a14="http://schemas.microsoft.com/office/drawing/2010/main">
+                <a:solidFill>
+                  <a:srgbClr val="FFFFFF"/>
+                </a:solidFill>
+              </a14:hiddenFill>
+            </a:ext>
+          </a:extLst>
+        </p:spPr>
+      </p:pic>
+      <p:pic>
+        <p:nvPicPr>
+          <p:cNvPr id="1032" name="Picture 8" descr="Shopify Japan 株式会社のプレスリリース｜PR TIMES">
+            <a:extLst>
+              <a:ext uri="{FF2B5EF4-FFF2-40B4-BE49-F238E27FC236}">
+                <a16:creationId xmlns:a16="http://schemas.microsoft.com/office/drawing/2014/main" id="{1BF2471A-3689-B39E-D841-0A5CEE63B028}"/>
+              </a:ext>
+            </a:extLst>
+          </p:cNvPr>
+          <p:cNvPicPr>
+            <a:picLocks noChangeAspect="1" noChangeArrowheads="1"/>
+          </p:cNvPicPr>
+          <p:nvPr/>
+        </p:nvPicPr>
+        <p:blipFill>
+          <a:blip r:embed="rId2" cstate="print">
+            <a:extLst>
+              <a:ext uri="{28A0092B-C50C-407E-A947-70E740481C1C}">
+                <a14:useLocalDpi xmlns:a14="http://schemas.microsoft.com/office/drawing/2010/main" val="0"/>
+              </a:ext>
+            </a:extLst>
+          </a:blip>
+          <a:srcRect/>
+          <a:stretch>
+            <a:fillRect/>
+          </a:stretch>
+        </p:blipFill>
+        <p:spPr bwMode="auto">
+          <a:xfrm>
+            <a:off x="7938796" y="4694711"/>
+            <a:ext cx="799200" cy="228571"/>
+          </a:xfrm>
+          <a:prstGeom prst="rect">
+            <a:avLst/>
+          </a:prstGeom>
+          <a:noFill/>
+          <a:extLst>
+            <a:ext uri="{909E8E84-426E-40DD-AFC4-6F175D3DCCD1}">
+              <a14:hiddenFill xmlns:a14="http://schemas.microsoft.com/office/drawing/2010/main">
+                <a:solidFill>
+                  <a:srgbClr val="FFFFFF"/>
+                </a:solidFill>
+              </a14:hiddenFill>
+            </a:ext>
+          </a:extLst>
+        </p:spPr>
+      </p:pic>
+      <p:sp>
+        <p:nvSpPr>
+          <p:cNvPr id="36" name="テキスト ボックス 35">
+            <a:extLst>
+              <a:ext uri="{FF2B5EF4-FFF2-40B4-BE49-F238E27FC236}">
+                <a16:creationId xmlns:a16="http://schemas.microsoft.com/office/drawing/2014/main" id="{EB20A091-C336-4BDE-54E9-33ECF6B1EC77}"/>
+              </a:ext>
+            </a:extLst>
+          </p:cNvPr>
+          <p:cNvSpPr txBox="1"/>
+          <p:nvPr/>
+        </p:nvSpPr>
+        <p:spPr>
+          <a:xfrm>
+            <a:off x="362665" y="4709164"/>
+            <a:ext cx="4459715" cy="246221"/>
+          </a:xfrm>
+          <a:prstGeom prst="rect">
+            <a:avLst/>
+          </a:prstGeom>
+          <a:noFill/>
+        </p:spPr>
+        <p:txBody>
+          <a:bodyPr wrap="square">
+            <a:spAutoFit/>
+          </a:bodyPr>
+          <a:lstStyle/>
+          <a:p>
+            <a:pPr algn="ctr"/>
+            <a:r>
+              <a:rPr lang="en-US" altLang="ja-JP" sz="1000" b="1" dirty="0">
+                <a:latin typeface="メイリオ" panose="020B0604030504040204" pitchFamily="50" charset="-128"/>
+                <a:ea typeface="メイリオ" panose="020B0604030504040204" pitchFamily="50" charset="-128"/>
+              </a:rPr>
+              <a:t>LINE</a:t>
+            </a:r>
+            <a:r>
+              <a:rPr lang="ja-JP" altLang="en-US" sz="1000" b="1" dirty="0">
+                <a:latin typeface="メイリオ" panose="020B0604030504040204" pitchFamily="50" charset="-128"/>
+                <a:ea typeface="メイリオ" panose="020B0604030504040204" pitchFamily="50" charset="-128"/>
+              </a:rPr>
+              <a:t>ヤフーのパッケージ商品などの拡販</a:t>
+            </a:r>
+            <a:endParaRPr kumimoji="1" lang="ja-JP" altLang="en-US" sz="1000" b="1" dirty="0">
+              <a:solidFill>
+                <a:schemeClr val="tx1"/>
+              </a:solidFill>
+              <a:latin typeface="メイリオ" panose="020B0604030504040204" pitchFamily="50" charset="-128"/>
+              <a:ea typeface="メイリオ" panose="020B0604030504040204" pitchFamily="50" charset="-128"/>
+            </a:endParaRPr>
+          </a:p>
+        </p:txBody>
+      </p:sp>
+      <p:sp>
+        <p:nvSpPr>
+          <p:cNvPr id="6" name="テキスト ボックス 5">
+            <a:extLst>
+              <a:ext uri="{FF2B5EF4-FFF2-40B4-BE49-F238E27FC236}">
+                <a16:creationId xmlns:a16="http://schemas.microsoft.com/office/drawing/2014/main" id="{63CD4067-EE53-3C90-C918-C15397527FBF}"/>
+              </a:ext>
+            </a:extLst>
+          </p:cNvPr>
+          <p:cNvSpPr txBox="1"/>
+          <p:nvPr/>
+        </p:nvSpPr>
+        <p:spPr>
+          <a:xfrm>
+            <a:off x="459470" y="2738645"/>
+            <a:ext cx="4311647" cy="646331"/>
+          </a:xfrm>
+          <a:prstGeom prst="rect">
+            <a:avLst/>
+          </a:prstGeom>
+          <a:noFill/>
+        </p:spPr>
+        <p:txBody>
+          <a:bodyPr wrap="square">
+            <a:spAutoFit/>
+          </a:bodyPr>
+          <a:lstStyle/>
+          <a:p>
+            <a:pPr algn="ctr"/>
+            <a:r>
+              <a:rPr kumimoji="1" lang="ja-JP" altLang="en-US" sz="1200" dirty="0">
+                <a:solidFill>
+                  <a:schemeClr val="tx1">
+                    <a:lumMod val="50000"/>
+                    <a:lumOff val="50000"/>
+                  </a:schemeClr>
+                </a:solidFill>
+                <a:latin typeface="メイリオ" panose="020B0604030504040204" pitchFamily="50" charset="-128"/>
+                <a:ea typeface="メイリオ" panose="020B0604030504040204" pitchFamily="50" charset="-128"/>
+              </a:rPr>
+              <a:t>・ツールによって、適用される機能自体に差分がある。</a:t>
+            </a:r>
+            <a:endParaRPr kumimoji="1" lang="en-US" altLang="ja-JP" sz="1200" dirty="0">
+              <a:solidFill>
+                <a:schemeClr val="tx1">
+                  <a:lumMod val="50000"/>
+                  <a:lumOff val="50000"/>
+                </a:schemeClr>
+              </a:solidFill>
+              <a:latin typeface="メイリオ" panose="020B0604030504040204" pitchFamily="50" charset="-128"/>
+              <a:ea typeface="メイリオ" panose="020B0604030504040204" pitchFamily="50" charset="-128"/>
+            </a:endParaRPr>
+          </a:p>
+          <a:p>
+            <a:pPr algn="ctr"/>
+            <a:r>
+              <a:rPr lang="ja-JP" altLang="en-US" sz="1200" dirty="0">
+                <a:solidFill>
+                  <a:schemeClr val="tx1">
+                    <a:lumMod val="50000"/>
+                    <a:lumOff val="50000"/>
+                  </a:schemeClr>
+                </a:solidFill>
+                <a:latin typeface="メイリオ" panose="020B0604030504040204" pitchFamily="50" charset="-128"/>
+                <a:ea typeface="メイリオ" panose="020B0604030504040204" pitchFamily="50" charset="-128"/>
+              </a:rPr>
+              <a:t>・ </a:t>
+            </a:r>
+            <a:r>
+              <a:rPr kumimoji="1" lang="en-US" altLang="ja-JP" sz="1200" dirty="0">
+                <a:solidFill>
+                  <a:schemeClr val="tx1">
+                    <a:lumMod val="50000"/>
+                    <a:lumOff val="50000"/>
+                  </a:schemeClr>
+                </a:solidFill>
+                <a:latin typeface="メイリオ" panose="020B0604030504040204" pitchFamily="50" charset="-128"/>
+                <a:ea typeface="メイリオ" panose="020B0604030504040204" pitchFamily="50" charset="-128"/>
+              </a:rPr>
+              <a:t>API</a:t>
+            </a:r>
+            <a:r>
+              <a:rPr kumimoji="1" lang="ja-JP" altLang="en-US" sz="1200" dirty="0">
+                <a:solidFill>
+                  <a:schemeClr val="tx1">
+                    <a:lumMod val="50000"/>
+                    <a:lumOff val="50000"/>
+                  </a:schemeClr>
+                </a:solidFill>
+                <a:latin typeface="メイリオ" panose="020B0604030504040204" pitchFamily="50" charset="-128"/>
+                <a:ea typeface="メイリオ" panose="020B0604030504040204" pitchFamily="50" charset="-128"/>
+              </a:rPr>
+              <a:t>ツールが</a:t>
+            </a:r>
+            <a:r>
+              <a:rPr kumimoji="1" lang="en-US" altLang="ja-JP" sz="1200" dirty="0">
+                <a:solidFill>
+                  <a:schemeClr val="tx1">
+                    <a:lumMod val="50000"/>
+                    <a:lumOff val="50000"/>
+                  </a:schemeClr>
+                </a:solidFill>
+                <a:latin typeface="メイリオ" panose="020B0604030504040204" pitchFamily="50" charset="-128"/>
+                <a:ea typeface="メイリオ" panose="020B0604030504040204" pitchFamily="50" charset="-128"/>
+              </a:rPr>
+              <a:t>1</a:t>
+            </a:r>
+            <a:r>
+              <a:rPr kumimoji="1" lang="ja-JP" altLang="en-US" sz="1200" dirty="0">
+                <a:solidFill>
+                  <a:schemeClr val="tx1">
+                    <a:lumMod val="50000"/>
+                    <a:lumOff val="50000"/>
+                  </a:schemeClr>
+                </a:solidFill>
+                <a:latin typeface="メイリオ" panose="020B0604030504040204" pitchFamily="50" charset="-128"/>
+                <a:ea typeface="メイリオ" panose="020B0604030504040204" pitchFamily="50" charset="-128"/>
+              </a:rPr>
+              <a:t>社のみの独占となり、切替えが難しい。</a:t>
+            </a:r>
+            <a:endParaRPr kumimoji="1" lang="en-US" altLang="ja-JP" sz="1200" dirty="0">
+              <a:solidFill>
+                <a:schemeClr val="tx1">
+                  <a:lumMod val="50000"/>
+                  <a:lumOff val="50000"/>
+                </a:schemeClr>
+              </a:solidFill>
+              <a:latin typeface="メイリオ" panose="020B0604030504040204" pitchFamily="50" charset="-128"/>
+              <a:ea typeface="メイリオ" panose="020B0604030504040204" pitchFamily="50" charset="-128"/>
+            </a:endParaRPr>
+          </a:p>
+          <a:p>
+            <a:pPr algn="ctr"/>
+            <a:r>
+              <a:rPr lang="ja-JP" altLang="en-US" sz="1200" dirty="0">
+                <a:solidFill>
+                  <a:schemeClr val="tx1">
+                    <a:lumMod val="50000"/>
+                    <a:lumOff val="50000"/>
+                  </a:schemeClr>
+                </a:solidFill>
+                <a:latin typeface="メイリオ" panose="020B0604030504040204" pitchFamily="50" charset="-128"/>
+                <a:ea typeface="メイリオ" panose="020B0604030504040204" pitchFamily="50" charset="-128"/>
+              </a:rPr>
+              <a:t>・コンサルも依頼の場合に費用が大きくなるリスク。</a:t>
+            </a:r>
+            <a:endParaRPr kumimoji="1" lang="ja-JP" altLang="en-US" sz="1200" dirty="0">
+              <a:solidFill>
+                <a:schemeClr val="tx1">
+                  <a:lumMod val="50000"/>
+                  <a:lumOff val="50000"/>
+                </a:schemeClr>
+              </a:solidFill>
+              <a:latin typeface="メイリオ" panose="020B0604030504040204" pitchFamily="50" charset="-128"/>
+              <a:ea typeface="メイリオ" panose="020B0604030504040204" pitchFamily="50" charset="-128"/>
+            </a:endParaRPr>
+          </a:p>
+        </p:txBody>
+      </p:sp>
+      <p:sp>
+        <p:nvSpPr>
+          <p:cNvPr id="7" name="テキスト ボックス 6">
+            <a:extLst>
+              <a:ext uri="{FF2B5EF4-FFF2-40B4-BE49-F238E27FC236}">
+                <a16:creationId xmlns:a16="http://schemas.microsoft.com/office/drawing/2014/main" id="{EBA4D737-3559-5FE1-B418-3302CBFCB9A9}"/>
+              </a:ext>
+            </a:extLst>
+          </p:cNvPr>
+          <p:cNvSpPr txBox="1"/>
+          <p:nvPr/>
+        </p:nvSpPr>
+        <p:spPr>
+          <a:xfrm>
+            <a:off x="4928055" y="2733229"/>
+            <a:ext cx="4311647" cy="646331"/>
+          </a:xfrm>
+          <a:prstGeom prst="rect">
+            <a:avLst/>
+          </a:prstGeom>
+          <a:noFill/>
+        </p:spPr>
+        <p:txBody>
+          <a:bodyPr wrap="square">
+            <a:spAutoFit/>
+          </a:bodyPr>
+          <a:lstStyle/>
+          <a:p>
+            <a:pPr algn="ctr"/>
+            <a:r>
+              <a:rPr lang="ja-JP" altLang="en-US" sz="1200" dirty="0">
+                <a:solidFill>
+                  <a:schemeClr val="tx1">
+                    <a:lumMod val="50000"/>
+                    <a:lumOff val="50000"/>
+                  </a:schemeClr>
+                </a:solidFill>
+                <a:latin typeface="メイリオ" panose="020B0604030504040204" pitchFamily="50" charset="-128"/>
+                <a:ea typeface="メイリオ" panose="020B0604030504040204" pitchFamily="50" charset="-128"/>
+              </a:rPr>
+              <a:t>・ツール外注により費用が大きくなる可能性がある。</a:t>
+            </a:r>
+            <a:endParaRPr lang="en-US" altLang="ja-JP" sz="1200" dirty="0">
+              <a:solidFill>
+                <a:schemeClr val="tx1">
+                  <a:lumMod val="50000"/>
+                  <a:lumOff val="50000"/>
+                </a:schemeClr>
+              </a:solidFill>
+              <a:latin typeface="メイリオ" panose="020B0604030504040204" pitchFamily="50" charset="-128"/>
+              <a:ea typeface="メイリオ" panose="020B0604030504040204" pitchFamily="50" charset="-128"/>
+            </a:endParaRPr>
+          </a:p>
+          <a:p>
+            <a:pPr algn="ctr"/>
+            <a:r>
+              <a:rPr lang="ja-JP" altLang="en-US" sz="1200" dirty="0">
+                <a:solidFill>
+                  <a:schemeClr val="tx1">
+                    <a:lumMod val="50000"/>
+                    <a:lumOff val="50000"/>
+                  </a:schemeClr>
+                </a:solidFill>
+                <a:latin typeface="メイリオ" panose="020B0604030504040204" pitchFamily="50" charset="-128"/>
+                <a:ea typeface="メイリオ" panose="020B0604030504040204" pitchFamily="50" charset="-128"/>
+              </a:rPr>
+              <a:t>・</a:t>
+            </a:r>
+            <a:r>
+              <a:rPr lang="en-US" altLang="ja-JP" sz="1200" dirty="0">
+                <a:solidFill>
+                  <a:schemeClr val="tx1">
+                    <a:lumMod val="50000"/>
+                    <a:lumOff val="50000"/>
+                  </a:schemeClr>
+                </a:solidFill>
+                <a:latin typeface="メイリオ" panose="020B0604030504040204" pitchFamily="50" charset="-128"/>
+                <a:ea typeface="メイリオ" panose="020B0604030504040204" pitchFamily="50" charset="-128"/>
+              </a:rPr>
+              <a:t>OA</a:t>
+            </a:r>
+            <a:r>
+              <a:rPr lang="ja-JP" altLang="en-US" sz="1200" dirty="0">
+                <a:solidFill>
+                  <a:schemeClr val="tx1">
+                    <a:lumMod val="50000"/>
+                    <a:lumOff val="50000"/>
+                  </a:schemeClr>
+                </a:solidFill>
+                <a:latin typeface="メイリオ" panose="020B0604030504040204" pitchFamily="50" charset="-128"/>
+                <a:ea typeface="メイリオ" panose="020B0604030504040204" pitchFamily="50" charset="-128"/>
+              </a:rPr>
+              <a:t>運用自体に対する知見が少ない。</a:t>
+            </a:r>
+            <a:endParaRPr lang="en-US" altLang="ja-JP" sz="1200" dirty="0">
+              <a:solidFill>
+                <a:schemeClr val="tx1">
+                  <a:lumMod val="50000"/>
+                  <a:lumOff val="50000"/>
+                </a:schemeClr>
+              </a:solidFill>
+              <a:latin typeface="メイリオ" panose="020B0604030504040204" pitchFamily="50" charset="-128"/>
+              <a:ea typeface="メイリオ" panose="020B0604030504040204" pitchFamily="50" charset="-128"/>
+            </a:endParaRPr>
+          </a:p>
+          <a:p>
+            <a:pPr algn="ctr"/>
+            <a:r>
+              <a:rPr lang="ja-JP" altLang="en-US" sz="1200" dirty="0">
+                <a:solidFill>
+                  <a:schemeClr val="tx1">
+                    <a:lumMod val="50000"/>
+                    <a:lumOff val="50000"/>
+                  </a:schemeClr>
+                </a:solidFill>
+                <a:latin typeface="メイリオ" panose="020B0604030504040204" pitchFamily="50" charset="-128"/>
+                <a:ea typeface="メイリオ" panose="020B0604030504040204" pitchFamily="50" charset="-128"/>
+              </a:rPr>
+              <a:t>・一部利用できない機能が存在する（</a:t>
+            </a:r>
+            <a:r>
+              <a:rPr lang="en-US" altLang="ja-JP" sz="1200" dirty="0">
+                <a:solidFill>
+                  <a:schemeClr val="tx1">
+                    <a:lumMod val="50000"/>
+                    <a:lumOff val="50000"/>
+                  </a:schemeClr>
+                </a:solidFill>
+                <a:latin typeface="メイリオ" panose="020B0604030504040204" pitchFamily="50" charset="-128"/>
+                <a:ea typeface="メイリオ" panose="020B0604030504040204" pitchFamily="50" charset="-128"/>
+              </a:rPr>
+              <a:t>Option API</a:t>
+            </a:r>
+            <a:r>
+              <a:rPr lang="ja-JP" altLang="en-US" sz="1200" dirty="0">
+                <a:solidFill>
+                  <a:schemeClr val="tx1">
+                    <a:lumMod val="50000"/>
+                    <a:lumOff val="50000"/>
+                  </a:schemeClr>
+                </a:solidFill>
+                <a:latin typeface="メイリオ" panose="020B0604030504040204" pitchFamily="50" charset="-128"/>
+                <a:ea typeface="メイリオ" panose="020B0604030504040204" pitchFamily="50" charset="-128"/>
+              </a:rPr>
+              <a:t>他）。</a:t>
+            </a:r>
+          </a:p>
+        </p:txBody>
+      </p:sp>
+      <p:sp>
+        <p:nvSpPr>
+          <p:cNvPr id="8" name="テキスト ボックス 7">
+            <a:extLst>
+              <a:ext uri="{FF2B5EF4-FFF2-40B4-BE49-F238E27FC236}">
+                <a16:creationId xmlns:a16="http://schemas.microsoft.com/office/drawing/2014/main" id="{C16446F7-FB27-00FA-5115-4A5251550BE6}"/>
+              </a:ext>
+            </a:extLst>
+          </p:cNvPr>
+          <p:cNvSpPr txBox="1"/>
+          <p:nvPr/>
+        </p:nvSpPr>
+        <p:spPr>
+          <a:xfrm>
+            <a:off x="461608" y="5199061"/>
+            <a:ext cx="4311647" cy="646331"/>
+          </a:xfrm>
+          <a:prstGeom prst="rect">
+            <a:avLst/>
+          </a:prstGeom>
+          <a:noFill/>
+        </p:spPr>
+        <p:txBody>
+          <a:bodyPr wrap="square">
+            <a:spAutoFit/>
+          </a:bodyPr>
+          <a:lstStyle/>
+          <a:p>
+            <a:pPr algn="ctr"/>
+            <a:r>
+              <a:rPr lang="ja-JP" altLang="en-US" sz="1200" dirty="0">
+                <a:solidFill>
+                  <a:schemeClr val="tx1">
+                    <a:lumMod val="50000"/>
+                    <a:lumOff val="50000"/>
+                  </a:schemeClr>
+                </a:solidFill>
+                <a:latin typeface="メイリオ" panose="020B0604030504040204" pitchFamily="50" charset="-128"/>
+                <a:ea typeface="メイリオ" panose="020B0604030504040204" pitchFamily="50" charset="-128"/>
+              </a:rPr>
+              <a:t>・</a:t>
+            </a:r>
+            <a:r>
+              <a:rPr lang="en-US" altLang="ja-JP" sz="1200" dirty="0">
+                <a:solidFill>
+                  <a:schemeClr val="tx1">
+                    <a:lumMod val="50000"/>
+                    <a:lumOff val="50000"/>
+                  </a:schemeClr>
+                </a:solidFill>
+                <a:latin typeface="メイリオ" panose="020B0604030504040204" pitchFamily="50" charset="-128"/>
+                <a:ea typeface="メイリオ" panose="020B0604030504040204" pitchFamily="50" charset="-128"/>
+              </a:rPr>
+              <a:t>OA</a:t>
+            </a:r>
+            <a:r>
+              <a:rPr lang="ja-JP" altLang="en-US" sz="1200" dirty="0">
+                <a:solidFill>
+                  <a:schemeClr val="tx1">
+                    <a:lumMod val="50000"/>
+                    <a:lumOff val="50000"/>
+                  </a:schemeClr>
+                </a:solidFill>
+                <a:latin typeface="メイリオ" panose="020B0604030504040204" pitchFamily="50" charset="-128"/>
+                <a:ea typeface="メイリオ" panose="020B0604030504040204" pitchFamily="50" charset="-128"/>
+              </a:rPr>
+              <a:t>運用部隊を備えていない可能性がある。</a:t>
+            </a:r>
+            <a:endParaRPr lang="en-US" altLang="ja-JP" sz="1200" dirty="0">
+              <a:solidFill>
+                <a:schemeClr val="tx1">
+                  <a:lumMod val="50000"/>
+                  <a:lumOff val="50000"/>
+                </a:schemeClr>
+              </a:solidFill>
+              <a:latin typeface="メイリオ" panose="020B0604030504040204" pitchFamily="50" charset="-128"/>
+              <a:ea typeface="メイリオ" panose="020B0604030504040204" pitchFamily="50" charset="-128"/>
+            </a:endParaRPr>
+          </a:p>
+          <a:p>
+            <a:pPr algn="ctr"/>
+            <a:r>
+              <a:rPr lang="ja-JP" altLang="en-US" sz="1200" dirty="0">
+                <a:solidFill>
+                  <a:schemeClr val="tx1">
+                    <a:lumMod val="50000"/>
+                    <a:lumOff val="50000"/>
+                  </a:schemeClr>
+                </a:solidFill>
+                <a:latin typeface="メイリオ" panose="020B0604030504040204" pitchFamily="50" charset="-128"/>
+                <a:ea typeface="メイリオ" panose="020B0604030504040204" pitchFamily="50" charset="-128"/>
+              </a:rPr>
+              <a:t>・パッケージ売りが中心で非アクティブユーザーが増加。</a:t>
+            </a:r>
+            <a:endParaRPr lang="en-US" altLang="ja-JP" sz="1200" dirty="0">
+              <a:solidFill>
+                <a:schemeClr val="tx1">
+                  <a:lumMod val="50000"/>
+                  <a:lumOff val="50000"/>
+                </a:schemeClr>
+              </a:solidFill>
+              <a:latin typeface="メイリオ" panose="020B0604030504040204" pitchFamily="50" charset="-128"/>
+              <a:ea typeface="メイリオ" panose="020B0604030504040204" pitchFamily="50" charset="-128"/>
+            </a:endParaRPr>
+          </a:p>
+          <a:p>
+            <a:pPr algn="ctr"/>
+            <a:r>
+              <a:rPr lang="ja-JP" altLang="en-US" sz="1200" dirty="0">
+                <a:solidFill>
+                  <a:schemeClr val="tx1">
+                    <a:lumMod val="50000"/>
+                    <a:lumOff val="50000"/>
+                  </a:schemeClr>
+                </a:solidFill>
+                <a:latin typeface="メイリオ" panose="020B0604030504040204" pitchFamily="50" charset="-128"/>
+                <a:ea typeface="メイリオ" panose="020B0604030504040204" pitchFamily="50" charset="-128"/>
+              </a:rPr>
+              <a:t>・コンサルも依頼の場合に費用が大きくなるリスク。</a:t>
+            </a:r>
+          </a:p>
+        </p:txBody>
+      </p:sp>
+      <p:sp>
+        <p:nvSpPr>
+          <p:cNvPr id="9" name="テキスト ボックス 8">
+            <a:extLst>
+              <a:ext uri="{FF2B5EF4-FFF2-40B4-BE49-F238E27FC236}">
+                <a16:creationId xmlns:a16="http://schemas.microsoft.com/office/drawing/2014/main" id="{19EE3868-DB7E-927E-8B36-00939FCE4211}"/>
+              </a:ext>
+            </a:extLst>
+          </p:cNvPr>
+          <p:cNvSpPr txBox="1"/>
+          <p:nvPr/>
+        </p:nvSpPr>
+        <p:spPr>
+          <a:xfrm>
+            <a:off x="4930193" y="5285978"/>
+            <a:ext cx="4311647" cy="461665"/>
+          </a:xfrm>
+          <a:prstGeom prst="rect">
+            <a:avLst/>
+          </a:prstGeom>
+          <a:noFill/>
+        </p:spPr>
+        <p:txBody>
+          <a:bodyPr wrap="square" anchor="ctr">
+            <a:spAutoFit/>
+          </a:bodyPr>
+          <a:lstStyle/>
+          <a:p>
+            <a:pPr algn="ctr"/>
+            <a:r>
+              <a:rPr lang="ja-JP" altLang="en-US" sz="1200" dirty="0">
+                <a:solidFill>
+                  <a:schemeClr val="tx1">
+                    <a:lumMod val="50000"/>
+                    <a:lumOff val="50000"/>
+                  </a:schemeClr>
+                </a:solidFill>
+                <a:latin typeface="メイリオ" panose="020B0604030504040204" pitchFamily="50" charset="-128"/>
+                <a:ea typeface="メイリオ" panose="020B0604030504040204" pitchFamily="50" charset="-128"/>
+              </a:rPr>
+              <a:t>・</a:t>
+            </a:r>
+            <a:r>
+              <a:rPr lang="en-US" altLang="ja-JP" sz="1200" dirty="0">
+                <a:solidFill>
+                  <a:schemeClr val="tx1">
+                    <a:lumMod val="50000"/>
+                    <a:lumOff val="50000"/>
+                  </a:schemeClr>
+                </a:solidFill>
+                <a:latin typeface="メイリオ" panose="020B0604030504040204" pitchFamily="50" charset="-128"/>
+                <a:ea typeface="メイリオ" panose="020B0604030504040204" pitchFamily="50" charset="-128"/>
+              </a:rPr>
+              <a:t>CRM</a:t>
+            </a:r>
+            <a:r>
+              <a:rPr lang="ja-JP" altLang="en-US" sz="1200" dirty="0">
+                <a:solidFill>
+                  <a:schemeClr val="tx1">
+                    <a:lumMod val="50000"/>
+                    <a:lumOff val="50000"/>
+                  </a:schemeClr>
+                </a:solidFill>
+                <a:latin typeface="メイリオ" panose="020B0604030504040204" pitchFamily="50" charset="-128"/>
+                <a:ea typeface="メイリオ" panose="020B0604030504040204" pitchFamily="50" charset="-128"/>
+              </a:rPr>
+              <a:t>側の</a:t>
+            </a:r>
+            <a:r>
+              <a:rPr lang="en-US" altLang="ja-JP" sz="1200" dirty="0">
+                <a:solidFill>
+                  <a:schemeClr val="tx1">
+                    <a:lumMod val="50000"/>
+                    <a:lumOff val="50000"/>
+                  </a:schemeClr>
+                </a:solidFill>
+                <a:latin typeface="メイリオ" panose="020B0604030504040204" pitchFamily="50" charset="-128"/>
+                <a:ea typeface="メイリオ" panose="020B0604030504040204" pitchFamily="50" charset="-128"/>
+              </a:rPr>
+              <a:t>API</a:t>
+            </a:r>
+            <a:r>
+              <a:rPr lang="ja-JP" altLang="en-US" sz="1200" dirty="0">
+                <a:solidFill>
+                  <a:schemeClr val="tx1">
+                    <a:lumMod val="50000"/>
+                    <a:lumOff val="50000"/>
+                  </a:schemeClr>
+                </a:solidFill>
+                <a:latin typeface="メイリオ" panose="020B0604030504040204" pitchFamily="50" charset="-128"/>
+                <a:ea typeface="メイリオ" panose="020B0604030504040204" pitchFamily="50" charset="-128"/>
+              </a:rPr>
+              <a:t>利用時に通常より高単価になりやすい。</a:t>
+            </a:r>
+            <a:endParaRPr lang="en-US" altLang="ja-JP" sz="1200" dirty="0">
+              <a:solidFill>
+                <a:schemeClr val="tx1">
+                  <a:lumMod val="50000"/>
+                  <a:lumOff val="50000"/>
+                </a:schemeClr>
+              </a:solidFill>
+              <a:latin typeface="メイリオ" panose="020B0604030504040204" pitchFamily="50" charset="-128"/>
+              <a:ea typeface="メイリオ" panose="020B0604030504040204" pitchFamily="50" charset="-128"/>
+            </a:endParaRPr>
+          </a:p>
+          <a:p>
+            <a:pPr algn="ctr"/>
+            <a:r>
+              <a:rPr lang="ja-JP" altLang="en-US" sz="1200" dirty="0">
+                <a:solidFill>
+                  <a:schemeClr val="tx1">
+                    <a:lumMod val="50000"/>
+                    <a:lumOff val="50000"/>
+                  </a:schemeClr>
+                </a:solidFill>
+                <a:latin typeface="メイリオ" panose="020B0604030504040204" pitchFamily="50" charset="-128"/>
+                <a:ea typeface="メイリオ" panose="020B0604030504040204" pitchFamily="50" charset="-128"/>
+              </a:rPr>
+              <a:t>・</a:t>
+            </a:r>
+            <a:r>
+              <a:rPr lang="en-US" altLang="ja-JP" sz="1200" dirty="0">
+                <a:solidFill>
+                  <a:schemeClr val="tx1">
+                    <a:lumMod val="50000"/>
+                    <a:lumOff val="50000"/>
+                  </a:schemeClr>
+                </a:solidFill>
+                <a:latin typeface="メイリオ" panose="020B0604030504040204" pitchFamily="50" charset="-128"/>
+                <a:ea typeface="メイリオ" panose="020B0604030504040204" pitchFamily="50" charset="-128"/>
+              </a:rPr>
+              <a:t>OA</a:t>
+            </a:r>
+            <a:r>
+              <a:rPr lang="ja-JP" altLang="en-US" sz="1200" dirty="0">
+                <a:solidFill>
+                  <a:schemeClr val="tx1">
+                    <a:lumMod val="50000"/>
+                    <a:lumOff val="50000"/>
+                  </a:schemeClr>
+                </a:solidFill>
+                <a:latin typeface="メイリオ" panose="020B0604030504040204" pitchFamily="50" charset="-128"/>
+                <a:ea typeface="メイリオ" panose="020B0604030504040204" pitchFamily="50" charset="-128"/>
+              </a:rPr>
+              <a:t>単体での運用知見の乏しさ。</a:t>
+            </a:r>
+            <a:endParaRPr lang="en-US" altLang="ja-JP" sz="1200" dirty="0">
+              <a:solidFill>
+                <a:schemeClr val="tx1">
+                  <a:lumMod val="50000"/>
+                  <a:lumOff val="50000"/>
+                </a:schemeClr>
+              </a:solidFill>
+              <a:latin typeface="メイリオ" panose="020B0604030504040204" pitchFamily="50" charset="-128"/>
+              <a:ea typeface="メイリオ" panose="020B0604030504040204" pitchFamily="50" charset="-128"/>
+            </a:endParaRPr>
+          </a:p>
+        </p:txBody>
+      </p:sp>
+      <p:sp>
+        <p:nvSpPr>
+          <p:cNvPr id="17" name="正方形/長方形 16">
+            <a:extLst>
+              <a:ext uri="{FF2B5EF4-FFF2-40B4-BE49-F238E27FC236}">
+                <a16:creationId xmlns:a16="http://schemas.microsoft.com/office/drawing/2014/main" id="{189FFC9F-CF2D-25AD-00C7-208E47BC4C66}"/>
+              </a:ext>
+            </a:extLst>
+          </p:cNvPr>
+          <p:cNvSpPr/>
+          <p:nvPr/>
+        </p:nvSpPr>
+        <p:spPr>
+          <a:xfrm>
+            <a:off x="3361317" y="1908015"/>
+            <a:ext cx="1355280" cy="243944"/>
+          </a:xfrm>
+          <a:prstGeom prst="rect">
+            <a:avLst/>
+          </a:prstGeom>
+          <a:solidFill>
+            <a:schemeClr val="tx2"/>
+          </a:solidFill>
+          <a:ln w="6350">
+            <a:solidFill>
+              <a:schemeClr val="bg1">
+                <a:lumMod val="85000"/>
+              </a:schemeClr>
+            </a:solidFill>
+          </a:ln>
+        </p:spPr>
+        <p:style>
+          <a:lnRef idx="2">
+            <a:schemeClr val="accent1">
+              <a:shade val="15000"/>
+            </a:schemeClr>
+          </a:lnRef>
+          <a:fillRef idx="1">
+            <a:schemeClr val="accent1"/>
+          </a:fillRef>
+          <a:effectRef idx="0">
+            <a:schemeClr val="accent1"/>
+          </a:effectRef>
+          <a:fontRef idx="minor">
+            <a:schemeClr val="lt1"/>
+          </a:fontRef>
+        </p:style>
+        <p:txBody>
+          <a:bodyPr rtlCol="0" anchor="ctr"/>
+          <a:lstStyle/>
+          <a:p>
+            <a:pPr algn="ctr"/>
+            <a:r>
+              <a:rPr kumimoji="1" lang="ja-JP" altLang="en-US" sz="1000" b="1" dirty="0">
+                <a:solidFill>
+                  <a:schemeClr val="bg1"/>
+                </a:solidFill>
+                <a:latin typeface="メイリオ" panose="020B0604030504040204" pitchFamily="50" charset="-128"/>
+                <a:ea typeface="メイリオ" panose="020B0604030504040204" pitchFamily="50" charset="-128"/>
+              </a:rPr>
+              <a:t>自動化・効率化</a:t>
+            </a:r>
+          </a:p>
+        </p:txBody>
+      </p:sp>
+      <p:sp>
+        <p:nvSpPr>
+          <p:cNvPr id="18" name="正方形/長方形 17">
+            <a:extLst>
+              <a:ext uri="{FF2B5EF4-FFF2-40B4-BE49-F238E27FC236}">
+                <a16:creationId xmlns:a16="http://schemas.microsoft.com/office/drawing/2014/main" id="{122AB27F-120A-6587-2E9E-7D2F5F3B4407}"/>
+              </a:ext>
+            </a:extLst>
+          </p:cNvPr>
+          <p:cNvSpPr/>
+          <p:nvPr/>
+        </p:nvSpPr>
+        <p:spPr>
+          <a:xfrm>
+            <a:off x="7854818" y="1902839"/>
+            <a:ext cx="1355280" cy="243944"/>
+          </a:xfrm>
+          <a:prstGeom prst="rect">
+            <a:avLst/>
+          </a:prstGeom>
+          <a:solidFill>
+            <a:schemeClr val="tx2"/>
+          </a:solidFill>
+          <a:ln w="6350">
+            <a:solidFill>
+              <a:schemeClr val="bg1">
+                <a:lumMod val="85000"/>
+              </a:schemeClr>
+            </a:solidFill>
+          </a:ln>
+        </p:spPr>
+        <p:style>
+          <a:lnRef idx="2">
+            <a:schemeClr val="accent1">
+              <a:shade val="15000"/>
+            </a:schemeClr>
+          </a:lnRef>
+          <a:fillRef idx="1">
+            <a:schemeClr val="accent1"/>
+          </a:fillRef>
+          <a:effectRef idx="0">
+            <a:schemeClr val="accent1"/>
+          </a:effectRef>
+          <a:fontRef idx="minor">
+            <a:schemeClr val="lt1"/>
+          </a:fontRef>
+        </p:style>
+        <p:txBody>
+          <a:bodyPr rtlCol="0" anchor="ctr"/>
+          <a:lstStyle/>
+          <a:p>
+            <a:pPr algn="ctr"/>
+            <a:r>
+              <a:rPr kumimoji="1" lang="ja-JP" altLang="en-US" sz="1000" b="1" dirty="0">
+                <a:solidFill>
+                  <a:schemeClr val="bg1"/>
+                </a:solidFill>
+                <a:latin typeface="メイリオ" panose="020B0604030504040204" pitchFamily="50" charset="-128"/>
+                <a:ea typeface="メイリオ" panose="020B0604030504040204" pitchFamily="50" charset="-128"/>
+              </a:rPr>
+              <a:t>リッチ化</a:t>
+            </a:r>
+          </a:p>
+        </p:txBody>
+      </p:sp>
+      <p:sp>
+        <p:nvSpPr>
+          <p:cNvPr id="19" name="正方形/長方形 18">
+            <a:extLst>
+              <a:ext uri="{FF2B5EF4-FFF2-40B4-BE49-F238E27FC236}">
+                <a16:creationId xmlns:a16="http://schemas.microsoft.com/office/drawing/2014/main" id="{56DB3229-AC80-A545-1A7F-30968AF568EC}"/>
+              </a:ext>
+            </a:extLst>
+          </p:cNvPr>
+          <p:cNvSpPr/>
+          <p:nvPr/>
+        </p:nvSpPr>
+        <p:spPr>
+          <a:xfrm>
+            <a:off x="3386263" y="4343224"/>
+            <a:ext cx="1355280" cy="243944"/>
+          </a:xfrm>
+          <a:prstGeom prst="rect">
+            <a:avLst/>
+          </a:prstGeom>
+          <a:solidFill>
+            <a:schemeClr val="tx2"/>
+          </a:solidFill>
+          <a:ln w="6350">
+            <a:solidFill>
+              <a:schemeClr val="bg1">
+                <a:lumMod val="85000"/>
+              </a:schemeClr>
+            </a:solidFill>
+          </a:ln>
+        </p:spPr>
+        <p:style>
+          <a:lnRef idx="2">
+            <a:schemeClr val="accent1">
+              <a:shade val="15000"/>
+            </a:schemeClr>
+          </a:lnRef>
+          <a:fillRef idx="1">
+            <a:schemeClr val="accent1"/>
+          </a:fillRef>
+          <a:effectRef idx="0">
+            <a:schemeClr val="accent1"/>
+          </a:effectRef>
+          <a:fontRef idx="minor">
+            <a:schemeClr val="lt1"/>
+          </a:fontRef>
+        </p:style>
+        <p:txBody>
+          <a:bodyPr rtlCol="0" anchor="ctr"/>
+          <a:lstStyle/>
+          <a:p>
+            <a:pPr algn="ctr"/>
+            <a:r>
+              <a:rPr kumimoji="1" lang="ja-JP" altLang="en-US" sz="1000" b="1" dirty="0">
+                <a:solidFill>
+                  <a:schemeClr val="bg1"/>
+                </a:solidFill>
+                <a:latin typeface="メイリオ" panose="020B0604030504040204" pitchFamily="50" charset="-128"/>
+                <a:ea typeface="メイリオ" panose="020B0604030504040204" pitchFamily="50" charset="-128"/>
+              </a:rPr>
+              <a:t>リード母数拡大</a:t>
+            </a:r>
+          </a:p>
+        </p:txBody>
+      </p:sp>
+      <p:sp>
+        <p:nvSpPr>
+          <p:cNvPr id="20" name="正方形/長方形 19">
+            <a:extLst>
+              <a:ext uri="{FF2B5EF4-FFF2-40B4-BE49-F238E27FC236}">
+                <a16:creationId xmlns:a16="http://schemas.microsoft.com/office/drawing/2014/main" id="{21D29B7F-EC01-1021-44F2-D37D7A2E27DC}"/>
+              </a:ext>
+            </a:extLst>
+          </p:cNvPr>
+          <p:cNvSpPr/>
+          <p:nvPr/>
+        </p:nvSpPr>
+        <p:spPr>
+          <a:xfrm>
+            <a:off x="7879764" y="4338048"/>
+            <a:ext cx="1355280" cy="243944"/>
+          </a:xfrm>
+          <a:prstGeom prst="rect">
+            <a:avLst/>
+          </a:prstGeom>
+          <a:solidFill>
+            <a:schemeClr val="tx2"/>
+          </a:solidFill>
+          <a:ln w="6350">
+            <a:solidFill>
+              <a:schemeClr val="bg1">
+                <a:lumMod val="85000"/>
+              </a:schemeClr>
+            </a:solidFill>
+          </a:ln>
+        </p:spPr>
+        <p:style>
+          <a:lnRef idx="2">
+            <a:schemeClr val="accent1">
+              <a:shade val="15000"/>
+            </a:schemeClr>
+          </a:lnRef>
+          <a:fillRef idx="1">
+            <a:schemeClr val="accent1"/>
+          </a:fillRef>
+          <a:effectRef idx="0">
+            <a:schemeClr val="accent1"/>
+          </a:effectRef>
+          <a:fontRef idx="minor">
+            <a:schemeClr val="lt1"/>
+          </a:fontRef>
+        </p:style>
+        <p:txBody>
+          <a:bodyPr rtlCol="0" anchor="ctr"/>
+          <a:lstStyle/>
+          <a:p>
+            <a:pPr algn="ctr"/>
+            <a:r>
+              <a:rPr kumimoji="1" lang="ja-JP" altLang="en-US" sz="1000" b="1" dirty="0">
+                <a:solidFill>
+                  <a:schemeClr val="bg1"/>
+                </a:solidFill>
+                <a:latin typeface="メイリオ" panose="020B0604030504040204" pitchFamily="50" charset="-128"/>
+                <a:ea typeface="メイリオ" panose="020B0604030504040204" pitchFamily="50" charset="-128"/>
+              </a:rPr>
+              <a:t>自動化・効率化</a:t>
+            </a:r>
+          </a:p>
+        </p:txBody>
+      </p:sp>
+      <p:sp>
+        <p:nvSpPr>
+          <p:cNvPr id="22" name="正方形/長方形 21">
+            <a:extLst>
+              <a:ext uri="{FF2B5EF4-FFF2-40B4-BE49-F238E27FC236}">
+                <a16:creationId xmlns:a16="http://schemas.microsoft.com/office/drawing/2014/main" id="{2B94E779-B2D3-DA1A-5386-88EC8B7F7A2A}"/>
+              </a:ext>
+            </a:extLst>
+          </p:cNvPr>
+          <p:cNvSpPr/>
+          <p:nvPr/>
+        </p:nvSpPr>
+        <p:spPr>
+          <a:xfrm>
+            <a:off x="486784" y="683522"/>
+            <a:ext cx="9005456" cy="869466"/>
+          </a:xfrm>
+          <a:prstGeom prst="rect">
+            <a:avLst/>
+          </a:prstGeom>
+          <a:noFill/>
+          <a:ln>
+            <a:noFill/>
+          </a:ln>
+        </p:spPr>
+        <p:style>
+          <a:lnRef idx="2">
+            <a:schemeClr val="accent1">
+              <a:shade val="50000"/>
+            </a:schemeClr>
+          </a:lnRef>
+          <a:fillRef idx="1">
+            <a:schemeClr val="accent1"/>
+          </a:fillRef>
+          <a:effectRef idx="0">
+            <a:schemeClr val="accent1"/>
+          </a:effectRef>
+          <a:fontRef idx="minor">
+            <a:schemeClr val="lt1"/>
+          </a:fontRef>
+        </p:style>
+        <p:txBody>
+          <a:bodyPr tIns="90000" anchor="ctr"/>
+          <a:lstStyle>
+            <a:defPPr>
+              <a:defRPr lang="ja-JP"/>
+            </a:defPPr>
+            <a:lvl1pPr marL="0" algn="l" defTabSz="914400" rtl="0" eaLnBrk="1" latinLnBrk="0" hangingPunct="1">
+              <a:defRPr kumimoji="1" sz="1800" kern="1200">
+                <a:solidFill>
+                  <a:schemeClr val="lt1"/>
+                </a:solidFill>
+                <a:latin typeface="+mn-lt"/>
+                <a:ea typeface="+mn-ea"/>
+                <a:cs typeface="+mn-cs"/>
+              </a:defRPr>
+            </a:lvl1pPr>
+            <a:lvl2pPr marL="457200" algn="l" defTabSz="914400" rtl="0" eaLnBrk="1" latinLnBrk="0" hangingPunct="1">
+              <a:defRPr kumimoji="1" sz="1800" kern="1200">
+                <a:solidFill>
+                  <a:schemeClr val="lt1"/>
+                </a:solidFill>
+                <a:latin typeface="+mn-lt"/>
+                <a:ea typeface="+mn-ea"/>
+                <a:cs typeface="+mn-cs"/>
+              </a:defRPr>
+            </a:lvl2pPr>
+            <a:lvl3pPr marL="914400" algn="l" defTabSz="914400" rtl="0" eaLnBrk="1" latinLnBrk="0" hangingPunct="1">
+              <a:defRPr kumimoji="1" sz="1800" kern="1200">
+                <a:solidFill>
+                  <a:schemeClr val="lt1"/>
+                </a:solidFill>
+                <a:latin typeface="+mn-lt"/>
+                <a:ea typeface="+mn-ea"/>
+                <a:cs typeface="+mn-cs"/>
+              </a:defRPr>
+            </a:lvl3pPr>
+            <a:lvl4pPr marL="1371600" algn="l" defTabSz="914400" rtl="0" eaLnBrk="1" latinLnBrk="0" hangingPunct="1">
+              <a:defRPr kumimoji="1" sz="1800" kern="1200">
+                <a:solidFill>
+                  <a:schemeClr val="lt1"/>
+                </a:solidFill>
+                <a:latin typeface="+mn-lt"/>
+                <a:ea typeface="+mn-ea"/>
+                <a:cs typeface="+mn-cs"/>
+              </a:defRPr>
+            </a:lvl4pPr>
+            <a:lvl5pPr marL="1828800" algn="l" defTabSz="914400" rtl="0" eaLnBrk="1" latinLnBrk="0" hangingPunct="1">
+              <a:defRPr kumimoji="1" sz="1800" kern="1200">
+                <a:solidFill>
+                  <a:schemeClr val="lt1"/>
+                </a:solidFill>
+                <a:latin typeface="+mn-lt"/>
+                <a:ea typeface="+mn-ea"/>
+                <a:cs typeface="+mn-cs"/>
+              </a:defRPr>
+            </a:lvl5pPr>
+            <a:lvl6pPr marL="2286000" algn="l" defTabSz="914400" rtl="0" eaLnBrk="1" latinLnBrk="0" hangingPunct="1">
+              <a:defRPr kumimoji="1" sz="1800" kern="1200">
+                <a:solidFill>
+                  <a:schemeClr val="lt1"/>
+                </a:solidFill>
+                <a:latin typeface="+mn-lt"/>
+                <a:ea typeface="+mn-ea"/>
+                <a:cs typeface="+mn-cs"/>
+              </a:defRPr>
+            </a:lvl6pPr>
+            <a:lvl7pPr marL="2743200" algn="l" defTabSz="914400" rtl="0" eaLnBrk="1" latinLnBrk="0" hangingPunct="1">
+              <a:defRPr kumimoji="1" sz="1800" kern="1200">
+                <a:solidFill>
+                  <a:schemeClr val="lt1"/>
+                </a:solidFill>
+                <a:latin typeface="+mn-lt"/>
+                <a:ea typeface="+mn-ea"/>
+                <a:cs typeface="+mn-cs"/>
+              </a:defRPr>
+            </a:lvl7pPr>
+            <a:lvl8pPr marL="3200400" algn="l" defTabSz="914400" rtl="0" eaLnBrk="1" latinLnBrk="0" hangingPunct="1">
+              <a:defRPr kumimoji="1" sz="1800" kern="1200">
+                <a:solidFill>
+                  <a:schemeClr val="lt1"/>
+                </a:solidFill>
+                <a:latin typeface="+mn-lt"/>
+                <a:ea typeface="+mn-ea"/>
+                <a:cs typeface="+mn-cs"/>
+              </a:defRPr>
+            </a:lvl8pPr>
+            <a:lvl9pPr marL="3657600" algn="l" defTabSz="914400" rtl="0" eaLnBrk="1" latinLnBrk="0" hangingPunct="1">
+              <a:defRPr kumimoji="1" sz="1800" kern="1200">
+                <a:solidFill>
+                  <a:schemeClr val="lt1"/>
+                </a:solidFill>
+                <a:latin typeface="+mn-lt"/>
+                <a:ea typeface="+mn-ea"/>
+                <a:cs typeface="+mn-cs"/>
+              </a:defRPr>
+            </a:lvl9pPr>
+          </a:lstStyle>
+          <a:p>
+            <a:pPr algn="ctr"/>
+            <a:r>
+              <a:rPr lang="ja-JP" altLang="en-US" sz="1600" b="1" dirty="0">
+                <a:solidFill>
+                  <a:schemeClr val="tx1"/>
+                </a:solidFill>
+                <a:latin typeface="メイリオ" panose="020B0604030504040204" pitchFamily="50" charset="-128"/>
+                <a:ea typeface="メイリオ" panose="020B0604030504040204" pitchFamily="50" charset="-128"/>
+              </a:rPr>
+              <a:t>各種パートナー企業との連携から、幅広い</a:t>
+            </a:r>
+            <a:r>
+              <a:rPr lang="en-US" altLang="ja-JP" sz="1600" b="1" dirty="0">
+                <a:solidFill>
+                  <a:schemeClr val="tx1"/>
+                </a:solidFill>
+                <a:latin typeface="メイリオ" panose="020B0604030504040204" pitchFamily="50" charset="-128"/>
+                <a:ea typeface="メイリオ" panose="020B0604030504040204" pitchFamily="50" charset="-128"/>
+              </a:rPr>
+              <a:t>LINEOA</a:t>
+            </a:r>
+            <a:r>
+              <a:rPr lang="ja-JP" altLang="en-US" sz="1600" b="1" dirty="0">
+                <a:solidFill>
+                  <a:schemeClr val="tx1"/>
+                </a:solidFill>
+                <a:latin typeface="メイリオ" panose="020B0604030504040204" pitchFamily="50" charset="-128"/>
+                <a:ea typeface="メイリオ" panose="020B0604030504040204" pitchFamily="50" charset="-128"/>
+              </a:rPr>
+              <a:t>業務に対して対応が可能。</a:t>
+            </a:r>
+            <a:endParaRPr lang="en-US" altLang="ja-JP" sz="1600" b="1" dirty="0">
+              <a:solidFill>
+                <a:schemeClr val="tx1"/>
+              </a:solidFill>
+              <a:latin typeface="メイリオ" panose="020B0604030504040204" pitchFamily="50" charset="-128"/>
+              <a:ea typeface="メイリオ" panose="020B0604030504040204" pitchFamily="50" charset="-128"/>
+            </a:endParaRPr>
+          </a:p>
+          <a:p>
+            <a:pPr algn="ctr"/>
+            <a:r>
+              <a:rPr lang="ja-JP" altLang="en-US" sz="1600" b="1" dirty="0">
+                <a:solidFill>
+                  <a:schemeClr val="tx1"/>
+                </a:solidFill>
+                <a:latin typeface="メイリオ" panose="020B0604030504040204" pitchFamily="50" charset="-128"/>
+                <a:ea typeface="メイリオ" panose="020B0604030504040204" pitchFamily="50" charset="-128"/>
+              </a:rPr>
+              <a:t>貴社社内運用部隊と連携して、一部業務の委託についてもご相談いただけます。</a:t>
+            </a:r>
+            <a:endParaRPr lang="en-US" altLang="ja-JP" sz="1600" b="1" dirty="0">
+              <a:solidFill>
+                <a:schemeClr val="tx1"/>
+              </a:solidFill>
+              <a:latin typeface="メイリオ" panose="020B0604030504040204" pitchFamily="50" charset="-128"/>
+              <a:ea typeface="メイリオ" panose="020B0604030504040204" pitchFamily="50" charset="-128"/>
+            </a:endParaRPr>
+          </a:p>
+          <a:p>
+            <a:pPr algn="ctr"/>
+            <a:r>
+              <a:rPr lang="en-US" altLang="ja-JP" sz="1200" b="1" dirty="0">
+                <a:solidFill>
+                  <a:srgbClr val="FF0000"/>
+                </a:solidFill>
+                <a:latin typeface="メイリオ" panose="020B0604030504040204" pitchFamily="50" charset="-128"/>
+                <a:ea typeface="メイリオ" panose="020B0604030504040204" pitchFamily="50" charset="-128"/>
+              </a:rPr>
+              <a:t>※</a:t>
+            </a:r>
+            <a:r>
+              <a:rPr lang="ja-JP" altLang="en-US" sz="1200" b="1" dirty="0">
+                <a:solidFill>
+                  <a:srgbClr val="FF0000"/>
+                </a:solidFill>
+                <a:latin typeface="メイリオ" panose="020B0604030504040204" pitchFamily="50" charset="-128"/>
+                <a:ea typeface="メイリオ" panose="020B0604030504040204" pitchFamily="50" charset="-128"/>
+              </a:rPr>
+              <a:t>現状運用環境に合わせた成果報酬プランやコストカットの監修なども提示が可能です。</a:t>
+            </a:r>
+            <a:endParaRPr lang="ja-JP" altLang="en-US" sz="1600" b="1" dirty="0">
+              <a:solidFill>
+                <a:srgbClr val="FF0000"/>
+              </a:solidFill>
+              <a:latin typeface="メイリオ" panose="020B0604030504040204" pitchFamily="50" charset="-128"/>
+              <a:ea typeface="メイリオ" panose="020B0604030504040204" pitchFamily="50" charset="-128"/>
+            </a:endParaRPr>
+          </a:p>
+        </p:txBody>
+      </p:sp>
+      <p:sp>
+        <p:nvSpPr>
+          <p:cNvPr id="30" name="テキスト ボックス 29">
+            <a:extLst>
+              <a:ext uri="{FF2B5EF4-FFF2-40B4-BE49-F238E27FC236}">
+                <a16:creationId xmlns:a16="http://schemas.microsoft.com/office/drawing/2014/main" id="{DB41465D-5D30-6E80-78F0-EEE5C4A9C571}"/>
+              </a:ext>
+            </a:extLst>
+          </p:cNvPr>
+          <p:cNvSpPr txBox="1"/>
+          <p:nvPr/>
+        </p:nvSpPr>
+        <p:spPr>
+          <a:xfrm>
+            <a:off x="269967" y="3632378"/>
+            <a:ext cx="687006" cy="261610"/>
+          </a:xfrm>
+          <a:prstGeom prst="rect">
+            <a:avLst/>
+          </a:prstGeom>
+          <a:solidFill>
+            <a:schemeClr val="tx2">
+              <a:lumMod val="50000"/>
+            </a:schemeClr>
+          </a:solidFill>
+        </p:spPr>
+        <p:txBody>
+          <a:bodyPr wrap="square">
+            <a:spAutoFit/>
+          </a:bodyPr>
+          <a:lstStyle/>
+          <a:p>
+            <a:r>
+              <a:rPr lang="en-US" altLang="ja-JP" sz="1100" b="1" dirty="0">
+                <a:solidFill>
+                  <a:schemeClr val="bg1"/>
+                </a:solidFill>
+                <a:latin typeface="メイリオ" panose="020B0604030504040204" pitchFamily="50" charset="-128"/>
+                <a:ea typeface="メイリオ" panose="020B0604030504040204" pitchFamily="50" charset="-128"/>
+              </a:rPr>
+              <a:t>DYM</a:t>
+            </a:r>
+            <a:r>
+              <a:rPr lang="ja-JP" altLang="en-US" sz="1100" b="1" dirty="0">
+                <a:solidFill>
+                  <a:schemeClr val="bg1"/>
+                </a:solidFill>
+                <a:latin typeface="メイリオ" panose="020B0604030504040204" pitchFamily="50" charset="-128"/>
+                <a:ea typeface="メイリオ" panose="020B0604030504040204" pitchFamily="50" charset="-128"/>
+              </a:rPr>
+              <a:t>→</a:t>
+            </a:r>
+            <a:endParaRPr lang="ja-JP" altLang="en-US" sz="1100" dirty="0">
+              <a:solidFill>
+                <a:schemeClr val="bg1"/>
+              </a:solidFill>
+            </a:endParaRPr>
+          </a:p>
+        </p:txBody>
+      </p:sp>
+      <p:sp>
+        <p:nvSpPr>
+          <p:cNvPr id="34" name="テキスト ボックス 33">
+            <a:extLst>
+              <a:ext uri="{FF2B5EF4-FFF2-40B4-BE49-F238E27FC236}">
+                <a16:creationId xmlns:a16="http://schemas.microsoft.com/office/drawing/2014/main" id="{0144DC71-37E5-DA34-FDBB-69F2A1BEA8E0}"/>
+              </a:ext>
+            </a:extLst>
+          </p:cNvPr>
+          <p:cNvSpPr txBox="1"/>
+          <p:nvPr/>
+        </p:nvSpPr>
+        <p:spPr>
+          <a:xfrm>
+            <a:off x="4741544" y="3629460"/>
+            <a:ext cx="687006" cy="261610"/>
+          </a:xfrm>
+          <a:prstGeom prst="rect">
+            <a:avLst/>
+          </a:prstGeom>
+          <a:solidFill>
+            <a:schemeClr val="tx2">
+              <a:lumMod val="50000"/>
+            </a:schemeClr>
+          </a:solidFill>
+        </p:spPr>
+        <p:txBody>
+          <a:bodyPr wrap="square">
+            <a:spAutoFit/>
+          </a:bodyPr>
+          <a:lstStyle/>
+          <a:p>
+            <a:r>
+              <a:rPr lang="en-US" altLang="ja-JP" sz="1100" b="1" dirty="0">
+                <a:solidFill>
+                  <a:schemeClr val="bg1"/>
+                </a:solidFill>
+                <a:latin typeface="メイリオ" panose="020B0604030504040204" pitchFamily="50" charset="-128"/>
+                <a:ea typeface="メイリオ" panose="020B0604030504040204" pitchFamily="50" charset="-128"/>
+              </a:rPr>
+              <a:t>DYM</a:t>
+            </a:r>
+            <a:r>
+              <a:rPr lang="ja-JP" altLang="en-US" sz="1100" b="1" dirty="0">
+                <a:solidFill>
+                  <a:schemeClr val="bg1"/>
+                </a:solidFill>
+                <a:latin typeface="メイリオ" panose="020B0604030504040204" pitchFamily="50" charset="-128"/>
+                <a:ea typeface="メイリオ" panose="020B0604030504040204" pitchFamily="50" charset="-128"/>
+              </a:rPr>
+              <a:t>→</a:t>
+            </a:r>
+            <a:endParaRPr lang="ja-JP" altLang="en-US" sz="1100" dirty="0">
+              <a:solidFill>
+                <a:schemeClr val="bg1"/>
+              </a:solidFill>
+            </a:endParaRPr>
+          </a:p>
+        </p:txBody>
+      </p:sp>
+      <p:sp>
+        <p:nvSpPr>
+          <p:cNvPr id="38" name="テキスト ボックス 37">
+            <a:extLst>
+              <a:ext uri="{FF2B5EF4-FFF2-40B4-BE49-F238E27FC236}">
+                <a16:creationId xmlns:a16="http://schemas.microsoft.com/office/drawing/2014/main" id="{AF15CFA9-BA43-360D-D26E-040407A743A9}"/>
+              </a:ext>
+            </a:extLst>
+          </p:cNvPr>
+          <p:cNvSpPr txBox="1"/>
+          <p:nvPr/>
+        </p:nvSpPr>
+        <p:spPr>
+          <a:xfrm>
+            <a:off x="269967" y="6081294"/>
+            <a:ext cx="687006" cy="261610"/>
+          </a:xfrm>
+          <a:prstGeom prst="rect">
+            <a:avLst/>
+          </a:prstGeom>
+          <a:solidFill>
+            <a:schemeClr val="tx2">
+              <a:lumMod val="50000"/>
+            </a:schemeClr>
+          </a:solidFill>
+        </p:spPr>
+        <p:txBody>
+          <a:bodyPr wrap="square">
+            <a:spAutoFit/>
+          </a:bodyPr>
+          <a:lstStyle/>
+          <a:p>
+            <a:r>
+              <a:rPr lang="en-US" altLang="ja-JP" sz="1100" b="1" dirty="0">
+                <a:solidFill>
+                  <a:schemeClr val="bg1"/>
+                </a:solidFill>
+                <a:latin typeface="メイリオ" panose="020B0604030504040204" pitchFamily="50" charset="-128"/>
+                <a:ea typeface="メイリオ" panose="020B0604030504040204" pitchFamily="50" charset="-128"/>
+              </a:rPr>
+              <a:t>DYM</a:t>
+            </a:r>
+            <a:r>
+              <a:rPr lang="ja-JP" altLang="en-US" sz="1100" b="1" dirty="0">
+                <a:solidFill>
+                  <a:schemeClr val="bg1"/>
+                </a:solidFill>
+                <a:latin typeface="メイリオ" panose="020B0604030504040204" pitchFamily="50" charset="-128"/>
+                <a:ea typeface="メイリオ" panose="020B0604030504040204" pitchFamily="50" charset="-128"/>
+              </a:rPr>
+              <a:t>→</a:t>
+            </a:r>
+            <a:endParaRPr lang="ja-JP" altLang="en-US" sz="1100" dirty="0">
+              <a:solidFill>
+                <a:schemeClr val="bg1"/>
+              </a:solidFill>
+            </a:endParaRPr>
+          </a:p>
+        </p:txBody>
+      </p:sp>
+      <p:sp>
+        <p:nvSpPr>
+          <p:cNvPr id="40" name="テキスト ボックス 39">
+            <a:extLst>
+              <a:ext uri="{FF2B5EF4-FFF2-40B4-BE49-F238E27FC236}">
+                <a16:creationId xmlns:a16="http://schemas.microsoft.com/office/drawing/2014/main" id="{240BE338-3054-2BB1-6A31-C90BDCFE06A9}"/>
+              </a:ext>
+            </a:extLst>
+          </p:cNvPr>
+          <p:cNvSpPr txBox="1"/>
+          <p:nvPr/>
+        </p:nvSpPr>
+        <p:spPr>
+          <a:xfrm>
+            <a:off x="4741544" y="6078376"/>
+            <a:ext cx="687006" cy="261610"/>
+          </a:xfrm>
+          <a:prstGeom prst="rect">
+            <a:avLst/>
+          </a:prstGeom>
+          <a:solidFill>
+            <a:schemeClr val="tx2">
+              <a:lumMod val="50000"/>
+            </a:schemeClr>
+          </a:solidFill>
+        </p:spPr>
+        <p:txBody>
+          <a:bodyPr wrap="square">
+            <a:spAutoFit/>
+          </a:bodyPr>
+          <a:lstStyle/>
+          <a:p>
+            <a:r>
+              <a:rPr lang="en-US" altLang="ja-JP" sz="1100" b="1" dirty="0">
+                <a:solidFill>
+                  <a:schemeClr val="bg1"/>
+                </a:solidFill>
+                <a:latin typeface="メイリオ" panose="020B0604030504040204" pitchFamily="50" charset="-128"/>
+                <a:ea typeface="メイリオ" panose="020B0604030504040204" pitchFamily="50" charset="-128"/>
+              </a:rPr>
+              <a:t>DYM</a:t>
+            </a:r>
+            <a:r>
+              <a:rPr lang="ja-JP" altLang="en-US" sz="1100" b="1" dirty="0">
+                <a:solidFill>
+                  <a:schemeClr val="bg1"/>
+                </a:solidFill>
+                <a:latin typeface="メイリオ" panose="020B0604030504040204" pitchFamily="50" charset="-128"/>
+                <a:ea typeface="メイリオ" panose="020B0604030504040204" pitchFamily="50" charset="-128"/>
+              </a:rPr>
+              <a:t>→</a:t>
+            </a:r>
+            <a:endParaRPr lang="ja-JP" altLang="en-US" sz="1100" dirty="0">
+              <a:solidFill>
+                <a:schemeClr val="bg1"/>
+              </a:solidFill>
+            </a:endParaRPr>
+          </a:p>
+        </p:txBody>
+      </p:sp>
+      <p:sp>
+        <p:nvSpPr>
+          <p:cNvPr id="41" name="テキスト ボックス 40">
+            <a:extLst>
+              <a:ext uri="{FF2B5EF4-FFF2-40B4-BE49-F238E27FC236}">
+                <a16:creationId xmlns:a16="http://schemas.microsoft.com/office/drawing/2014/main" id="{C0326F10-43FF-1E4A-8F3D-ED5A80FA014B}"/>
+              </a:ext>
+            </a:extLst>
+          </p:cNvPr>
+          <p:cNvSpPr txBox="1"/>
+          <p:nvPr/>
+        </p:nvSpPr>
+        <p:spPr>
+          <a:xfrm>
+            <a:off x="956972" y="3530330"/>
+            <a:ext cx="3842445" cy="461665"/>
+          </a:xfrm>
+          <a:prstGeom prst="rect">
+            <a:avLst/>
+          </a:prstGeom>
+          <a:noFill/>
+        </p:spPr>
+        <p:txBody>
+          <a:bodyPr wrap="square">
+            <a:spAutoFit/>
+          </a:bodyPr>
+          <a:lstStyle/>
+          <a:p>
+            <a:pPr algn="ctr"/>
+            <a:r>
+              <a:rPr lang="ja-JP" altLang="en-US" sz="1200" b="1" dirty="0">
+                <a:solidFill>
+                  <a:schemeClr val="tx2"/>
+                </a:solidFill>
+                <a:latin typeface="メイリオ" panose="020B0604030504040204" pitchFamily="50" charset="-128"/>
+                <a:ea typeface="メイリオ" panose="020B0604030504040204" pitchFamily="50" charset="-128"/>
+              </a:rPr>
+              <a:t>各種実績の多いツール企業と連携している為、</a:t>
+            </a:r>
+            <a:endParaRPr lang="en-US" altLang="ja-JP" sz="1200" b="1">
+              <a:solidFill>
+                <a:schemeClr val="tx2"/>
+              </a:solidFill>
+              <a:latin typeface="メイリオ" panose="020B0604030504040204" pitchFamily="50" charset="-128"/>
+              <a:ea typeface="メイリオ" panose="020B0604030504040204" pitchFamily="50" charset="-128"/>
+            </a:endParaRPr>
+          </a:p>
+          <a:p>
+            <a:pPr algn="ctr"/>
+            <a:r>
+              <a:rPr kumimoji="1" lang="ja-JP" altLang="en-US" sz="1200" b="1">
+                <a:solidFill>
+                  <a:schemeClr val="tx2"/>
+                </a:solidFill>
+                <a:latin typeface="メイリオ" panose="020B0604030504040204" pitchFamily="50" charset="-128"/>
+                <a:ea typeface="メイリオ" panose="020B0604030504040204" pitchFamily="50" charset="-128"/>
+              </a:rPr>
+              <a:t>将来的</a:t>
+            </a:r>
+            <a:r>
+              <a:rPr kumimoji="1" lang="ja-JP" altLang="en-US" sz="1200" b="1" dirty="0">
+                <a:solidFill>
+                  <a:schemeClr val="tx2"/>
+                </a:solidFill>
+                <a:latin typeface="メイリオ" panose="020B0604030504040204" pitchFamily="50" charset="-128"/>
+                <a:ea typeface="メイリオ" panose="020B0604030504040204" pitchFamily="50" charset="-128"/>
+              </a:rPr>
+              <a:t>な運用プランに合わせてツール選定をサポート。</a:t>
+            </a:r>
+          </a:p>
+        </p:txBody>
+      </p:sp>
+      <p:sp>
+        <p:nvSpPr>
+          <p:cNvPr id="42" name="テキスト ボックス 41">
+            <a:extLst>
+              <a:ext uri="{FF2B5EF4-FFF2-40B4-BE49-F238E27FC236}">
+                <a16:creationId xmlns:a16="http://schemas.microsoft.com/office/drawing/2014/main" id="{D6EF5007-A21E-89B0-31EE-98FC1F7BE5FB}"/>
+              </a:ext>
+            </a:extLst>
+          </p:cNvPr>
+          <p:cNvSpPr txBox="1"/>
+          <p:nvPr/>
+        </p:nvSpPr>
+        <p:spPr>
+          <a:xfrm>
+            <a:off x="5428549" y="3527412"/>
+            <a:ext cx="3842445" cy="461665"/>
+          </a:xfrm>
+          <a:prstGeom prst="rect">
+            <a:avLst/>
+          </a:prstGeom>
+          <a:noFill/>
+        </p:spPr>
+        <p:txBody>
+          <a:bodyPr wrap="square">
+            <a:spAutoFit/>
+          </a:bodyPr>
+          <a:lstStyle/>
+          <a:p>
+            <a:pPr algn="ctr"/>
+            <a:r>
+              <a:rPr lang="en-US" altLang="ja-JP" sz="1200" b="1" dirty="0">
+                <a:solidFill>
+                  <a:schemeClr val="tx2"/>
+                </a:solidFill>
+                <a:latin typeface="メイリオ" panose="020B0604030504040204" pitchFamily="50" charset="-128"/>
+                <a:ea typeface="メイリオ" panose="020B0604030504040204" pitchFamily="50" charset="-128"/>
+              </a:rPr>
+              <a:t>DYM</a:t>
+            </a:r>
+            <a:r>
+              <a:rPr lang="ja-JP" altLang="en-US" sz="1200" b="1" dirty="0">
+                <a:solidFill>
+                  <a:schemeClr val="tx2"/>
+                </a:solidFill>
+                <a:latin typeface="メイリオ" panose="020B0604030504040204" pitchFamily="50" charset="-128"/>
+                <a:ea typeface="メイリオ" panose="020B0604030504040204" pitchFamily="50" charset="-128"/>
+              </a:rPr>
+              <a:t>が商流に入ることにより限定の割引プランや</a:t>
+            </a:r>
+            <a:endParaRPr lang="en-US" altLang="ja-JP" sz="1200" b="1" dirty="0">
+              <a:solidFill>
+                <a:schemeClr val="tx2"/>
+              </a:solidFill>
+              <a:latin typeface="メイリオ" panose="020B0604030504040204" pitchFamily="50" charset="-128"/>
+              <a:ea typeface="メイリオ" panose="020B0604030504040204" pitchFamily="50" charset="-128"/>
+            </a:endParaRPr>
+          </a:p>
+          <a:p>
+            <a:pPr algn="ctr"/>
+            <a:r>
+              <a:rPr kumimoji="1" lang="ja-JP" altLang="en-US" sz="1200" b="1" dirty="0">
+                <a:solidFill>
+                  <a:schemeClr val="tx2"/>
+                </a:solidFill>
+                <a:latin typeface="メイリオ" panose="020B0604030504040204" pitchFamily="50" charset="-128"/>
+                <a:ea typeface="メイリオ" panose="020B0604030504040204" pitchFamily="50" charset="-128"/>
+              </a:rPr>
+              <a:t>拡張機能（一部</a:t>
+            </a:r>
+            <a:r>
+              <a:rPr kumimoji="1" lang="en-US" altLang="ja-JP" sz="1200" b="1" dirty="0">
+                <a:solidFill>
+                  <a:schemeClr val="tx2"/>
+                </a:solidFill>
+                <a:latin typeface="メイリオ" panose="020B0604030504040204" pitchFamily="50" charset="-128"/>
+                <a:ea typeface="メイリオ" panose="020B0604030504040204" pitchFamily="50" charset="-128"/>
+              </a:rPr>
+              <a:t>β</a:t>
+            </a:r>
+            <a:r>
+              <a:rPr lang="ja-JP" altLang="en-US" sz="1200" b="1" dirty="0">
+                <a:solidFill>
+                  <a:schemeClr val="tx2"/>
+                </a:solidFill>
+                <a:latin typeface="メイリオ" panose="020B0604030504040204" pitchFamily="50" charset="-128"/>
+                <a:ea typeface="メイリオ" panose="020B0604030504040204" pitchFamily="50" charset="-128"/>
+              </a:rPr>
+              <a:t>版）の展開を可能に。</a:t>
+            </a:r>
+            <a:endParaRPr kumimoji="1" lang="ja-JP" altLang="en-US" sz="1200" b="1" dirty="0">
+              <a:solidFill>
+                <a:schemeClr val="tx2"/>
+              </a:solidFill>
+              <a:latin typeface="メイリオ" panose="020B0604030504040204" pitchFamily="50" charset="-128"/>
+              <a:ea typeface="メイリオ" panose="020B0604030504040204" pitchFamily="50" charset="-128"/>
+            </a:endParaRPr>
+          </a:p>
+        </p:txBody>
+      </p:sp>
+      <p:sp>
+        <p:nvSpPr>
+          <p:cNvPr id="43" name="テキスト ボックス 42">
+            <a:extLst>
+              <a:ext uri="{FF2B5EF4-FFF2-40B4-BE49-F238E27FC236}">
+                <a16:creationId xmlns:a16="http://schemas.microsoft.com/office/drawing/2014/main" id="{674B7463-4A8E-D0FC-FDB4-5BB44B5E2FB2}"/>
+              </a:ext>
+            </a:extLst>
+          </p:cNvPr>
+          <p:cNvSpPr txBox="1"/>
+          <p:nvPr/>
+        </p:nvSpPr>
+        <p:spPr>
+          <a:xfrm>
+            <a:off x="956972" y="5979246"/>
+            <a:ext cx="3842445" cy="461665"/>
+          </a:xfrm>
+          <a:prstGeom prst="rect">
+            <a:avLst/>
+          </a:prstGeom>
+          <a:noFill/>
+        </p:spPr>
+        <p:txBody>
+          <a:bodyPr wrap="square">
+            <a:spAutoFit/>
+          </a:bodyPr>
+          <a:lstStyle/>
+          <a:p>
+            <a:pPr algn="ctr"/>
+            <a:r>
+              <a:rPr lang="ja-JP" altLang="en-US" sz="1200" b="1" dirty="0">
+                <a:solidFill>
+                  <a:schemeClr val="tx2"/>
+                </a:solidFill>
+                <a:latin typeface="メイリオ" panose="020B0604030504040204" pitchFamily="50" charset="-128"/>
+                <a:ea typeface="メイリオ" panose="020B0604030504040204" pitchFamily="50" charset="-128"/>
+              </a:rPr>
+              <a:t>運用実務におけるアウトソースとして活用し、</a:t>
+            </a:r>
+            <a:endParaRPr lang="en-US" altLang="ja-JP" sz="1200" b="1" dirty="0">
+              <a:solidFill>
+                <a:schemeClr val="tx2"/>
+              </a:solidFill>
+              <a:latin typeface="メイリオ" panose="020B0604030504040204" pitchFamily="50" charset="-128"/>
+              <a:ea typeface="メイリオ" panose="020B0604030504040204" pitchFamily="50" charset="-128"/>
+            </a:endParaRPr>
+          </a:p>
+          <a:p>
+            <a:pPr algn="ctr"/>
+            <a:r>
+              <a:rPr kumimoji="1" lang="ja-JP" altLang="en-US" sz="1200" b="1" dirty="0">
+                <a:solidFill>
+                  <a:schemeClr val="tx2"/>
+                </a:solidFill>
+                <a:latin typeface="メイリオ" panose="020B0604030504040204" pitchFamily="50" charset="-128"/>
+                <a:ea typeface="メイリオ" panose="020B0604030504040204" pitchFamily="50" charset="-128"/>
+              </a:rPr>
+              <a:t>既存の運用領域における効率化をサポート。</a:t>
+            </a:r>
+          </a:p>
+        </p:txBody>
+      </p:sp>
+      <p:sp>
+        <p:nvSpPr>
+          <p:cNvPr id="44" name="テキスト ボックス 43">
+            <a:extLst>
+              <a:ext uri="{FF2B5EF4-FFF2-40B4-BE49-F238E27FC236}">
+                <a16:creationId xmlns:a16="http://schemas.microsoft.com/office/drawing/2014/main" id="{C373F1E9-22BB-9E8C-628E-A261897C133F}"/>
+              </a:ext>
+            </a:extLst>
+          </p:cNvPr>
+          <p:cNvSpPr txBox="1"/>
+          <p:nvPr/>
+        </p:nvSpPr>
+        <p:spPr>
+          <a:xfrm>
+            <a:off x="5428549" y="5976328"/>
+            <a:ext cx="3842445" cy="461665"/>
+          </a:xfrm>
+          <a:prstGeom prst="rect">
+            <a:avLst/>
+          </a:prstGeom>
+          <a:noFill/>
+        </p:spPr>
+        <p:txBody>
+          <a:bodyPr wrap="square">
+            <a:spAutoFit/>
+          </a:bodyPr>
+          <a:lstStyle/>
+          <a:p>
+            <a:pPr algn="ctr"/>
+            <a:r>
+              <a:rPr kumimoji="1" lang="en-US" altLang="ja-JP" sz="1200" b="1" dirty="0">
+                <a:solidFill>
+                  <a:schemeClr val="tx2"/>
+                </a:solidFill>
+                <a:latin typeface="メイリオ" panose="020B0604030504040204" pitchFamily="50" charset="-128"/>
+                <a:ea typeface="メイリオ" panose="020B0604030504040204" pitchFamily="50" charset="-128"/>
+              </a:rPr>
+              <a:t>OAM(</a:t>
+            </a:r>
+            <a:r>
+              <a:rPr kumimoji="1" lang="ja-JP" altLang="en-US" sz="1200" b="1" dirty="0">
+                <a:solidFill>
+                  <a:schemeClr val="tx2"/>
+                </a:solidFill>
+                <a:latin typeface="メイリオ" panose="020B0604030504040204" pitchFamily="50" charset="-128"/>
+                <a:ea typeface="メイリオ" panose="020B0604030504040204" pitchFamily="50" charset="-128"/>
+              </a:rPr>
+              <a:t>公式管理画面</a:t>
+            </a:r>
+            <a:r>
+              <a:rPr kumimoji="1" lang="en-US" altLang="ja-JP" sz="1200" b="1" dirty="0">
+                <a:solidFill>
+                  <a:schemeClr val="tx2"/>
+                </a:solidFill>
+                <a:latin typeface="メイリオ" panose="020B0604030504040204" pitchFamily="50" charset="-128"/>
+                <a:ea typeface="メイリオ" panose="020B0604030504040204" pitchFamily="50" charset="-128"/>
+              </a:rPr>
+              <a:t>)</a:t>
+            </a:r>
+            <a:r>
+              <a:rPr kumimoji="1" lang="ja-JP" altLang="en-US" sz="1200" b="1" dirty="0">
+                <a:solidFill>
+                  <a:schemeClr val="tx2"/>
+                </a:solidFill>
+                <a:latin typeface="メイリオ" panose="020B0604030504040204" pitchFamily="50" charset="-128"/>
+                <a:ea typeface="メイリオ" panose="020B0604030504040204" pitchFamily="50" charset="-128"/>
+              </a:rPr>
+              <a:t>と併用しながらコストカット。</a:t>
+            </a:r>
+            <a:endParaRPr kumimoji="1" lang="en-US" altLang="ja-JP" sz="1200" b="1" dirty="0">
+              <a:solidFill>
+                <a:schemeClr val="tx2"/>
+              </a:solidFill>
+              <a:latin typeface="メイリオ" panose="020B0604030504040204" pitchFamily="50" charset="-128"/>
+              <a:ea typeface="メイリオ" panose="020B0604030504040204" pitchFamily="50" charset="-128"/>
+            </a:endParaRPr>
+          </a:p>
+          <a:p>
+            <a:pPr algn="ctr"/>
+            <a:r>
+              <a:rPr lang="ja-JP" altLang="en-US" sz="1200" b="1" dirty="0">
+                <a:solidFill>
+                  <a:schemeClr val="tx2"/>
+                </a:solidFill>
+                <a:latin typeface="メイリオ" panose="020B0604030504040204" pitchFamily="50" charset="-128"/>
+                <a:ea typeface="メイリオ" panose="020B0604030504040204" pitchFamily="50" charset="-128"/>
+              </a:rPr>
+              <a:t>また複数ステップ配信の組み合わせで効率化も。</a:t>
+            </a:r>
+            <a:endParaRPr kumimoji="1" lang="ja-JP" altLang="en-US" sz="1200" b="1" dirty="0">
+              <a:solidFill>
+                <a:schemeClr val="tx2"/>
+              </a:solidFill>
+              <a:latin typeface="メイリオ" panose="020B0604030504040204" pitchFamily="50" charset="-128"/>
+              <a:ea typeface="メイリオ" panose="020B0604030504040204" pitchFamily="50" charset="-128"/>
+            </a:endParaRPr>
           </a:p>
         </p:txBody>
       </p:sp>
